--- a/02-PROFESORADO/03-PRESENTACIONES/POR-SESION/h1/S211-constantes-presentacion.pptx
+++ b/02-PROFESORADO/03-PRESENTACIONES/POR-SESION/h1/S211-constantes-presentacion.pptx
@@ -11,6 +11,8 @@
     <p:sldId id="259" r:id="rId10"/>
     <p:sldId id="260" r:id="rId11"/>
     <p:sldId id="261" r:id="rId12"/>
+    <p:sldId id="262" r:id="rId13"/>
+    <p:sldId id="263" r:id="rId14"/>
   </p:sldIdLst>
   <p:sldSz cx="12191695" cy="6858000" type="screen4x3"/>
   <p:notesSz cx="6858000" cy="9144000"/>
@@ -3145,7 +3147,7 @@
         <p:spPr>
           <a:xfrm>
             <a:off x="0" y="0"/>
-            <a:ext cx="228600" cy="6858000"/>
+            <a:ext cx="256032" cy="6858000"/>
           </a:xfrm>
           <a:prstGeom prst="rect">
             <a:avLst/>
@@ -3187,8 +3189,8 @@
         </p:nvSpPr>
         <p:spPr>
           <a:xfrm>
-            <a:off x="640080" y="566928"/>
-            <a:ext cx="1828800" cy="566928"/>
+            <a:off x="658368" y="566928"/>
+            <a:ext cx="1874519" cy="566928"/>
           </a:xfrm>
           <a:prstGeom prst="roundRect">
             <a:avLst/>
@@ -3197,7 +3199,9 @@
             <a:srgbClr val="2F5BA8"/>
           </a:solidFill>
           <a:ln>
-            <a:noFill/>
+            <a:solidFill>
+              <a:srgbClr val="2F5BA8"/>
+            </a:solidFill>
           </a:ln>
         </p:spPr>
         <p:style>
@@ -3230,8 +3234,8 @@
         </p:nvSpPr>
         <p:spPr>
           <a:xfrm>
-            <a:off x="713232" y="676656"/>
-            <a:ext cx="1682496" cy="256032"/>
+            <a:off x="731520" y="685800"/>
+            <a:ext cx="1719072" cy="228600"/>
           </a:xfrm>
           <a:prstGeom prst="rect">
             <a:avLst/>
@@ -3239,7 +3243,7 @@
           <a:noFill/>
         </p:spPr>
         <p:txBody>
-          <a:bodyPr wrap="square" lIns="36576" rIns="36576" tIns="27432" bIns="27432">
+          <a:bodyPr wrap="square" lIns="45720" rIns="45720" tIns="36576" bIns="36576" anchor="t">
             <a:spAutoFit/>
           </a:bodyPr>
           <a:lstStyle/>
@@ -3266,8 +3270,8 @@
         </p:nvSpPr>
         <p:spPr>
           <a:xfrm>
-            <a:off x="658368" y="1536192"/>
-            <a:ext cx="10789920" cy="1645920"/>
+            <a:off x="685800" y="1481328"/>
+            <a:ext cx="10789920" cy="1691640"/>
           </a:xfrm>
           <a:prstGeom prst="rect">
             <a:avLst/>
@@ -3275,7 +3279,7 @@
           <a:noFill/>
         </p:spPr>
         <p:txBody>
-          <a:bodyPr wrap="square" lIns="36576" rIns="36576" tIns="27432" bIns="27432">
+          <a:bodyPr wrap="square" lIns="45720" rIns="45720" tIns="36576" bIns="36576" anchor="t">
             <a:spAutoFit/>
           </a:bodyPr>
           <a:lstStyle/>
@@ -3302,8 +3306,8 @@
         </p:nvSpPr>
         <p:spPr>
           <a:xfrm>
-            <a:off x="685800" y="3822191"/>
-            <a:ext cx="6766560" cy="384048"/>
+            <a:off x="713232" y="3703320"/>
+            <a:ext cx="10424160" cy="411480"/>
           </a:xfrm>
           <a:prstGeom prst="rect">
             <a:avLst/>
@@ -3311,7 +3315,7 @@
           <a:noFill/>
         </p:spPr>
         <p:txBody>
-          <a:bodyPr wrap="square" lIns="36576" rIns="36576" tIns="27432" bIns="27432">
+          <a:bodyPr wrap="square" lIns="45720" rIns="45720" tIns="36576" bIns="36576" anchor="t">
             <a:spAutoFit/>
           </a:bodyPr>
           <a:lstStyle/>
@@ -3325,7 +3329,7 @@
               </a:defRPr>
             </a:pPr>
             <a:r>
-              <a:t>H1  ·  45 minutos</a:t>
+              <a:t>H1 · 45 minutos</a:t>
             </a:r>
           </a:p>
         </p:txBody>
@@ -3338,8 +3342,8 @@
         </p:nvSpPr>
         <p:spPr>
           <a:xfrm>
-            <a:off x="685800" y="5074920"/>
-            <a:ext cx="10241280" cy="640080"/>
+            <a:off x="713232" y="4315968"/>
+            <a:ext cx="10241280" cy="502920"/>
           </a:xfrm>
           <a:prstGeom prst="rect">
             <a:avLst/>
@@ -3347,13 +3351,13 @@
           <a:noFill/>
         </p:spPr>
         <p:txBody>
-          <a:bodyPr wrap="square" lIns="36576" rIns="36576" tIns="27432" bIns="27432">
+          <a:bodyPr wrap="square" lIns="45720" rIns="45720" tIns="36576" bIns="36576" anchor="t">
             <a:spAutoFit/>
           </a:bodyPr>
           <a:lstStyle/>
           <a:p>
             <a:pPr algn="l">
-              <a:defRPr sz="2400" b="0">
+              <a:defRPr sz="1900" b="0">
                 <a:solidFill>
                   <a:srgbClr val="FFFFFF"/>
                 </a:solidFill>
@@ -3361,7 +3365,7 @@
               </a:defRPr>
             </a:pPr>
             <a:r>
-              <a:t>Hoy construiremos una evidencia que puedas comprobar y explicar.</a:t>
+              <a:t>Fase HEXA: Ejecutar — crear</a:t>
             </a:r>
           </a:p>
         </p:txBody>
@@ -3374,7 +3378,7 @@
         </p:nvSpPr>
         <p:spPr>
           <a:xfrm>
-            <a:off x="685800" y="6272784"/>
+            <a:off x="713232" y="6272784"/>
             <a:ext cx="10607040" cy="201168"/>
           </a:xfrm>
           <a:prstGeom prst="rect">
@@ -3383,7 +3387,7 @@
           <a:noFill/>
         </p:spPr>
         <p:txBody>
-          <a:bodyPr wrap="square" lIns="36576" rIns="36576" tIns="27432" bIns="27432">
+          <a:bodyPr wrap="square" lIns="45720" rIns="45720" tIns="36576" bIns="36576" anchor="t">
             <a:spAutoFit/>
           </a:bodyPr>
           <a:lstStyle/>
@@ -3514,8 +3518,8 @@
         </p:nvSpPr>
         <p:spPr>
           <a:xfrm>
-            <a:off x="502920" y="310896"/>
-            <a:ext cx="5029200" cy="256032"/>
+            <a:off x="502920" y="274320"/>
+            <a:ext cx="5486400" cy="256032"/>
           </a:xfrm>
           <a:prstGeom prst="rect">
             <a:avLst/>
@@ -3523,7 +3527,7 @@
           <a:noFill/>
         </p:spPr>
         <p:txBody>
-          <a:bodyPr wrap="square" lIns="36576" rIns="36576" tIns="27432" bIns="27432">
+          <a:bodyPr wrap="square" lIns="45720" rIns="45720" tIns="36576" bIns="36576" anchor="t">
             <a:spAutoFit/>
           </a:bodyPr>
           <a:lstStyle/>
@@ -3550,7 +3554,7 @@
         </p:nvSpPr>
         <p:spPr>
           <a:xfrm>
-            <a:off x="502920" y="621792"/>
+            <a:off x="502920" y="603504"/>
             <a:ext cx="11064240" cy="530352"/>
           </a:xfrm>
           <a:prstGeom prst="rect">
@@ -3559,7 +3563,7 @@
           <a:noFill/>
         </p:spPr>
         <p:txBody>
-          <a:bodyPr wrap="square" lIns="36576" rIns="36576" tIns="27432" bIns="27432">
+          <a:bodyPr wrap="square" lIns="45720" rIns="45720" tIns="36576" bIns="36576" anchor="t">
             <a:spAutoFit/>
           </a:bodyPr>
           <a:lstStyle/>
@@ -3573,7 +3577,7 @@
               </a:defRPr>
             </a:pPr>
             <a:r>
-              <a:t>Qué vamos a conseguir</a:t>
+              <a:t>Qué debe conseguirse</a:t>
             </a:r>
           </a:p>
         </p:txBody>
@@ -3638,7 +3642,7 @@
           <a:noFill/>
         </p:spPr>
         <p:txBody>
-          <a:bodyPr wrap="square" lIns="36576" rIns="36576" tIns="27432" bIns="27432">
+          <a:bodyPr wrap="square" lIns="45720" rIns="45720" tIns="36576" bIns="36576" anchor="t">
             <a:spAutoFit/>
           </a:bodyPr>
           <a:lstStyle/>
@@ -3665,8 +3669,8 @@
         </p:nvSpPr>
         <p:spPr>
           <a:xfrm>
-            <a:off x="594360" y="1417320"/>
-            <a:ext cx="5349240" cy="4343400"/>
+            <a:off x="594360" y="1389888"/>
+            <a:ext cx="5184648" cy="4297680"/>
           </a:xfrm>
           <a:prstGeom prst="roundRect">
             <a:avLst/>
@@ -3676,7 +3680,7 @@
           </a:solidFill>
           <a:ln>
             <a:solidFill>
-              <a:srgbClr val="EBEEF2"/>
+              <a:srgbClr val="E5E9EF"/>
             </a:solidFill>
           </a:ln>
         </p:spPr>
@@ -3711,7 +3715,7 @@
         <p:spPr>
           <a:xfrm>
             <a:off x="822960" y="1618488"/>
-            <a:ext cx="438912" cy="411480"/>
+            <a:ext cx="4727448" cy="3840480"/>
           </a:xfrm>
           <a:prstGeom prst="rect">
             <a:avLst/>
@@ -3719,107 +3723,35 @@
           <a:noFill/>
         </p:spPr>
         <p:txBody>
-          <a:bodyPr wrap="square" lIns="36576" rIns="36576" tIns="27432" bIns="27432">
+          <a:bodyPr wrap="square" lIns="45720" rIns="45720" tIns="36576" bIns="36576" anchor="t">
             <a:spAutoFit/>
           </a:bodyPr>
           <a:lstStyle/>
           <a:p>
-            <a:pPr algn="ctr">
-              <a:defRPr sz="2400" b="1">
-                <a:solidFill>
-                  <a:srgbClr val="2F5BA8"/>
+            <a:pPr algn="l">
+              <a:defRPr sz="2100" b="1">
+                <a:solidFill>
+                  <a:srgbClr val="1C2330"/>
                 </a:solidFill>
                 <a:latin typeface="Aptos"/>
               </a:defRPr>
             </a:pPr>
             <a:r>
-              <a:t>01</a:t>
-            </a:r>
-          </a:p>
-        </p:txBody>
-      </p:sp>
-      <p:sp>
-        <p:nvSpPr>
-          <p:cNvPr id="10" name="TextBox 9"/>
-          <p:cNvSpPr txBox="1"/>
-          <p:nvPr/>
-        </p:nvSpPr>
-        <p:spPr>
-          <a:xfrm>
-            <a:off x="1344168" y="1645920"/>
-            <a:ext cx="4389120" cy="365760"/>
-          </a:xfrm>
-          <a:prstGeom prst="rect">
-            <a:avLst/>
-          </a:prstGeom>
-          <a:noFill/>
-        </p:spPr>
-        <p:txBody>
-          <a:bodyPr wrap="square" lIns="36576" rIns="36576" tIns="27432" bIns="27432">
-            <a:spAutoFit/>
-          </a:bodyPr>
-          <a:lstStyle/>
-          <a:p>
-            <a:pPr algn="l">
-              <a:defRPr sz="1700" b="1">
-                <a:solidFill>
-                  <a:srgbClr val="2F5BA8"/>
-                </a:solidFill>
-                <a:latin typeface="Aptos"/>
-              </a:defRPr>
-            </a:pPr>
-            <a:r>
-              <a:t>Hoy vas a…</a:t>
-            </a:r>
-          </a:p>
-        </p:txBody>
-      </p:sp>
-      <p:sp>
-        <p:nvSpPr>
-          <p:cNvPr id="11" name="TextBox 10"/>
-          <p:cNvSpPr txBox="1"/>
-          <p:nvPr/>
-        </p:nvSpPr>
-        <p:spPr>
-          <a:xfrm>
-            <a:off x="868680" y="2286000"/>
-            <a:ext cx="4800600" cy="3246120"/>
-          </a:xfrm>
-          <a:prstGeom prst="rect">
-            <a:avLst/>
-          </a:prstGeom>
-          <a:noFill/>
-        </p:spPr>
-        <p:txBody>
-          <a:bodyPr wrap="square" lIns="36576" rIns="36576" tIns="27432" bIns="27432">
-            <a:spAutoFit/>
-          </a:bodyPr>
-          <a:lstStyle/>
-          <a:p>
-            <a:pPr algn="l">
-              <a:defRPr sz="2200" b="0">
-                <a:solidFill>
-                  <a:srgbClr val="1C2330"/>
-                </a:solidFill>
-                <a:latin typeface="Aptos"/>
-              </a:defRPr>
-            </a:pPr>
-            <a:r>
-              <a:t>Diferenciar variable y constante.</a:t>
-            </a:r>
-          </a:p>
-        </p:txBody>
-      </p:sp>
-      <p:sp>
-        <p:nvSpPr>
-          <p:cNvPr id="12" name="Rounded Rectangle 11"/>
+              <a:t>Objetivo: Diferenciar variable y constante.</a:t>
+            </a:r>
+          </a:p>
+        </p:txBody>
+      </p:sp>
+      <p:sp>
+        <p:nvSpPr>
+          <p:cNvPr id="10" name="Rounded Rectangle 9"/>
           <p:cNvSpPr/>
           <p:nvPr/>
         </p:nvSpPr>
         <p:spPr>
           <a:xfrm>
-            <a:off x="6236208" y="1417320"/>
-            <a:ext cx="5349240" cy="4343400"/>
+            <a:off x="6035040" y="1389888"/>
+            <a:ext cx="5184648" cy="4297680"/>
           </a:xfrm>
           <a:prstGeom prst="roundRect">
             <a:avLst/>
@@ -3829,7 +3761,7 @@
           </a:solidFill>
           <a:ln>
             <a:solidFill>
-              <a:srgbClr val="EBEEF2"/>
+              <a:srgbClr val="E5E9EF"/>
             </a:solidFill>
           </a:ln>
         </p:spPr>
@@ -3857,14 +3789,14 @@
       </p:sp>
       <p:sp>
         <p:nvSpPr>
-          <p:cNvPr id="13" name="TextBox 12"/>
+          <p:cNvPr id="11" name="TextBox 10"/>
           <p:cNvSpPr txBox="1"/>
           <p:nvPr/>
         </p:nvSpPr>
         <p:spPr>
           <a:xfrm>
-            <a:off x="6464808" y="1618488"/>
-            <a:ext cx="438912" cy="411480"/>
+            <a:off x="6263640" y="1618488"/>
+            <a:ext cx="4727448" cy="3840480"/>
           </a:xfrm>
           <a:prstGeom prst="rect">
             <a:avLst/>
@@ -3872,93 +3804,21 @@
           <a:noFill/>
         </p:spPr>
         <p:txBody>
-          <a:bodyPr wrap="square" lIns="36576" rIns="36576" tIns="27432" bIns="27432">
+          <a:bodyPr wrap="square" lIns="45720" rIns="45720" tIns="36576" bIns="36576" anchor="t">
             <a:spAutoFit/>
           </a:bodyPr>
           <a:lstStyle/>
           <a:p>
-            <a:pPr algn="ctr">
-              <a:defRPr sz="2400" b="1">
-                <a:solidFill>
-                  <a:srgbClr val="2F5BA8"/>
+            <a:pPr algn="l">
+              <a:defRPr sz="2100" b="1">
+                <a:solidFill>
+                  <a:srgbClr val="1C2330"/>
                 </a:solidFill>
                 <a:latin typeface="Aptos"/>
               </a:defRPr>
             </a:pPr>
             <a:r>
-              <a:t>02</a:t>
-            </a:r>
-          </a:p>
-        </p:txBody>
-      </p:sp>
-      <p:sp>
-        <p:nvSpPr>
-          <p:cNvPr id="14" name="TextBox 13"/>
-          <p:cNvSpPr txBox="1"/>
-          <p:nvPr/>
-        </p:nvSpPr>
-        <p:spPr>
-          <a:xfrm>
-            <a:off x="6986016" y="1645920"/>
-            <a:ext cx="4389120" cy="365760"/>
-          </a:xfrm>
-          <a:prstGeom prst="rect">
-            <a:avLst/>
-          </a:prstGeom>
-          <a:noFill/>
-        </p:spPr>
-        <p:txBody>
-          <a:bodyPr wrap="square" lIns="36576" rIns="36576" tIns="27432" bIns="27432">
-            <a:spAutoFit/>
-          </a:bodyPr>
-          <a:lstStyle/>
-          <a:p>
-            <a:pPr algn="l">
-              <a:defRPr sz="1700" b="1">
-                <a:solidFill>
-                  <a:srgbClr val="2F5BA8"/>
-                </a:solidFill>
-                <a:latin typeface="Aptos"/>
-              </a:defRPr>
-            </a:pPr>
-            <a:r>
-              <a:t>Debe quedar…</a:t>
-            </a:r>
-          </a:p>
-        </p:txBody>
-      </p:sp>
-      <p:sp>
-        <p:nvSpPr>
-          <p:cNvPr id="15" name="TextBox 14"/>
-          <p:cNvSpPr txBox="1"/>
-          <p:nvPr/>
-        </p:nvSpPr>
-        <p:spPr>
-          <a:xfrm>
-            <a:off x="6510528" y="2286000"/>
-            <a:ext cx="4800600" cy="3246120"/>
-          </a:xfrm>
-          <a:prstGeom prst="rect">
-            <a:avLst/>
-          </a:prstGeom>
-          <a:noFill/>
-        </p:spPr>
-        <p:txBody>
-          <a:bodyPr wrap="square" lIns="36576" rIns="36576" tIns="27432" bIns="27432">
-            <a:spAutoFit/>
-          </a:bodyPr>
-          <a:lstStyle/>
-          <a:p>
-            <a:pPr algn="l">
-              <a:defRPr sz="2200" b="0">
-                <a:solidFill>
-                  <a:srgbClr val="1C2330"/>
-                </a:solidFill>
-                <a:latin typeface="Aptos"/>
-              </a:defRPr>
-            </a:pPr>
-            <a:r>
-              <a:t>Código con al menos una constante bien usada.</a:t>
+              <a:t>Evidencia: Código con al menos una constante bien usada.</a:t>
             </a:r>
           </a:p>
         </p:txBody>
@@ -4075,8 +3935,8 @@
         </p:nvSpPr>
         <p:spPr>
           <a:xfrm>
-            <a:off x="502920" y="310896"/>
-            <a:ext cx="5029200" cy="256032"/>
+            <a:off x="502920" y="274320"/>
+            <a:ext cx="5486400" cy="256032"/>
           </a:xfrm>
           <a:prstGeom prst="rect">
             <a:avLst/>
@@ -4084,7 +3944,7 @@
           <a:noFill/>
         </p:spPr>
         <p:txBody>
-          <a:bodyPr wrap="square" lIns="36576" rIns="36576" tIns="27432" bIns="27432">
+          <a:bodyPr wrap="square" lIns="45720" rIns="45720" tIns="36576" bIns="36576" anchor="t">
             <a:spAutoFit/>
           </a:bodyPr>
           <a:lstStyle/>
@@ -4098,7 +3958,7 @@
               </a:defRPr>
             </a:pPr>
             <a:r>
-              <a:t>PASO A PASO</a:t>
+              <a:t>RITMO DE LA SESIÓN</a:t>
             </a:r>
           </a:p>
         </p:txBody>
@@ -4111,7 +3971,7 @@
         </p:nvSpPr>
         <p:spPr>
           <a:xfrm>
-            <a:off x="502920" y="621792"/>
+            <a:off x="502920" y="603504"/>
             <a:ext cx="11064240" cy="530352"/>
           </a:xfrm>
           <a:prstGeom prst="rect">
@@ -4120,7 +3980,7 @@
           <a:noFill/>
         </p:spPr>
         <p:txBody>
-          <a:bodyPr wrap="square" lIns="36576" rIns="36576" tIns="27432" bIns="27432">
+          <a:bodyPr wrap="square" lIns="45720" rIns="45720" tIns="36576" bIns="36576" anchor="t">
             <a:spAutoFit/>
           </a:bodyPr>
           <a:lstStyle/>
@@ -4134,7 +3994,7 @@
               </a:defRPr>
             </a:pPr>
             <a:r>
-              <a:t>Ruta de trabajo</a:t>
+              <a:t>Secuencia de aula</a:t>
             </a:r>
           </a:p>
         </p:txBody>
@@ -4199,7 +4059,7 @@
           <a:noFill/>
         </p:spPr>
         <p:txBody>
-          <a:bodyPr wrap="square" lIns="36576" rIns="36576" tIns="27432" bIns="27432">
+          <a:bodyPr wrap="square" lIns="45720" rIns="45720" tIns="36576" bIns="36576" anchor="t">
             <a:spAutoFit/>
           </a:bodyPr>
           <a:lstStyle/>
@@ -4226,8 +4086,8 @@
         </p:nvSpPr>
         <p:spPr>
           <a:xfrm>
-            <a:off x="685800" y="1325880"/>
-            <a:ext cx="502920" cy="502920"/>
+            <a:off x="658368" y="1280160"/>
+            <a:ext cx="475488" cy="475488"/>
           </a:xfrm>
           <a:prstGeom prst="ellipse">
             <a:avLst/>
@@ -4269,8 +4129,8 @@
         </p:nvSpPr>
         <p:spPr>
           <a:xfrm>
-            <a:off x="685800" y="1435607"/>
-            <a:ext cx="502920" cy="201168"/>
+            <a:off x="658368" y="1380744"/>
+            <a:ext cx="475488" cy="201168"/>
           </a:xfrm>
           <a:prstGeom prst="rect">
             <a:avLst/>
@@ -4278,13 +4138,13 @@
           <a:noFill/>
         </p:spPr>
         <p:txBody>
-          <a:bodyPr wrap="square" lIns="36576" rIns="36576" tIns="27432" bIns="27432">
+          <a:bodyPr wrap="square" lIns="45720" rIns="45720" tIns="36576" bIns="36576" anchor="t">
             <a:spAutoFit/>
           </a:bodyPr>
           <a:lstStyle/>
           <a:p>
             <a:pPr algn="ctr">
-              <a:defRPr sz="1400" b="1">
+              <a:defRPr sz="1300" b="1">
                 <a:solidFill>
                   <a:srgbClr val="FFFFFF"/>
                 </a:solidFill>
@@ -4305,8 +4165,8 @@
         </p:nvSpPr>
         <p:spPr>
           <a:xfrm>
-            <a:off x="1417320" y="1344168"/>
-            <a:ext cx="9875520" cy="548640"/>
+            <a:off x="1389888" y="1261872"/>
+            <a:ext cx="10058400" cy="772668"/>
           </a:xfrm>
           <a:prstGeom prst="rect">
             <a:avLst/>
@@ -4314,13 +4174,13 @@
           <a:noFill/>
         </p:spPr>
         <p:txBody>
-          <a:bodyPr wrap="square" lIns="36576" rIns="36576" tIns="27432" bIns="27432">
+          <a:bodyPr wrap="square" lIns="45720" rIns="45720" tIns="36576" bIns="36576" anchor="t">
             <a:spAutoFit/>
           </a:bodyPr>
           <a:lstStyle/>
           <a:p>
             <a:pPr algn="l">
-              <a:defRPr sz="2000" b="0">
+              <a:defRPr sz="1600" b="0">
                 <a:solidFill>
                   <a:srgbClr val="1C2330"/>
                 </a:solidFill>
@@ -4328,7 +4188,7 @@
               </a:defRPr>
             </a:pPr>
             <a:r>
-              <a:t>Lee el objetivo y escribe con tus palabras qué debe quedar terminado.</a:t>
+              <a:t>0–5 min — Presentar objetivo, producto y evidencia de hoy.</a:t>
             </a:r>
           </a:p>
         </p:txBody>
@@ -4341,8 +4201,8 @@
         </p:nvSpPr>
         <p:spPr>
           <a:xfrm>
-            <a:off x="685800" y="2258568"/>
-            <a:ext cx="502920" cy="502920"/>
+            <a:off x="658368" y="2125979"/>
+            <a:ext cx="475488" cy="475488"/>
           </a:xfrm>
           <a:prstGeom prst="ellipse">
             <a:avLst/>
@@ -4384,8 +4244,8 @@
         </p:nvSpPr>
         <p:spPr>
           <a:xfrm>
-            <a:off x="685800" y="2368296"/>
-            <a:ext cx="502920" cy="201168"/>
+            <a:off x="658368" y="2226563"/>
+            <a:ext cx="475488" cy="201168"/>
           </a:xfrm>
           <a:prstGeom prst="rect">
             <a:avLst/>
@@ -4393,13 +4253,13 @@
           <a:noFill/>
         </p:spPr>
         <p:txBody>
-          <a:bodyPr wrap="square" lIns="36576" rIns="36576" tIns="27432" bIns="27432">
+          <a:bodyPr wrap="square" lIns="45720" rIns="45720" tIns="36576" bIns="36576" anchor="t">
             <a:spAutoFit/>
           </a:bodyPr>
           <a:lstStyle/>
           <a:p>
             <a:pPr algn="ctr">
-              <a:defRPr sz="1400" b="1">
+              <a:defRPr sz="1300" b="1">
                 <a:solidFill>
                   <a:srgbClr val="FFFFFF"/>
                 </a:solidFill>
@@ -4420,8 +4280,8 @@
         </p:nvSpPr>
         <p:spPr>
           <a:xfrm>
-            <a:off x="1417320" y="2276856"/>
-            <a:ext cx="9875520" cy="548640"/>
+            <a:off x="1389888" y="2107691"/>
+            <a:ext cx="10058400" cy="772668"/>
           </a:xfrm>
           <a:prstGeom prst="rect">
             <a:avLst/>
@@ -4429,13 +4289,13 @@
           <a:noFill/>
         </p:spPr>
         <p:txBody>
-          <a:bodyPr wrap="square" lIns="36576" rIns="36576" tIns="27432" bIns="27432">
+          <a:bodyPr wrap="square" lIns="45720" rIns="45720" tIns="36576" bIns="36576" anchor="t">
             <a:spAutoFit/>
           </a:bodyPr>
           <a:lstStyle/>
           <a:p>
             <a:pPr algn="l">
-              <a:defRPr sz="2000" b="0">
+              <a:defRPr sz="1600" b="0">
                 <a:solidFill>
                   <a:srgbClr val="1C2330"/>
                 </a:solidFill>
@@ -4443,7 +4303,7 @@
               </a:defRPr>
             </a:pPr>
             <a:r>
-              <a:t>Atiende al ejemplo breve y anota una predicción, duda o decisión.</a:t>
+              <a:t>5–13 min — Explicación breve: Una constante representa un dato que no debe cambiar durante la ejecución.</a:t>
             </a:r>
           </a:p>
         </p:txBody>
@@ -4456,8 +4316,8 @@
         </p:nvSpPr>
         <p:spPr>
           <a:xfrm>
-            <a:off x="685800" y="3191256"/>
-            <a:ext cx="502920" cy="502920"/>
+            <a:off x="658368" y="2971799"/>
+            <a:ext cx="475488" cy="475488"/>
           </a:xfrm>
           <a:prstGeom prst="ellipse">
             <a:avLst/>
@@ -4499,8 +4359,8 @@
         </p:nvSpPr>
         <p:spPr>
           <a:xfrm>
-            <a:off x="685800" y="3300984"/>
-            <a:ext cx="502920" cy="201168"/>
+            <a:off x="658368" y="3072383"/>
+            <a:ext cx="475488" cy="201168"/>
           </a:xfrm>
           <a:prstGeom prst="rect">
             <a:avLst/>
@@ -4508,13 +4368,13 @@
           <a:noFill/>
         </p:spPr>
         <p:txBody>
-          <a:bodyPr wrap="square" lIns="36576" rIns="36576" tIns="27432" bIns="27432">
+          <a:bodyPr wrap="square" lIns="45720" rIns="45720" tIns="36576" bIns="36576" anchor="t">
             <a:spAutoFit/>
           </a:bodyPr>
           <a:lstStyle/>
           <a:p>
             <a:pPr algn="ctr">
-              <a:defRPr sz="1400" b="1">
+              <a:defRPr sz="1300" b="1">
                 <a:solidFill>
                   <a:srgbClr val="FFFFFF"/>
                 </a:solidFill>
@@ -4535,8 +4395,8 @@
         </p:nvSpPr>
         <p:spPr>
           <a:xfrm>
-            <a:off x="1417320" y="3209544"/>
-            <a:ext cx="9875520" cy="548640"/>
+            <a:off x="1389888" y="2953511"/>
+            <a:ext cx="10058400" cy="772668"/>
           </a:xfrm>
           <a:prstGeom prst="rect">
             <a:avLst/>
@@ -4544,13 +4404,13 @@
           <a:noFill/>
         </p:spPr>
         <p:txBody>
-          <a:bodyPr wrap="square" lIns="36576" rIns="36576" tIns="27432" bIns="27432">
+          <a:bodyPr wrap="square" lIns="45720" rIns="45720" tIns="36576" bIns="36576" anchor="t">
             <a:spAutoFit/>
           </a:bodyPr>
           <a:lstStyle/>
           <a:p>
             <a:pPr algn="l">
-              <a:defRPr sz="2000" b="0">
+              <a:defRPr sz="1600" b="0">
                 <a:solidFill>
                   <a:srgbClr val="1C2330"/>
                 </a:solidFill>
@@ -4558,7 +4418,7 @@
               </a:defRPr>
             </a:pPr>
             <a:r>
-              <a:t>Realiza esta tarea: Añadir ASSISTANT_NAME y COURSE_YEAR.</a:t>
+              <a:t>13–18 min — Demostración o ejemplo: final String ASSISTANT_NAME = "MiniJarvis";.</a:t>
             </a:r>
           </a:p>
         </p:txBody>
@@ -4571,8 +4431,8 @@
         </p:nvSpPr>
         <p:spPr>
           <a:xfrm>
-            <a:off x="685800" y="4123944"/>
-            <a:ext cx="502920" cy="502920"/>
+            <a:off x="658368" y="3817620"/>
+            <a:ext cx="475488" cy="475488"/>
           </a:xfrm>
           <a:prstGeom prst="ellipse">
             <a:avLst/>
@@ -4614,8 +4474,8 @@
         </p:nvSpPr>
         <p:spPr>
           <a:xfrm>
-            <a:off x="685800" y="4233672"/>
-            <a:ext cx="502920" cy="201168"/>
+            <a:off x="658368" y="3918204"/>
+            <a:ext cx="475488" cy="201168"/>
           </a:xfrm>
           <a:prstGeom prst="rect">
             <a:avLst/>
@@ -4623,13 +4483,13 @@
           <a:noFill/>
         </p:spPr>
         <p:txBody>
-          <a:bodyPr wrap="square" lIns="36576" rIns="36576" tIns="27432" bIns="27432">
+          <a:bodyPr wrap="square" lIns="45720" rIns="45720" tIns="36576" bIns="36576" anchor="t">
             <a:spAutoFit/>
           </a:bodyPr>
           <a:lstStyle/>
           <a:p>
             <a:pPr algn="ctr">
-              <a:defRPr sz="1400" b="1">
+              <a:defRPr sz="1300" b="1">
                 <a:solidFill>
                   <a:srgbClr val="FFFFFF"/>
                 </a:solidFill>
@@ -4650,8 +4510,8 @@
         </p:nvSpPr>
         <p:spPr>
           <a:xfrm>
-            <a:off x="1417320" y="4142231"/>
-            <a:ext cx="9875520" cy="548640"/>
+            <a:off x="1389888" y="3799332"/>
+            <a:ext cx="10058400" cy="772668"/>
           </a:xfrm>
           <a:prstGeom prst="rect">
             <a:avLst/>
@@ -4659,13 +4519,13 @@
           <a:noFill/>
         </p:spPr>
         <p:txBody>
-          <a:bodyPr wrap="square" lIns="36576" rIns="36576" tIns="27432" bIns="27432">
+          <a:bodyPr wrap="square" lIns="45720" rIns="45720" tIns="36576" bIns="36576" anchor="t">
             <a:spAutoFit/>
           </a:bodyPr>
           <a:lstStyle/>
           <a:p>
             <a:pPr algn="l">
-              <a:defRPr sz="2000" b="0">
+              <a:defRPr sz="1600" b="0">
                 <a:solidFill>
                   <a:srgbClr val="1C2330"/>
                 </a:solidFill>
@@ -4673,7 +4533,7 @@
               </a:defRPr>
             </a:pPr>
             <a:r>
-              <a:t>Comprueba el resultado con una prueba observable; no basta con decir “funciona”.</a:t>
+              <a:t>18–35 min — Trabajo del alumnado: Añadir ASSISTANT_NAME y COURSE_YEAR.</a:t>
             </a:r>
           </a:p>
         </p:txBody>
@@ -4686,8 +4546,8 @@
         </p:nvSpPr>
         <p:spPr>
           <a:xfrm>
-            <a:off x="685800" y="5056631"/>
-            <a:ext cx="502920" cy="502920"/>
+            <a:off x="658368" y="4663440"/>
+            <a:ext cx="475488" cy="475488"/>
           </a:xfrm>
           <a:prstGeom prst="ellipse">
             <a:avLst/>
@@ -4729,8 +4589,8 @@
         </p:nvSpPr>
         <p:spPr>
           <a:xfrm>
-            <a:off x="685800" y="5166359"/>
-            <a:ext cx="502920" cy="201168"/>
+            <a:off x="658368" y="4764024"/>
+            <a:ext cx="475488" cy="201168"/>
           </a:xfrm>
           <a:prstGeom prst="rect">
             <a:avLst/>
@@ -4738,13 +4598,13 @@
           <a:noFill/>
         </p:spPr>
         <p:txBody>
-          <a:bodyPr wrap="square" lIns="36576" rIns="36576" tIns="27432" bIns="27432">
+          <a:bodyPr wrap="square" lIns="45720" rIns="45720" tIns="36576" bIns="36576" anchor="t">
             <a:spAutoFit/>
           </a:bodyPr>
           <a:lstStyle/>
           <a:p>
             <a:pPr algn="ctr">
-              <a:defRPr sz="1400" b="1">
+              <a:defRPr sz="1300" b="1">
                 <a:solidFill>
                   <a:srgbClr val="FFFFFF"/>
                 </a:solidFill>
@@ -4765,8 +4625,8 @@
         </p:nvSpPr>
         <p:spPr>
           <a:xfrm>
-            <a:off x="1417320" y="5074919"/>
-            <a:ext cx="9875520" cy="548640"/>
+            <a:off x="1389888" y="4645152"/>
+            <a:ext cx="10058400" cy="772668"/>
           </a:xfrm>
           <a:prstGeom prst="rect">
             <a:avLst/>
@@ -4774,13 +4634,13 @@
           <a:noFill/>
         </p:spPr>
         <p:txBody>
-          <a:bodyPr wrap="square" lIns="36576" rIns="36576" tIns="27432" bIns="27432">
+          <a:bodyPr wrap="square" lIns="45720" rIns="45720" tIns="36576" bIns="36576" anchor="t">
             <a:spAutoFit/>
           </a:bodyPr>
           <a:lstStyle/>
           <a:p>
             <a:pPr algn="l">
-              <a:defRPr sz="2000" b="0">
+              <a:defRPr sz="1600" b="0">
                 <a:solidFill>
                   <a:srgbClr val="1C2330"/>
                 </a:solidFill>
@@ -4788,7 +4648,122 @@
               </a:defRPr>
             </a:pPr>
             <a:r>
-              <a:t>Guarda o entrega la evidencia indicada y prepárate para explicarla.</a:t>
+              <a:t>35–40 min — Comprobar la evidencia con una explicación o prueba breve.</a:t>
+            </a:r>
+          </a:p>
+        </p:txBody>
+      </p:sp>
+      <p:sp>
+        <p:nvSpPr>
+          <p:cNvPr id="23" name="Oval 22"/>
+          <p:cNvSpPr/>
+          <p:nvPr/>
+        </p:nvSpPr>
+        <p:spPr>
+          <a:xfrm>
+            <a:off x="658368" y="5509259"/>
+            <a:ext cx="475488" cy="475488"/>
+          </a:xfrm>
+          <a:prstGeom prst="ellipse">
+            <a:avLst/>
+          </a:prstGeom>
+          <a:solidFill>
+            <a:srgbClr val="2F5BA8"/>
+          </a:solidFill>
+          <a:ln>
+            <a:noFill/>
+          </a:ln>
+        </p:spPr>
+        <p:style>
+          <a:lnRef idx="1">
+            <a:schemeClr val="accent1"/>
+          </a:lnRef>
+          <a:fillRef idx="3">
+            <a:schemeClr val="accent1"/>
+          </a:fillRef>
+          <a:effectRef idx="2">
+            <a:schemeClr val="accent1"/>
+          </a:effectRef>
+          <a:fontRef idx="minor">
+            <a:schemeClr val="lt1"/>
+          </a:fontRef>
+        </p:style>
+        <p:txBody>
+          <a:bodyPr rtlCol="0" anchor="ctr"/>
+          <a:lstStyle/>
+          <a:p>
+            <a:pPr algn="ctr"/>
+          </a:p>
+        </p:txBody>
+      </p:sp>
+      <p:sp>
+        <p:nvSpPr>
+          <p:cNvPr id="24" name="TextBox 23"/>
+          <p:cNvSpPr txBox="1"/>
+          <p:nvPr/>
+        </p:nvSpPr>
+        <p:spPr>
+          <a:xfrm>
+            <a:off x="658368" y="5609844"/>
+            <a:ext cx="475488" cy="201168"/>
+          </a:xfrm>
+          <a:prstGeom prst="rect">
+            <a:avLst/>
+          </a:prstGeom>
+          <a:noFill/>
+        </p:spPr>
+        <p:txBody>
+          <a:bodyPr wrap="square" lIns="45720" rIns="45720" tIns="36576" bIns="36576" anchor="t">
+            <a:spAutoFit/>
+          </a:bodyPr>
+          <a:lstStyle/>
+          <a:p>
+            <a:pPr algn="ctr">
+              <a:defRPr sz="1300" b="1">
+                <a:solidFill>
+                  <a:srgbClr val="FFFFFF"/>
+                </a:solidFill>
+                <a:latin typeface="Aptos"/>
+              </a:defRPr>
+            </a:pPr>
+            <a:r>
+              <a:t>6</a:t>
+            </a:r>
+          </a:p>
+        </p:txBody>
+      </p:sp>
+      <p:sp>
+        <p:nvSpPr>
+          <p:cNvPr id="25" name="TextBox 24"/>
+          <p:cNvSpPr txBox="1"/>
+          <p:nvPr/>
+        </p:nvSpPr>
+        <p:spPr>
+          <a:xfrm>
+            <a:off x="1389888" y="5490972"/>
+            <a:ext cx="10058400" cy="772668"/>
+          </a:xfrm>
+          <a:prstGeom prst="rect">
+            <a:avLst/>
+          </a:prstGeom>
+          <a:noFill/>
+        </p:spPr>
+        <p:txBody>
+          <a:bodyPr wrap="square" lIns="45720" rIns="45720" tIns="36576" bIns="36576" anchor="t">
+            <a:spAutoFit/>
+          </a:bodyPr>
+          <a:lstStyle/>
+          <a:p>
+            <a:pPr algn="l">
+              <a:defRPr sz="1600" b="0">
+                <a:solidFill>
+                  <a:srgbClr val="1C2330"/>
+                </a:solidFill>
+                <a:latin typeface="Aptos"/>
+              </a:defRPr>
+            </a:pPr>
+            <a:r>
+              <a:t>40–45 min — Cierre: ¿qué dato de nuestro programa debería ser constante?</a:t>
             </a:r>
           </a:p>
         </p:txBody>
@@ -4905,8 +4880,8 @@
         </p:nvSpPr>
         <p:spPr>
           <a:xfrm>
-            <a:off x="502920" y="310896"/>
-            <a:ext cx="5029200" cy="256032"/>
+            <a:off x="502920" y="274320"/>
+            <a:ext cx="5486400" cy="256032"/>
           </a:xfrm>
           <a:prstGeom prst="rect">
             <a:avLst/>
@@ -4914,7 +4889,7 @@
           <a:noFill/>
         </p:spPr>
         <p:txBody>
-          <a:bodyPr wrap="square" lIns="36576" rIns="36576" tIns="27432" bIns="27432">
+          <a:bodyPr wrap="square" lIns="45720" rIns="45720" tIns="36576" bIns="36576" anchor="t">
             <a:spAutoFit/>
           </a:bodyPr>
           <a:lstStyle/>
@@ -4928,7 +4903,7 @@
               </a:defRPr>
             </a:pPr>
             <a:r>
-              <a:t>COMPRENDER Y APLICAR</a:t>
+              <a:t>COMPRENDER Y TRANSFERIR</a:t>
             </a:r>
           </a:p>
         </p:txBody>
@@ -4941,7 +4916,7 @@
         </p:nvSpPr>
         <p:spPr>
           <a:xfrm>
-            <a:off x="502920" y="621792"/>
+            <a:off x="502920" y="603504"/>
             <a:ext cx="11064240" cy="530352"/>
           </a:xfrm>
           <a:prstGeom prst="rect">
@@ -4950,7 +4925,7 @@
           <a:noFill/>
         </p:spPr>
         <p:txBody>
-          <a:bodyPr wrap="square" lIns="36576" rIns="36576" tIns="27432" bIns="27432">
+          <a:bodyPr wrap="square" lIns="45720" rIns="45720" tIns="36576" bIns="36576" anchor="t">
             <a:spAutoFit/>
           </a:bodyPr>
           <a:lstStyle/>
@@ -4964,7 +4939,7 @@
               </a:defRPr>
             </a:pPr>
             <a:r>
-              <a:t>Claves para avanzar</a:t>
+              <a:t>Idea clave y puesta en práctica</a:t>
             </a:r>
           </a:p>
         </p:txBody>
@@ -5029,7 +5004,7 @@
           <a:noFill/>
         </p:spPr>
         <p:txBody>
-          <a:bodyPr wrap="square" lIns="36576" rIns="36576" tIns="27432" bIns="27432">
+          <a:bodyPr wrap="square" lIns="45720" rIns="45720" tIns="36576" bIns="36576" anchor="t">
             <a:spAutoFit/>
           </a:bodyPr>
           <a:lstStyle/>
@@ -5056,8 +5031,8 @@
         </p:nvSpPr>
         <p:spPr>
           <a:xfrm>
-            <a:off x="594360" y="1325880"/>
-            <a:ext cx="5257800" cy="4526280"/>
+            <a:off x="621792" y="1325880"/>
+            <a:ext cx="5285232" cy="4736592"/>
           </a:xfrm>
           <a:prstGeom prst="roundRect">
             <a:avLst/>
@@ -5067,7 +5042,7 @@
           </a:solidFill>
           <a:ln>
             <a:solidFill>
-              <a:srgbClr val="EBEEF2"/>
+              <a:srgbClr val="E5E9EF"/>
             </a:solidFill>
           </a:ln>
         </p:spPr>
@@ -5095,25 +5070,98 @@
       </p:sp>
       <p:sp>
         <p:nvSpPr>
-          <p:cNvPr id="9" name="Rounded Rectangle 8"/>
+          <p:cNvPr id="9" name="TextBox 8"/>
+          <p:cNvSpPr txBox="1"/>
+          <p:nvPr/>
+        </p:nvSpPr>
+        <p:spPr>
+          <a:xfrm>
+            <a:off x="932688" y="1627632"/>
+            <a:ext cx="2011680" cy="329184"/>
+          </a:xfrm>
+          <a:prstGeom prst="rect">
+            <a:avLst/>
+          </a:prstGeom>
+          <a:noFill/>
+        </p:spPr>
+        <p:txBody>
+          <a:bodyPr wrap="square" lIns="45720" rIns="45720" tIns="36576" bIns="36576" anchor="t">
+            <a:spAutoFit/>
+          </a:bodyPr>
+          <a:lstStyle/>
+          <a:p>
+            <a:pPr algn="l">
+              <a:defRPr sz="1300" b="1">
+                <a:solidFill>
+                  <a:srgbClr val="2F5BA8"/>
+                </a:solidFill>
+                <a:latin typeface="Aptos"/>
+              </a:defRPr>
+            </a:pPr>
+            <a:r>
+              <a:t>IDEA CLAVE</a:t>
+            </a:r>
+          </a:p>
+        </p:txBody>
+      </p:sp>
+      <p:sp>
+        <p:nvSpPr>
+          <p:cNvPr id="10" name="TextBox 9"/>
+          <p:cNvSpPr txBox="1"/>
+          <p:nvPr/>
+        </p:nvSpPr>
+        <p:spPr>
+          <a:xfrm>
+            <a:off x="932688" y="2176272"/>
+            <a:ext cx="4617720" cy="3429000"/>
+          </a:xfrm>
+          <a:prstGeom prst="rect">
+            <a:avLst/>
+          </a:prstGeom>
+          <a:noFill/>
+        </p:spPr>
+        <p:txBody>
+          <a:bodyPr wrap="square" lIns="73152" rIns="45720" tIns="36576">
+            <a:spAutoFit/>
+          </a:bodyPr>
+          <a:lstStyle/>
+          <a:p>
+            <a:pPr>
+              <a:spcAft>
+                <a:spcPts val="900"/>
+              </a:spcAft>
+              <a:defRPr sz="2300">
+                <a:solidFill>
+                  <a:srgbClr val="1C2330"/>
+                </a:solidFill>
+                <a:latin typeface="Aptos"/>
+              </a:defRPr>
+            </a:pPr>
+            <a:r>
+              <a:t>•  final, nombres claros y datos que no deberían cambiar.</a:t>
+            </a:r>
+          </a:p>
+        </p:txBody>
+      </p:sp>
+      <p:sp>
+        <p:nvSpPr>
+          <p:cNvPr id="11" name="Rounded Rectangle 10"/>
           <p:cNvSpPr/>
           <p:nvPr/>
         </p:nvSpPr>
         <p:spPr>
           <a:xfrm>
             <a:off x="6172200" y="1325880"/>
-            <a:ext cx="5413248" cy="4526280"/>
+            <a:ext cx="5394960" cy="4736592"/>
           </a:xfrm>
           <a:prstGeom prst="roundRect">
             <a:avLst/>
           </a:prstGeom>
           <a:solidFill>
-            <a:srgbClr val="FFFFFF"/>
+            <a:srgbClr val="121824"/>
           </a:solidFill>
           <a:ln>
-            <a:solidFill>
-              <a:srgbClr val="EBEEF2"/>
-            </a:solidFill>
+            <a:noFill/>
           </a:ln>
         </p:spPr>
         <p:style>
@@ -5140,14 +5188,14 @@
       </p:sp>
       <p:sp>
         <p:nvSpPr>
-          <p:cNvPr id="10" name="TextBox 9"/>
+          <p:cNvPr id="12" name="TextBox 11"/>
           <p:cNvSpPr txBox="1"/>
           <p:nvPr/>
         </p:nvSpPr>
         <p:spPr>
           <a:xfrm>
-            <a:off x="868680" y="1600200"/>
-            <a:ext cx="4663440" cy="365760"/>
+            <a:off x="6492240" y="1627632"/>
+            <a:ext cx="2194560" cy="329184"/>
           </a:xfrm>
           <a:prstGeom prst="rect">
             <a:avLst/>
@@ -5155,13 +5203,13 @@
           <a:noFill/>
         </p:spPr>
         <p:txBody>
-          <a:bodyPr wrap="square" lIns="36576" rIns="36576" tIns="27432" bIns="27432">
+          <a:bodyPr wrap="square" lIns="45720" rIns="45720" tIns="36576" bIns="36576" anchor="t">
             <a:spAutoFit/>
           </a:bodyPr>
           <a:lstStyle/>
           <a:p>
             <a:pPr algn="l">
-              <a:defRPr sz="1600" b="1">
+              <a:defRPr sz="1300" b="1">
                 <a:solidFill>
                   <a:srgbClr val="2F5BA8"/>
                 </a:solidFill>
@@ -5169,21 +5217,21 @@
               </a:defRPr>
             </a:pPr>
             <a:r>
-              <a:t>IDEAS CLAVE</a:t>
-            </a:r>
-          </a:p>
-        </p:txBody>
-      </p:sp>
-      <p:sp>
-        <p:nvSpPr>
-          <p:cNvPr id="11" name="TextBox 10"/>
+              <a:t>EN PRÁCTICA</a:t>
+            </a:r>
+          </a:p>
+        </p:txBody>
+      </p:sp>
+      <p:sp>
+        <p:nvSpPr>
+          <p:cNvPr id="13" name="TextBox 12"/>
           <p:cNvSpPr txBox="1"/>
           <p:nvPr/>
         </p:nvSpPr>
         <p:spPr>
           <a:xfrm>
-            <a:off x="868680" y="2121408"/>
-            <a:ext cx="4572000" cy="3337560"/>
+            <a:off x="6492240" y="2176272"/>
+            <a:ext cx="4617720" cy="3429000"/>
           </a:xfrm>
           <a:prstGeom prst="rect">
             <a:avLst/>
@@ -5198,118 +5246,11 @@
           <a:p>
             <a:pPr>
               <a:spcAft>
-                <a:spcPts val="1000"/>
+                <a:spcPts val="900"/>
               </a:spcAft>
-              <a:defRPr sz="1800">
-                <a:solidFill>
-                  <a:srgbClr val="1C2330"/>
-                </a:solidFill>
-                <a:latin typeface="Aptos"/>
-              </a:defRPr>
-            </a:pPr>
-            <a:r>
-              <a:t>•  final, nombres claros y datos que no deberían cambiar.</a:t>
-            </a:r>
-          </a:p>
-          <a:p>
-            <a:pPr>
-              <a:spcAft>
-                <a:spcPts val="1000"/>
-              </a:spcAft>
-              <a:defRPr sz="1800">
-                <a:solidFill>
-                  <a:srgbClr val="1C2330"/>
-                </a:solidFill>
-                <a:latin typeface="Aptos"/>
-              </a:defRPr>
-            </a:pPr>
-            <a:r>
-              <a:t>•  Guion breve sugerido:</a:t>
-            </a:r>
-          </a:p>
-          <a:p>
-            <a:pPr>
-              <a:spcAft>
-                <a:spcPts val="1000"/>
-              </a:spcAft>
-              <a:defRPr sz="1800">
-                <a:solidFill>
-                  <a:srgbClr val="1C2330"/>
-                </a:solidFill>
-                <a:latin typeface="Aptos"/>
-              </a:defRPr>
-            </a:pPr>
-            <a:r>
-              <a:t>•  &gt; Hoy necesitamos comprender y practicar lo justo para producir una evidencia verificable. Primero observaremos un ejemplo, después trabajaréis y al final cada pers…</a:t>
-            </a:r>
-          </a:p>
-        </p:txBody>
-      </p:sp>
-      <p:sp>
-        <p:nvSpPr>
-          <p:cNvPr id="12" name="TextBox 11"/>
-          <p:cNvSpPr txBox="1"/>
-          <p:nvPr/>
-        </p:nvSpPr>
-        <p:spPr>
-          <a:xfrm>
-            <a:off x="6446520" y="1600200"/>
-            <a:ext cx="4572000" cy="365760"/>
-          </a:xfrm>
-          <a:prstGeom prst="rect">
-            <a:avLst/>
-          </a:prstGeom>
-          <a:noFill/>
-        </p:spPr>
-        <p:txBody>
-          <a:bodyPr wrap="square" lIns="36576" rIns="36576" tIns="27432" bIns="27432">
-            <a:spAutoFit/>
-          </a:bodyPr>
-          <a:lstStyle/>
-          <a:p>
-            <a:pPr algn="l">
-              <a:defRPr sz="1600" b="1">
-                <a:solidFill>
-                  <a:srgbClr val="2F5BA8"/>
-                </a:solidFill>
-                <a:latin typeface="Aptos"/>
-              </a:defRPr>
-            </a:pPr>
-            <a:r>
-              <a:t>ACTIVIDAD CENTRAL</a:t>
-            </a:r>
-          </a:p>
-        </p:txBody>
-      </p:sp>
-      <p:sp>
-        <p:nvSpPr>
-          <p:cNvPr id="13" name="TextBox 12"/>
-          <p:cNvSpPr txBox="1"/>
-          <p:nvPr/>
-        </p:nvSpPr>
-        <p:spPr>
-          <a:xfrm>
-            <a:off x="6446520" y="2121408"/>
-            <a:ext cx="4617720" cy="3337560"/>
-          </a:xfrm>
-          <a:prstGeom prst="rect">
-            <a:avLst/>
-          </a:prstGeom>
-          <a:noFill/>
-        </p:spPr>
-        <p:txBody>
-          <a:bodyPr wrap="square" lIns="73152" rIns="45720" tIns="36576">
-            <a:spAutoFit/>
-          </a:bodyPr>
-          <a:lstStyle/>
-          <a:p>
-            <a:pPr>
-              <a:spcAft>
-                <a:spcPts val="1000"/>
-              </a:spcAft>
-              <a:defRPr sz="1800">
-                <a:solidFill>
-                  <a:srgbClr val="1C2330"/>
+              <a:defRPr sz="2300">
+                <a:solidFill>
+                  <a:srgbClr val="FFFFFF"/>
                 </a:solidFill>
                 <a:latin typeface="Aptos"/>
               </a:defRPr>
@@ -5432,8 +5373,8 @@
         </p:nvSpPr>
         <p:spPr>
           <a:xfrm>
-            <a:off x="502920" y="310896"/>
-            <a:ext cx="5029200" cy="256032"/>
+            <a:off x="502920" y="274320"/>
+            <a:ext cx="5486400" cy="256032"/>
           </a:xfrm>
           <a:prstGeom prst="rect">
             <a:avLst/>
@@ -5441,7 +5382,7 @@
           <a:noFill/>
         </p:spPr>
         <p:txBody>
-          <a:bodyPr wrap="square" lIns="36576" rIns="36576" tIns="27432" bIns="27432">
+          <a:bodyPr wrap="square" lIns="45720" rIns="45720" tIns="36576" bIns="36576" anchor="t">
             <a:spAutoFit/>
           </a:bodyPr>
           <a:lstStyle/>
@@ -5455,7 +5396,7 @@
               </a:defRPr>
             </a:pPr>
             <a:r>
-              <a:t>EVIDENCIA MÍNIMA</a:t>
+              <a:t>APLICAR Y DECIDIR</a:t>
             </a:r>
           </a:p>
         </p:txBody>
@@ -5468,7 +5409,7 @@
         </p:nvSpPr>
         <p:spPr>
           <a:xfrm>
-            <a:off x="502920" y="621792"/>
+            <a:off x="502920" y="603504"/>
             <a:ext cx="11064240" cy="530352"/>
           </a:xfrm>
           <a:prstGeom prst="rect">
@@ -5477,7 +5418,7 @@
           <a:noFill/>
         </p:spPr>
         <p:txBody>
-          <a:bodyPr wrap="square" lIns="36576" rIns="36576" tIns="27432" bIns="27432">
+          <a:bodyPr wrap="square" lIns="45720" rIns="45720" tIns="36576" bIns="36576" anchor="t">
             <a:spAutoFit/>
           </a:bodyPr>
           <a:lstStyle/>
@@ -5491,7 +5432,7 @@
               </a:defRPr>
             </a:pPr>
             <a:r>
-              <a:t>Antes de salir, comprueba</a:t>
+              <a:t>Actividad central</a:t>
             </a:r>
           </a:p>
         </p:txBody>
@@ -5556,7 +5497,7 @@
           <a:noFill/>
         </p:spPr>
         <p:txBody>
-          <a:bodyPr wrap="square" lIns="36576" rIns="36576" tIns="27432" bIns="27432">
+          <a:bodyPr wrap="square" lIns="45720" rIns="45720" tIns="36576" bIns="36576" anchor="t">
             <a:spAutoFit/>
           </a:bodyPr>
           <a:lstStyle/>
@@ -5583,8 +5524,8 @@
         </p:nvSpPr>
         <p:spPr>
           <a:xfrm>
-            <a:off x="713232" y="1371600"/>
-            <a:ext cx="420624" cy="420624"/>
+            <a:off x="658368" y="1307592"/>
+            <a:ext cx="10835640" cy="2226564"/>
           </a:xfrm>
           <a:prstGeom prst="roundRect">
             <a:avLst/>
@@ -5594,7 +5535,7 @@
           </a:solidFill>
           <a:ln>
             <a:solidFill>
-              <a:srgbClr val="2F5BA8"/>
+              <a:srgbClr val="E5E9EF"/>
             </a:solidFill>
           </a:ln>
         </p:spPr>
@@ -5628,8 +5569,8 @@
         </p:nvSpPr>
         <p:spPr>
           <a:xfrm>
-            <a:off x="1389888" y="1362456"/>
-            <a:ext cx="9784080" cy="594360"/>
+            <a:off x="850392" y="1453895"/>
+            <a:ext cx="685800" cy="384048"/>
           </a:xfrm>
           <a:prstGeom prst="rect">
             <a:avLst/>
@@ -5637,12 +5578,48 @@
           <a:noFill/>
         </p:spPr>
         <p:txBody>
-          <a:bodyPr wrap="square" lIns="36576" rIns="36576" tIns="27432" bIns="27432">
+          <a:bodyPr wrap="square" lIns="45720" rIns="45720" tIns="36576" bIns="36576" anchor="t">
             <a:spAutoFit/>
           </a:bodyPr>
           <a:lstStyle/>
           <a:p>
             <a:pPr algn="l">
+              <a:defRPr sz="1200" b="1">
+                <a:solidFill>
+                  <a:srgbClr val="2F5BA8"/>
+                </a:solidFill>
+                <a:latin typeface="Aptos"/>
+              </a:defRPr>
+            </a:pPr>
+            <a:r>
+              <a:t>PASO 1</a:t>
+            </a:r>
+          </a:p>
+        </p:txBody>
+      </p:sp>
+      <p:sp>
+        <p:nvSpPr>
+          <p:cNvPr id="10" name="TextBox 9"/>
+          <p:cNvSpPr txBox="1"/>
+          <p:nvPr/>
+        </p:nvSpPr>
+        <p:spPr>
+          <a:xfrm>
+            <a:off x="1664208" y="1417319"/>
+            <a:ext cx="9464040" cy="2007108"/>
+          </a:xfrm>
+          <a:prstGeom prst="rect">
+            <a:avLst/>
+          </a:prstGeom>
+          <a:noFill/>
+        </p:spPr>
+        <p:txBody>
+          <a:bodyPr wrap="square" lIns="45720" rIns="45720" tIns="36576" bIns="36576" anchor="t">
+            <a:spAutoFit/>
+          </a:bodyPr>
+          <a:lstStyle/>
+          <a:p>
+            <a:pPr algn="l">
               <a:defRPr sz="2000" b="0">
                 <a:solidFill>
                   <a:srgbClr val="1C2330"/>
@@ -5651,21 +5628,21 @@
               </a:defRPr>
             </a:pPr>
             <a:r>
-              <a:t>He producido o actualizado: Código con al menos una constante bien usada.</a:t>
-            </a:r>
-          </a:p>
-        </p:txBody>
-      </p:sp>
-      <p:sp>
-        <p:nvSpPr>
-          <p:cNvPr id="10" name="Rounded Rectangle 9"/>
+              <a:t>Añadir nombre del asistente y año como constantes.</a:t>
+            </a:r>
+          </a:p>
+        </p:txBody>
+      </p:sp>
+      <p:sp>
+        <p:nvSpPr>
+          <p:cNvPr id="11" name="Rounded Rectangle 10"/>
           <p:cNvSpPr/>
           <p:nvPr/>
         </p:nvSpPr>
         <p:spPr>
           <a:xfrm>
-            <a:off x="713232" y="2267712"/>
-            <a:ext cx="420624" cy="420624"/>
+            <a:off x="658368" y="3776472"/>
+            <a:ext cx="10835640" cy="2226564"/>
           </a:xfrm>
           <a:prstGeom prst="roundRect">
             <a:avLst/>
@@ -5675,7 +5652,7 @@
           </a:solidFill>
           <a:ln>
             <a:solidFill>
-              <a:srgbClr val="2F5BA8"/>
+              <a:srgbClr val="E5E9EF"/>
             </a:solidFill>
           </a:ln>
         </p:spPr>
@@ -5703,14 +5680,14 @@
       </p:sp>
       <p:sp>
         <p:nvSpPr>
-          <p:cNvPr id="11" name="TextBox 10"/>
+          <p:cNvPr id="12" name="TextBox 11"/>
           <p:cNvSpPr txBox="1"/>
           <p:nvPr/>
         </p:nvSpPr>
         <p:spPr>
           <a:xfrm>
-            <a:off x="1389888" y="2258568"/>
-            <a:ext cx="9784080" cy="594360"/>
+            <a:off x="850392" y="3922776"/>
+            <a:ext cx="685800" cy="384048"/>
           </a:xfrm>
           <a:prstGeom prst="rect">
             <a:avLst/>
@@ -5718,67 +5695,22 @@
           <a:noFill/>
         </p:spPr>
         <p:txBody>
-          <a:bodyPr wrap="square" lIns="36576" rIns="36576" tIns="27432" bIns="27432">
+          <a:bodyPr wrap="square" lIns="45720" rIns="45720" tIns="36576" bIns="36576" anchor="t">
             <a:spAutoFit/>
           </a:bodyPr>
           <a:lstStyle/>
           <a:p>
             <a:pPr algn="l">
-              <a:defRPr sz="2000" b="0">
-                <a:solidFill>
-                  <a:srgbClr val="1C2330"/>
+              <a:defRPr sz="1200" b="1">
+                <a:solidFill>
+                  <a:srgbClr val="2F5BA8"/>
                 </a:solidFill>
                 <a:latin typeface="Aptos"/>
               </a:defRPr>
             </a:pPr>
             <a:r>
-              <a:t>Puedo señalar dónde está.</a:t>
-            </a:r>
-          </a:p>
-        </p:txBody>
-      </p:sp>
-      <p:sp>
-        <p:nvSpPr>
-          <p:cNvPr id="12" name="Rounded Rectangle 11"/>
-          <p:cNvSpPr/>
-          <p:nvPr/>
-        </p:nvSpPr>
-        <p:spPr>
-          <a:xfrm>
-            <a:off x="713232" y="3163824"/>
-            <a:ext cx="420624" cy="420624"/>
-          </a:xfrm>
-          <a:prstGeom prst="roundRect">
-            <a:avLst/>
-          </a:prstGeom>
-          <a:solidFill>
-            <a:srgbClr val="FFFFFF"/>
-          </a:solidFill>
-          <a:ln>
-            <a:solidFill>
-              <a:srgbClr val="2F5BA8"/>
-            </a:solidFill>
-          </a:ln>
-        </p:spPr>
-        <p:style>
-          <a:lnRef idx="1">
-            <a:schemeClr val="accent1"/>
-          </a:lnRef>
-          <a:fillRef idx="3">
-            <a:schemeClr val="accent1"/>
-          </a:fillRef>
-          <a:effectRef idx="2">
-            <a:schemeClr val="accent1"/>
-          </a:effectRef>
-          <a:fontRef idx="minor">
-            <a:schemeClr val="lt1"/>
-          </a:fontRef>
-        </p:style>
-        <p:txBody>
-          <a:bodyPr rtlCol="0" anchor="ctr"/>
-          <a:lstStyle/>
-          <a:p>
-            <a:pPr algn="ctr"/>
+              <a:t>PASO 2</a:t>
+            </a:r>
           </a:p>
         </p:txBody>
       </p:sp>
@@ -5790,8 +5722,8 @@
         </p:nvSpPr>
         <p:spPr>
           <a:xfrm>
-            <a:off x="1389888" y="3154680"/>
-            <a:ext cx="9784080" cy="594360"/>
+            <a:off x="1664208" y="3886200"/>
+            <a:ext cx="9464040" cy="2007108"/>
           </a:xfrm>
           <a:prstGeom prst="rect">
             <a:avLst/>
@@ -5799,7 +5731,7 @@
           <a:noFill/>
         </p:spPr>
         <p:txBody>
-          <a:bodyPr wrap="square" lIns="36576" rIns="36576" tIns="27432" bIns="27432">
+          <a:bodyPr wrap="square" lIns="45720" rIns="45720" tIns="36576" bIns="36576" anchor="t">
             <a:spAutoFit/>
           </a:bodyPr>
           <a:lstStyle/>
@@ -5813,205 +5745,7 @@
               </a:defRPr>
             </a:pPr>
             <a:r>
-              <a:t>Puedo explicar una decisión tomada.</a:t>
-            </a:r>
-          </a:p>
-        </p:txBody>
-      </p:sp>
-      <p:sp>
-        <p:nvSpPr>
-          <p:cNvPr id="14" name="Rounded Rectangle 13"/>
-          <p:cNvSpPr/>
-          <p:nvPr/>
-        </p:nvSpPr>
-        <p:spPr>
-          <a:xfrm>
-            <a:off x="713232" y="4059935"/>
-            <a:ext cx="420624" cy="420624"/>
-          </a:xfrm>
-          <a:prstGeom prst="roundRect">
-            <a:avLst/>
-          </a:prstGeom>
-          <a:solidFill>
-            <a:srgbClr val="FFFFFF"/>
-          </a:solidFill>
-          <a:ln>
-            <a:solidFill>
-              <a:srgbClr val="2F5BA8"/>
-            </a:solidFill>
-          </a:ln>
-        </p:spPr>
-        <p:style>
-          <a:lnRef idx="1">
-            <a:schemeClr val="accent1"/>
-          </a:lnRef>
-          <a:fillRef idx="3">
-            <a:schemeClr val="accent1"/>
-          </a:fillRef>
-          <a:effectRef idx="2">
-            <a:schemeClr val="accent1"/>
-          </a:effectRef>
-          <a:fontRef idx="minor">
-            <a:schemeClr val="lt1"/>
-          </a:fontRef>
-        </p:style>
-        <p:txBody>
-          <a:bodyPr rtlCol="0" anchor="ctr"/>
-          <a:lstStyle/>
-          <a:p>
-            <a:pPr algn="ctr"/>
-          </a:p>
-        </p:txBody>
-      </p:sp>
-      <p:sp>
-        <p:nvSpPr>
-          <p:cNvPr id="15" name="TextBox 14"/>
-          <p:cNvSpPr txBox="1"/>
-          <p:nvPr/>
-        </p:nvSpPr>
-        <p:spPr>
-          <a:xfrm>
-            <a:off x="1389888" y="4050791"/>
-            <a:ext cx="9784080" cy="594360"/>
-          </a:xfrm>
-          <a:prstGeom prst="rect">
-            <a:avLst/>
-          </a:prstGeom>
-          <a:noFill/>
-        </p:spPr>
-        <p:txBody>
-          <a:bodyPr wrap="square" lIns="36576" rIns="36576" tIns="27432" bIns="27432">
-            <a:spAutoFit/>
-          </a:bodyPr>
-          <a:lstStyle/>
-          <a:p>
-            <a:pPr algn="l">
-              <a:defRPr sz="2000" b="0">
-                <a:solidFill>
-                  <a:srgbClr val="1C2330"/>
-                </a:solidFill>
-                <a:latin typeface="Aptos"/>
-              </a:defRPr>
-            </a:pPr>
-            <a:r>
-              <a:t>Puedo mostrar una prueba o comprobación.</a:t>
-            </a:r>
-          </a:p>
-        </p:txBody>
-      </p:sp>
-      <p:sp>
-        <p:nvSpPr>
-          <p:cNvPr id="16" name="Rounded Rectangle 15"/>
-          <p:cNvSpPr/>
-          <p:nvPr/>
-        </p:nvSpPr>
-        <p:spPr>
-          <a:xfrm>
-            <a:off x="713232" y="4956048"/>
-            <a:ext cx="420624" cy="420624"/>
-          </a:xfrm>
-          <a:prstGeom prst="roundRect">
-            <a:avLst/>
-          </a:prstGeom>
-          <a:solidFill>
-            <a:srgbClr val="FFFFFF"/>
-          </a:solidFill>
-          <a:ln>
-            <a:solidFill>
-              <a:srgbClr val="2F5BA8"/>
-            </a:solidFill>
-          </a:ln>
-        </p:spPr>
-        <p:style>
-          <a:lnRef idx="1">
-            <a:schemeClr val="accent1"/>
-          </a:lnRef>
-          <a:fillRef idx="3">
-            <a:schemeClr val="accent1"/>
-          </a:fillRef>
-          <a:effectRef idx="2">
-            <a:schemeClr val="accent1"/>
-          </a:effectRef>
-          <a:fontRef idx="minor">
-            <a:schemeClr val="lt1"/>
-          </a:fontRef>
-        </p:style>
-        <p:txBody>
-          <a:bodyPr rtlCol="0" anchor="ctr"/>
-          <a:lstStyle/>
-          <a:p>
-            <a:pPr algn="ctr"/>
-          </a:p>
-        </p:txBody>
-      </p:sp>
-      <p:sp>
-        <p:nvSpPr>
-          <p:cNvPr id="17" name="TextBox 16"/>
-          <p:cNvSpPr txBox="1"/>
-          <p:nvPr/>
-        </p:nvSpPr>
-        <p:spPr>
-          <a:xfrm>
-            <a:off x="1389888" y="4946904"/>
-            <a:ext cx="9784080" cy="594360"/>
-          </a:xfrm>
-          <a:prstGeom prst="rect">
-            <a:avLst/>
-          </a:prstGeom>
-          <a:noFill/>
-        </p:spPr>
-        <p:txBody>
-          <a:bodyPr wrap="square" lIns="36576" rIns="36576" tIns="27432" bIns="27432">
-            <a:spAutoFit/>
-          </a:bodyPr>
-          <a:lstStyle/>
-          <a:p>
-            <a:pPr algn="l">
-              <a:defRPr sz="2000" b="0">
-                <a:solidFill>
-                  <a:srgbClr val="1C2330"/>
-                </a:solidFill>
-                <a:latin typeface="Aptos"/>
-              </a:defRPr>
-            </a:pPr>
-            <a:r>
-              <a:t>He registrado mi aportación individual si el trabajo era de equipo.</a:t>
-            </a:r>
-          </a:p>
-        </p:txBody>
-      </p:sp>
-      <p:sp>
-        <p:nvSpPr>
-          <p:cNvPr id="18" name="TextBox 17"/>
-          <p:cNvSpPr txBox="1"/>
-          <p:nvPr/>
-        </p:nvSpPr>
-        <p:spPr>
-          <a:xfrm>
-            <a:off x="731520" y="5925312"/>
-            <a:ext cx="10789920" cy="274320"/>
-          </a:xfrm>
-          <a:prstGeom prst="rect">
-            <a:avLst/>
-          </a:prstGeom>
-          <a:noFill/>
-        </p:spPr>
-        <p:txBody>
-          <a:bodyPr wrap="square" lIns="36576" rIns="36576" tIns="27432" bIns="27432">
-            <a:spAutoFit/>
-          </a:bodyPr>
-          <a:lstStyle/>
-          <a:p>
-            <a:pPr algn="l">
-              <a:defRPr sz="1200" b="0">
-                <a:solidFill>
-                  <a:srgbClr val="586270"/>
-                </a:solidFill>
-                <a:latin typeface="Aptos"/>
-              </a:defRPr>
-            </a:pPr>
-            <a:r>
-              <a:t>Necesitas: Un ordenador por estudiante o pareja, con JDK e IntelliJ disponibles y el proyecto del hito accesible.</a:t>
+              <a:t>Comprueba y registra la evidencia: Código con al menos una constante bien usada.</a:t>
             </a:r>
           </a:p>
         </p:txBody>
@@ -6128,8 +5862,8 @@
         </p:nvSpPr>
         <p:spPr>
           <a:xfrm>
-            <a:off x="502920" y="310896"/>
-            <a:ext cx="5029200" cy="256032"/>
+            <a:off x="502920" y="274320"/>
+            <a:ext cx="5486400" cy="256032"/>
           </a:xfrm>
           <a:prstGeom prst="rect">
             <a:avLst/>
@@ -6137,7 +5871,7 @@
           <a:noFill/>
         </p:spPr>
         <p:txBody>
-          <a:bodyPr wrap="square" lIns="36576" rIns="36576" tIns="27432" bIns="27432">
+          <a:bodyPr wrap="square" lIns="45720" rIns="45720" tIns="36576" bIns="36576" anchor="t">
             <a:spAutoFit/>
           </a:bodyPr>
           <a:lstStyle/>
@@ -6151,7 +5885,7 @@
               </a:defRPr>
             </a:pPr>
             <a:r>
-              <a:t>COMPRUEBA Y EXPLICA</a:t>
+              <a:t>COMPROBAR</a:t>
             </a:r>
           </a:p>
         </p:txBody>
@@ -6164,7 +5898,7 @@
         </p:nvSpPr>
         <p:spPr>
           <a:xfrm>
-            <a:off x="502920" y="621792"/>
+            <a:off x="502920" y="603504"/>
             <a:ext cx="11064240" cy="530352"/>
           </a:xfrm>
           <a:prstGeom prst="rect">
@@ -6173,7 +5907,7 @@
           <a:noFill/>
         </p:spPr>
         <p:txBody>
-          <a:bodyPr wrap="square" lIns="36576" rIns="36576" tIns="27432" bIns="27432">
+          <a:bodyPr wrap="square" lIns="45720" rIns="45720" tIns="36576" bIns="36576" anchor="t">
             <a:spAutoFit/>
           </a:bodyPr>
           <a:lstStyle/>
@@ -6187,7 +5921,7 @@
               </a:defRPr>
             </a:pPr>
             <a:r>
-              <a:t>Cierre de la sesión</a:t>
+              <a:t>Evidencia y comprobación</a:t>
             </a:r>
           </a:p>
         </p:txBody>
@@ -6252,7 +5986,7 @@
           <a:noFill/>
         </p:spPr>
         <p:txBody>
-          <a:bodyPr wrap="square" lIns="36576" rIns="36576" tIns="27432" bIns="27432">
+          <a:bodyPr wrap="square" lIns="45720" rIns="45720" tIns="36576" bIns="36576" anchor="t">
             <a:spAutoFit/>
           </a:bodyPr>
           <a:lstStyle/>
@@ -6279,10 +6013,476 @@
         </p:nvSpPr>
         <p:spPr>
           <a:xfrm>
-            <a:off x="621792" y="1298448"/>
-            <a:ext cx="10927080" cy="1965960"/>
+            <a:off x="713232" y="1298448"/>
+            <a:ext cx="420624" cy="420624"/>
           </a:xfrm>
           <a:prstGeom prst="roundRect">
+            <a:avLst/>
+          </a:prstGeom>
+          <a:solidFill>
+            <a:srgbClr val="FFFFFF"/>
+          </a:solidFill>
+          <a:ln>
+            <a:solidFill>
+              <a:srgbClr val="2F5BA8"/>
+            </a:solidFill>
+          </a:ln>
+        </p:spPr>
+        <p:style>
+          <a:lnRef idx="1">
+            <a:schemeClr val="accent1"/>
+          </a:lnRef>
+          <a:fillRef idx="3">
+            <a:schemeClr val="accent1"/>
+          </a:fillRef>
+          <a:effectRef idx="2">
+            <a:schemeClr val="accent1"/>
+          </a:effectRef>
+          <a:fontRef idx="minor">
+            <a:schemeClr val="lt1"/>
+          </a:fontRef>
+        </p:style>
+        <p:txBody>
+          <a:bodyPr rtlCol="0" anchor="ctr"/>
+          <a:lstStyle/>
+          <a:p>
+            <a:pPr algn="ctr"/>
+          </a:p>
+        </p:txBody>
+      </p:sp>
+      <p:sp>
+        <p:nvSpPr>
+          <p:cNvPr id="9" name="TextBox 8"/>
+          <p:cNvSpPr txBox="1"/>
+          <p:nvPr/>
+        </p:nvSpPr>
+        <p:spPr>
+          <a:xfrm>
+            <a:off x="1389888" y="1280160"/>
+            <a:ext cx="9829800" cy="960120"/>
+          </a:xfrm>
+          <a:prstGeom prst="rect">
+            <a:avLst/>
+          </a:prstGeom>
+          <a:noFill/>
+        </p:spPr>
+        <p:txBody>
+          <a:bodyPr wrap="square" lIns="45720" rIns="45720" tIns="36576" bIns="36576" anchor="t">
+            <a:spAutoFit/>
+          </a:bodyPr>
+          <a:lstStyle/>
+          <a:p>
+            <a:pPr algn="l">
+              <a:defRPr sz="1900" b="0">
+                <a:solidFill>
+                  <a:srgbClr val="1C2330"/>
+                </a:solidFill>
+                <a:latin typeface="Aptos"/>
+              </a:defRPr>
+            </a:pPr>
+            <a:r>
+              <a:t>He producido o actualizado: Código con al menos una constante bien usada.</a:t>
+            </a:r>
+          </a:p>
+        </p:txBody>
+      </p:sp>
+      <p:sp>
+        <p:nvSpPr>
+          <p:cNvPr id="10" name="Rounded Rectangle 9"/>
+          <p:cNvSpPr/>
+          <p:nvPr/>
+        </p:nvSpPr>
+        <p:spPr>
+          <a:xfrm>
+            <a:off x="713232" y="2295144"/>
+            <a:ext cx="420624" cy="420624"/>
+          </a:xfrm>
+          <a:prstGeom prst="roundRect">
+            <a:avLst/>
+          </a:prstGeom>
+          <a:solidFill>
+            <a:srgbClr val="FFFFFF"/>
+          </a:solidFill>
+          <a:ln>
+            <a:solidFill>
+              <a:srgbClr val="2F5BA8"/>
+            </a:solidFill>
+          </a:ln>
+        </p:spPr>
+        <p:style>
+          <a:lnRef idx="1">
+            <a:schemeClr val="accent1"/>
+          </a:lnRef>
+          <a:fillRef idx="3">
+            <a:schemeClr val="accent1"/>
+          </a:fillRef>
+          <a:effectRef idx="2">
+            <a:schemeClr val="accent1"/>
+          </a:effectRef>
+          <a:fontRef idx="minor">
+            <a:schemeClr val="lt1"/>
+          </a:fontRef>
+        </p:style>
+        <p:txBody>
+          <a:bodyPr rtlCol="0" anchor="ctr"/>
+          <a:lstStyle/>
+          <a:p>
+            <a:pPr algn="ctr"/>
+          </a:p>
+        </p:txBody>
+      </p:sp>
+      <p:sp>
+        <p:nvSpPr>
+          <p:cNvPr id="11" name="TextBox 10"/>
+          <p:cNvSpPr txBox="1"/>
+          <p:nvPr/>
+        </p:nvSpPr>
+        <p:spPr>
+          <a:xfrm>
+            <a:off x="1389888" y="2276856"/>
+            <a:ext cx="9829800" cy="960120"/>
+          </a:xfrm>
+          <a:prstGeom prst="rect">
+            <a:avLst/>
+          </a:prstGeom>
+          <a:noFill/>
+        </p:spPr>
+        <p:txBody>
+          <a:bodyPr wrap="square" lIns="45720" rIns="45720" tIns="36576" bIns="36576" anchor="t">
+            <a:spAutoFit/>
+          </a:bodyPr>
+          <a:lstStyle/>
+          <a:p>
+            <a:pPr algn="l">
+              <a:defRPr sz="1900" b="0">
+                <a:solidFill>
+                  <a:srgbClr val="1C2330"/>
+                </a:solidFill>
+                <a:latin typeface="Aptos"/>
+              </a:defRPr>
+            </a:pPr>
+            <a:r>
+              <a:t>Puedo señalar dónde está.</a:t>
+            </a:r>
+          </a:p>
+        </p:txBody>
+      </p:sp>
+      <p:sp>
+        <p:nvSpPr>
+          <p:cNvPr id="12" name="Rounded Rectangle 11"/>
+          <p:cNvSpPr/>
+          <p:nvPr/>
+        </p:nvSpPr>
+        <p:spPr>
+          <a:xfrm>
+            <a:off x="713232" y="3291839"/>
+            <a:ext cx="420624" cy="420624"/>
+          </a:xfrm>
+          <a:prstGeom prst="roundRect">
+            <a:avLst/>
+          </a:prstGeom>
+          <a:solidFill>
+            <a:srgbClr val="FFFFFF"/>
+          </a:solidFill>
+          <a:ln>
+            <a:solidFill>
+              <a:srgbClr val="2F5BA8"/>
+            </a:solidFill>
+          </a:ln>
+        </p:spPr>
+        <p:style>
+          <a:lnRef idx="1">
+            <a:schemeClr val="accent1"/>
+          </a:lnRef>
+          <a:fillRef idx="3">
+            <a:schemeClr val="accent1"/>
+          </a:fillRef>
+          <a:effectRef idx="2">
+            <a:schemeClr val="accent1"/>
+          </a:effectRef>
+          <a:fontRef idx="minor">
+            <a:schemeClr val="lt1"/>
+          </a:fontRef>
+        </p:style>
+        <p:txBody>
+          <a:bodyPr rtlCol="0" anchor="ctr"/>
+          <a:lstStyle/>
+          <a:p>
+            <a:pPr algn="ctr"/>
+          </a:p>
+        </p:txBody>
+      </p:sp>
+      <p:sp>
+        <p:nvSpPr>
+          <p:cNvPr id="13" name="TextBox 12"/>
+          <p:cNvSpPr txBox="1"/>
+          <p:nvPr/>
+        </p:nvSpPr>
+        <p:spPr>
+          <a:xfrm>
+            <a:off x="1389888" y="3273551"/>
+            <a:ext cx="9829800" cy="960120"/>
+          </a:xfrm>
+          <a:prstGeom prst="rect">
+            <a:avLst/>
+          </a:prstGeom>
+          <a:noFill/>
+        </p:spPr>
+        <p:txBody>
+          <a:bodyPr wrap="square" lIns="45720" rIns="45720" tIns="36576" bIns="36576" anchor="t">
+            <a:spAutoFit/>
+          </a:bodyPr>
+          <a:lstStyle/>
+          <a:p>
+            <a:pPr algn="l">
+              <a:defRPr sz="1900" b="0">
+                <a:solidFill>
+                  <a:srgbClr val="1C2330"/>
+                </a:solidFill>
+                <a:latin typeface="Aptos"/>
+              </a:defRPr>
+            </a:pPr>
+            <a:r>
+              <a:t>Puedo explicar una decisión tomada.</a:t>
+            </a:r>
+          </a:p>
+        </p:txBody>
+      </p:sp>
+      <p:sp>
+        <p:nvSpPr>
+          <p:cNvPr id="14" name="Rounded Rectangle 13"/>
+          <p:cNvSpPr/>
+          <p:nvPr/>
+        </p:nvSpPr>
+        <p:spPr>
+          <a:xfrm>
+            <a:off x="713232" y="4288536"/>
+            <a:ext cx="420624" cy="420624"/>
+          </a:xfrm>
+          <a:prstGeom prst="roundRect">
+            <a:avLst/>
+          </a:prstGeom>
+          <a:solidFill>
+            <a:srgbClr val="FFFFFF"/>
+          </a:solidFill>
+          <a:ln>
+            <a:solidFill>
+              <a:srgbClr val="2F5BA8"/>
+            </a:solidFill>
+          </a:ln>
+        </p:spPr>
+        <p:style>
+          <a:lnRef idx="1">
+            <a:schemeClr val="accent1"/>
+          </a:lnRef>
+          <a:fillRef idx="3">
+            <a:schemeClr val="accent1"/>
+          </a:fillRef>
+          <a:effectRef idx="2">
+            <a:schemeClr val="accent1"/>
+          </a:effectRef>
+          <a:fontRef idx="minor">
+            <a:schemeClr val="lt1"/>
+          </a:fontRef>
+        </p:style>
+        <p:txBody>
+          <a:bodyPr rtlCol="0" anchor="ctr"/>
+          <a:lstStyle/>
+          <a:p>
+            <a:pPr algn="ctr"/>
+          </a:p>
+        </p:txBody>
+      </p:sp>
+      <p:sp>
+        <p:nvSpPr>
+          <p:cNvPr id="15" name="TextBox 14"/>
+          <p:cNvSpPr txBox="1"/>
+          <p:nvPr/>
+        </p:nvSpPr>
+        <p:spPr>
+          <a:xfrm>
+            <a:off x="1389888" y="4270248"/>
+            <a:ext cx="9829800" cy="960120"/>
+          </a:xfrm>
+          <a:prstGeom prst="rect">
+            <a:avLst/>
+          </a:prstGeom>
+          <a:noFill/>
+        </p:spPr>
+        <p:txBody>
+          <a:bodyPr wrap="square" lIns="45720" rIns="45720" tIns="36576" bIns="36576" anchor="t">
+            <a:spAutoFit/>
+          </a:bodyPr>
+          <a:lstStyle/>
+          <a:p>
+            <a:pPr algn="l">
+              <a:defRPr sz="1900" b="0">
+                <a:solidFill>
+                  <a:srgbClr val="1C2330"/>
+                </a:solidFill>
+                <a:latin typeface="Aptos"/>
+              </a:defRPr>
+            </a:pPr>
+            <a:r>
+              <a:t>Puedo mostrar una prueba o comprobación.</a:t>
+            </a:r>
+          </a:p>
+        </p:txBody>
+      </p:sp>
+      <p:sp>
+        <p:nvSpPr>
+          <p:cNvPr id="16" name="Rounded Rectangle 15"/>
+          <p:cNvSpPr/>
+          <p:nvPr/>
+        </p:nvSpPr>
+        <p:spPr>
+          <a:xfrm>
+            <a:off x="713232" y="5285231"/>
+            <a:ext cx="420624" cy="420624"/>
+          </a:xfrm>
+          <a:prstGeom prst="roundRect">
+            <a:avLst/>
+          </a:prstGeom>
+          <a:solidFill>
+            <a:srgbClr val="FFFFFF"/>
+          </a:solidFill>
+          <a:ln>
+            <a:solidFill>
+              <a:srgbClr val="2F5BA8"/>
+            </a:solidFill>
+          </a:ln>
+        </p:spPr>
+        <p:style>
+          <a:lnRef idx="1">
+            <a:schemeClr val="accent1"/>
+          </a:lnRef>
+          <a:fillRef idx="3">
+            <a:schemeClr val="accent1"/>
+          </a:fillRef>
+          <a:effectRef idx="2">
+            <a:schemeClr val="accent1"/>
+          </a:effectRef>
+          <a:fontRef idx="minor">
+            <a:schemeClr val="lt1"/>
+          </a:fontRef>
+        </p:style>
+        <p:txBody>
+          <a:bodyPr rtlCol="0" anchor="ctr"/>
+          <a:lstStyle/>
+          <a:p>
+            <a:pPr algn="ctr"/>
+          </a:p>
+        </p:txBody>
+      </p:sp>
+      <p:sp>
+        <p:nvSpPr>
+          <p:cNvPr id="17" name="TextBox 16"/>
+          <p:cNvSpPr txBox="1"/>
+          <p:nvPr/>
+        </p:nvSpPr>
+        <p:spPr>
+          <a:xfrm>
+            <a:off x="1389888" y="5266944"/>
+            <a:ext cx="9829800" cy="960120"/>
+          </a:xfrm>
+          <a:prstGeom prst="rect">
+            <a:avLst/>
+          </a:prstGeom>
+          <a:noFill/>
+        </p:spPr>
+        <p:txBody>
+          <a:bodyPr wrap="square" lIns="45720" rIns="45720" tIns="36576" bIns="36576" anchor="t">
+            <a:spAutoFit/>
+          </a:bodyPr>
+          <a:lstStyle/>
+          <a:p>
+            <a:pPr algn="l">
+              <a:defRPr sz="1900" b="0">
+                <a:solidFill>
+                  <a:srgbClr val="1C2330"/>
+                </a:solidFill>
+                <a:latin typeface="Aptos"/>
+              </a:defRPr>
+            </a:pPr>
+            <a:r>
+              <a:t>He registrado mi aportación individual si el trabajo era de equipo.</a:t>
+            </a:r>
+          </a:p>
+        </p:txBody>
+      </p:sp>
+    </p:spTree>
+  </p:cSld>
+  <p:clrMapOvr>
+    <a:masterClrMapping/>
+  </p:clrMapOvr>
+</p:sld>
+</file>
+
+<file path=ppt/slides/slide7.xml><?xml version="1.0" encoding="utf-8"?>
+<p:sld xmlns:a="http://schemas.openxmlformats.org/drawingml/2006/main" xmlns:p="http://schemas.openxmlformats.org/presentationml/2006/main" xmlns:r="http://schemas.openxmlformats.org/officeDocument/2006/relationships">
+  <p:cSld>
+    <p:spTree>
+      <p:nvGrpSpPr>
+        <p:cNvPr id="1" name=""/>
+        <p:cNvGrpSpPr/>
+        <p:nvPr/>
+      </p:nvGrpSpPr>
+      <p:grpSpPr/>
+      <p:sp>
+        <p:nvSpPr>
+          <p:cNvPr id="2" name="Rectangle 1"/>
+          <p:cNvSpPr/>
+          <p:nvPr/>
+        </p:nvSpPr>
+        <p:spPr>
+          <a:xfrm>
+            <a:off x="0" y="0"/>
+            <a:ext cx="12191695" cy="6858000"/>
+          </a:xfrm>
+          <a:prstGeom prst="rect">
+            <a:avLst/>
+          </a:prstGeom>
+          <a:solidFill>
+            <a:srgbClr val="F9F7F2"/>
+          </a:solidFill>
+          <a:ln>
+            <a:noFill/>
+          </a:ln>
+        </p:spPr>
+        <p:style>
+          <a:lnRef idx="1">
+            <a:schemeClr val="accent1"/>
+          </a:lnRef>
+          <a:fillRef idx="3">
+            <a:schemeClr val="accent1"/>
+          </a:fillRef>
+          <a:effectRef idx="2">
+            <a:schemeClr val="accent1"/>
+          </a:effectRef>
+          <a:fontRef idx="minor">
+            <a:schemeClr val="lt1"/>
+          </a:fontRef>
+        </p:style>
+        <p:txBody>
+          <a:bodyPr rtlCol="0" anchor="ctr"/>
+          <a:lstStyle/>
+          <a:p>
+            <a:pPr algn="ctr"/>
+          </a:p>
+        </p:txBody>
+      </p:sp>
+      <p:sp>
+        <p:nvSpPr>
+          <p:cNvPr id="3" name="Rectangle 2"/>
+          <p:cNvSpPr/>
+          <p:nvPr/>
+        </p:nvSpPr>
+        <p:spPr>
+          <a:xfrm>
+            <a:off x="0" y="0"/>
+            <a:ext cx="164592" cy="6858000"/>
+          </a:xfrm>
+          <a:prstGeom prst="rect">
             <a:avLst/>
           </a:prstGeom>
           <a:solidFill>
@@ -6316,14 +6516,14 @@
       </p:sp>
       <p:sp>
         <p:nvSpPr>
-          <p:cNvPr id="9" name="TextBox 8"/>
+          <p:cNvPr id="4" name="TextBox 3"/>
           <p:cNvSpPr txBox="1"/>
           <p:nvPr/>
         </p:nvSpPr>
         <p:spPr>
           <a:xfrm>
-            <a:off x="960120" y="1618488"/>
-            <a:ext cx="10195560" cy="320040"/>
+            <a:off x="502920" y="274320"/>
+            <a:ext cx="5486400" cy="256032"/>
           </a:xfrm>
           <a:prstGeom prst="rect">
             <a:avLst/>
@@ -6331,35 +6531,35 @@
           <a:noFill/>
         </p:spPr>
         <p:txBody>
-          <a:bodyPr wrap="square" lIns="36576" rIns="36576" tIns="27432" bIns="27432">
+          <a:bodyPr wrap="square" lIns="45720" rIns="45720" tIns="36576" bIns="36576" anchor="t">
             <a:spAutoFit/>
           </a:bodyPr>
           <a:lstStyle/>
           <a:p>
             <a:pPr algn="l">
-              <a:defRPr sz="1400" b="1">
-                <a:solidFill>
-                  <a:srgbClr val="FFFFFF"/>
+              <a:defRPr sz="1000" b="1">
+                <a:solidFill>
+                  <a:srgbClr val="2F5BA8"/>
                 </a:solidFill>
                 <a:latin typeface="Aptos"/>
               </a:defRPr>
             </a:pPr>
             <a:r>
-              <a:t>PREGUNTA DE SALIDA</a:t>
-            </a:r>
-          </a:p>
-        </p:txBody>
-      </p:sp>
-      <p:sp>
-        <p:nvSpPr>
-          <p:cNvPr id="10" name="TextBox 9"/>
+              <a:t>LÍMITES QUE PROTEGEN EL APRENDIZAJE</a:t>
+            </a:r>
+          </a:p>
+        </p:txBody>
+      </p:sp>
+      <p:sp>
+        <p:nvSpPr>
+          <p:cNvPr id="5" name="TextBox 4"/>
           <p:cNvSpPr txBox="1"/>
           <p:nvPr/>
         </p:nvSpPr>
         <p:spPr>
           <a:xfrm>
-            <a:off x="960120" y="2057400"/>
-            <a:ext cx="10058400" cy="822960"/>
+            <a:off x="502920" y="603504"/>
+            <a:ext cx="11064240" cy="530352"/>
           </a:xfrm>
           <a:prstGeom prst="rect">
             <a:avLst/>
@@ -6367,35 +6567,78 @@
           <a:noFill/>
         </p:spPr>
         <p:txBody>
-          <a:bodyPr wrap="square" lIns="36576" rIns="36576" tIns="27432" bIns="27432">
+          <a:bodyPr wrap="square" lIns="45720" rIns="45720" tIns="36576" bIns="36576" anchor="t">
             <a:spAutoFit/>
           </a:bodyPr>
           <a:lstStyle/>
           <a:p>
             <a:pPr algn="l">
-              <a:defRPr sz="2700" b="1">
-                <a:solidFill>
-                  <a:srgbClr val="FFFFFF"/>
+              <a:defRPr sz="2800" b="1">
+                <a:solidFill>
+                  <a:srgbClr val="1C2330"/>
                 </a:solidFill>
                 <a:latin typeface="Aptos"/>
               </a:defRPr>
             </a:pPr>
             <a:r>
-              <a:t>Pregunta: ¿qué dato de nuestro programa debería ser constante?</a:t>
-            </a:r>
-          </a:p>
-        </p:txBody>
-      </p:sp>
-      <p:sp>
-        <p:nvSpPr>
-          <p:cNvPr id="11" name="TextBox 10"/>
+              <a:t>Seguridad y uso responsable</a:t>
+            </a:r>
+          </a:p>
+        </p:txBody>
+      </p:sp>
+      <p:sp>
+        <p:nvSpPr>
+          <p:cNvPr id="6" name="Rectangle 5"/>
+          <p:cNvSpPr/>
+          <p:nvPr/>
+        </p:nvSpPr>
+        <p:spPr>
+          <a:xfrm>
+            <a:off x="0" y="6601968"/>
+            <a:ext cx="12191695" cy="256032"/>
+          </a:xfrm>
+          <a:prstGeom prst="rect">
+            <a:avLst/>
+          </a:prstGeom>
+          <a:solidFill>
+            <a:srgbClr val="2F5BA8"/>
+          </a:solidFill>
+          <a:ln>
+            <a:noFill/>
+          </a:ln>
+        </p:spPr>
+        <p:style>
+          <a:lnRef idx="1">
+            <a:schemeClr val="accent1"/>
+          </a:lnRef>
+          <a:fillRef idx="3">
+            <a:schemeClr val="accent1"/>
+          </a:fillRef>
+          <a:effectRef idx="2">
+            <a:schemeClr val="accent1"/>
+          </a:effectRef>
+          <a:fontRef idx="minor">
+            <a:schemeClr val="lt1"/>
+          </a:fontRef>
+        </p:style>
+        <p:txBody>
+          <a:bodyPr rtlCol="0" anchor="ctr"/>
+          <a:lstStyle/>
+          <a:p>
+            <a:pPr algn="ctr"/>
+          </a:p>
+        </p:txBody>
+      </p:sp>
+      <p:sp>
+        <p:nvSpPr>
+          <p:cNvPr id="7" name="TextBox 6"/>
           <p:cNvSpPr txBox="1"/>
           <p:nvPr/>
         </p:nvSpPr>
         <p:spPr>
           <a:xfrm>
-            <a:off x="713232" y="3703320"/>
-            <a:ext cx="3749039" cy="320040"/>
+            <a:off x="411480" y="6629400"/>
+            <a:ext cx="11247120" cy="164592"/>
           </a:xfrm>
           <a:prstGeom prst="rect">
             <a:avLst/>
@@ -6403,106 +6646,35 @@
           <a:noFill/>
         </p:spPr>
         <p:txBody>
-          <a:bodyPr wrap="square" lIns="36576" rIns="36576" tIns="27432" bIns="27432">
+          <a:bodyPr wrap="square" lIns="45720" rIns="45720" tIns="36576" bIns="36576" anchor="t">
             <a:spAutoFit/>
           </a:bodyPr>
           <a:lstStyle/>
           <a:p>
             <a:pPr algn="l">
-              <a:defRPr sz="1500" b="1">
-                <a:solidFill>
-                  <a:srgbClr val="2F5BA8"/>
+              <a:defRPr sz="900" b="0">
+                <a:solidFill>
+                  <a:srgbClr val="FFFFFF"/>
                 </a:solidFill>
                 <a:latin typeface="Aptos"/>
               </a:defRPr>
             </a:pPr>
             <a:r>
-              <a:t>RECUERDA</a:t>
-            </a:r>
-          </a:p>
-        </p:txBody>
-      </p:sp>
-      <p:sp>
-        <p:nvSpPr>
-          <p:cNvPr id="12" name="TextBox 11"/>
-          <p:cNvSpPr txBox="1"/>
-          <p:nvPr/>
-        </p:nvSpPr>
-        <p:spPr>
-          <a:xfrm>
-            <a:off x="713232" y="4114800"/>
-            <a:ext cx="6583680" cy="1691640"/>
-          </a:xfrm>
-          <a:prstGeom prst="rect">
-            <a:avLst/>
-          </a:prstGeom>
-          <a:noFill/>
-        </p:spPr>
-        <p:txBody>
-          <a:bodyPr wrap="square" lIns="73152" rIns="45720" tIns="36576">
-            <a:spAutoFit/>
-          </a:bodyPr>
-          <a:lstStyle/>
-          <a:p>
-            <a:pPr>
-              <a:spcAft>
-                <a:spcPts val="1000"/>
-              </a:spcAft>
-              <a:defRPr sz="1700">
-                <a:solidFill>
-                  <a:srgbClr val="1C2330"/>
-                </a:solidFill>
-                <a:latin typeface="Aptos"/>
-              </a:defRPr>
-            </a:pPr>
-            <a:r>
-              <a:t>•  Trabaja únicamente con datos ficticios.</a:t>
-            </a:r>
-          </a:p>
-          <a:p>
-            <a:pPr>
-              <a:spcAft>
-                <a:spcPts val="1000"/>
-              </a:spcAft>
-              <a:defRPr sz="1700">
-                <a:solidFill>
-                  <a:srgbClr val="1C2330"/>
-                </a:solidFill>
-                <a:latin typeface="Aptos"/>
-              </a:defRPr>
-            </a:pPr>
-            <a:r>
-              <a:t>•  No escribas contraseñas, tokens, claves API ni datos personales.</a:t>
-            </a:r>
-          </a:p>
-          <a:p>
-            <a:pPr>
-              <a:spcAft>
-                <a:spcPts val="1000"/>
-              </a:spcAft>
-              <a:defRPr sz="1700">
-                <a:solidFill>
-                  <a:srgbClr val="1C2330"/>
-                </a:solidFill>
-                <a:latin typeface="Aptos"/>
-              </a:defRPr>
-            </a:pPr>
-            <a:r>
-              <a:t>•  Si utilizas IA en un uso permitido, registra qué pediste, qué recibiste, qué cambiaste y cómo lo comprobaste.</a:t>
-            </a:r>
-          </a:p>
-        </p:txBody>
-      </p:sp>
-      <p:sp>
-        <p:nvSpPr>
-          <p:cNvPr id="13" name="Rounded Rectangle 12"/>
+              <a:t>MiniJarvis · 1.º DAW · Sesión 211 · H1</a:t>
+            </a:r>
+          </a:p>
+        </p:txBody>
+      </p:sp>
+      <p:sp>
+        <p:nvSpPr>
+          <p:cNvPr id="8" name="Rounded Rectangle 7"/>
           <p:cNvSpPr/>
           <p:nvPr/>
         </p:nvSpPr>
         <p:spPr>
           <a:xfrm>
-            <a:off x="7726679" y="3794760"/>
-            <a:ext cx="3703320" cy="1600200"/>
+            <a:off x="621792" y="1298448"/>
+            <a:ext cx="5230368" cy="2176272"/>
           </a:xfrm>
           <a:prstGeom prst="roundRect">
             <a:avLst/>
@@ -6512,7 +6684,7 @@
           </a:solidFill>
           <a:ln>
             <a:solidFill>
-              <a:srgbClr val="EBEEF2"/>
+              <a:srgbClr val="E5E9EF"/>
             </a:solidFill>
           </a:ln>
         </p:spPr>
@@ -6540,14 +6712,57 @@
       </p:sp>
       <p:sp>
         <p:nvSpPr>
-          <p:cNvPr id="14" name="TextBox 13"/>
+          <p:cNvPr id="9" name="Rounded Rectangle 8"/>
+          <p:cNvSpPr/>
+          <p:nvPr/>
+        </p:nvSpPr>
+        <p:spPr>
+          <a:xfrm>
+            <a:off x="841248" y="1527048"/>
+            <a:ext cx="237744" cy="1719072"/>
+          </a:xfrm>
+          <a:prstGeom prst="roundRect">
+            <a:avLst/>
+          </a:prstGeom>
+          <a:solidFill>
+            <a:srgbClr val="247E5C"/>
+          </a:solidFill>
+          <a:ln>
+            <a:noFill/>
+          </a:ln>
+        </p:spPr>
+        <p:style>
+          <a:lnRef idx="1">
+            <a:schemeClr val="accent1"/>
+          </a:lnRef>
+          <a:fillRef idx="3">
+            <a:schemeClr val="accent1"/>
+          </a:fillRef>
+          <a:effectRef idx="2">
+            <a:schemeClr val="accent1"/>
+          </a:effectRef>
+          <a:fontRef idx="minor">
+            <a:schemeClr val="lt1"/>
+          </a:fontRef>
+        </p:style>
+        <p:txBody>
+          <a:bodyPr rtlCol="0" anchor="ctr"/>
+          <a:lstStyle/>
+          <a:p>
+            <a:pPr algn="ctr"/>
+          </a:p>
+        </p:txBody>
+      </p:sp>
+      <p:sp>
+        <p:nvSpPr>
+          <p:cNvPr id="10" name="TextBox 9"/>
           <p:cNvSpPr txBox="1"/>
           <p:nvPr/>
         </p:nvSpPr>
         <p:spPr>
           <a:xfrm>
-            <a:off x="8028431" y="4087368"/>
-            <a:ext cx="3063240" cy="868680"/>
+            <a:off x="1280160" y="1527048"/>
+            <a:ext cx="4224528" cy="1783080"/>
           </a:xfrm>
           <a:prstGeom prst="rect">
             <a:avLst/>
@@ -6555,13 +6770,793 @@
           <a:noFill/>
         </p:spPr>
         <p:txBody>
-          <a:bodyPr wrap="square" lIns="36576" rIns="36576" tIns="27432" bIns="27432">
+          <a:bodyPr wrap="square" lIns="45720" rIns="45720" tIns="36576" bIns="36576" anchor="t">
             <a:spAutoFit/>
           </a:bodyPr>
           <a:lstStyle/>
           <a:p>
+            <a:pPr algn="l">
+              <a:defRPr sz="1900" b="0">
+                <a:solidFill>
+                  <a:srgbClr val="1C2330"/>
+                </a:solidFill>
+                <a:latin typeface="Aptos"/>
+              </a:defRPr>
+            </a:pPr>
+            <a:r>
+              <a:t>Trabaja únicamente con datos ficticios.</a:t>
+            </a:r>
+          </a:p>
+        </p:txBody>
+      </p:sp>
+      <p:sp>
+        <p:nvSpPr>
+          <p:cNvPr id="11" name="Rounded Rectangle 10"/>
+          <p:cNvSpPr/>
+          <p:nvPr/>
+        </p:nvSpPr>
+        <p:spPr>
+          <a:xfrm>
+            <a:off x="6126479" y="1298448"/>
+            <a:ext cx="5230368" cy="2176272"/>
+          </a:xfrm>
+          <a:prstGeom prst="roundRect">
+            <a:avLst/>
+          </a:prstGeom>
+          <a:solidFill>
+            <a:srgbClr val="FFFFFF"/>
+          </a:solidFill>
+          <a:ln>
+            <a:solidFill>
+              <a:srgbClr val="E5E9EF"/>
+            </a:solidFill>
+          </a:ln>
+        </p:spPr>
+        <p:style>
+          <a:lnRef idx="1">
+            <a:schemeClr val="accent1"/>
+          </a:lnRef>
+          <a:fillRef idx="3">
+            <a:schemeClr val="accent1"/>
+          </a:fillRef>
+          <a:effectRef idx="2">
+            <a:schemeClr val="accent1"/>
+          </a:effectRef>
+          <a:fontRef idx="minor">
+            <a:schemeClr val="lt1"/>
+          </a:fontRef>
+        </p:style>
+        <p:txBody>
+          <a:bodyPr rtlCol="0" anchor="ctr"/>
+          <a:lstStyle/>
+          <a:p>
+            <a:pPr algn="ctr"/>
+          </a:p>
+        </p:txBody>
+      </p:sp>
+      <p:sp>
+        <p:nvSpPr>
+          <p:cNvPr id="12" name="Rounded Rectangle 11"/>
+          <p:cNvSpPr/>
+          <p:nvPr/>
+        </p:nvSpPr>
+        <p:spPr>
+          <a:xfrm>
+            <a:off x="6345936" y="1527048"/>
+            <a:ext cx="237744" cy="1719072"/>
+          </a:xfrm>
+          <a:prstGeom prst="roundRect">
+            <a:avLst/>
+          </a:prstGeom>
+          <a:solidFill>
+            <a:srgbClr val="C07020"/>
+          </a:solidFill>
+          <a:ln>
+            <a:noFill/>
+          </a:ln>
+        </p:spPr>
+        <p:style>
+          <a:lnRef idx="1">
+            <a:schemeClr val="accent1"/>
+          </a:lnRef>
+          <a:fillRef idx="3">
+            <a:schemeClr val="accent1"/>
+          </a:fillRef>
+          <a:effectRef idx="2">
+            <a:schemeClr val="accent1"/>
+          </a:effectRef>
+          <a:fontRef idx="minor">
+            <a:schemeClr val="lt1"/>
+          </a:fontRef>
+        </p:style>
+        <p:txBody>
+          <a:bodyPr rtlCol="0" anchor="ctr"/>
+          <a:lstStyle/>
+          <a:p>
+            <a:pPr algn="ctr"/>
+          </a:p>
+        </p:txBody>
+      </p:sp>
+      <p:sp>
+        <p:nvSpPr>
+          <p:cNvPr id="13" name="TextBox 12"/>
+          <p:cNvSpPr txBox="1"/>
+          <p:nvPr/>
+        </p:nvSpPr>
+        <p:spPr>
+          <a:xfrm>
+            <a:off x="6784847" y="1527048"/>
+            <a:ext cx="4224528" cy="1783080"/>
+          </a:xfrm>
+          <a:prstGeom prst="rect">
+            <a:avLst/>
+          </a:prstGeom>
+          <a:noFill/>
+        </p:spPr>
+        <p:txBody>
+          <a:bodyPr wrap="square" lIns="45720" rIns="45720" tIns="36576" bIns="36576" anchor="t">
+            <a:spAutoFit/>
+          </a:bodyPr>
+          <a:lstStyle/>
+          <a:p>
+            <a:pPr algn="l">
+              <a:defRPr sz="1900" b="0">
+                <a:solidFill>
+                  <a:srgbClr val="1C2330"/>
+                </a:solidFill>
+                <a:latin typeface="Aptos"/>
+              </a:defRPr>
+            </a:pPr>
+            <a:r>
+              <a:t>No escribas contraseñas, tokens, claves API ni datos personales.</a:t>
+            </a:r>
+          </a:p>
+        </p:txBody>
+      </p:sp>
+      <p:sp>
+        <p:nvSpPr>
+          <p:cNvPr id="14" name="Rounded Rectangle 13"/>
+          <p:cNvSpPr/>
+          <p:nvPr/>
+        </p:nvSpPr>
+        <p:spPr>
+          <a:xfrm>
+            <a:off x="621792" y="3675887"/>
+            <a:ext cx="5230368" cy="2176272"/>
+          </a:xfrm>
+          <a:prstGeom prst="roundRect">
+            <a:avLst/>
+          </a:prstGeom>
+          <a:solidFill>
+            <a:srgbClr val="FFFFFF"/>
+          </a:solidFill>
+          <a:ln>
+            <a:solidFill>
+              <a:srgbClr val="E5E9EF"/>
+            </a:solidFill>
+          </a:ln>
+        </p:spPr>
+        <p:style>
+          <a:lnRef idx="1">
+            <a:schemeClr val="accent1"/>
+          </a:lnRef>
+          <a:fillRef idx="3">
+            <a:schemeClr val="accent1"/>
+          </a:fillRef>
+          <a:effectRef idx="2">
+            <a:schemeClr val="accent1"/>
+          </a:effectRef>
+          <a:fontRef idx="minor">
+            <a:schemeClr val="lt1"/>
+          </a:fontRef>
+        </p:style>
+        <p:txBody>
+          <a:bodyPr rtlCol="0" anchor="ctr"/>
+          <a:lstStyle/>
+          <a:p>
+            <a:pPr algn="ctr"/>
+          </a:p>
+        </p:txBody>
+      </p:sp>
+      <p:sp>
+        <p:nvSpPr>
+          <p:cNvPr id="15" name="Rounded Rectangle 14"/>
+          <p:cNvSpPr/>
+          <p:nvPr/>
+        </p:nvSpPr>
+        <p:spPr>
+          <a:xfrm>
+            <a:off x="841248" y="3904487"/>
+            <a:ext cx="237744" cy="1719072"/>
+          </a:xfrm>
+          <a:prstGeom prst="roundRect">
+            <a:avLst/>
+          </a:prstGeom>
+          <a:solidFill>
+            <a:srgbClr val="B13A3A"/>
+          </a:solidFill>
+          <a:ln>
+            <a:noFill/>
+          </a:ln>
+        </p:spPr>
+        <p:style>
+          <a:lnRef idx="1">
+            <a:schemeClr val="accent1"/>
+          </a:lnRef>
+          <a:fillRef idx="3">
+            <a:schemeClr val="accent1"/>
+          </a:fillRef>
+          <a:effectRef idx="2">
+            <a:schemeClr val="accent1"/>
+          </a:effectRef>
+          <a:fontRef idx="minor">
+            <a:schemeClr val="lt1"/>
+          </a:fontRef>
+        </p:style>
+        <p:txBody>
+          <a:bodyPr rtlCol="0" anchor="ctr"/>
+          <a:lstStyle/>
+          <a:p>
+            <a:pPr algn="ctr"/>
+          </a:p>
+        </p:txBody>
+      </p:sp>
+      <p:sp>
+        <p:nvSpPr>
+          <p:cNvPr id="16" name="TextBox 15"/>
+          <p:cNvSpPr txBox="1"/>
+          <p:nvPr/>
+        </p:nvSpPr>
+        <p:spPr>
+          <a:xfrm>
+            <a:off x="1280160" y="3904487"/>
+            <a:ext cx="4224528" cy="1783080"/>
+          </a:xfrm>
+          <a:prstGeom prst="rect">
+            <a:avLst/>
+          </a:prstGeom>
+          <a:noFill/>
+        </p:spPr>
+        <p:txBody>
+          <a:bodyPr wrap="square" lIns="45720" rIns="45720" tIns="36576" bIns="36576" anchor="t">
+            <a:spAutoFit/>
+          </a:bodyPr>
+          <a:lstStyle/>
+          <a:p>
+            <a:pPr algn="l">
+              <a:defRPr sz="1900" b="0">
+                <a:solidFill>
+                  <a:srgbClr val="1C2330"/>
+                </a:solidFill>
+                <a:latin typeface="Aptos"/>
+              </a:defRPr>
+            </a:pPr>
+            <a:r>
+              <a:t>Si utilizas IA en un uso permitido, registra qué pediste, qué recibiste, qué cambiaste y cómo lo comprobaste.</a:t>
+            </a:r>
+          </a:p>
+        </p:txBody>
+      </p:sp>
+      <p:sp>
+        <p:nvSpPr>
+          <p:cNvPr id="17" name="Rounded Rectangle 16"/>
+          <p:cNvSpPr/>
+          <p:nvPr/>
+        </p:nvSpPr>
+        <p:spPr>
+          <a:xfrm>
+            <a:off x="6126479" y="3675887"/>
+            <a:ext cx="5230368" cy="2176272"/>
+          </a:xfrm>
+          <a:prstGeom prst="roundRect">
+            <a:avLst/>
+          </a:prstGeom>
+          <a:solidFill>
+            <a:srgbClr val="FFFFFF"/>
+          </a:solidFill>
+          <a:ln>
+            <a:solidFill>
+              <a:srgbClr val="E5E9EF"/>
+            </a:solidFill>
+          </a:ln>
+        </p:spPr>
+        <p:style>
+          <a:lnRef idx="1">
+            <a:schemeClr val="accent1"/>
+          </a:lnRef>
+          <a:fillRef idx="3">
+            <a:schemeClr val="accent1"/>
+          </a:fillRef>
+          <a:effectRef idx="2">
+            <a:schemeClr val="accent1"/>
+          </a:effectRef>
+          <a:fontRef idx="minor">
+            <a:schemeClr val="lt1"/>
+          </a:fontRef>
+        </p:style>
+        <p:txBody>
+          <a:bodyPr rtlCol="0" anchor="ctr"/>
+          <a:lstStyle/>
+          <a:p>
+            <a:pPr algn="ctr"/>
+          </a:p>
+        </p:txBody>
+      </p:sp>
+      <p:sp>
+        <p:nvSpPr>
+          <p:cNvPr id="18" name="Rounded Rectangle 17"/>
+          <p:cNvSpPr/>
+          <p:nvPr/>
+        </p:nvSpPr>
+        <p:spPr>
+          <a:xfrm>
+            <a:off x="6345936" y="3904487"/>
+            <a:ext cx="237744" cy="1719072"/>
+          </a:xfrm>
+          <a:prstGeom prst="roundRect">
+            <a:avLst/>
+          </a:prstGeom>
+          <a:solidFill>
+            <a:srgbClr val="2F5BA8"/>
+          </a:solidFill>
+          <a:ln>
+            <a:noFill/>
+          </a:ln>
+        </p:spPr>
+        <p:style>
+          <a:lnRef idx="1">
+            <a:schemeClr val="accent1"/>
+          </a:lnRef>
+          <a:fillRef idx="3">
+            <a:schemeClr val="accent1"/>
+          </a:fillRef>
+          <a:effectRef idx="2">
+            <a:schemeClr val="accent1"/>
+          </a:effectRef>
+          <a:fontRef idx="minor">
+            <a:schemeClr val="lt1"/>
+          </a:fontRef>
+        </p:style>
+        <p:txBody>
+          <a:bodyPr rtlCol="0" anchor="ctr"/>
+          <a:lstStyle/>
+          <a:p>
+            <a:pPr algn="ctr"/>
+          </a:p>
+        </p:txBody>
+      </p:sp>
+      <p:sp>
+        <p:nvSpPr>
+          <p:cNvPr id="19" name="TextBox 18"/>
+          <p:cNvSpPr txBox="1"/>
+          <p:nvPr/>
+        </p:nvSpPr>
+        <p:spPr>
+          <a:xfrm>
+            <a:off x="6784847" y="3904487"/>
+            <a:ext cx="4224528" cy="1783080"/>
+          </a:xfrm>
+          <a:prstGeom prst="rect">
+            <a:avLst/>
+          </a:prstGeom>
+          <a:noFill/>
+        </p:spPr>
+        <p:txBody>
+          <a:bodyPr wrap="square" lIns="45720" rIns="45720" tIns="36576" bIns="36576" anchor="t">
+            <a:spAutoFit/>
+          </a:bodyPr>
+          <a:lstStyle/>
+          <a:p>
+            <a:pPr algn="l">
+              <a:defRPr sz="1900" b="0">
+                <a:solidFill>
+                  <a:srgbClr val="1C2330"/>
+                </a:solidFill>
+                <a:latin typeface="Aptos"/>
+              </a:defRPr>
+            </a:pPr>
+            <a:r>
+              <a:t>Los ejemplos de Laura solo se consultan después del intento propio.</a:t>
+            </a:r>
+          </a:p>
+        </p:txBody>
+      </p:sp>
+    </p:spTree>
+  </p:cSld>
+  <p:clrMapOvr>
+    <a:masterClrMapping/>
+  </p:clrMapOvr>
+</p:sld>
+</file>
+
+<file path=ppt/slides/slide8.xml><?xml version="1.0" encoding="utf-8"?>
+<p:sld xmlns:a="http://schemas.openxmlformats.org/drawingml/2006/main" xmlns:p="http://schemas.openxmlformats.org/presentationml/2006/main" xmlns:r="http://schemas.openxmlformats.org/officeDocument/2006/relationships">
+  <p:cSld>
+    <p:spTree>
+      <p:nvGrpSpPr>
+        <p:cNvPr id="1" name=""/>
+        <p:cNvGrpSpPr/>
+        <p:nvPr/>
+      </p:nvGrpSpPr>
+      <p:grpSpPr/>
+      <p:sp>
+        <p:nvSpPr>
+          <p:cNvPr id="2" name="Rectangle 1"/>
+          <p:cNvSpPr/>
+          <p:nvPr/>
+        </p:nvSpPr>
+        <p:spPr>
+          <a:xfrm>
+            <a:off x="0" y="0"/>
+            <a:ext cx="12191695" cy="6858000"/>
+          </a:xfrm>
+          <a:prstGeom prst="rect">
+            <a:avLst/>
+          </a:prstGeom>
+          <a:solidFill>
+            <a:srgbClr val="F9F7F2"/>
+          </a:solidFill>
+          <a:ln>
+            <a:noFill/>
+          </a:ln>
+        </p:spPr>
+        <p:style>
+          <a:lnRef idx="1">
+            <a:schemeClr val="accent1"/>
+          </a:lnRef>
+          <a:fillRef idx="3">
+            <a:schemeClr val="accent1"/>
+          </a:fillRef>
+          <a:effectRef idx="2">
+            <a:schemeClr val="accent1"/>
+          </a:effectRef>
+          <a:fontRef idx="minor">
+            <a:schemeClr val="lt1"/>
+          </a:fontRef>
+        </p:style>
+        <p:txBody>
+          <a:bodyPr rtlCol="0" anchor="ctr"/>
+          <a:lstStyle/>
+          <a:p>
+            <a:pPr algn="ctr"/>
+          </a:p>
+        </p:txBody>
+      </p:sp>
+      <p:sp>
+        <p:nvSpPr>
+          <p:cNvPr id="3" name="Rectangle 2"/>
+          <p:cNvSpPr/>
+          <p:nvPr/>
+        </p:nvSpPr>
+        <p:spPr>
+          <a:xfrm>
+            <a:off x="0" y="0"/>
+            <a:ext cx="164592" cy="6858000"/>
+          </a:xfrm>
+          <a:prstGeom prst="rect">
+            <a:avLst/>
+          </a:prstGeom>
+          <a:solidFill>
+            <a:srgbClr val="2F5BA8"/>
+          </a:solidFill>
+          <a:ln>
+            <a:noFill/>
+          </a:ln>
+        </p:spPr>
+        <p:style>
+          <a:lnRef idx="1">
+            <a:schemeClr val="accent1"/>
+          </a:lnRef>
+          <a:fillRef idx="3">
+            <a:schemeClr val="accent1"/>
+          </a:fillRef>
+          <a:effectRef idx="2">
+            <a:schemeClr val="accent1"/>
+          </a:effectRef>
+          <a:fontRef idx="minor">
+            <a:schemeClr val="lt1"/>
+          </a:fontRef>
+        </p:style>
+        <p:txBody>
+          <a:bodyPr rtlCol="0" anchor="ctr"/>
+          <a:lstStyle/>
+          <a:p>
+            <a:pPr algn="ctr"/>
+          </a:p>
+        </p:txBody>
+      </p:sp>
+      <p:sp>
+        <p:nvSpPr>
+          <p:cNvPr id="4" name="TextBox 3"/>
+          <p:cNvSpPr txBox="1"/>
+          <p:nvPr/>
+        </p:nvSpPr>
+        <p:spPr>
+          <a:xfrm>
+            <a:off x="502920" y="274320"/>
+            <a:ext cx="5486400" cy="256032"/>
+          </a:xfrm>
+          <a:prstGeom prst="rect">
+            <a:avLst/>
+          </a:prstGeom>
+          <a:noFill/>
+        </p:spPr>
+        <p:txBody>
+          <a:bodyPr wrap="square" lIns="45720" rIns="45720" tIns="36576" bIns="36576" anchor="t">
+            <a:spAutoFit/>
+          </a:bodyPr>
+          <a:lstStyle/>
+          <a:p>
+            <a:pPr algn="l">
+              <a:defRPr sz="1000" b="1">
+                <a:solidFill>
+                  <a:srgbClr val="2F5BA8"/>
+                </a:solidFill>
+                <a:latin typeface="Aptos"/>
+              </a:defRPr>
+            </a:pPr>
+            <a:r>
+              <a:t>EXPLICAR Y DEFENDER</a:t>
+            </a:r>
+          </a:p>
+        </p:txBody>
+      </p:sp>
+      <p:sp>
+        <p:nvSpPr>
+          <p:cNvPr id="5" name="TextBox 4"/>
+          <p:cNvSpPr txBox="1"/>
+          <p:nvPr/>
+        </p:nvSpPr>
+        <p:spPr>
+          <a:xfrm>
+            <a:off x="502920" y="603504"/>
+            <a:ext cx="11064240" cy="530352"/>
+          </a:xfrm>
+          <a:prstGeom prst="rect">
+            <a:avLst/>
+          </a:prstGeom>
+          <a:noFill/>
+        </p:spPr>
+        <p:txBody>
+          <a:bodyPr wrap="square" lIns="45720" rIns="45720" tIns="36576" bIns="36576" anchor="t">
+            <a:spAutoFit/>
+          </a:bodyPr>
+          <a:lstStyle/>
+          <a:p>
+            <a:pPr algn="l">
+              <a:defRPr sz="2800" b="1">
+                <a:solidFill>
+                  <a:srgbClr val="1C2330"/>
+                </a:solidFill>
+                <a:latin typeface="Aptos"/>
+              </a:defRPr>
+            </a:pPr>
+            <a:r>
+              <a:t>Cierre y defensa</a:t>
+            </a:r>
+          </a:p>
+        </p:txBody>
+      </p:sp>
+      <p:sp>
+        <p:nvSpPr>
+          <p:cNvPr id="6" name="Rectangle 5"/>
+          <p:cNvSpPr/>
+          <p:nvPr/>
+        </p:nvSpPr>
+        <p:spPr>
+          <a:xfrm>
+            <a:off x="0" y="6601968"/>
+            <a:ext cx="12191695" cy="256032"/>
+          </a:xfrm>
+          <a:prstGeom prst="rect">
+            <a:avLst/>
+          </a:prstGeom>
+          <a:solidFill>
+            <a:srgbClr val="2F5BA8"/>
+          </a:solidFill>
+          <a:ln>
+            <a:noFill/>
+          </a:ln>
+        </p:spPr>
+        <p:style>
+          <a:lnRef idx="1">
+            <a:schemeClr val="accent1"/>
+          </a:lnRef>
+          <a:fillRef idx="3">
+            <a:schemeClr val="accent1"/>
+          </a:fillRef>
+          <a:effectRef idx="2">
+            <a:schemeClr val="accent1"/>
+          </a:effectRef>
+          <a:fontRef idx="minor">
+            <a:schemeClr val="lt1"/>
+          </a:fontRef>
+        </p:style>
+        <p:txBody>
+          <a:bodyPr rtlCol="0" anchor="ctr"/>
+          <a:lstStyle/>
+          <a:p>
+            <a:pPr algn="ctr"/>
+          </a:p>
+        </p:txBody>
+      </p:sp>
+      <p:sp>
+        <p:nvSpPr>
+          <p:cNvPr id="7" name="TextBox 6"/>
+          <p:cNvSpPr txBox="1"/>
+          <p:nvPr/>
+        </p:nvSpPr>
+        <p:spPr>
+          <a:xfrm>
+            <a:off x="411480" y="6629400"/>
+            <a:ext cx="11247120" cy="164592"/>
+          </a:xfrm>
+          <a:prstGeom prst="rect">
+            <a:avLst/>
+          </a:prstGeom>
+          <a:noFill/>
+        </p:spPr>
+        <p:txBody>
+          <a:bodyPr wrap="square" lIns="45720" rIns="45720" tIns="36576" bIns="36576" anchor="t">
+            <a:spAutoFit/>
+          </a:bodyPr>
+          <a:lstStyle/>
+          <a:p>
+            <a:pPr algn="l">
+              <a:defRPr sz="900" b="0">
+                <a:solidFill>
+                  <a:srgbClr val="FFFFFF"/>
+                </a:solidFill>
+                <a:latin typeface="Aptos"/>
+              </a:defRPr>
+            </a:pPr>
+            <a:r>
+              <a:t>MiniJarvis · 1.º DAW · Sesión 211 · H1</a:t>
+            </a:r>
+          </a:p>
+        </p:txBody>
+      </p:sp>
+      <p:sp>
+        <p:nvSpPr>
+          <p:cNvPr id="8" name="Rounded Rectangle 7"/>
+          <p:cNvSpPr/>
+          <p:nvPr/>
+        </p:nvSpPr>
+        <p:spPr>
+          <a:xfrm>
+            <a:off x="621792" y="1298448"/>
+            <a:ext cx="10927080" cy="1828800"/>
+          </a:xfrm>
+          <a:prstGeom prst="roundRect">
+            <a:avLst/>
+          </a:prstGeom>
+          <a:solidFill>
+            <a:srgbClr val="2F5BA8"/>
+          </a:solidFill>
+          <a:ln>
+            <a:solidFill>
+              <a:srgbClr val="2F5BA8"/>
+            </a:solidFill>
+          </a:ln>
+        </p:spPr>
+        <p:style>
+          <a:lnRef idx="1">
+            <a:schemeClr val="accent1"/>
+          </a:lnRef>
+          <a:fillRef idx="3">
+            <a:schemeClr val="accent1"/>
+          </a:fillRef>
+          <a:effectRef idx="2">
+            <a:schemeClr val="accent1"/>
+          </a:effectRef>
+          <a:fontRef idx="minor">
+            <a:schemeClr val="lt1"/>
+          </a:fontRef>
+        </p:style>
+        <p:txBody>
+          <a:bodyPr rtlCol="0" anchor="ctr"/>
+          <a:lstStyle/>
+          <a:p>
+            <a:pPr algn="ctr"/>
+          </a:p>
+        </p:txBody>
+      </p:sp>
+      <p:sp>
+        <p:nvSpPr>
+          <p:cNvPr id="9" name="TextBox 8"/>
+          <p:cNvSpPr txBox="1"/>
+          <p:nvPr/>
+        </p:nvSpPr>
+        <p:spPr>
+          <a:xfrm>
+            <a:off x="932688" y="1591056"/>
+            <a:ext cx="10241280" cy="256032"/>
+          </a:xfrm>
+          <a:prstGeom prst="rect">
+            <a:avLst/>
+          </a:prstGeom>
+          <a:noFill/>
+        </p:spPr>
+        <p:txBody>
+          <a:bodyPr wrap="square" lIns="45720" rIns="45720" tIns="36576" bIns="36576" anchor="t">
+            <a:spAutoFit/>
+          </a:bodyPr>
+          <a:lstStyle/>
+          <a:p>
+            <a:pPr algn="l">
+              <a:defRPr sz="1300" b="1">
+                <a:solidFill>
+                  <a:srgbClr val="FFFFFF"/>
+                </a:solidFill>
+                <a:latin typeface="Aptos"/>
+              </a:defRPr>
+            </a:pPr>
+            <a:r>
+              <a:t>PREGUNTA O DECISIÓN DE SALIDA</a:t>
+            </a:r>
+          </a:p>
+        </p:txBody>
+      </p:sp>
+      <p:sp>
+        <p:nvSpPr>
+          <p:cNvPr id="10" name="TextBox 9"/>
+          <p:cNvSpPr txBox="1"/>
+          <p:nvPr/>
+        </p:nvSpPr>
+        <p:spPr>
+          <a:xfrm>
+            <a:off x="932688" y="1975104"/>
+            <a:ext cx="10058400" cy="822960"/>
+          </a:xfrm>
+          <a:prstGeom prst="rect">
+            <a:avLst/>
+          </a:prstGeom>
+          <a:noFill/>
+        </p:spPr>
+        <p:txBody>
+          <a:bodyPr wrap="square" lIns="45720" rIns="45720" tIns="36576" bIns="36576" anchor="t">
+            <a:spAutoFit/>
+          </a:bodyPr>
+          <a:lstStyle/>
+          <a:p>
+            <a:pPr algn="l">
+              <a:defRPr sz="2500" b="1">
+                <a:solidFill>
+                  <a:srgbClr val="FFFFFF"/>
+                </a:solidFill>
+                <a:latin typeface="Aptos"/>
+              </a:defRPr>
+            </a:pPr>
+            <a:r>
+              <a:t>¿qué dato de nuestro programa debería ser constante?</a:t>
+            </a:r>
+          </a:p>
+        </p:txBody>
+      </p:sp>
+      <p:sp>
+        <p:nvSpPr>
+          <p:cNvPr id="11" name="TextBox 10"/>
+          <p:cNvSpPr txBox="1"/>
+          <p:nvPr/>
+        </p:nvSpPr>
+        <p:spPr>
+          <a:xfrm>
+            <a:off x="749808" y="3886200"/>
+            <a:ext cx="10607040" cy="1280160"/>
+          </a:xfrm>
+          <a:prstGeom prst="rect">
+            <a:avLst/>
+          </a:prstGeom>
+          <a:noFill/>
+        </p:spPr>
+        <p:txBody>
+          <a:bodyPr wrap="square" lIns="45720" rIns="45720" tIns="36576" bIns="36576" anchor="ctr">
+            <a:spAutoFit/>
+          </a:bodyPr>
+          <a:lstStyle/>
+          <a:p>
             <a:pPr algn="ctr">
-              <a:defRPr sz="1800" b="1">
+              <a:defRPr sz="2300" b="1">
                 <a:solidFill>
                   <a:srgbClr val="247E5C"/>
                 </a:solidFill>
@@ -6569,7 +7564,7 @@
               </a:defRPr>
             </a:pPr>
             <a:r>
-              <a:t>La sesión termina cuando la evidencia existe, está comprobada y puedes defenderla.</a:t>
+              <a:t>La sesión termina cuando la evidencia existe, está comprobada y puede defenderse.</a:t>
             </a:r>
           </a:p>
         </p:txBody>

--- a/02-PROFESORADO/03-PRESENTACIONES/POR-SESION/h1/S211-constantes-presentacion.pptx
+++ b/02-PROFESORADO/03-PRESENTACIONES/POR-SESION/h1/S211-constantes-presentacion.pptx
@@ -6,13 +6,14 @@
   </p:sldMasterIdLst>
   <p:sldIdLst>
     <p:sldId id="256" r:id="rId7"/>
-    <p:sldId id="257" r:id="rId8"/>
-    <p:sldId id="258" r:id="rId9"/>
-    <p:sldId id="259" r:id="rId10"/>
-    <p:sldId id="260" r:id="rId11"/>
-    <p:sldId id="261" r:id="rId12"/>
-    <p:sldId id="262" r:id="rId13"/>
-    <p:sldId id="263" r:id="rId14"/>
+    <p:sldId id="257" r:id="rId9"/>
+    <p:sldId id="258" r:id="rId10"/>
+    <p:sldId id="259" r:id="rId11"/>
+    <p:sldId id="260" r:id="rId12"/>
+    <p:sldId id="261" r:id="rId13"/>
+    <p:sldId id="262" r:id="rId14"/>
+    <p:sldId id="263" r:id="rId15"/>
+    <p:sldId id="264" r:id="rId16"/>
   </p:sldIdLst>
   <p:sldSz cx="12191695" cy="6858000" type="screen4x3"/>
   <p:notesSz cx="6858000" cy="9144000"/>
@@ -112,6 +113,1341 @@
     </a:lvl9pPr>
   </p:defaultTextStyle>
 </p:presentation>
+</file>
+
+<file path=ppt/notesMasters/notesMaster1.xml><?xml version="1.0" encoding="utf-8"?>
+<p:notesMaster xmlns:a="http://schemas.openxmlformats.org/drawingml/2006/main" xmlns:p="http://schemas.openxmlformats.org/presentationml/2006/main" xmlns:r="http://schemas.openxmlformats.org/officeDocument/2006/relationships">
+  <p:cSld>
+    <p:bg>
+      <p:bgRef idx="1001">
+        <a:schemeClr val="bg1"/>
+      </p:bgRef>
+    </p:bg>
+    <p:spTree>
+      <p:nvGrpSpPr>
+        <p:cNvPr id="1" name=""/>
+        <p:cNvGrpSpPr/>
+        <p:nvPr/>
+      </p:nvGrpSpPr>
+      <p:grpSpPr>
+        <a:xfrm>
+          <a:off x="0" y="0"/>
+          <a:ext cx="0" cy="0"/>
+          <a:chOff x="0" y="0"/>
+          <a:chExt cx="0" cy="0"/>
+        </a:xfrm>
+      </p:grpSpPr>
+      <p:sp>
+        <p:nvSpPr>
+          <p:cNvPr id="2" name="Header Placeholder 1"/>
+          <p:cNvSpPr>
+            <a:spLocks noGrp="1"/>
+          </p:cNvSpPr>
+          <p:nvPr>
+            <p:ph type="hdr" sz="quarter"/>
+          </p:nvPr>
+        </p:nvSpPr>
+        <p:spPr>
+          <a:xfrm>
+            <a:off x="0" y="0"/>
+            <a:ext cx="2971800" cy="457200"/>
+          </a:xfrm>
+          <a:prstGeom prst="rect">
+            <a:avLst/>
+          </a:prstGeom>
+        </p:spPr>
+        <p:txBody>
+          <a:bodyPr vert="horz" lIns="91440" tIns="45720" rIns="91440" bIns="45720" rtlCol="0"/>
+          <a:lstStyle>
+            <a:lvl1pPr algn="l">
+              <a:defRPr sz="1200"/>
+            </a:lvl1pPr>
+          </a:lstStyle>
+          <a:p>
+            <a:endParaRPr lang="en-US"/>
+          </a:p>
+        </p:txBody>
+      </p:sp>
+      <p:sp>
+        <p:nvSpPr>
+          <p:cNvPr id="3" name="Date Placeholder 2"/>
+          <p:cNvSpPr>
+            <a:spLocks noGrp="1"/>
+          </p:cNvSpPr>
+          <p:nvPr>
+            <p:ph type="dt" idx="1"/>
+          </p:nvPr>
+        </p:nvSpPr>
+        <p:spPr>
+          <a:xfrm>
+            <a:off x="3884613" y="0"/>
+            <a:ext cx="2971800" cy="457200"/>
+          </a:xfrm>
+          <a:prstGeom prst="rect">
+            <a:avLst/>
+          </a:prstGeom>
+        </p:spPr>
+        <p:txBody>
+          <a:bodyPr vert="horz" lIns="91440" tIns="45720" rIns="91440" bIns="45720" rtlCol="0"/>
+          <a:lstStyle>
+            <a:lvl1pPr algn="r">
+              <a:defRPr sz="1200"/>
+            </a:lvl1pPr>
+          </a:lstStyle>
+          <a:p>
+            <a:fld id="{0F89C1C7-3DCD-1040-A9CF-14679D8B5DDD}" type="datetimeFigureOut">
+              <a:rPr lang="en-US" smtClean="0"/>
+              <a:t>10/17/16</a:t>
+            </a:fld>
+            <a:endParaRPr lang="en-US"/>
+          </a:p>
+        </p:txBody>
+      </p:sp>
+      <p:sp>
+        <p:nvSpPr>
+          <p:cNvPr id="4" name="Slide Image Placeholder 3"/>
+          <p:cNvSpPr>
+            <a:spLocks noGrp="1" noRot="1" noChangeAspect="1"/>
+          </p:cNvSpPr>
+          <p:nvPr>
+            <p:ph type="sldImg" idx="2"/>
+          </p:nvPr>
+        </p:nvSpPr>
+        <p:spPr>
+          <a:xfrm>
+            <a:off x="1143000" y="685800"/>
+            <a:ext cx="4572000" cy="3429000"/>
+          </a:xfrm>
+          <a:prstGeom prst="rect">
+            <a:avLst/>
+          </a:prstGeom>
+          <a:noFill/>
+          <a:ln w="12700">
+            <a:solidFill>
+              <a:prstClr val="black"/>
+            </a:solidFill>
+          </a:ln>
+        </p:spPr>
+        <p:txBody>
+          <a:bodyPr vert="horz" lIns="91440" tIns="45720" rIns="91440" bIns="45720" rtlCol="0" anchor="ctr"/>
+          <a:lstStyle/>
+          <a:p>
+            <a:endParaRPr lang="en-US"/>
+          </a:p>
+        </p:txBody>
+      </p:sp>
+      <p:sp>
+        <p:nvSpPr>
+          <p:cNvPr id="5" name="Notes Placeholder 4"/>
+          <p:cNvSpPr>
+            <a:spLocks noGrp="1"/>
+          </p:cNvSpPr>
+          <p:nvPr>
+            <p:ph type="body" sz="quarter" idx="3"/>
+          </p:nvPr>
+        </p:nvSpPr>
+        <p:spPr>
+          <a:xfrm>
+            <a:off x="685800" y="4343400"/>
+            <a:ext cx="5486400" cy="4114800"/>
+          </a:xfrm>
+          <a:prstGeom prst="rect">
+            <a:avLst/>
+          </a:prstGeom>
+        </p:spPr>
+        <p:txBody>
+          <a:bodyPr vert="horz" lIns="91440" tIns="45720" rIns="91440" bIns="45720" rtlCol="0"/>
+          <a:lstStyle/>
+          <a:p>
+            <a:pPr lvl="0"/>
+            <a:r>
+              <a:rPr lang="en-US" smtClean="0"/>
+              <a:t>Click to edit Master text styles</a:t>
+            </a:r>
+          </a:p>
+          <a:p>
+            <a:pPr lvl="1"/>
+            <a:r>
+              <a:rPr lang="en-US" smtClean="0"/>
+              <a:t>Second level</a:t>
+            </a:r>
+          </a:p>
+          <a:p>
+            <a:pPr lvl="2"/>
+            <a:r>
+              <a:rPr lang="en-US" smtClean="0"/>
+              <a:t>Third level</a:t>
+            </a:r>
+          </a:p>
+          <a:p>
+            <a:pPr lvl="3"/>
+            <a:r>
+              <a:rPr lang="en-US" smtClean="0"/>
+              <a:t>Fourth level</a:t>
+            </a:r>
+          </a:p>
+          <a:p>
+            <a:pPr lvl="4"/>
+            <a:r>
+              <a:rPr lang="en-US" smtClean="0"/>
+              <a:t>Fifth level</a:t>
+            </a:r>
+            <a:endParaRPr lang="en-US"/>
+          </a:p>
+        </p:txBody>
+      </p:sp>
+      <p:sp>
+        <p:nvSpPr>
+          <p:cNvPr id="6" name="Footer Placeholder 5"/>
+          <p:cNvSpPr>
+            <a:spLocks noGrp="1"/>
+          </p:cNvSpPr>
+          <p:nvPr>
+            <p:ph type="ftr" sz="quarter" idx="4"/>
+          </p:nvPr>
+        </p:nvSpPr>
+        <p:spPr>
+          <a:xfrm>
+            <a:off x="0" y="8685213"/>
+            <a:ext cx="2971800" cy="457200"/>
+          </a:xfrm>
+          <a:prstGeom prst="rect">
+            <a:avLst/>
+          </a:prstGeom>
+        </p:spPr>
+        <p:txBody>
+          <a:bodyPr vert="horz" lIns="91440" tIns="45720" rIns="91440" bIns="45720" rtlCol="0" anchor="b"/>
+          <a:lstStyle>
+            <a:lvl1pPr algn="l">
+              <a:defRPr sz="1200"/>
+            </a:lvl1pPr>
+          </a:lstStyle>
+          <a:p>
+            <a:endParaRPr lang="en-US"/>
+          </a:p>
+        </p:txBody>
+      </p:sp>
+      <p:sp>
+        <p:nvSpPr>
+          <p:cNvPr id="7" name="Slide Number Placeholder 6"/>
+          <p:cNvSpPr>
+            <a:spLocks noGrp="1"/>
+          </p:cNvSpPr>
+          <p:nvPr>
+            <p:ph type="sldNum" sz="quarter" idx="5"/>
+          </p:nvPr>
+        </p:nvSpPr>
+        <p:spPr>
+          <a:xfrm>
+            <a:off x="3884613" y="8685213"/>
+            <a:ext cx="2971800" cy="457200"/>
+          </a:xfrm>
+          <a:prstGeom prst="rect">
+            <a:avLst/>
+          </a:prstGeom>
+        </p:spPr>
+        <p:txBody>
+          <a:bodyPr vert="horz" lIns="91440" tIns="45720" rIns="91440" bIns="45720" rtlCol="0" anchor="b"/>
+          <a:lstStyle>
+            <a:lvl1pPr algn="r">
+              <a:defRPr sz="1200"/>
+            </a:lvl1pPr>
+          </a:lstStyle>
+          <a:p>
+            <a:fld id="{BB5E49A5-4136-284D-997B-48E1D791AD67}" type="slidenum">
+              <a:rPr lang="en-US" smtClean="0"/>
+              <a:t>‹#›</a:t>
+            </a:fld>
+            <a:endParaRPr lang="en-US"/>
+          </a:p>
+        </p:txBody>
+      </p:sp>
+    </p:spTree>
+    <p:extLst>
+      <p:ext uri="{BB962C8B-B14F-4D97-AF65-F5344CB8AC3E}">
+        <p14:creationId xmlns:p14="http://schemas.microsoft.com/office/powerpoint/2010/main" val="2623252185"/>
+      </p:ext>
+    </p:extLst>
+  </p:cSld>
+  <p:clrMap bg1="lt1" tx1="dk1" bg2="lt2" tx2="dk2" accent1="accent1" accent2="accent2" accent3="accent3" accent4="accent4" accent5="accent5" accent6="accent6" hlink="hlink" folHlink="folHlink"/>
+  <p:notesStyle>
+    <a:lvl1pPr marL="0" algn="l" defTabSz="457200" rtl="0" eaLnBrk="1" latinLnBrk="0" hangingPunct="1">
+      <a:defRPr sz="1200" kern="1200">
+        <a:solidFill>
+          <a:schemeClr val="tx1"/>
+        </a:solidFill>
+        <a:latin typeface="+mn-lt"/>
+        <a:ea typeface="+mn-ea"/>
+        <a:cs typeface="+mn-cs"/>
+      </a:defRPr>
+    </a:lvl1pPr>
+    <a:lvl2pPr marL="457200" algn="l" defTabSz="457200" rtl="0" eaLnBrk="1" latinLnBrk="0" hangingPunct="1">
+      <a:defRPr sz="1200" kern="1200">
+        <a:solidFill>
+          <a:schemeClr val="tx1"/>
+        </a:solidFill>
+        <a:latin typeface="+mn-lt"/>
+        <a:ea typeface="+mn-ea"/>
+        <a:cs typeface="+mn-cs"/>
+      </a:defRPr>
+    </a:lvl2pPr>
+    <a:lvl3pPr marL="914400" algn="l" defTabSz="457200" rtl="0" eaLnBrk="1" latinLnBrk="0" hangingPunct="1">
+      <a:defRPr sz="1200" kern="1200">
+        <a:solidFill>
+          <a:schemeClr val="tx1"/>
+        </a:solidFill>
+        <a:latin typeface="+mn-lt"/>
+        <a:ea typeface="+mn-ea"/>
+        <a:cs typeface="+mn-cs"/>
+      </a:defRPr>
+    </a:lvl3pPr>
+    <a:lvl4pPr marL="1371600" algn="l" defTabSz="457200" rtl="0" eaLnBrk="1" latinLnBrk="0" hangingPunct="1">
+      <a:defRPr sz="1200" kern="1200">
+        <a:solidFill>
+          <a:schemeClr val="tx1"/>
+        </a:solidFill>
+        <a:latin typeface="+mn-lt"/>
+        <a:ea typeface="+mn-ea"/>
+        <a:cs typeface="+mn-cs"/>
+      </a:defRPr>
+    </a:lvl4pPr>
+    <a:lvl5pPr marL="1828800" algn="l" defTabSz="457200" rtl="0" eaLnBrk="1" latinLnBrk="0" hangingPunct="1">
+      <a:defRPr sz="1200" kern="1200">
+        <a:solidFill>
+          <a:schemeClr val="tx1"/>
+        </a:solidFill>
+        <a:latin typeface="+mn-lt"/>
+        <a:ea typeface="+mn-ea"/>
+        <a:cs typeface="+mn-cs"/>
+      </a:defRPr>
+    </a:lvl5pPr>
+    <a:lvl6pPr marL="2286000" algn="l" defTabSz="457200" rtl="0" eaLnBrk="1" latinLnBrk="0" hangingPunct="1">
+      <a:defRPr sz="1200" kern="1200">
+        <a:solidFill>
+          <a:schemeClr val="tx1"/>
+        </a:solidFill>
+        <a:latin typeface="+mn-lt"/>
+        <a:ea typeface="+mn-ea"/>
+        <a:cs typeface="+mn-cs"/>
+      </a:defRPr>
+    </a:lvl6pPr>
+    <a:lvl7pPr marL="2743200" algn="l" defTabSz="457200" rtl="0" eaLnBrk="1" latinLnBrk="0" hangingPunct="1">
+      <a:defRPr sz="1200" kern="1200">
+        <a:solidFill>
+          <a:schemeClr val="tx1"/>
+        </a:solidFill>
+        <a:latin typeface="+mn-lt"/>
+        <a:ea typeface="+mn-ea"/>
+        <a:cs typeface="+mn-cs"/>
+      </a:defRPr>
+    </a:lvl7pPr>
+    <a:lvl8pPr marL="3200400" algn="l" defTabSz="457200" rtl="0" eaLnBrk="1" latinLnBrk="0" hangingPunct="1">
+      <a:defRPr sz="1200" kern="1200">
+        <a:solidFill>
+          <a:schemeClr val="tx1"/>
+        </a:solidFill>
+        <a:latin typeface="+mn-lt"/>
+        <a:ea typeface="+mn-ea"/>
+        <a:cs typeface="+mn-cs"/>
+      </a:defRPr>
+    </a:lvl8pPr>
+    <a:lvl9pPr marL="3657600" algn="l" defTabSz="457200" rtl="0" eaLnBrk="1" latinLnBrk="0" hangingPunct="1">
+      <a:defRPr sz="1200" kern="1200">
+        <a:solidFill>
+          <a:schemeClr val="tx1"/>
+        </a:solidFill>
+        <a:latin typeface="+mn-lt"/>
+        <a:ea typeface="+mn-ea"/>
+        <a:cs typeface="+mn-cs"/>
+      </a:defRPr>
+    </a:lvl9pPr>
+  </p:notesStyle>
+</p:notesMaster>
+</file>
+
+<file path=ppt/notesSlides/notesSlide1.xml><?xml version="1.0" encoding="utf-8"?>
+<p:notes xmlns:a="http://schemas.openxmlformats.org/drawingml/2006/main" xmlns:p="http://schemas.openxmlformats.org/presentationml/2006/main" xmlns:r="http://schemas.openxmlformats.org/officeDocument/2006/relationships">
+  <p:cSld>
+    <p:spTree>
+      <p:nvGrpSpPr>
+        <p:cNvPr id="1" name=""/>
+        <p:cNvGrpSpPr/>
+        <p:nvPr/>
+      </p:nvGrpSpPr>
+      <p:grpSpPr>
+        <a:xfrm>
+          <a:off x="0" y="0"/>
+          <a:ext cx="0" cy="0"/>
+          <a:chOff x="0" y="0"/>
+          <a:chExt cx="0" cy="0"/>
+        </a:xfrm>
+      </p:grpSpPr>
+      <p:sp>
+        <p:nvSpPr>
+          <p:cNvPr id="2" name="Slide Image Placeholder 1"/>
+          <p:cNvSpPr>
+            <a:spLocks noGrp="1"/>
+          </p:cNvSpPr>
+          <p:nvPr>
+            <p:ph type="sldImg" idx="2"/>
+          </p:nvPr>
+        </p:nvSpPr>
+        <p:spPr/>
+      </p:sp>
+      <p:sp>
+        <p:nvSpPr>
+          <p:cNvPr id="3" name="Notes Placeholder 2"/>
+          <p:cNvSpPr>
+            <a:spLocks noGrp="1"/>
+          </p:cNvSpPr>
+          <p:nvPr>
+            <p:ph type="body" idx="3" sz="quarter"/>
+          </p:nvPr>
+        </p:nvSpPr>
+        <p:spPr/>
+        <p:txBody>
+          <a:bodyPr/>
+          <a:lstStyle/>
+          <a:p>
+            <a:r>
+              <a:t>Objetivo docente: Aplicar constantes, literales y operaciones aritméticas con predicción y prueba.</a:t>
+            </a:r>
+          </a:p>
+          <a:p>
+            <a:r>
+              <a:t>Diapositiva 1 de 9: Constantes, literales y operaciones</a:t>
+            </a:r>
+          </a:p>
+          <a:p>
+            <a:r>
+              <a:t>Fase HEXA: Ejecutar — crear</a:t>
+            </a:r>
+          </a:p>
+          <a:p>
+            <a:r>
+              <a:t>Presenta el producto y anticipa la evidencia: Quede diagnóstico.</a:t>
+            </a:r>
+          </a:p>
+          <a:p>
+            <a:r>
+              <a:t>Secuencia docente:</a:t>
+            </a:r>
+          </a:p>
+          <a:p>
+            <a:r>
+              <a:t>- 00:00–00:04 / D1: EJECUTAR: Pide clasificar datos estables y cambiantes.</a:t>
+            </a:r>
+          </a:p>
+          <a:p>
+            <a:r>
+              <a:t>- 00:04–00:09 / D2: PÍLDORA DOCENTE 1/5: Explica que no deben cambiar durante la ejecución y por qué dan intención al código.</a:t>
+            </a:r>
+          </a:p>
+          <a:p>
+            <a:r>
+              <a:t>- 00:09–00:14 / D3: PÍLDORA DOCENTE 2/5: Introduce literales de forma práctica.</a:t>
+            </a:r>
+          </a:p>
+          <a:p>
+            <a:r>
+              <a:t>- 00:14–00:21 / D4: PÍLDORA DOCENTE 3/5: Explica que una operación produce un resultado que debemos usar/guardar si queremos trabajar con él.</a:t>
+            </a:r>
+          </a:p>
+          <a:p>
+            <a:r>
+              <a:t>- 00:21–00:26 / D5: EXPERIMENTO: Haz predicción antes de ejecutar. Explica cociente entero vs división real.</a:t>
+            </a:r>
+          </a:p>
+          <a:p>
+            <a:r>
+              <a:t>- 00:26–00:30 / D6: PÍLDORA DOCENTE 4/5: Aclara que % no significa porcentaje.</a:t>
+            </a:r>
+          </a:p>
+          <a:p>
+            <a:r>
+              <a:t>- 00:30–00:34 / D7: EXPERIMENTO: Haz resolver a mano. Conecta con precedencia matemática y paréntesis.</a:t>
+            </a:r>
+          </a:p>
+          <a:p>
+            <a:r>
+              <a:t>- 00:34–00:37 / D8: PÍLDORA DOCENTE 5/5: Relaciona con asignación de S210.</a:t>
+            </a:r>
+          </a:p>
+          <a:p>
+            <a:r>
+              <a:t>- 00:37–00:42 / D9: ACTIVIDAD: Circula y pregunta qué entrada/datos usaron y qué esperaban.</a:t>
+            </a:r>
+          </a:p>
+          <a:p>
+            <a:r>
+              <a:t>- 00:42–00:45 / D10: CIERRE: Recoge respuestas y registra errores comunes.</a:t>
+            </a:r>
+          </a:p>
+          <a:p>
+            <a:r>
+              <a:t>Claves docentes:</a:t>
+            </a:r>
+          </a:p>
+          <a:p>
+            <a:r>
+              <a:t>- PÍLDORA DOCENTE 1/5: Explica que no deben cambiar durante la ejecución y por qué dan intención al código, PÍLDORA DOCENTE 2/5: Introduce literales de forma práctica, PÍLDORA DOCENTE 3/5: Explica que una operación produce un resultado que debemos usar/guardar si queremos trabajar con él.</a:t>
+            </a:r>
+          </a:p>
+          <a:p>
+            <a:r>
+              <a:t>- PÍLDORA DOCENTE 4/5: Aclara que % no significa porcentaje, PÍLDORA DOCENTE 5/5: Relaciona con asignación de S210.</a:t>
+            </a:r>
+          </a:p>
+          <a:p>
+            <a:r>
+              <a:t>Fuente docente: /mnt/compartido/Programación-26-27/Minijarvis/02-PROFESORADO/02-SESIONES/h1/S211-constantes-docente.md</a:t>
+            </a:r>
+          </a:p>
+        </p:txBody>
+      </p:sp>
+      <p:sp>
+        <p:nvSpPr>
+          <p:cNvPr id="4" name="Slide Number Placeholder 3"/>
+          <p:cNvSpPr>
+            <a:spLocks noGrp="1"/>
+          </p:cNvSpPr>
+          <p:nvPr>
+            <p:ph type="sldNum" idx="5" sz="quarter"/>
+          </p:nvPr>
+        </p:nvSpPr>
+        <p:spPr/>
+      </p:sp>
+    </p:spTree>
+  </p:cSld>
+  <p:clrMapOvr>
+    <a:masterClrMapping/>
+  </p:clrMapOvr>
+</p:notes>
+</file>
+
+<file path=ppt/notesSlides/notesSlide2.xml><?xml version="1.0" encoding="utf-8"?>
+<p:notes xmlns:a="http://schemas.openxmlformats.org/drawingml/2006/main" xmlns:p="http://schemas.openxmlformats.org/presentationml/2006/main" xmlns:r="http://schemas.openxmlformats.org/officeDocument/2006/relationships">
+  <p:cSld>
+    <p:spTree>
+      <p:nvGrpSpPr>
+        <p:cNvPr id="1" name=""/>
+        <p:cNvGrpSpPr/>
+        <p:nvPr/>
+      </p:nvGrpSpPr>
+      <p:grpSpPr>
+        <a:xfrm>
+          <a:off x="0" y="0"/>
+          <a:ext cx="0" cy="0"/>
+          <a:chOff x="0" y="0"/>
+          <a:chExt cx="0" cy="0"/>
+        </a:xfrm>
+      </p:grpSpPr>
+      <p:sp>
+        <p:nvSpPr>
+          <p:cNvPr id="2" name="Slide Image Placeholder 1"/>
+          <p:cNvSpPr>
+            <a:spLocks noGrp="1"/>
+          </p:cNvSpPr>
+          <p:nvPr>
+            <p:ph type="sldImg" idx="2"/>
+          </p:nvPr>
+        </p:nvSpPr>
+        <p:spPr/>
+      </p:sp>
+      <p:sp>
+        <p:nvSpPr>
+          <p:cNvPr id="3" name="Notes Placeholder 2"/>
+          <p:cNvSpPr>
+            <a:spLocks noGrp="1"/>
+          </p:cNvSpPr>
+          <p:nvPr>
+            <p:ph type="body" idx="3" sz="quarter"/>
+          </p:nvPr>
+        </p:nvSpPr>
+        <p:spPr/>
+        <p:txBody>
+          <a:bodyPr/>
+          <a:lstStyle/>
+          <a:p>
+            <a:r>
+              <a:t>Objetivo docente: Aplicar constantes, literales y operaciones aritméticas con predicción y prueba.</a:t>
+            </a:r>
+          </a:p>
+          <a:p>
+            <a:r>
+              <a:t>Diapositiva 2 de 9: Qué debe conseguirse</a:t>
+            </a:r>
+          </a:p>
+          <a:p>
+            <a:r>
+              <a:t>Fase HEXA: Ejecutar — crear</a:t>
+            </a:r>
+          </a:p>
+          <a:p>
+            <a:r>
+              <a:t>- Objetivo: Aplicar constantes, literales y operaciones aritméticas con predicción y prueba.</a:t>
+            </a:r>
+          </a:p>
+          <a:p>
+            <a:r>
+              <a:t>- Al terminar: señala la evidencia, explica qué demuestra y reproduce la prueba.</a:t>
+            </a:r>
+          </a:p>
+          <a:p>
+            <a:r>
+              <a:t>Fuente docente: /mnt/compartido/Programación-26-27/Minijarvis/02-PROFESORADO/02-SESIONES/h1/S211-constantes-docente.md</a:t>
+            </a:r>
+          </a:p>
+        </p:txBody>
+      </p:sp>
+      <p:sp>
+        <p:nvSpPr>
+          <p:cNvPr id="4" name="Slide Number Placeholder 3"/>
+          <p:cNvSpPr>
+            <a:spLocks noGrp="1"/>
+          </p:cNvSpPr>
+          <p:nvPr>
+            <p:ph type="sldNum" idx="5" sz="quarter"/>
+          </p:nvPr>
+        </p:nvSpPr>
+        <p:spPr/>
+      </p:sp>
+    </p:spTree>
+  </p:cSld>
+  <p:clrMapOvr>
+    <a:masterClrMapping/>
+  </p:clrMapOvr>
+</p:notes>
+</file>
+
+<file path=ppt/notesSlides/notesSlide3.xml><?xml version="1.0" encoding="utf-8"?>
+<p:notes xmlns:a="http://schemas.openxmlformats.org/drawingml/2006/main" xmlns:p="http://schemas.openxmlformats.org/presentationml/2006/main" xmlns:r="http://schemas.openxmlformats.org/officeDocument/2006/relationships">
+  <p:cSld>
+    <p:spTree>
+      <p:nvGrpSpPr>
+        <p:cNvPr id="1" name=""/>
+        <p:cNvGrpSpPr/>
+        <p:nvPr/>
+      </p:nvGrpSpPr>
+      <p:grpSpPr>
+        <a:xfrm>
+          <a:off x="0" y="0"/>
+          <a:ext cx="0" cy="0"/>
+          <a:chOff x="0" y="0"/>
+          <a:chExt cx="0" cy="0"/>
+        </a:xfrm>
+      </p:grpSpPr>
+      <p:sp>
+        <p:nvSpPr>
+          <p:cNvPr id="2" name="Slide Image Placeholder 1"/>
+          <p:cNvSpPr>
+            <a:spLocks noGrp="1"/>
+          </p:cNvSpPr>
+          <p:nvPr>
+            <p:ph type="sldImg" idx="2"/>
+          </p:nvPr>
+        </p:nvSpPr>
+        <p:spPr/>
+      </p:sp>
+      <p:sp>
+        <p:nvSpPr>
+          <p:cNvPr id="3" name="Notes Placeholder 2"/>
+          <p:cNvSpPr>
+            <a:spLocks noGrp="1"/>
+          </p:cNvSpPr>
+          <p:nvPr>
+            <p:ph type="body" idx="3" sz="quarter"/>
+          </p:nvPr>
+        </p:nvSpPr>
+        <p:spPr/>
+        <p:txBody>
+          <a:bodyPr/>
+          <a:lstStyle/>
+          <a:p>
+            <a:r>
+              <a:t>Objetivo docente: Aplicar constantes, literales y operaciones aritméticas con predicción y prueba.</a:t>
+            </a:r>
+          </a:p>
+          <a:p>
+            <a:r>
+              <a:t>Diapositiva 3 de 9: Ejemplo o demostración · 1</a:t>
+            </a:r>
+          </a:p>
+          <a:p>
+            <a:r>
+              <a:t>Fase HEXA: Ejecutar — crear</a:t>
+            </a:r>
+          </a:p>
+          <a:p>
+            <a:r>
+              <a:t>Modela el ejemplo sin resolver la actividad completa; pide una predicción antes de ejecutar.</a:t>
+            </a:r>
+          </a:p>
+          <a:p>
+            <a:r>
+              <a:t>- D1 · ¿Qué datos deberían cambiar? — Nombre del asistente · curso · horas de estudio · contador de tareas</a:t>
+            </a:r>
+          </a:p>
+          <a:p>
+            <a:r>
+              <a:t>- D2 · Constantes con final — final String ASSISTANT_NAME = "MiniJarvis";</a:t>
+            </a:r>
+          </a:p>
+          <a:p>
+            <a:r>
+              <a:t>- final int START_YEAR = 2026;</a:t>
+            </a:r>
+          </a:p>
+          <a:p>
+            <a:r>
+              <a:t>- D3 · Literal = valor escrito directamente — NÚMEROS: 5 / 3.5 \| TEXTO/CARÁCTER: "Hola" / 'A' \| LÓGICO: true / false</a:t>
+            </a:r>
+          </a:p>
+          <a:p>
+            <a:r>
+              <a:t>- D4 · Operadores aritméticos — + suma</a:t>
+            </a:r>
+          </a:p>
+          <a:p>
+            <a:r>
+              <a:t>Fuente docente: /mnt/compartido/Programación-26-27/Minijarvis/02-PROFESORADO/02-SESIONES/h1/S211-constantes-docente.md</a:t>
+            </a:r>
+          </a:p>
+        </p:txBody>
+      </p:sp>
+      <p:sp>
+        <p:nvSpPr>
+          <p:cNvPr id="4" name="Slide Number Placeholder 3"/>
+          <p:cNvSpPr>
+            <a:spLocks noGrp="1"/>
+          </p:cNvSpPr>
+          <p:nvPr>
+            <p:ph type="sldNum" idx="5" sz="quarter"/>
+          </p:nvPr>
+        </p:nvSpPr>
+        <p:spPr/>
+      </p:sp>
+    </p:spTree>
+  </p:cSld>
+  <p:clrMapOvr>
+    <a:masterClrMapping/>
+  </p:clrMapOvr>
+</p:notes>
+</file>
+
+<file path=ppt/notesSlides/notesSlide4.xml><?xml version="1.0" encoding="utf-8"?>
+<p:notes xmlns:a="http://schemas.openxmlformats.org/drawingml/2006/main" xmlns:p="http://schemas.openxmlformats.org/presentationml/2006/main" xmlns:r="http://schemas.openxmlformats.org/officeDocument/2006/relationships">
+  <p:cSld>
+    <p:spTree>
+      <p:nvGrpSpPr>
+        <p:cNvPr id="1" name=""/>
+        <p:cNvGrpSpPr/>
+        <p:nvPr/>
+      </p:nvGrpSpPr>
+      <p:grpSpPr>
+        <a:xfrm>
+          <a:off x="0" y="0"/>
+          <a:ext cx="0" cy="0"/>
+          <a:chOff x="0" y="0"/>
+          <a:chExt cx="0" cy="0"/>
+        </a:xfrm>
+      </p:grpSpPr>
+      <p:sp>
+        <p:nvSpPr>
+          <p:cNvPr id="2" name="Slide Image Placeholder 1"/>
+          <p:cNvSpPr>
+            <a:spLocks noGrp="1"/>
+          </p:cNvSpPr>
+          <p:nvPr>
+            <p:ph type="sldImg" idx="2"/>
+          </p:nvPr>
+        </p:nvSpPr>
+        <p:spPr/>
+      </p:sp>
+      <p:sp>
+        <p:nvSpPr>
+          <p:cNvPr id="3" name="Notes Placeholder 2"/>
+          <p:cNvSpPr>
+            <a:spLocks noGrp="1"/>
+          </p:cNvSpPr>
+          <p:nvPr>
+            <p:ph type="body" idx="3" sz="quarter"/>
+          </p:nvPr>
+        </p:nvSpPr>
+        <p:spPr/>
+        <p:txBody>
+          <a:bodyPr/>
+          <a:lstStyle/>
+          <a:p>
+            <a:r>
+              <a:t>Objetivo docente: Aplicar constantes, literales y operaciones aritméticas con predicción y prueba.</a:t>
+            </a:r>
+          </a:p>
+          <a:p>
+            <a:r>
+              <a:t>Diapositiva 4 de 9: Ejemplo o demostración · 2</a:t>
+            </a:r>
+          </a:p>
+          <a:p>
+            <a:r>
+              <a:t>Fase HEXA: Ejecutar — crear</a:t>
+            </a:r>
+          </a:p>
+          <a:p>
+            <a:r>
+              <a:t>Modela el ejemplo sin resolver la actividad completa; pide una predicción antes de ejecutar.</a:t>
+            </a:r>
+          </a:p>
+          <a:p>
+            <a:r>
+              <a:t>- resta</a:t>
+            </a:r>
+          </a:p>
+          <a:p>
+            <a:r>
+              <a:t>- \* multiplicación</a:t>
+            </a:r>
+          </a:p>
+          <a:p>
+            <a:r>
+              <a:t>- / división o cociente</a:t>
+            </a:r>
+          </a:p>
+          <a:p>
+            <a:r>
+              <a:t>Fuente docente: /mnt/compartido/Programación-26-27/Minijarvis/02-PROFESORADO/02-SESIONES/h1/S211-constantes-docente.md</a:t>
+            </a:r>
+          </a:p>
+        </p:txBody>
+      </p:sp>
+      <p:sp>
+        <p:nvSpPr>
+          <p:cNvPr id="4" name="Slide Number Placeholder 3"/>
+          <p:cNvSpPr>
+            <a:spLocks noGrp="1"/>
+          </p:cNvSpPr>
+          <p:nvPr>
+            <p:ph type="sldNum" idx="5" sz="quarter"/>
+          </p:nvPr>
+        </p:nvSpPr>
+        <p:spPr/>
+      </p:sp>
+    </p:spTree>
+  </p:cSld>
+  <p:clrMapOvr>
+    <a:masterClrMapping/>
+  </p:clrMapOvr>
+</p:notes>
+</file>
+
+<file path=ppt/notesSlides/notesSlide5.xml><?xml version="1.0" encoding="utf-8"?>
+<p:notes xmlns:a="http://schemas.openxmlformats.org/drawingml/2006/main" xmlns:p="http://schemas.openxmlformats.org/presentationml/2006/main" xmlns:r="http://schemas.openxmlformats.org/officeDocument/2006/relationships">
+  <p:cSld>
+    <p:spTree>
+      <p:nvGrpSpPr>
+        <p:cNvPr id="1" name=""/>
+        <p:cNvGrpSpPr/>
+        <p:nvPr/>
+      </p:nvGrpSpPr>
+      <p:grpSpPr>
+        <a:xfrm>
+          <a:off x="0" y="0"/>
+          <a:ext cx="0" cy="0"/>
+          <a:chOff x="0" y="0"/>
+          <a:chExt cx="0" cy="0"/>
+        </a:xfrm>
+      </p:grpSpPr>
+      <p:sp>
+        <p:nvSpPr>
+          <p:cNvPr id="2" name="Slide Image Placeholder 1"/>
+          <p:cNvSpPr>
+            <a:spLocks noGrp="1"/>
+          </p:cNvSpPr>
+          <p:nvPr>
+            <p:ph type="sldImg" idx="2"/>
+          </p:nvPr>
+        </p:nvSpPr>
+        <p:spPr/>
+      </p:sp>
+      <p:sp>
+        <p:nvSpPr>
+          <p:cNvPr id="3" name="Notes Placeholder 2"/>
+          <p:cNvSpPr>
+            <a:spLocks noGrp="1"/>
+          </p:cNvSpPr>
+          <p:nvPr>
+            <p:ph type="body" idx="3" sz="quarter"/>
+          </p:nvPr>
+        </p:nvSpPr>
+        <p:spPr/>
+        <p:txBody>
+          <a:bodyPr/>
+          <a:lstStyle/>
+          <a:p>
+            <a:r>
+              <a:t>Objetivo docente: Aplicar constantes, literales y operaciones aritméticas con predicción y prueba.</a:t>
+            </a:r>
+          </a:p>
+          <a:p>
+            <a:r>
+              <a:t>Diapositiva 5 de 9: Actividad central · 1</a:t>
+            </a:r>
+          </a:p>
+          <a:p>
+            <a:r>
+              <a:t>Fase HEXA: Ejecutar — crear</a:t>
+            </a:r>
+          </a:p>
+          <a:p>
+            <a:r>
+              <a:t>Entrega la consigna, observa decisiones y pide una prueba reproducible.</a:t>
+            </a:r>
+          </a:p>
+          <a:p>
+            <a:r>
+              <a:t>- Predice antes de ejecutar cuando haya código.</a:t>
+            </a:r>
+          </a:p>
+          <a:p>
+            <a:r>
+              <a:t>- Realiza la micropráctica o modificación prevista.</a:t>
+            </a:r>
+          </a:p>
+          <a:p>
+            <a:r>
+              <a:t>- Prueba el caso normal y, cuando exista una decisión o conversión, también el caso alternativo o erróneo.</a:t>
+            </a:r>
+          </a:p>
+          <a:p>
+            <a:r>
+              <a:t>- Conserva el código o resultado en el repositorio o espacio indicado.</a:t>
+            </a:r>
+          </a:p>
+          <a:p>
+            <a:r>
+              <a:t>Fuente docente: /mnt/compartido/Programación-26-27/Minijarvis/02-PROFESORADO/02-SESIONES/h1/S211-constantes-docente.md</a:t>
+            </a:r>
+          </a:p>
+        </p:txBody>
+      </p:sp>
+      <p:sp>
+        <p:nvSpPr>
+          <p:cNvPr id="4" name="Slide Number Placeholder 3"/>
+          <p:cNvSpPr>
+            <a:spLocks noGrp="1"/>
+          </p:cNvSpPr>
+          <p:nvPr>
+            <p:ph type="sldNum" idx="5" sz="quarter"/>
+          </p:nvPr>
+        </p:nvSpPr>
+        <p:spPr/>
+      </p:sp>
+    </p:spTree>
+  </p:cSld>
+  <p:clrMapOvr>
+    <a:masterClrMapping/>
+  </p:clrMapOvr>
+</p:notes>
+</file>
+
+<file path=ppt/notesSlides/notesSlide6.xml><?xml version="1.0" encoding="utf-8"?>
+<p:notes xmlns:a="http://schemas.openxmlformats.org/drawingml/2006/main" xmlns:p="http://schemas.openxmlformats.org/presentationml/2006/main" xmlns:r="http://schemas.openxmlformats.org/officeDocument/2006/relationships">
+  <p:cSld>
+    <p:spTree>
+      <p:nvGrpSpPr>
+        <p:cNvPr id="1" name=""/>
+        <p:cNvGrpSpPr/>
+        <p:nvPr/>
+      </p:nvGrpSpPr>
+      <p:grpSpPr>
+        <a:xfrm>
+          <a:off x="0" y="0"/>
+          <a:ext cx="0" cy="0"/>
+          <a:chOff x="0" y="0"/>
+          <a:chExt cx="0" cy="0"/>
+        </a:xfrm>
+      </p:grpSpPr>
+      <p:sp>
+        <p:nvSpPr>
+          <p:cNvPr id="2" name="Slide Image Placeholder 1"/>
+          <p:cNvSpPr>
+            <a:spLocks noGrp="1"/>
+          </p:cNvSpPr>
+          <p:nvPr>
+            <p:ph type="sldImg" idx="2"/>
+          </p:nvPr>
+        </p:nvSpPr>
+        <p:spPr/>
+      </p:sp>
+      <p:sp>
+        <p:nvSpPr>
+          <p:cNvPr id="3" name="Notes Placeholder 2"/>
+          <p:cNvSpPr>
+            <a:spLocks noGrp="1"/>
+          </p:cNvSpPr>
+          <p:nvPr>
+            <p:ph type="body" idx="3" sz="quarter"/>
+          </p:nvPr>
+        </p:nvSpPr>
+        <p:spPr/>
+        <p:txBody>
+          <a:bodyPr/>
+          <a:lstStyle/>
+          <a:p>
+            <a:r>
+              <a:t>Objetivo docente: Aplicar constantes, literales y operaciones aritméticas con predicción y prueba.</a:t>
+            </a:r>
+          </a:p>
+          <a:p>
+            <a:r>
+              <a:t>Diapositiva 6 de 9: Actividad central · 2</a:t>
+            </a:r>
+          </a:p>
+          <a:p>
+            <a:r>
+              <a:t>Fase HEXA: Ejecutar — crear</a:t>
+            </a:r>
+          </a:p>
+          <a:p>
+            <a:r>
+              <a:t>Entrega la consigna, observa decisiones y pide una prueba reproducible.</a:t>
+            </a:r>
+          </a:p>
+          <a:p>
+            <a:r>
+              <a:t>- Registra una sola entrada en el diario individual; no crees un informe paralelo.</a:t>
+            </a:r>
+          </a:p>
+          <a:p>
+            <a:r>
+              <a:t>- ¿Qué puedes señalar, explicar y probar al terminar este checkpoint?</a:t>
+            </a:r>
+          </a:p>
+          <a:p>
+            <a:r>
+              <a:t>Fuente docente: /mnt/compartido/Programación-26-27/Minijarvis/02-PROFESORADO/02-SESIONES/h1/S211-constantes-docente.md</a:t>
+            </a:r>
+          </a:p>
+        </p:txBody>
+      </p:sp>
+      <p:sp>
+        <p:nvSpPr>
+          <p:cNvPr id="4" name="Slide Number Placeholder 3"/>
+          <p:cNvSpPr>
+            <a:spLocks noGrp="1"/>
+          </p:cNvSpPr>
+          <p:nvPr>
+            <p:ph type="sldNum" idx="5" sz="quarter"/>
+          </p:nvPr>
+        </p:nvSpPr>
+        <p:spPr/>
+      </p:sp>
+    </p:spTree>
+  </p:cSld>
+  <p:clrMapOvr>
+    <a:masterClrMapping/>
+  </p:clrMapOvr>
+</p:notes>
+</file>
+
+<file path=ppt/notesSlides/notesSlide7.xml><?xml version="1.0" encoding="utf-8"?>
+<p:notes xmlns:a="http://schemas.openxmlformats.org/drawingml/2006/main" xmlns:p="http://schemas.openxmlformats.org/presentationml/2006/main" xmlns:r="http://schemas.openxmlformats.org/officeDocument/2006/relationships">
+  <p:cSld>
+    <p:spTree>
+      <p:nvGrpSpPr>
+        <p:cNvPr id="1" name=""/>
+        <p:cNvGrpSpPr/>
+        <p:nvPr/>
+      </p:nvGrpSpPr>
+      <p:grpSpPr>
+        <a:xfrm>
+          <a:off x="0" y="0"/>
+          <a:ext cx="0" cy="0"/>
+          <a:chOff x="0" y="0"/>
+          <a:chExt cx="0" cy="0"/>
+        </a:xfrm>
+      </p:grpSpPr>
+      <p:sp>
+        <p:nvSpPr>
+          <p:cNvPr id="2" name="Slide Image Placeholder 1"/>
+          <p:cNvSpPr>
+            <a:spLocks noGrp="1"/>
+          </p:cNvSpPr>
+          <p:nvPr>
+            <p:ph type="sldImg" idx="2"/>
+          </p:nvPr>
+        </p:nvSpPr>
+        <p:spPr/>
+      </p:sp>
+      <p:sp>
+        <p:nvSpPr>
+          <p:cNvPr id="3" name="Notes Placeholder 2"/>
+          <p:cNvSpPr>
+            <a:spLocks noGrp="1"/>
+          </p:cNvSpPr>
+          <p:nvPr>
+            <p:ph type="body" idx="3" sz="quarter"/>
+          </p:nvPr>
+        </p:nvSpPr>
+        <p:spPr/>
+        <p:txBody>
+          <a:bodyPr/>
+          <a:lstStyle/>
+          <a:p>
+            <a:r>
+              <a:t>Objetivo docente: Aplicar constantes, literales y operaciones aritméticas con predicción y prueba.</a:t>
+            </a:r>
+          </a:p>
+          <a:p>
+            <a:r>
+              <a:t>Diapositiva 7 de 9: Evidencia y comprobación</a:t>
+            </a:r>
+          </a:p>
+          <a:p>
+            <a:r>
+              <a:t>Fase HEXA: Ejecutar — crear</a:t>
+            </a:r>
+          </a:p>
+          <a:p>
+            <a:r>
+              <a:t>Comprueba la evidencia en su fuente canónica: Quede diagnóstico.</a:t>
+            </a:r>
+          </a:p>
+          <a:p>
+            <a:r>
+              <a:t>- conserva el código o la prueba en el lugar indicado por la sesión;</a:t>
+            </a:r>
+          </a:p>
+          <a:p>
+            <a:r>
+              <a:t>- añade una sola entrada al diario individual con prueba, bloqueo y siguiente paso;</a:t>
+            </a:r>
+          </a:p>
+          <a:p>
+            <a:r>
+              <a:t>- no copies la misma reflexión en otro documento; el Site personal seleccionará evidencias al cerrar H1.</a:t>
+            </a:r>
+          </a:p>
+          <a:p>
+            <a:r>
+              <a:t>Fuente docente: /mnt/compartido/Programación-26-27/Minijarvis/02-PROFESORADO/02-SESIONES/h1/S211-constantes-docente.md</a:t>
+            </a:r>
+          </a:p>
+        </p:txBody>
+      </p:sp>
+      <p:sp>
+        <p:nvSpPr>
+          <p:cNvPr id="4" name="Slide Number Placeholder 3"/>
+          <p:cNvSpPr>
+            <a:spLocks noGrp="1"/>
+          </p:cNvSpPr>
+          <p:nvPr>
+            <p:ph type="sldNum" idx="5" sz="quarter"/>
+          </p:nvPr>
+        </p:nvSpPr>
+        <p:spPr/>
+      </p:sp>
+    </p:spTree>
+  </p:cSld>
+  <p:clrMapOvr>
+    <a:masterClrMapping/>
+  </p:clrMapOvr>
+</p:notes>
+</file>
+
+<file path=ppt/notesSlides/notesSlide8.xml><?xml version="1.0" encoding="utf-8"?>
+<p:notes xmlns:a="http://schemas.openxmlformats.org/drawingml/2006/main" xmlns:p="http://schemas.openxmlformats.org/presentationml/2006/main" xmlns:r="http://schemas.openxmlformats.org/officeDocument/2006/relationships">
+  <p:cSld>
+    <p:spTree>
+      <p:nvGrpSpPr>
+        <p:cNvPr id="1" name=""/>
+        <p:cNvGrpSpPr/>
+        <p:nvPr/>
+      </p:nvGrpSpPr>
+      <p:grpSpPr>
+        <a:xfrm>
+          <a:off x="0" y="0"/>
+          <a:ext cx="0" cy="0"/>
+          <a:chOff x="0" y="0"/>
+          <a:chExt cx="0" cy="0"/>
+        </a:xfrm>
+      </p:grpSpPr>
+      <p:sp>
+        <p:nvSpPr>
+          <p:cNvPr id="2" name="Slide Image Placeholder 1"/>
+          <p:cNvSpPr>
+            <a:spLocks noGrp="1"/>
+          </p:cNvSpPr>
+          <p:nvPr>
+            <p:ph type="sldImg" idx="2"/>
+          </p:nvPr>
+        </p:nvSpPr>
+        <p:spPr/>
+      </p:sp>
+      <p:sp>
+        <p:nvSpPr>
+          <p:cNvPr id="3" name="Notes Placeholder 2"/>
+          <p:cNvSpPr>
+            <a:spLocks noGrp="1"/>
+          </p:cNvSpPr>
+          <p:nvPr>
+            <p:ph type="body" idx="3" sz="quarter"/>
+          </p:nvPr>
+        </p:nvSpPr>
+        <p:spPr/>
+        <p:txBody>
+          <a:bodyPr/>
+          <a:lstStyle/>
+          <a:p>
+            <a:r>
+              <a:t>Objetivo docente: Aplicar constantes, literales y operaciones aritméticas con predicción y prueba.</a:t>
+            </a:r>
+          </a:p>
+          <a:p>
+            <a:r>
+              <a:t>Diapositiva 8 de 9: Seguridad y uso responsable</a:t>
+            </a:r>
+          </a:p>
+          <a:p>
+            <a:r>
+              <a:t>Fase HEXA: Ejecutar — crear</a:t>
+            </a:r>
+          </a:p>
+          <a:p>
+            <a:r>
+              <a:t>Recuerda estos límites antes de que el alumnado comparta o publique:</a:t>
+            </a:r>
+          </a:p>
+          <a:p>
+            <a:r>
+              <a:t>- Usa datos ficticios y no publiques credenciales ni información personal.</a:t>
+            </a:r>
+          </a:p>
+          <a:p>
+            <a:r>
+              <a:t>- Si utilizas IA de forma sustantiva, registra propósito, propuesta, cambios propios y validación en el registro de IA del hito.</a:t>
+            </a:r>
+          </a:p>
+          <a:p>
+            <a:r>
+              <a:t>Fuente docente: /mnt/compartido/Programación-26-27/Minijarvis/02-PROFESORADO/02-SESIONES/h1/S211-constantes-docente.md</a:t>
+            </a:r>
+          </a:p>
+        </p:txBody>
+      </p:sp>
+      <p:sp>
+        <p:nvSpPr>
+          <p:cNvPr id="4" name="Slide Number Placeholder 3"/>
+          <p:cNvSpPr>
+            <a:spLocks noGrp="1"/>
+          </p:cNvSpPr>
+          <p:nvPr>
+            <p:ph type="sldNum" idx="5" sz="quarter"/>
+          </p:nvPr>
+        </p:nvSpPr>
+        <p:spPr/>
+      </p:sp>
+    </p:spTree>
+  </p:cSld>
+  <p:clrMapOvr>
+    <a:masterClrMapping/>
+  </p:clrMapOvr>
+</p:notes>
+</file>
+
+<file path=ppt/notesSlides/notesSlide9.xml><?xml version="1.0" encoding="utf-8"?>
+<p:notes xmlns:a="http://schemas.openxmlformats.org/drawingml/2006/main" xmlns:p="http://schemas.openxmlformats.org/presentationml/2006/main" xmlns:r="http://schemas.openxmlformats.org/officeDocument/2006/relationships">
+  <p:cSld>
+    <p:spTree>
+      <p:nvGrpSpPr>
+        <p:cNvPr id="1" name=""/>
+        <p:cNvGrpSpPr/>
+        <p:nvPr/>
+      </p:nvGrpSpPr>
+      <p:grpSpPr>
+        <a:xfrm>
+          <a:off x="0" y="0"/>
+          <a:ext cx="0" cy="0"/>
+          <a:chOff x="0" y="0"/>
+          <a:chExt cx="0" cy="0"/>
+        </a:xfrm>
+      </p:grpSpPr>
+      <p:sp>
+        <p:nvSpPr>
+          <p:cNvPr id="2" name="Slide Image Placeholder 1"/>
+          <p:cNvSpPr>
+            <a:spLocks noGrp="1"/>
+          </p:cNvSpPr>
+          <p:nvPr>
+            <p:ph type="sldImg" idx="2"/>
+          </p:nvPr>
+        </p:nvSpPr>
+        <p:spPr/>
+      </p:sp>
+      <p:sp>
+        <p:nvSpPr>
+          <p:cNvPr id="3" name="Notes Placeholder 2"/>
+          <p:cNvSpPr>
+            <a:spLocks noGrp="1"/>
+          </p:cNvSpPr>
+          <p:nvPr>
+            <p:ph type="body" idx="3" sz="quarter"/>
+          </p:nvPr>
+        </p:nvSpPr>
+        <p:spPr/>
+        <p:txBody>
+          <a:bodyPr/>
+          <a:lstStyle/>
+          <a:p>
+            <a:r>
+              <a:t>Objetivo docente: Aplicar constantes, literales y operaciones aritméticas con predicción y prueba.</a:t>
+            </a:r>
+          </a:p>
+          <a:p>
+            <a:r>
+              <a:t>Diapositiva 9 de 9: Cierre y defensa</a:t>
+            </a:r>
+          </a:p>
+          <a:p>
+            <a:r>
+              <a:t>Fase HEXA: Ejecutar — crear</a:t>
+            </a:r>
+          </a:p>
+          <a:p>
+            <a:r>
+              <a:t>Cierra con explicación individual, prueba observable y siguiente paso concreto.</a:t>
+            </a:r>
+          </a:p>
+          <a:p>
+            <a:r>
+              <a:t>- ¿Qué puedes señalar, explicar y probar al terminar este checkpoint?</a:t>
+            </a:r>
+          </a:p>
+          <a:p>
+            <a:r>
+              <a:t>Fuente docente: /mnt/compartido/Programación-26-27/Minijarvis/02-PROFESORADO/02-SESIONES/h1/S211-constantes-docente.md</a:t>
+            </a:r>
+          </a:p>
+        </p:txBody>
+      </p:sp>
+      <p:sp>
+        <p:nvSpPr>
+          <p:cNvPr id="4" name="Slide Number Placeholder 3"/>
+          <p:cNvSpPr>
+            <a:spLocks noGrp="1"/>
+          </p:cNvSpPr>
+          <p:nvPr>
+            <p:ph type="sldNum" idx="5" sz="quarter"/>
+          </p:nvPr>
+        </p:nvSpPr>
+        <p:spPr/>
+      </p:sp>
+    </p:spTree>
+  </p:cSld>
+  <p:clrMapOvr>
+    <a:masterClrMapping/>
+  </p:clrMapOvr>
+</p:notes>
 </file>
 
 <file path=ppt/slideLayouts/slideLayout1.xml><?xml version="1.0" encoding="utf-8"?>
@@ -3293,7 +4629,7 @@
               </a:defRPr>
             </a:pPr>
             <a:r>
-              <a:t>Constantes</a:t>
+              <a:t>Constantes, literales y operaciones</a:t>
             </a:r>
           </a:p>
         </p:txBody>
@@ -3329,7 +4665,7 @@
               </a:defRPr>
             </a:pPr>
             <a:r>
-              <a:t>H1 · 45 minutos</a:t>
+              <a:t>H1 — Primer MiniJarvis · Fase HEXA: Ejecutar — crear</a:t>
             </a:r>
           </a:p>
         </p:txBody>
@@ -3378,6 +4714,42 @@
         </p:nvSpPr>
         <p:spPr>
           <a:xfrm>
+            <a:off x="713232" y="4965192"/>
+            <a:ext cx="10241280" cy="594360"/>
+          </a:xfrm>
+          <a:prstGeom prst="rect">
+            <a:avLst/>
+          </a:prstGeom>
+          <a:noFill/>
+        </p:spPr>
+        <p:txBody>
+          <a:bodyPr wrap="square" lIns="45720" rIns="45720" tIns="36576" bIns="36576" anchor="t">
+            <a:spAutoFit/>
+          </a:bodyPr>
+          <a:lstStyle/>
+          <a:p>
+            <a:pPr algn="l">
+              <a:defRPr sz="1700" b="0">
+                <a:solidFill>
+                  <a:srgbClr val="D2D9E4"/>
+                </a:solidFill>
+                <a:latin typeface="Aptos"/>
+              </a:defRPr>
+            </a:pPr>
+            <a:r>
+              <a:t>Individual con contraste por parejas o equipo cuando la práctica lo requiera</a:t>
+            </a:r>
+          </a:p>
+        </p:txBody>
+      </p:sp>
+      <p:sp>
+        <p:nvSpPr>
+          <p:cNvPr id="10" name="TextBox 9"/>
+          <p:cNvSpPr txBox="1"/>
+          <p:nvPr/>
+        </p:nvSpPr>
+        <p:spPr>
+          <a:xfrm>
             <a:off x="713232" y="6272784"/>
             <a:ext cx="10607040" cy="201168"/>
           </a:xfrm>
@@ -3401,7 +4773,7 @@
               </a:defRPr>
             </a:pPr>
             <a:r>
-              <a:t>MINIJARVIS · PROGRAMACIÓN + ENTORNOS DE DESARROLLO</a:t>
+              <a:t>MINIJARVIS · PROGRAMACIÓN</a:t>
             </a:r>
           </a:p>
         </p:txBody>
@@ -3656,7 +5028,7 @@
               </a:defRPr>
             </a:pPr>
             <a:r>
-              <a:t>MiniJarvis · 1.º DAW · Sesión 211 · H1</a:t>
+              <a:t>MiniJarvis · 1.º DAW · Sesión 211 · H1 — Primer MiniJarvis</a:t>
             </a:r>
           </a:p>
         </p:txBody>
@@ -3737,7 +5109,7 @@
               </a:defRPr>
             </a:pPr>
             <a:r>
-              <a:t>Objetivo: Diferenciar variable y constante.</a:t>
+              <a:t>Objetivo: Aplicar constantes, literales y operaciones aritméticas con predicción y prueba.</a:t>
             </a:r>
           </a:p>
         </p:txBody>
@@ -3818,7 +5190,7 @@
               </a:defRPr>
             </a:pPr>
             <a:r>
-              <a:t>Evidencia: Código con al menos una constante bien usada.</a:t>
+              <a:t>Al terminar: señala la evidencia, explica qué demuestra y reproduce la prueba.</a:t>
             </a:r>
           </a:p>
         </p:txBody>
@@ -3958,7 +5330,7 @@
               </a:defRPr>
             </a:pPr>
             <a:r>
-              <a:t>RITMO DE LA SESIÓN</a:t>
+              <a:t>OBSERVAR ANTES DE ACTUAR</a:t>
             </a:r>
           </a:p>
         </p:txBody>
@@ -3994,7 +5366,7 @@
               </a:defRPr>
             </a:pPr>
             <a:r>
-              <a:t>Secuencia de aula</a:t>
+              <a:t>Ejemplo o demostración · 1</a:t>
             </a:r>
           </a:p>
         </p:txBody>
@@ -4073,27 +5445,27 @@
               </a:defRPr>
             </a:pPr>
             <a:r>
-              <a:t>MiniJarvis · 1.º DAW · Sesión 211 · H1</a:t>
-            </a:r>
-          </a:p>
-        </p:txBody>
-      </p:sp>
-      <p:sp>
-        <p:nvSpPr>
-          <p:cNvPr id="8" name="Oval 7"/>
+              <a:t>MiniJarvis · 1.º DAW · Sesión 211 · H1 — Primer MiniJarvis</a:t>
+            </a:r>
+          </a:p>
+        </p:txBody>
+      </p:sp>
+      <p:sp>
+        <p:nvSpPr>
+          <p:cNvPr id="8" name="Rounded Rectangle 7"/>
           <p:cNvSpPr/>
           <p:nvPr/>
         </p:nvSpPr>
         <p:spPr>
           <a:xfrm>
-            <a:off x="658368" y="1280160"/>
-            <a:ext cx="475488" cy="475488"/>
-          </a:xfrm>
-          <a:prstGeom prst="ellipse">
+            <a:off x="621792" y="1353312"/>
+            <a:ext cx="10927080" cy="4526280"/>
+          </a:xfrm>
+          <a:prstGeom prst="roundRect">
             <a:avLst/>
           </a:prstGeom>
           <a:solidFill>
-            <a:srgbClr val="2F5BA8"/>
+            <a:srgbClr val="121824"/>
           </a:solidFill>
           <a:ln>
             <a:noFill/>
@@ -4129,8 +5501,8 @@
         </p:nvSpPr>
         <p:spPr>
           <a:xfrm>
-            <a:off x="658368" y="1380744"/>
-            <a:ext cx="475488" cy="201168"/>
+            <a:off x="932688" y="1627632"/>
+            <a:ext cx="2057400" cy="411480"/>
           </a:xfrm>
           <a:prstGeom prst="rect">
             <a:avLst/>
@@ -4143,8 +5515,47 @@
           </a:bodyPr>
           <a:lstStyle/>
           <a:p>
-            <a:pPr algn="ctr">
+            <a:pPr algn="l">
               <a:defRPr sz="1300" b="1">
+                <a:solidFill>
+                  <a:srgbClr val="2F5BA8"/>
+                </a:solidFill>
+                <a:latin typeface="Aptos"/>
+              </a:defRPr>
+            </a:pPr>
+            <a:r>
+              <a:t>DEMOSTRACIÓN</a:t>
+            </a:r>
+          </a:p>
+        </p:txBody>
+      </p:sp>
+      <p:sp>
+        <p:nvSpPr>
+          <p:cNvPr id="10" name="TextBox 9"/>
+          <p:cNvSpPr txBox="1"/>
+          <p:nvPr/>
+        </p:nvSpPr>
+        <p:spPr>
+          <a:xfrm>
+            <a:off x="932688" y="2212848"/>
+            <a:ext cx="9966960" cy="3246120"/>
+          </a:xfrm>
+          <a:prstGeom prst="rect">
+            <a:avLst/>
+          </a:prstGeom>
+          <a:noFill/>
+        </p:spPr>
+        <p:txBody>
+          <a:bodyPr wrap="square" lIns="73152" rIns="45720" tIns="36576">
+            <a:spAutoFit/>
+          </a:bodyPr>
+          <a:lstStyle/>
+          <a:p>
+            <a:pPr>
+              <a:spcAft>
+                <a:spcPts val="900"/>
+              </a:spcAft>
+              <a:defRPr sz="1900">
                 <a:solidFill>
                   <a:srgbClr val="FFFFFF"/>
                 </a:solidFill>
@@ -4152,114 +5563,15 @@
               </a:defRPr>
             </a:pPr>
             <a:r>
-              <a:t>1</a:t>
-            </a:r>
-          </a:p>
-        </p:txBody>
-      </p:sp>
-      <p:sp>
-        <p:nvSpPr>
-          <p:cNvPr id="10" name="TextBox 9"/>
-          <p:cNvSpPr txBox="1"/>
-          <p:nvPr/>
-        </p:nvSpPr>
-        <p:spPr>
-          <a:xfrm>
-            <a:off x="1389888" y="1261872"/>
-            <a:ext cx="10058400" cy="772668"/>
-          </a:xfrm>
-          <a:prstGeom prst="rect">
-            <a:avLst/>
-          </a:prstGeom>
-          <a:noFill/>
-        </p:spPr>
-        <p:txBody>
-          <a:bodyPr wrap="square" lIns="45720" rIns="45720" tIns="36576" bIns="36576" anchor="t">
-            <a:spAutoFit/>
-          </a:bodyPr>
-          <a:lstStyle/>
-          <a:p>
-            <a:pPr algn="l">
-              <a:defRPr sz="1600" b="0">
-                <a:solidFill>
-                  <a:srgbClr val="1C2330"/>
-                </a:solidFill>
-                <a:latin typeface="Aptos"/>
-              </a:defRPr>
-            </a:pPr>
-            <a:r>
-              <a:t>0–5 min — Presentar objetivo, producto y evidencia de hoy.</a:t>
-            </a:r>
-          </a:p>
-        </p:txBody>
-      </p:sp>
-      <p:sp>
-        <p:nvSpPr>
-          <p:cNvPr id="11" name="Oval 10"/>
-          <p:cNvSpPr/>
-          <p:nvPr/>
-        </p:nvSpPr>
-        <p:spPr>
-          <a:xfrm>
-            <a:off x="658368" y="2125979"/>
-            <a:ext cx="475488" cy="475488"/>
-          </a:xfrm>
-          <a:prstGeom prst="ellipse">
-            <a:avLst/>
-          </a:prstGeom>
-          <a:solidFill>
-            <a:srgbClr val="2F5BA8"/>
-          </a:solidFill>
-          <a:ln>
-            <a:noFill/>
-          </a:ln>
-        </p:spPr>
-        <p:style>
-          <a:lnRef idx="1">
-            <a:schemeClr val="accent1"/>
-          </a:lnRef>
-          <a:fillRef idx="3">
-            <a:schemeClr val="accent1"/>
-          </a:fillRef>
-          <a:effectRef idx="2">
-            <a:schemeClr val="accent1"/>
-          </a:effectRef>
-          <a:fontRef idx="minor">
-            <a:schemeClr val="lt1"/>
-          </a:fontRef>
-        </p:style>
-        <p:txBody>
-          <a:bodyPr rtlCol="0" anchor="ctr"/>
-          <a:lstStyle/>
-          <a:p>
-            <a:pPr algn="ctr"/>
-          </a:p>
-        </p:txBody>
-      </p:sp>
-      <p:sp>
-        <p:nvSpPr>
-          <p:cNvPr id="12" name="TextBox 11"/>
-          <p:cNvSpPr txBox="1"/>
-          <p:nvPr/>
-        </p:nvSpPr>
-        <p:spPr>
-          <a:xfrm>
-            <a:off x="658368" y="2226563"/>
-            <a:ext cx="475488" cy="201168"/>
-          </a:xfrm>
-          <a:prstGeom prst="rect">
-            <a:avLst/>
-          </a:prstGeom>
-          <a:noFill/>
-        </p:spPr>
-        <p:txBody>
-          <a:bodyPr wrap="square" lIns="45720" rIns="45720" tIns="36576" bIns="36576" anchor="t">
-            <a:spAutoFit/>
-          </a:bodyPr>
-          <a:lstStyle/>
-          <a:p>
-            <a:pPr algn="ctr">
-              <a:defRPr sz="1300" b="1">
+              <a:t>•  D1 · ¿Qué datos deberían cambiar? — Nombre del asistente · curso · horas de estudio · contador de tareas</a:t>
+            </a:r>
+          </a:p>
+          <a:p>
+            <a:pPr>
+              <a:spcAft>
+                <a:spcPts val="900"/>
+              </a:spcAft>
+              <a:defRPr sz="1900">
                 <a:solidFill>
                   <a:srgbClr val="FFFFFF"/>
                 </a:solidFill>
@@ -4267,114 +5579,15 @@
               </a:defRPr>
             </a:pPr>
             <a:r>
-              <a:t>2</a:t>
-            </a:r>
-          </a:p>
-        </p:txBody>
-      </p:sp>
-      <p:sp>
-        <p:nvSpPr>
-          <p:cNvPr id="13" name="TextBox 12"/>
-          <p:cNvSpPr txBox="1"/>
-          <p:nvPr/>
-        </p:nvSpPr>
-        <p:spPr>
-          <a:xfrm>
-            <a:off x="1389888" y="2107691"/>
-            <a:ext cx="10058400" cy="772668"/>
-          </a:xfrm>
-          <a:prstGeom prst="rect">
-            <a:avLst/>
-          </a:prstGeom>
-          <a:noFill/>
-        </p:spPr>
-        <p:txBody>
-          <a:bodyPr wrap="square" lIns="45720" rIns="45720" tIns="36576" bIns="36576" anchor="t">
-            <a:spAutoFit/>
-          </a:bodyPr>
-          <a:lstStyle/>
-          <a:p>
-            <a:pPr algn="l">
-              <a:defRPr sz="1600" b="0">
-                <a:solidFill>
-                  <a:srgbClr val="1C2330"/>
-                </a:solidFill>
-                <a:latin typeface="Aptos"/>
-              </a:defRPr>
-            </a:pPr>
-            <a:r>
-              <a:t>5–13 min — Explicación breve: Una constante representa un dato que no debe cambiar durante la ejecución.</a:t>
-            </a:r>
-          </a:p>
-        </p:txBody>
-      </p:sp>
-      <p:sp>
-        <p:nvSpPr>
-          <p:cNvPr id="14" name="Oval 13"/>
-          <p:cNvSpPr/>
-          <p:nvPr/>
-        </p:nvSpPr>
-        <p:spPr>
-          <a:xfrm>
-            <a:off x="658368" y="2971799"/>
-            <a:ext cx="475488" cy="475488"/>
-          </a:xfrm>
-          <a:prstGeom prst="ellipse">
-            <a:avLst/>
-          </a:prstGeom>
-          <a:solidFill>
-            <a:srgbClr val="2F5BA8"/>
-          </a:solidFill>
-          <a:ln>
-            <a:noFill/>
-          </a:ln>
-        </p:spPr>
-        <p:style>
-          <a:lnRef idx="1">
-            <a:schemeClr val="accent1"/>
-          </a:lnRef>
-          <a:fillRef idx="3">
-            <a:schemeClr val="accent1"/>
-          </a:fillRef>
-          <a:effectRef idx="2">
-            <a:schemeClr val="accent1"/>
-          </a:effectRef>
-          <a:fontRef idx="minor">
-            <a:schemeClr val="lt1"/>
-          </a:fontRef>
-        </p:style>
-        <p:txBody>
-          <a:bodyPr rtlCol="0" anchor="ctr"/>
-          <a:lstStyle/>
-          <a:p>
-            <a:pPr algn="ctr"/>
-          </a:p>
-        </p:txBody>
-      </p:sp>
-      <p:sp>
-        <p:nvSpPr>
-          <p:cNvPr id="15" name="TextBox 14"/>
-          <p:cNvSpPr txBox="1"/>
-          <p:nvPr/>
-        </p:nvSpPr>
-        <p:spPr>
-          <a:xfrm>
-            <a:off x="658368" y="3072383"/>
-            <a:ext cx="475488" cy="201168"/>
-          </a:xfrm>
-          <a:prstGeom prst="rect">
-            <a:avLst/>
-          </a:prstGeom>
-          <a:noFill/>
-        </p:spPr>
-        <p:txBody>
-          <a:bodyPr wrap="square" lIns="45720" rIns="45720" tIns="36576" bIns="36576" anchor="t">
-            <a:spAutoFit/>
-          </a:bodyPr>
-          <a:lstStyle/>
-          <a:p>
-            <a:pPr algn="ctr">
-              <a:defRPr sz="1300" b="1">
+              <a:t>•  D2 · Constantes con final — final String ASSISTANT_NAME = "MiniJarvis";</a:t>
+            </a:r>
+          </a:p>
+          <a:p>
+            <a:pPr>
+              <a:spcAft>
+                <a:spcPts val="900"/>
+              </a:spcAft>
+              <a:defRPr sz="1900">
                 <a:solidFill>
                   <a:srgbClr val="FFFFFF"/>
                 </a:solidFill>
@@ -4382,114 +5595,15 @@
               </a:defRPr>
             </a:pPr>
             <a:r>
-              <a:t>3</a:t>
-            </a:r>
-          </a:p>
-        </p:txBody>
-      </p:sp>
-      <p:sp>
-        <p:nvSpPr>
-          <p:cNvPr id="16" name="TextBox 15"/>
-          <p:cNvSpPr txBox="1"/>
-          <p:nvPr/>
-        </p:nvSpPr>
-        <p:spPr>
-          <a:xfrm>
-            <a:off x="1389888" y="2953511"/>
-            <a:ext cx="10058400" cy="772668"/>
-          </a:xfrm>
-          <a:prstGeom prst="rect">
-            <a:avLst/>
-          </a:prstGeom>
-          <a:noFill/>
-        </p:spPr>
-        <p:txBody>
-          <a:bodyPr wrap="square" lIns="45720" rIns="45720" tIns="36576" bIns="36576" anchor="t">
-            <a:spAutoFit/>
-          </a:bodyPr>
-          <a:lstStyle/>
-          <a:p>
-            <a:pPr algn="l">
-              <a:defRPr sz="1600" b="0">
-                <a:solidFill>
-                  <a:srgbClr val="1C2330"/>
-                </a:solidFill>
-                <a:latin typeface="Aptos"/>
-              </a:defRPr>
-            </a:pPr>
-            <a:r>
-              <a:t>13–18 min — Demostración o ejemplo: final String ASSISTANT_NAME = "MiniJarvis";.</a:t>
-            </a:r>
-          </a:p>
-        </p:txBody>
-      </p:sp>
-      <p:sp>
-        <p:nvSpPr>
-          <p:cNvPr id="17" name="Oval 16"/>
-          <p:cNvSpPr/>
-          <p:nvPr/>
-        </p:nvSpPr>
-        <p:spPr>
-          <a:xfrm>
-            <a:off x="658368" y="3817620"/>
-            <a:ext cx="475488" cy="475488"/>
-          </a:xfrm>
-          <a:prstGeom prst="ellipse">
-            <a:avLst/>
-          </a:prstGeom>
-          <a:solidFill>
-            <a:srgbClr val="2F5BA8"/>
-          </a:solidFill>
-          <a:ln>
-            <a:noFill/>
-          </a:ln>
-        </p:spPr>
-        <p:style>
-          <a:lnRef idx="1">
-            <a:schemeClr val="accent1"/>
-          </a:lnRef>
-          <a:fillRef idx="3">
-            <a:schemeClr val="accent1"/>
-          </a:fillRef>
-          <a:effectRef idx="2">
-            <a:schemeClr val="accent1"/>
-          </a:effectRef>
-          <a:fontRef idx="minor">
-            <a:schemeClr val="lt1"/>
-          </a:fontRef>
-        </p:style>
-        <p:txBody>
-          <a:bodyPr rtlCol="0" anchor="ctr"/>
-          <a:lstStyle/>
-          <a:p>
-            <a:pPr algn="ctr"/>
-          </a:p>
-        </p:txBody>
-      </p:sp>
-      <p:sp>
-        <p:nvSpPr>
-          <p:cNvPr id="18" name="TextBox 17"/>
-          <p:cNvSpPr txBox="1"/>
-          <p:nvPr/>
-        </p:nvSpPr>
-        <p:spPr>
-          <a:xfrm>
-            <a:off x="658368" y="3918204"/>
-            <a:ext cx="475488" cy="201168"/>
-          </a:xfrm>
-          <a:prstGeom prst="rect">
-            <a:avLst/>
-          </a:prstGeom>
-          <a:noFill/>
-        </p:spPr>
-        <p:txBody>
-          <a:bodyPr wrap="square" lIns="45720" rIns="45720" tIns="36576" bIns="36576" anchor="t">
-            <a:spAutoFit/>
-          </a:bodyPr>
-          <a:lstStyle/>
-          <a:p>
-            <a:pPr algn="ctr">
-              <a:defRPr sz="1300" b="1">
+              <a:t>•  final int START_YEAR = 2026;</a:t>
+            </a:r>
+          </a:p>
+          <a:p>
+            <a:pPr>
+              <a:spcAft>
+                <a:spcPts val="900"/>
+              </a:spcAft>
+              <a:defRPr sz="1900">
                 <a:solidFill>
                   <a:srgbClr val="FFFFFF"/>
                 </a:solidFill>
@@ -4497,114 +5611,15 @@
               </a:defRPr>
             </a:pPr>
             <a:r>
-              <a:t>4</a:t>
-            </a:r>
-          </a:p>
-        </p:txBody>
-      </p:sp>
-      <p:sp>
-        <p:nvSpPr>
-          <p:cNvPr id="19" name="TextBox 18"/>
-          <p:cNvSpPr txBox="1"/>
-          <p:nvPr/>
-        </p:nvSpPr>
-        <p:spPr>
-          <a:xfrm>
-            <a:off x="1389888" y="3799332"/>
-            <a:ext cx="10058400" cy="772668"/>
-          </a:xfrm>
-          <a:prstGeom prst="rect">
-            <a:avLst/>
-          </a:prstGeom>
-          <a:noFill/>
-        </p:spPr>
-        <p:txBody>
-          <a:bodyPr wrap="square" lIns="45720" rIns="45720" tIns="36576" bIns="36576" anchor="t">
-            <a:spAutoFit/>
-          </a:bodyPr>
-          <a:lstStyle/>
-          <a:p>
-            <a:pPr algn="l">
-              <a:defRPr sz="1600" b="0">
-                <a:solidFill>
-                  <a:srgbClr val="1C2330"/>
-                </a:solidFill>
-                <a:latin typeface="Aptos"/>
-              </a:defRPr>
-            </a:pPr>
-            <a:r>
-              <a:t>18–35 min — Trabajo del alumnado: Añadir ASSISTANT_NAME y COURSE_YEAR.</a:t>
-            </a:r>
-          </a:p>
-        </p:txBody>
-      </p:sp>
-      <p:sp>
-        <p:nvSpPr>
-          <p:cNvPr id="20" name="Oval 19"/>
-          <p:cNvSpPr/>
-          <p:nvPr/>
-        </p:nvSpPr>
-        <p:spPr>
-          <a:xfrm>
-            <a:off x="658368" y="4663440"/>
-            <a:ext cx="475488" cy="475488"/>
-          </a:xfrm>
-          <a:prstGeom prst="ellipse">
-            <a:avLst/>
-          </a:prstGeom>
-          <a:solidFill>
-            <a:srgbClr val="2F5BA8"/>
-          </a:solidFill>
-          <a:ln>
-            <a:noFill/>
-          </a:ln>
-        </p:spPr>
-        <p:style>
-          <a:lnRef idx="1">
-            <a:schemeClr val="accent1"/>
-          </a:lnRef>
-          <a:fillRef idx="3">
-            <a:schemeClr val="accent1"/>
-          </a:fillRef>
-          <a:effectRef idx="2">
-            <a:schemeClr val="accent1"/>
-          </a:effectRef>
-          <a:fontRef idx="minor">
-            <a:schemeClr val="lt1"/>
-          </a:fontRef>
-        </p:style>
-        <p:txBody>
-          <a:bodyPr rtlCol="0" anchor="ctr"/>
-          <a:lstStyle/>
-          <a:p>
-            <a:pPr algn="ctr"/>
-          </a:p>
-        </p:txBody>
-      </p:sp>
-      <p:sp>
-        <p:nvSpPr>
-          <p:cNvPr id="21" name="TextBox 20"/>
-          <p:cNvSpPr txBox="1"/>
-          <p:nvPr/>
-        </p:nvSpPr>
-        <p:spPr>
-          <a:xfrm>
-            <a:off x="658368" y="4764024"/>
-            <a:ext cx="475488" cy="201168"/>
-          </a:xfrm>
-          <a:prstGeom prst="rect">
-            <a:avLst/>
-          </a:prstGeom>
-          <a:noFill/>
-        </p:spPr>
-        <p:txBody>
-          <a:bodyPr wrap="square" lIns="45720" rIns="45720" tIns="36576" bIns="36576" anchor="t">
-            <a:spAutoFit/>
-          </a:bodyPr>
-          <a:lstStyle/>
-          <a:p>
-            <a:pPr algn="ctr">
-              <a:defRPr sz="1300" b="1">
+              <a:t>•  D3 · Literal = valor escrito directamente — NÚMEROS: 5 / 3.5 \| TEXTO/CARÁCTER: "Hola" / 'A' \| LÓGICO: true / false</a:t>
+            </a:r>
+          </a:p>
+          <a:p>
+            <a:pPr>
+              <a:spcAft>
+                <a:spcPts val="900"/>
+              </a:spcAft>
+              <a:defRPr sz="1900">
                 <a:solidFill>
                   <a:srgbClr val="FFFFFF"/>
                 </a:solidFill>
@@ -4612,158 +5627,7 @@
               </a:defRPr>
             </a:pPr>
             <a:r>
-              <a:t>5</a:t>
-            </a:r>
-          </a:p>
-        </p:txBody>
-      </p:sp>
-      <p:sp>
-        <p:nvSpPr>
-          <p:cNvPr id="22" name="TextBox 21"/>
-          <p:cNvSpPr txBox="1"/>
-          <p:nvPr/>
-        </p:nvSpPr>
-        <p:spPr>
-          <a:xfrm>
-            <a:off x="1389888" y="4645152"/>
-            <a:ext cx="10058400" cy="772668"/>
-          </a:xfrm>
-          <a:prstGeom prst="rect">
-            <a:avLst/>
-          </a:prstGeom>
-          <a:noFill/>
-        </p:spPr>
-        <p:txBody>
-          <a:bodyPr wrap="square" lIns="45720" rIns="45720" tIns="36576" bIns="36576" anchor="t">
-            <a:spAutoFit/>
-          </a:bodyPr>
-          <a:lstStyle/>
-          <a:p>
-            <a:pPr algn="l">
-              <a:defRPr sz="1600" b="0">
-                <a:solidFill>
-                  <a:srgbClr val="1C2330"/>
-                </a:solidFill>
-                <a:latin typeface="Aptos"/>
-              </a:defRPr>
-            </a:pPr>
-            <a:r>
-              <a:t>35–40 min — Comprobar la evidencia con una explicación o prueba breve.</a:t>
-            </a:r>
-          </a:p>
-        </p:txBody>
-      </p:sp>
-      <p:sp>
-        <p:nvSpPr>
-          <p:cNvPr id="23" name="Oval 22"/>
-          <p:cNvSpPr/>
-          <p:nvPr/>
-        </p:nvSpPr>
-        <p:spPr>
-          <a:xfrm>
-            <a:off x="658368" y="5509259"/>
-            <a:ext cx="475488" cy="475488"/>
-          </a:xfrm>
-          <a:prstGeom prst="ellipse">
-            <a:avLst/>
-          </a:prstGeom>
-          <a:solidFill>
-            <a:srgbClr val="2F5BA8"/>
-          </a:solidFill>
-          <a:ln>
-            <a:noFill/>
-          </a:ln>
-        </p:spPr>
-        <p:style>
-          <a:lnRef idx="1">
-            <a:schemeClr val="accent1"/>
-          </a:lnRef>
-          <a:fillRef idx="3">
-            <a:schemeClr val="accent1"/>
-          </a:fillRef>
-          <a:effectRef idx="2">
-            <a:schemeClr val="accent1"/>
-          </a:effectRef>
-          <a:fontRef idx="minor">
-            <a:schemeClr val="lt1"/>
-          </a:fontRef>
-        </p:style>
-        <p:txBody>
-          <a:bodyPr rtlCol="0" anchor="ctr"/>
-          <a:lstStyle/>
-          <a:p>
-            <a:pPr algn="ctr"/>
-          </a:p>
-        </p:txBody>
-      </p:sp>
-      <p:sp>
-        <p:nvSpPr>
-          <p:cNvPr id="24" name="TextBox 23"/>
-          <p:cNvSpPr txBox="1"/>
-          <p:nvPr/>
-        </p:nvSpPr>
-        <p:spPr>
-          <a:xfrm>
-            <a:off x="658368" y="5609844"/>
-            <a:ext cx="475488" cy="201168"/>
-          </a:xfrm>
-          <a:prstGeom prst="rect">
-            <a:avLst/>
-          </a:prstGeom>
-          <a:noFill/>
-        </p:spPr>
-        <p:txBody>
-          <a:bodyPr wrap="square" lIns="45720" rIns="45720" tIns="36576" bIns="36576" anchor="t">
-            <a:spAutoFit/>
-          </a:bodyPr>
-          <a:lstStyle/>
-          <a:p>
-            <a:pPr algn="ctr">
-              <a:defRPr sz="1300" b="1">
-                <a:solidFill>
-                  <a:srgbClr val="FFFFFF"/>
-                </a:solidFill>
-                <a:latin typeface="Aptos"/>
-              </a:defRPr>
-            </a:pPr>
-            <a:r>
-              <a:t>6</a:t>
-            </a:r>
-          </a:p>
-        </p:txBody>
-      </p:sp>
-      <p:sp>
-        <p:nvSpPr>
-          <p:cNvPr id="25" name="TextBox 24"/>
-          <p:cNvSpPr txBox="1"/>
-          <p:nvPr/>
-        </p:nvSpPr>
-        <p:spPr>
-          <a:xfrm>
-            <a:off x="1389888" y="5490972"/>
-            <a:ext cx="10058400" cy="772668"/>
-          </a:xfrm>
-          <a:prstGeom prst="rect">
-            <a:avLst/>
-          </a:prstGeom>
-          <a:noFill/>
-        </p:spPr>
-        <p:txBody>
-          <a:bodyPr wrap="square" lIns="45720" rIns="45720" tIns="36576" bIns="36576" anchor="t">
-            <a:spAutoFit/>
-          </a:bodyPr>
-          <a:lstStyle/>
-          <a:p>
-            <a:pPr algn="l">
-              <a:defRPr sz="1600" b="0">
-                <a:solidFill>
-                  <a:srgbClr val="1C2330"/>
-                </a:solidFill>
-                <a:latin typeface="Aptos"/>
-              </a:defRPr>
-            </a:pPr>
-            <a:r>
-              <a:t>40–45 min — Cierre: ¿qué dato de nuestro programa debería ser constante?</a:t>
+              <a:t>•  D4 · Operadores aritméticos — + suma</a:t>
             </a:r>
           </a:p>
         </p:txBody>
@@ -4903,7 +5767,7 @@
               </a:defRPr>
             </a:pPr>
             <a:r>
-              <a:t>COMPRENDER Y TRANSFERIR</a:t>
+              <a:t>OBSERVAR ANTES DE ACTUAR</a:t>
             </a:r>
           </a:p>
         </p:txBody>
@@ -4939,7 +5803,7 @@
               </a:defRPr>
             </a:pPr>
             <a:r>
-              <a:t>Idea clave y puesta en práctica</a:t>
+              <a:t>Ejemplo o demostración · 2</a:t>
             </a:r>
           </a:p>
         </p:txBody>
@@ -5018,7 +5882,7 @@
               </a:defRPr>
             </a:pPr>
             <a:r>
-              <a:t>MiniJarvis · 1.º DAW · Sesión 211 · H1</a:t>
+              <a:t>MiniJarvis · 1.º DAW · Sesión 211 · H1 — Primer MiniJarvis</a:t>
             </a:r>
           </a:p>
         </p:txBody>
@@ -5031,19 +5895,17 @@
         </p:nvSpPr>
         <p:spPr>
           <a:xfrm>
-            <a:off x="621792" y="1325880"/>
-            <a:ext cx="5285232" cy="4736592"/>
+            <a:off x="621792" y="1353312"/>
+            <a:ext cx="10927080" cy="4526280"/>
           </a:xfrm>
           <a:prstGeom prst="roundRect">
             <a:avLst/>
           </a:prstGeom>
           <a:solidFill>
-            <a:srgbClr val="FFFFFF"/>
+            <a:srgbClr val="121824"/>
           </a:solidFill>
           <a:ln>
-            <a:solidFill>
-              <a:srgbClr val="E5E9EF"/>
-            </a:solidFill>
+            <a:noFill/>
           </a:ln>
         </p:spPr>
         <p:style>
@@ -5077,7 +5939,7 @@
         <p:spPr>
           <a:xfrm>
             <a:off x="932688" y="1627632"/>
-            <a:ext cx="2011680" cy="329184"/>
+            <a:ext cx="2057400" cy="411480"/>
           </a:xfrm>
           <a:prstGeom prst="rect">
             <a:avLst/>
@@ -5099,7 +5961,7 @@
               </a:defRPr>
             </a:pPr>
             <a:r>
-              <a:t>IDEA CLAVE</a:t>
+              <a:t>DEMOSTRACIÓN</a:t>
             </a:r>
           </a:p>
         </p:txBody>
@@ -5112,8 +5974,8 @@
         </p:nvSpPr>
         <p:spPr>
           <a:xfrm>
-            <a:off x="932688" y="2176272"/>
-            <a:ext cx="4617720" cy="3429000"/>
+            <a:off x="932688" y="2212848"/>
+            <a:ext cx="9966960" cy="3246120"/>
           </a:xfrm>
           <a:prstGeom prst="rect">
             <a:avLst/>
@@ -5130,125 +5992,7 @@
               <a:spcAft>
                 <a:spcPts val="900"/>
               </a:spcAft>
-              <a:defRPr sz="2300">
-                <a:solidFill>
-                  <a:srgbClr val="1C2330"/>
-                </a:solidFill>
-                <a:latin typeface="Aptos"/>
-              </a:defRPr>
-            </a:pPr>
-            <a:r>
-              <a:t>•  final, nombres claros y datos que no deberían cambiar.</a:t>
-            </a:r>
-          </a:p>
-        </p:txBody>
-      </p:sp>
-      <p:sp>
-        <p:nvSpPr>
-          <p:cNvPr id="11" name="Rounded Rectangle 10"/>
-          <p:cNvSpPr/>
-          <p:nvPr/>
-        </p:nvSpPr>
-        <p:spPr>
-          <a:xfrm>
-            <a:off x="6172200" y="1325880"/>
-            <a:ext cx="5394960" cy="4736592"/>
-          </a:xfrm>
-          <a:prstGeom prst="roundRect">
-            <a:avLst/>
-          </a:prstGeom>
-          <a:solidFill>
-            <a:srgbClr val="121824"/>
-          </a:solidFill>
-          <a:ln>
-            <a:noFill/>
-          </a:ln>
-        </p:spPr>
-        <p:style>
-          <a:lnRef idx="1">
-            <a:schemeClr val="accent1"/>
-          </a:lnRef>
-          <a:fillRef idx="3">
-            <a:schemeClr val="accent1"/>
-          </a:fillRef>
-          <a:effectRef idx="2">
-            <a:schemeClr val="accent1"/>
-          </a:effectRef>
-          <a:fontRef idx="minor">
-            <a:schemeClr val="lt1"/>
-          </a:fontRef>
-        </p:style>
-        <p:txBody>
-          <a:bodyPr rtlCol="0" anchor="ctr"/>
-          <a:lstStyle/>
-          <a:p>
-            <a:pPr algn="ctr"/>
-          </a:p>
-        </p:txBody>
-      </p:sp>
-      <p:sp>
-        <p:nvSpPr>
-          <p:cNvPr id="12" name="TextBox 11"/>
-          <p:cNvSpPr txBox="1"/>
-          <p:nvPr/>
-        </p:nvSpPr>
-        <p:spPr>
-          <a:xfrm>
-            <a:off x="6492240" y="1627632"/>
-            <a:ext cx="2194560" cy="329184"/>
-          </a:xfrm>
-          <a:prstGeom prst="rect">
-            <a:avLst/>
-          </a:prstGeom>
-          <a:noFill/>
-        </p:spPr>
-        <p:txBody>
-          <a:bodyPr wrap="square" lIns="45720" rIns="45720" tIns="36576" bIns="36576" anchor="t">
-            <a:spAutoFit/>
-          </a:bodyPr>
-          <a:lstStyle/>
-          <a:p>
-            <a:pPr algn="l">
-              <a:defRPr sz="1300" b="1">
-                <a:solidFill>
-                  <a:srgbClr val="2F5BA8"/>
-                </a:solidFill>
-                <a:latin typeface="Aptos"/>
-              </a:defRPr>
-            </a:pPr>
-            <a:r>
-              <a:t>EN PRÁCTICA</a:t>
-            </a:r>
-          </a:p>
-        </p:txBody>
-      </p:sp>
-      <p:sp>
-        <p:nvSpPr>
-          <p:cNvPr id="13" name="TextBox 12"/>
-          <p:cNvSpPr txBox="1"/>
-          <p:nvPr/>
-        </p:nvSpPr>
-        <p:spPr>
-          <a:xfrm>
-            <a:off x="6492240" y="2176272"/>
-            <a:ext cx="4617720" cy="3429000"/>
-          </a:xfrm>
-          <a:prstGeom prst="rect">
-            <a:avLst/>
-          </a:prstGeom>
-          <a:noFill/>
-        </p:spPr>
-        <p:txBody>
-          <a:bodyPr wrap="square" lIns="73152" rIns="45720" tIns="36576">
-            <a:spAutoFit/>
-          </a:bodyPr>
-          <a:lstStyle/>
-          <a:p>
-            <a:pPr>
-              <a:spcAft>
-                <a:spcPts val="900"/>
-              </a:spcAft>
-              <a:defRPr sz="2300">
+              <a:defRPr sz="2200">
                 <a:solidFill>
                   <a:srgbClr val="FFFFFF"/>
                 </a:solidFill>
@@ -5256,7 +6000,39 @@
               </a:defRPr>
             </a:pPr>
             <a:r>
-              <a:t>•  final String ASSISTANT_NAME = "MiniJarvis";.</a:t>
+              <a:t>•  resta</a:t>
+            </a:r>
+          </a:p>
+          <a:p>
+            <a:pPr>
+              <a:spcAft>
+                <a:spcPts val="900"/>
+              </a:spcAft>
+              <a:defRPr sz="2200">
+                <a:solidFill>
+                  <a:srgbClr val="FFFFFF"/>
+                </a:solidFill>
+                <a:latin typeface="Aptos"/>
+              </a:defRPr>
+            </a:pPr>
+            <a:r>
+              <a:t>•  \* multiplicación</a:t>
+            </a:r>
+          </a:p>
+          <a:p>
+            <a:pPr>
+              <a:spcAft>
+                <a:spcPts val="900"/>
+              </a:spcAft>
+              <a:defRPr sz="2200">
+                <a:solidFill>
+                  <a:srgbClr val="FFFFFF"/>
+                </a:solidFill>
+                <a:latin typeface="Aptos"/>
+              </a:defRPr>
+            </a:pPr>
+            <a:r>
+              <a:t>•  / división o cociente</a:t>
             </a:r>
           </a:p>
         </p:txBody>
@@ -5432,7 +6208,7 @@
               </a:defRPr>
             </a:pPr>
             <a:r>
-              <a:t>Actividad central</a:t>
+              <a:t>Actividad central · 1</a:t>
             </a:r>
           </a:p>
         </p:txBody>
@@ -5511,7 +6287,7 @@
               </a:defRPr>
             </a:pPr>
             <a:r>
-              <a:t>MiniJarvis · 1.º DAW · Sesión 211 · H1</a:t>
+              <a:t>MiniJarvis · 1.º DAW · Sesión 211 · H1 — Primer MiniJarvis</a:t>
             </a:r>
           </a:p>
         </p:txBody>
@@ -5525,7 +6301,7 @@
         <p:spPr>
           <a:xfrm>
             <a:off x="658368" y="1307592"/>
-            <a:ext cx="10835640" cy="2226564"/>
+            <a:ext cx="10835640" cy="1049274"/>
           </a:xfrm>
           <a:prstGeom prst="roundRect">
             <a:avLst/>
@@ -5606,7 +6382,7 @@
         <p:spPr>
           <a:xfrm>
             <a:off x="1664208" y="1417319"/>
-            <a:ext cx="9464040" cy="2007108"/>
+            <a:ext cx="9464040" cy="829818"/>
           </a:xfrm>
           <a:prstGeom prst="rect">
             <a:avLst/>
@@ -5628,7 +6404,7 @@
               </a:defRPr>
             </a:pPr>
             <a:r>
-              <a:t>Añadir nombre del asistente y año como constantes.</a:t>
+              <a:t>Predice antes de ejecutar cuando haya código.</a:t>
             </a:r>
           </a:p>
         </p:txBody>
@@ -5641,8 +6417,8 @@
         </p:nvSpPr>
         <p:spPr>
           <a:xfrm>
-            <a:off x="658368" y="3776472"/>
-            <a:ext cx="10835640" cy="2226564"/>
+            <a:off x="658368" y="2542032"/>
+            <a:ext cx="10835640" cy="1049274"/>
           </a:xfrm>
           <a:prstGeom prst="roundRect">
             <a:avLst/>
@@ -5686,7 +6462,7 @@
         </p:nvSpPr>
         <p:spPr>
           <a:xfrm>
-            <a:off x="850392" y="3922776"/>
+            <a:off x="850392" y="2688336"/>
             <a:ext cx="685800" cy="384048"/>
           </a:xfrm>
           <a:prstGeom prst="rect">
@@ -5722,8 +6498,8 @@
         </p:nvSpPr>
         <p:spPr>
           <a:xfrm>
-            <a:off x="1664208" y="3886200"/>
-            <a:ext cx="9464040" cy="2007108"/>
+            <a:off x="1664208" y="2651760"/>
+            <a:ext cx="9464040" cy="829818"/>
           </a:xfrm>
           <a:prstGeom prst="rect">
             <a:avLst/>
@@ -5745,7 +6521,241 @@
               </a:defRPr>
             </a:pPr>
             <a:r>
-              <a:t>Comprueba y registra la evidencia: Código con al menos una constante bien usada.</a:t>
+              <a:t>Realiza la micropráctica o modificación prevista.</a:t>
+            </a:r>
+          </a:p>
+        </p:txBody>
+      </p:sp>
+      <p:sp>
+        <p:nvSpPr>
+          <p:cNvPr id="14" name="Rounded Rectangle 13"/>
+          <p:cNvSpPr/>
+          <p:nvPr/>
+        </p:nvSpPr>
+        <p:spPr>
+          <a:xfrm>
+            <a:off x="658368" y="3776472"/>
+            <a:ext cx="10835640" cy="1049274"/>
+          </a:xfrm>
+          <a:prstGeom prst="roundRect">
+            <a:avLst/>
+          </a:prstGeom>
+          <a:solidFill>
+            <a:srgbClr val="FFFFFF"/>
+          </a:solidFill>
+          <a:ln>
+            <a:solidFill>
+              <a:srgbClr val="E5E9EF"/>
+            </a:solidFill>
+          </a:ln>
+        </p:spPr>
+        <p:style>
+          <a:lnRef idx="1">
+            <a:schemeClr val="accent1"/>
+          </a:lnRef>
+          <a:fillRef idx="3">
+            <a:schemeClr val="accent1"/>
+          </a:fillRef>
+          <a:effectRef idx="2">
+            <a:schemeClr val="accent1"/>
+          </a:effectRef>
+          <a:fontRef idx="minor">
+            <a:schemeClr val="lt1"/>
+          </a:fontRef>
+        </p:style>
+        <p:txBody>
+          <a:bodyPr rtlCol="0" anchor="ctr"/>
+          <a:lstStyle/>
+          <a:p>
+            <a:pPr algn="ctr"/>
+          </a:p>
+        </p:txBody>
+      </p:sp>
+      <p:sp>
+        <p:nvSpPr>
+          <p:cNvPr id="15" name="TextBox 14"/>
+          <p:cNvSpPr txBox="1"/>
+          <p:nvPr/>
+        </p:nvSpPr>
+        <p:spPr>
+          <a:xfrm>
+            <a:off x="850392" y="3922776"/>
+            <a:ext cx="685800" cy="384048"/>
+          </a:xfrm>
+          <a:prstGeom prst="rect">
+            <a:avLst/>
+          </a:prstGeom>
+          <a:noFill/>
+        </p:spPr>
+        <p:txBody>
+          <a:bodyPr wrap="square" lIns="45720" rIns="45720" tIns="36576" bIns="36576" anchor="t">
+            <a:spAutoFit/>
+          </a:bodyPr>
+          <a:lstStyle/>
+          <a:p>
+            <a:pPr algn="l">
+              <a:defRPr sz="1200" b="1">
+                <a:solidFill>
+                  <a:srgbClr val="2F5BA8"/>
+                </a:solidFill>
+                <a:latin typeface="Aptos"/>
+              </a:defRPr>
+            </a:pPr>
+            <a:r>
+              <a:t>PASO 3</a:t>
+            </a:r>
+          </a:p>
+        </p:txBody>
+      </p:sp>
+      <p:sp>
+        <p:nvSpPr>
+          <p:cNvPr id="16" name="TextBox 15"/>
+          <p:cNvSpPr txBox="1"/>
+          <p:nvPr/>
+        </p:nvSpPr>
+        <p:spPr>
+          <a:xfrm>
+            <a:off x="1664208" y="3886200"/>
+            <a:ext cx="9464040" cy="829818"/>
+          </a:xfrm>
+          <a:prstGeom prst="rect">
+            <a:avLst/>
+          </a:prstGeom>
+          <a:noFill/>
+        </p:spPr>
+        <p:txBody>
+          <a:bodyPr wrap="square" lIns="45720" rIns="45720" tIns="36576" bIns="36576" anchor="t">
+            <a:spAutoFit/>
+          </a:bodyPr>
+          <a:lstStyle/>
+          <a:p>
+            <a:pPr algn="l">
+              <a:defRPr sz="2000" b="0">
+                <a:solidFill>
+                  <a:srgbClr val="1C2330"/>
+                </a:solidFill>
+                <a:latin typeface="Aptos"/>
+              </a:defRPr>
+            </a:pPr>
+            <a:r>
+              <a:t>Prueba el caso normal y, cuando exista una decisión o conversión, también el caso alternativo o erróneo.</a:t>
+            </a:r>
+          </a:p>
+        </p:txBody>
+      </p:sp>
+      <p:sp>
+        <p:nvSpPr>
+          <p:cNvPr id="17" name="Rounded Rectangle 16"/>
+          <p:cNvSpPr/>
+          <p:nvPr/>
+        </p:nvSpPr>
+        <p:spPr>
+          <a:xfrm>
+            <a:off x="658368" y="5010912"/>
+            <a:ext cx="10835640" cy="1049274"/>
+          </a:xfrm>
+          <a:prstGeom prst="roundRect">
+            <a:avLst/>
+          </a:prstGeom>
+          <a:solidFill>
+            <a:srgbClr val="FFFFFF"/>
+          </a:solidFill>
+          <a:ln>
+            <a:solidFill>
+              <a:srgbClr val="E5E9EF"/>
+            </a:solidFill>
+          </a:ln>
+        </p:spPr>
+        <p:style>
+          <a:lnRef idx="1">
+            <a:schemeClr val="accent1"/>
+          </a:lnRef>
+          <a:fillRef idx="3">
+            <a:schemeClr val="accent1"/>
+          </a:fillRef>
+          <a:effectRef idx="2">
+            <a:schemeClr val="accent1"/>
+          </a:effectRef>
+          <a:fontRef idx="minor">
+            <a:schemeClr val="lt1"/>
+          </a:fontRef>
+        </p:style>
+        <p:txBody>
+          <a:bodyPr rtlCol="0" anchor="ctr"/>
+          <a:lstStyle/>
+          <a:p>
+            <a:pPr algn="ctr"/>
+          </a:p>
+        </p:txBody>
+      </p:sp>
+      <p:sp>
+        <p:nvSpPr>
+          <p:cNvPr id="18" name="TextBox 17"/>
+          <p:cNvSpPr txBox="1"/>
+          <p:nvPr/>
+        </p:nvSpPr>
+        <p:spPr>
+          <a:xfrm>
+            <a:off x="850392" y="5157216"/>
+            <a:ext cx="685800" cy="384048"/>
+          </a:xfrm>
+          <a:prstGeom prst="rect">
+            <a:avLst/>
+          </a:prstGeom>
+          <a:noFill/>
+        </p:spPr>
+        <p:txBody>
+          <a:bodyPr wrap="square" lIns="45720" rIns="45720" tIns="36576" bIns="36576" anchor="t">
+            <a:spAutoFit/>
+          </a:bodyPr>
+          <a:lstStyle/>
+          <a:p>
+            <a:pPr algn="l">
+              <a:defRPr sz="1200" b="1">
+                <a:solidFill>
+                  <a:srgbClr val="2F5BA8"/>
+                </a:solidFill>
+                <a:latin typeface="Aptos"/>
+              </a:defRPr>
+            </a:pPr>
+            <a:r>
+              <a:t>PASO 4</a:t>
+            </a:r>
+          </a:p>
+        </p:txBody>
+      </p:sp>
+      <p:sp>
+        <p:nvSpPr>
+          <p:cNvPr id="19" name="TextBox 18"/>
+          <p:cNvSpPr txBox="1"/>
+          <p:nvPr/>
+        </p:nvSpPr>
+        <p:spPr>
+          <a:xfrm>
+            <a:off x="1664208" y="5120640"/>
+            <a:ext cx="9464040" cy="829818"/>
+          </a:xfrm>
+          <a:prstGeom prst="rect">
+            <a:avLst/>
+          </a:prstGeom>
+          <a:noFill/>
+        </p:spPr>
+        <p:txBody>
+          <a:bodyPr wrap="square" lIns="45720" rIns="45720" tIns="36576" bIns="36576" anchor="t">
+            <a:spAutoFit/>
+          </a:bodyPr>
+          <a:lstStyle/>
+          <a:p>
+            <a:pPr algn="l">
+              <a:defRPr sz="2000" b="0">
+                <a:solidFill>
+                  <a:srgbClr val="1C2330"/>
+                </a:solidFill>
+                <a:latin typeface="Aptos"/>
+              </a:defRPr>
+            </a:pPr>
+            <a:r>
+              <a:t>Conserva el código o resultado en el repositorio o espacio indicado.</a:t>
             </a:r>
           </a:p>
         </p:txBody>
@@ -5885,7 +6895,7 @@
               </a:defRPr>
             </a:pPr>
             <a:r>
-              <a:t>COMPROBAR</a:t>
+              <a:t>APLICAR Y DECIDIR</a:t>
             </a:r>
           </a:p>
         </p:txBody>
@@ -5921,7 +6931,7 @@
               </a:defRPr>
             </a:pPr>
             <a:r>
-              <a:t>Evidencia y comprobación</a:t>
+              <a:t>Actividad central · 2</a:t>
             </a:r>
           </a:p>
         </p:txBody>
@@ -6000,7 +7010,7 @@
               </a:defRPr>
             </a:pPr>
             <a:r>
-              <a:t>MiniJarvis · 1.º DAW · Sesión 211 · H1</a:t>
+              <a:t>MiniJarvis · 1.º DAW · Sesión 211 · H1 — Primer MiniJarvis</a:t>
             </a:r>
           </a:p>
         </p:txBody>
@@ -6013,8 +7023,8 @@
         </p:nvSpPr>
         <p:spPr>
           <a:xfrm>
-            <a:off x="713232" y="1298448"/>
-            <a:ext cx="420624" cy="420624"/>
+            <a:off x="658368" y="1307592"/>
+            <a:ext cx="10835640" cy="2226564"/>
           </a:xfrm>
           <a:prstGeom prst="roundRect">
             <a:avLst/>
@@ -6024,7 +7034,7 @@
           </a:solidFill>
           <a:ln>
             <a:solidFill>
-              <a:srgbClr val="2F5BA8"/>
+              <a:srgbClr val="E5E9EF"/>
             </a:solidFill>
           </a:ln>
         </p:spPr>
@@ -6058,8 +7068,8 @@
         </p:nvSpPr>
         <p:spPr>
           <a:xfrm>
-            <a:off x="1389888" y="1280160"/>
-            <a:ext cx="9829800" cy="960120"/>
+            <a:off x="850392" y="1453895"/>
+            <a:ext cx="685800" cy="384048"/>
           </a:xfrm>
           <a:prstGeom prst="rect">
             <a:avLst/>
@@ -6073,7 +7083,43 @@
           <a:lstStyle/>
           <a:p>
             <a:pPr algn="l">
-              <a:defRPr sz="1900" b="0">
+              <a:defRPr sz="1200" b="1">
+                <a:solidFill>
+                  <a:srgbClr val="2F5BA8"/>
+                </a:solidFill>
+                <a:latin typeface="Aptos"/>
+              </a:defRPr>
+            </a:pPr>
+            <a:r>
+              <a:t>PASO 6</a:t>
+            </a:r>
+          </a:p>
+        </p:txBody>
+      </p:sp>
+      <p:sp>
+        <p:nvSpPr>
+          <p:cNvPr id="10" name="TextBox 9"/>
+          <p:cNvSpPr txBox="1"/>
+          <p:nvPr/>
+        </p:nvSpPr>
+        <p:spPr>
+          <a:xfrm>
+            <a:off x="1664208" y="1417319"/>
+            <a:ext cx="9464040" cy="2007108"/>
+          </a:xfrm>
+          <a:prstGeom prst="rect">
+            <a:avLst/>
+          </a:prstGeom>
+          <a:noFill/>
+        </p:spPr>
+        <p:txBody>
+          <a:bodyPr wrap="square" lIns="45720" rIns="45720" tIns="36576" bIns="36576" anchor="t">
+            <a:spAutoFit/>
+          </a:bodyPr>
+          <a:lstStyle/>
+          <a:p>
+            <a:pPr algn="l">
+              <a:defRPr sz="2000" b="0">
                 <a:solidFill>
                   <a:srgbClr val="1C2330"/>
                 </a:solidFill>
@@ -6081,21 +7127,21 @@
               </a:defRPr>
             </a:pPr>
             <a:r>
-              <a:t>He producido o actualizado: Código con al menos una constante bien usada.</a:t>
-            </a:r>
-          </a:p>
-        </p:txBody>
-      </p:sp>
-      <p:sp>
-        <p:nvSpPr>
-          <p:cNvPr id="10" name="Rounded Rectangle 9"/>
+              <a:t>Registra una sola entrada en el diario individual; no crees un informe paralelo.</a:t>
+            </a:r>
+          </a:p>
+        </p:txBody>
+      </p:sp>
+      <p:sp>
+        <p:nvSpPr>
+          <p:cNvPr id="11" name="Rounded Rectangle 10"/>
           <p:cNvSpPr/>
           <p:nvPr/>
         </p:nvSpPr>
         <p:spPr>
           <a:xfrm>
-            <a:off x="713232" y="2295144"/>
-            <a:ext cx="420624" cy="420624"/>
+            <a:off x="658368" y="3776472"/>
+            <a:ext cx="10835640" cy="2226564"/>
           </a:xfrm>
           <a:prstGeom prst="roundRect">
             <a:avLst/>
@@ -6105,7 +7151,7 @@
           </a:solidFill>
           <a:ln>
             <a:solidFill>
-              <a:srgbClr val="2F5BA8"/>
+              <a:srgbClr val="E5E9EF"/>
             </a:solidFill>
           </a:ln>
         </p:spPr>
@@ -6133,14 +7179,14 @@
       </p:sp>
       <p:sp>
         <p:nvSpPr>
-          <p:cNvPr id="11" name="TextBox 10"/>
+          <p:cNvPr id="12" name="TextBox 11"/>
           <p:cNvSpPr txBox="1"/>
           <p:nvPr/>
         </p:nvSpPr>
         <p:spPr>
           <a:xfrm>
-            <a:off x="1389888" y="2276856"/>
-            <a:ext cx="9829800" cy="960120"/>
+            <a:off x="850392" y="3922776"/>
+            <a:ext cx="685800" cy="384048"/>
           </a:xfrm>
           <a:prstGeom prst="rect">
             <a:avLst/>
@@ -6154,7 +7200,43 @@
           <a:lstStyle/>
           <a:p>
             <a:pPr algn="l">
-              <a:defRPr sz="1900" b="0">
+              <a:defRPr sz="1200" b="1">
+                <a:solidFill>
+                  <a:srgbClr val="2F5BA8"/>
+                </a:solidFill>
+                <a:latin typeface="Aptos"/>
+              </a:defRPr>
+            </a:pPr>
+            <a:r>
+              <a:t>PASO 7</a:t>
+            </a:r>
+          </a:p>
+        </p:txBody>
+      </p:sp>
+      <p:sp>
+        <p:nvSpPr>
+          <p:cNvPr id="13" name="TextBox 12"/>
+          <p:cNvSpPr txBox="1"/>
+          <p:nvPr/>
+        </p:nvSpPr>
+        <p:spPr>
+          <a:xfrm>
+            <a:off x="1664208" y="3886200"/>
+            <a:ext cx="9464040" cy="2007108"/>
+          </a:xfrm>
+          <a:prstGeom prst="rect">
+            <a:avLst/>
+          </a:prstGeom>
+          <a:noFill/>
+        </p:spPr>
+        <p:txBody>
+          <a:bodyPr wrap="square" lIns="45720" rIns="45720" tIns="36576" bIns="36576" anchor="t">
+            <a:spAutoFit/>
+          </a:bodyPr>
+          <a:lstStyle/>
+          <a:p>
+            <a:pPr algn="l">
+              <a:defRPr sz="2000" b="0">
                 <a:solidFill>
                   <a:srgbClr val="1C2330"/>
                 </a:solidFill>
@@ -6162,250 +7244,7 @@
               </a:defRPr>
             </a:pPr>
             <a:r>
-              <a:t>Puedo señalar dónde está.</a:t>
-            </a:r>
-          </a:p>
-        </p:txBody>
-      </p:sp>
-      <p:sp>
-        <p:nvSpPr>
-          <p:cNvPr id="12" name="Rounded Rectangle 11"/>
-          <p:cNvSpPr/>
-          <p:nvPr/>
-        </p:nvSpPr>
-        <p:spPr>
-          <a:xfrm>
-            <a:off x="713232" y="3291839"/>
-            <a:ext cx="420624" cy="420624"/>
-          </a:xfrm>
-          <a:prstGeom prst="roundRect">
-            <a:avLst/>
-          </a:prstGeom>
-          <a:solidFill>
-            <a:srgbClr val="FFFFFF"/>
-          </a:solidFill>
-          <a:ln>
-            <a:solidFill>
-              <a:srgbClr val="2F5BA8"/>
-            </a:solidFill>
-          </a:ln>
-        </p:spPr>
-        <p:style>
-          <a:lnRef idx="1">
-            <a:schemeClr val="accent1"/>
-          </a:lnRef>
-          <a:fillRef idx="3">
-            <a:schemeClr val="accent1"/>
-          </a:fillRef>
-          <a:effectRef idx="2">
-            <a:schemeClr val="accent1"/>
-          </a:effectRef>
-          <a:fontRef idx="minor">
-            <a:schemeClr val="lt1"/>
-          </a:fontRef>
-        </p:style>
-        <p:txBody>
-          <a:bodyPr rtlCol="0" anchor="ctr"/>
-          <a:lstStyle/>
-          <a:p>
-            <a:pPr algn="ctr"/>
-          </a:p>
-        </p:txBody>
-      </p:sp>
-      <p:sp>
-        <p:nvSpPr>
-          <p:cNvPr id="13" name="TextBox 12"/>
-          <p:cNvSpPr txBox="1"/>
-          <p:nvPr/>
-        </p:nvSpPr>
-        <p:spPr>
-          <a:xfrm>
-            <a:off x="1389888" y="3273551"/>
-            <a:ext cx="9829800" cy="960120"/>
-          </a:xfrm>
-          <a:prstGeom prst="rect">
-            <a:avLst/>
-          </a:prstGeom>
-          <a:noFill/>
-        </p:spPr>
-        <p:txBody>
-          <a:bodyPr wrap="square" lIns="45720" rIns="45720" tIns="36576" bIns="36576" anchor="t">
-            <a:spAutoFit/>
-          </a:bodyPr>
-          <a:lstStyle/>
-          <a:p>
-            <a:pPr algn="l">
-              <a:defRPr sz="1900" b="0">
-                <a:solidFill>
-                  <a:srgbClr val="1C2330"/>
-                </a:solidFill>
-                <a:latin typeface="Aptos"/>
-              </a:defRPr>
-            </a:pPr>
-            <a:r>
-              <a:t>Puedo explicar una decisión tomada.</a:t>
-            </a:r>
-          </a:p>
-        </p:txBody>
-      </p:sp>
-      <p:sp>
-        <p:nvSpPr>
-          <p:cNvPr id="14" name="Rounded Rectangle 13"/>
-          <p:cNvSpPr/>
-          <p:nvPr/>
-        </p:nvSpPr>
-        <p:spPr>
-          <a:xfrm>
-            <a:off x="713232" y="4288536"/>
-            <a:ext cx="420624" cy="420624"/>
-          </a:xfrm>
-          <a:prstGeom prst="roundRect">
-            <a:avLst/>
-          </a:prstGeom>
-          <a:solidFill>
-            <a:srgbClr val="FFFFFF"/>
-          </a:solidFill>
-          <a:ln>
-            <a:solidFill>
-              <a:srgbClr val="2F5BA8"/>
-            </a:solidFill>
-          </a:ln>
-        </p:spPr>
-        <p:style>
-          <a:lnRef idx="1">
-            <a:schemeClr val="accent1"/>
-          </a:lnRef>
-          <a:fillRef idx="3">
-            <a:schemeClr val="accent1"/>
-          </a:fillRef>
-          <a:effectRef idx="2">
-            <a:schemeClr val="accent1"/>
-          </a:effectRef>
-          <a:fontRef idx="minor">
-            <a:schemeClr val="lt1"/>
-          </a:fontRef>
-        </p:style>
-        <p:txBody>
-          <a:bodyPr rtlCol="0" anchor="ctr"/>
-          <a:lstStyle/>
-          <a:p>
-            <a:pPr algn="ctr"/>
-          </a:p>
-        </p:txBody>
-      </p:sp>
-      <p:sp>
-        <p:nvSpPr>
-          <p:cNvPr id="15" name="TextBox 14"/>
-          <p:cNvSpPr txBox="1"/>
-          <p:nvPr/>
-        </p:nvSpPr>
-        <p:spPr>
-          <a:xfrm>
-            <a:off x="1389888" y="4270248"/>
-            <a:ext cx="9829800" cy="960120"/>
-          </a:xfrm>
-          <a:prstGeom prst="rect">
-            <a:avLst/>
-          </a:prstGeom>
-          <a:noFill/>
-        </p:spPr>
-        <p:txBody>
-          <a:bodyPr wrap="square" lIns="45720" rIns="45720" tIns="36576" bIns="36576" anchor="t">
-            <a:spAutoFit/>
-          </a:bodyPr>
-          <a:lstStyle/>
-          <a:p>
-            <a:pPr algn="l">
-              <a:defRPr sz="1900" b="0">
-                <a:solidFill>
-                  <a:srgbClr val="1C2330"/>
-                </a:solidFill>
-                <a:latin typeface="Aptos"/>
-              </a:defRPr>
-            </a:pPr>
-            <a:r>
-              <a:t>Puedo mostrar una prueba o comprobación.</a:t>
-            </a:r>
-          </a:p>
-        </p:txBody>
-      </p:sp>
-      <p:sp>
-        <p:nvSpPr>
-          <p:cNvPr id="16" name="Rounded Rectangle 15"/>
-          <p:cNvSpPr/>
-          <p:nvPr/>
-        </p:nvSpPr>
-        <p:spPr>
-          <a:xfrm>
-            <a:off x="713232" y="5285231"/>
-            <a:ext cx="420624" cy="420624"/>
-          </a:xfrm>
-          <a:prstGeom prst="roundRect">
-            <a:avLst/>
-          </a:prstGeom>
-          <a:solidFill>
-            <a:srgbClr val="FFFFFF"/>
-          </a:solidFill>
-          <a:ln>
-            <a:solidFill>
-              <a:srgbClr val="2F5BA8"/>
-            </a:solidFill>
-          </a:ln>
-        </p:spPr>
-        <p:style>
-          <a:lnRef idx="1">
-            <a:schemeClr val="accent1"/>
-          </a:lnRef>
-          <a:fillRef idx="3">
-            <a:schemeClr val="accent1"/>
-          </a:fillRef>
-          <a:effectRef idx="2">
-            <a:schemeClr val="accent1"/>
-          </a:effectRef>
-          <a:fontRef idx="minor">
-            <a:schemeClr val="lt1"/>
-          </a:fontRef>
-        </p:style>
-        <p:txBody>
-          <a:bodyPr rtlCol="0" anchor="ctr"/>
-          <a:lstStyle/>
-          <a:p>
-            <a:pPr algn="ctr"/>
-          </a:p>
-        </p:txBody>
-      </p:sp>
-      <p:sp>
-        <p:nvSpPr>
-          <p:cNvPr id="17" name="TextBox 16"/>
-          <p:cNvSpPr txBox="1"/>
-          <p:nvPr/>
-        </p:nvSpPr>
-        <p:spPr>
-          <a:xfrm>
-            <a:off x="1389888" y="5266944"/>
-            <a:ext cx="9829800" cy="960120"/>
-          </a:xfrm>
-          <a:prstGeom prst="rect">
-            <a:avLst/>
-          </a:prstGeom>
-          <a:noFill/>
-        </p:spPr>
-        <p:txBody>
-          <a:bodyPr wrap="square" lIns="45720" rIns="45720" tIns="36576" bIns="36576" anchor="t">
-            <a:spAutoFit/>
-          </a:bodyPr>
-          <a:lstStyle/>
-          <a:p>
-            <a:pPr algn="l">
-              <a:defRPr sz="1900" b="0">
-                <a:solidFill>
-                  <a:srgbClr val="1C2330"/>
-                </a:solidFill>
-                <a:latin typeface="Aptos"/>
-              </a:defRPr>
-            </a:pPr>
-            <a:r>
-              <a:t>He registrado mi aportación individual si el trabajo era de equipo.</a:t>
+              <a:t>¿Qué puedes señalar, explicar y probar al terminar este checkpoint?</a:t>
             </a:r>
           </a:p>
         </p:txBody>
@@ -6545,7 +7384,7 @@
               </a:defRPr>
             </a:pPr>
             <a:r>
-              <a:t>LÍMITES QUE PROTEGEN EL APRENDIZAJE</a:t>
+              <a:t>COMPROBAR</a:t>
             </a:r>
           </a:p>
         </p:txBody>
@@ -6581,7 +7420,7 @@
               </a:defRPr>
             </a:pPr>
             <a:r>
-              <a:t>Seguridad y uso responsable</a:t>
+              <a:t>Evidencia y comprobación</a:t>
             </a:r>
           </a:p>
         </p:txBody>
@@ -6660,7 +7499,7 @@
               </a:defRPr>
             </a:pPr>
             <a:r>
-              <a:t>MiniJarvis · 1.º DAW · Sesión 211 · H1</a:t>
+              <a:t>MiniJarvis · 1.º DAW · Sesión 211 · H1 — Primer MiniJarvis</a:t>
             </a:r>
           </a:p>
         </p:txBody>
@@ -6673,8 +7512,8 @@
         </p:nvSpPr>
         <p:spPr>
           <a:xfrm>
-            <a:off x="621792" y="1298448"/>
-            <a:ext cx="5230368" cy="2176272"/>
+            <a:off x="713232" y="1298448"/>
+            <a:ext cx="420624" cy="420624"/>
           </a:xfrm>
           <a:prstGeom prst="roundRect">
             <a:avLst/>
@@ -6684,7 +7523,7 @@
           </a:solidFill>
           <a:ln>
             <a:solidFill>
-              <a:srgbClr val="E5E9EF"/>
+              <a:srgbClr val="2F5BA8"/>
             </a:solidFill>
           </a:ln>
         </p:spPr>
@@ -6712,57 +7551,14 @@
       </p:sp>
       <p:sp>
         <p:nvSpPr>
-          <p:cNvPr id="9" name="Rounded Rectangle 8"/>
-          <p:cNvSpPr/>
-          <p:nvPr/>
-        </p:nvSpPr>
-        <p:spPr>
-          <a:xfrm>
-            <a:off x="841248" y="1527048"/>
-            <a:ext cx="237744" cy="1719072"/>
-          </a:xfrm>
-          <a:prstGeom prst="roundRect">
-            <a:avLst/>
-          </a:prstGeom>
-          <a:solidFill>
-            <a:srgbClr val="247E5C"/>
-          </a:solidFill>
-          <a:ln>
-            <a:noFill/>
-          </a:ln>
-        </p:spPr>
-        <p:style>
-          <a:lnRef idx="1">
-            <a:schemeClr val="accent1"/>
-          </a:lnRef>
-          <a:fillRef idx="3">
-            <a:schemeClr val="accent1"/>
-          </a:fillRef>
-          <a:effectRef idx="2">
-            <a:schemeClr val="accent1"/>
-          </a:effectRef>
-          <a:fontRef idx="minor">
-            <a:schemeClr val="lt1"/>
-          </a:fontRef>
-        </p:style>
-        <p:txBody>
-          <a:bodyPr rtlCol="0" anchor="ctr"/>
-          <a:lstStyle/>
-          <a:p>
-            <a:pPr algn="ctr"/>
-          </a:p>
-        </p:txBody>
-      </p:sp>
-      <p:sp>
-        <p:nvSpPr>
-          <p:cNvPr id="10" name="TextBox 9"/>
+          <p:cNvPr id="9" name="TextBox 8"/>
           <p:cNvSpPr txBox="1"/>
           <p:nvPr/>
         </p:nvSpPr>
         <p:spPr>
           <a:xfrm>
-            <a:off x="1280160" y="1527048"/>
-            <a:ext cx="4224528" cy="1783080"/>
+            <a:off x="1389888" y="1280160"/>
+            <a:ext cx="9829800" cy="1624584"/>
           </a:xfrm>
           <a:prstGeom prst="rect">
             <a:avLst/>
@@ -6784,21 +7580,21 @@
               </a:defRPr>
             </a:pPr>
             <a:r>
-              <a:t>Trabaja únicamente con datos ficticios.</a:t>
-            </a:r>
-          </a:p>
-        </p:txBody>
-      </p:sp>
-      <p:sp>
-        <p:nvSpPr>
-          <p:cNvPr id="11" name="Rounded Rectangle 10"/>
+              <a:t>conserva el código o la prueba en el lugar indicado por la sesión;</a:t>
+            </a:r>
+          </a:p>
+        </p:txBody>
+      </p:sp>
+      <p:sp>
+        <p:nvSpPr>
+          <p:cNvPr id="10" name="Rounded Rectangle 9"/>
           <p:cNvSpPr/>
           <p:nvPr/>
         </p:nvSpPr>
         <p:spPr>
           <a:xfrm>
-            <a:off x="6126479" y="1298448"/>
-            <a:ext cx="5230368" cy="2176272"/>
+            <a:off x="713232" y="2959607"/>
+            <a:ext cx="420624" cy="420624"/>
           </a:xfrm>
           <a:prstGeom prst="roundRect">
             <a:avLst/>
@@ -6808,7 +7604,7 @@
           </a:solidFill>
           <a:ln>
             <a:solidFill>
-              <a:srgbClr val="E5E9EF"/>
+              <a:srgbClr val="2F5BA8"/>
             </a:solidFill>
           </a:ln>
         </p:spPr>
@@ -6836,57 +7632,14 @@
       </p:sp>
       <p:sp>
         <p:nvSpPr>
-          <p:cNvPr id="12" name="Rounded Rectangle 11"/>
-          <p:cNvSpPr/>
-          <p:nvPr/>
-        </p:nvSpPr>
-        <p:spPr>
-          <a:xfrm>
-            <a:off x="6345936" y="1527048"/>
-            <a:ext cx="237744" cy="1719072"/>
-          </a:xfrm>
-          <a:prstGeom prst="roundRect">
-            <a:avLst/>
-          </a:prstGeom>
-          <a:solidFill>
-            <a:srgbClr val="C07020"/>
-          </a:solidFill>
-          <a:ln>
-            <a:noFill/>
-          </a:ln>
-        </p:spPr>
-        <p:style>
-          <a:lnRef idx="1">
-            <a:schemeClr val="accent1"/>
-          </a:lnRef>
-          <a:fillRef idx="3">
-            <a:schemeClr val="accent1"/>
-          </a:fillRef>
-          <a:effectRef idx="2">
-            <a:schemeClr val="accent1"/>
-          </a:effectRef>
-          <a:fontRef idx="minor">
-            <a:schemeClr val="lt1"/>
-          </a:fontRef>
-        </p:style>
-        <p:txBody>
-          <a:bodyPr rtlCol="0" anchor="ctr"/>
-          <a:lstStyle/>
-          <a:p>
-            <a:pPr algn="ctr"/>
-          </a:p>
-        </p:txBody>
-      </p:sp>
-      <p:sp>
-        <p:nvSpPr>
-          <p:cNvPr id="13" name="TextBox 12"/>
+          <p:cNvPr id="11" name="TextBox 10"/>
           <p:cNvSpPr txBox="1"/>
           <p:nvPr/>
         </p:nvSpPr>
         <p:spPr>
           <a:xfrm>
-            <a:off x="6784847" y="1527048"/>
-            <a:ext cx="4224528" cy="1783080"/>
+            <a:off x="1389888" y="2941319"/>
+            <a:ext cx="9829800" cy="1624584"/>
           </a:xfrm>
           <a:prstGeom prst="rect">
             <a:avLst/>
@@ -6908,21 +7661,21 @@
               </a:defRPr>
             </a:pPr>
             <a:r>
-              <a:t>No escribas contraseñas, tokens, claves API ni datos personales.</a:t>
-            </a:r>
-          </a:p>
-        </p:txBody>
-      </p:sp>
-      <p:sp>
-        <p:nvSpPr>
-          <p:cNvPr id="14" name="Rounded Rectangle 13"/>
+              <a:t>añade una sola entrada al diario individual con prueba, bloqueo y siguiente paso;</a:t>
+            </a:r>
+          </a:p>
+        </p:txBody>
+      </p:sp>
+      <p:sp>
+        <p:nvSpPr>
+          <p:cNvPr id="12" name="Rounded Rectangle 11"/>
           <p:cNvSpPr/>
           <p:nvPr/>
         </p:nvSpPr>
         <p:spPr>
           <a:xfrm>
-            <a:off x="621792" y="3675887"/>
-            <a:ext cx="5230368" cy="2176272"/>
+            <a:off x="713232" y="4620767"/>
+            <a:ext cx="420624" cy="420624"/>
           </a:xfrm>
           <a:prstGeom prst="roundRect">
             <a:avLst/>
@@ -6932,7 +7685,7 @@
           </a:solidFill>
           <a:ln>
             <a:solidFill>
-              <a:srgbClr val="E5E9EF"/>
+              <a:srgbClr val="2F5BA8"/>
             </a:solidFill>
           </a:ln>
         </p:spPr>
@@ -6960,57 +7713,14 @@
       </p:sp>
       <p:sp>
         <p:nvSpPr>
-          <p:cNvPr id="15" name="Rounded Rectangle 14"/>
-          <p:cNvSpPr/>
-          <p:nvPr/>
-        </p:nvSpPr>
-        <p:spPr>
-          <a:xfrm>
-            <a:off x="841248" y="3904487"/>
-            <a:ext cx="237744" cy="1719072"/>
-          </a:xfrm>
-          <a:prstGeom prst="roundRect">
-            <a:avLst/>
-          </a:prstGeom>
-          <a:solidFill>
-            <a:srgbClr val="B13A3A"/>
-          </a:solidFill>
-          <a:ln>
-            <a:noFill/>
-          </a:ln>
-        </p:spPr>
-        <p:style>
-          <a:lnRef idx="1">
-            <a:schemeClr val="accent1"/>
-          </a:lnRef>
-          <a:fillRef idx="3">
-            <a:schemeClr val="accent1"/>
-          </a:fillRef>
-          <a:effectRef idx="2">
-            <a:schemeClr val="accent1"/>
-          </a:effectRef>
-          <a:fontRef idx="minor">
-            <a:schemeClr val="lt1"/>
-          </a:fontRef>
-        </p:style>
-        <p:txBody>
-          <a:bodyPr rtlCol="0" anchor="ctr"/>
-          <a:lstStyle/>
-          <a:p>
-            <a:pPr algn="ctr"/>
-          </a:p>
-        </p:txBody>
-      </p:sp>
-      <p:sp>
-        <p:nvSpPr>
-          <p:cNvPr id="16" name="TextBox 15"/>
+          <p:cNvPr id="13" name="TextBox 12"/>
           <p:cNvSpPr txBox="1"/>
           <p:nvPr/>
         </p:nvSpPr>
         <p:spPr>
           <a:xfrm>
-            <a:off x="1280160" y="3904487"/>
-            <a:ext cx="4224528" cy="1783080"/>
+            <a:off x="1389888" y="4602480"/>
+            <a:ext cx="9829800" cy="1624584"/>
           </a:xfrm>
           <a:prstGeom prst="rect">
             <a:avLst/>
@@ -7032,131 +7742,7 @@
               </a:defRPr>
             </a:pPr>
             <a:r>
-              <a:t>Si utilizas IA en un uso permitido, registra qué pediste, qué recibiste, qué cambiaste y cómo lo comprobaste.</a:t>
-            </a:r>
-          </a:p>
-        </p:txBody>
-      </p:sp>
-      <p:sp>
-        <p:nvSpPr>
-          <p:cNvPr id="17" name="Rounded Rectangle 16"/>
-          <p:cNvSpPr/>
-          <p:nvPr/>
-        </p:nvSpPr>
-        <p:spPr>
-          <a:xfrm>
-            <a:off x="6126479" y="3675887"/>
-            <a:ext cx="5230368" cy="2176272"/>
-          </a:xfrm>
-          <a:prstGeom prst="roundRect">
-            <a:avLst/>
-          </a:prstGeom>
-          <a:solidFill>
-            <a:srgbClr val="FFFFFF"/>
-          </a:solidFill>
-          <a:ln>
-            <a:solidFill>
-              <a:srgbClr val="E5E9EF"/>
-            </a:solidFill>
-          </a:ln>
-        </p:spPr>
-        <p:style>
-          <a:lnRef idx="1">
-            <a:schemeClr val="accent1"/>
-          </a:lnRef>
-          <a:fillRef idx="3">
-            <a:schemeClr val="accent1"/>
-          </a:fillRef>
-          <a:effectRef idx="2">
-            <a:schemeClr val="accent1"/>
-          </a:effectRef>
-          <a:fontRef idx="minor">
-            <a:schemeClr val="lt1"/>
-          </a:fontRef>
-        </p:style>
-        <p:txBody>
-          <a:bodyPr rtlCol="0" anchor="ctr"/>
-          <a:lstStyle/>
-          <a:p>
-            <a:pPr algn="ctr"/>
-          </a:p>
-        </p:txBody>
-      </p:sp>
-      <p:sp>
-        <p:nvSpPr>
-          <p:cNvPr id="18" name="Rounded Rectangle 17"/>
-          <p:cNvSpPr/>
-          <p:nvPr/>
-        </p:nvSpPr>
-        <p:spPr>
-          <a:xfrm>
-            <a:off x="6345936" y="3904487"/>
-            <a:ext cx="237744" cy="1719072"/>
-          </a:xfrm>
-          <a:prstGeom prst="roundRect">
-            <a:avLst/>
-          </a:prstGeom>
-          <a:solidFill>
-            <a:srgbClr val="2F5BA8"/>
-          </a:solidFill>
-          <a:ln>
-            <a:noFill/>
-          </a:ln>
-        </p:spPr>
-        <p:style>
-          <a:lnRef idx="1">
-            <a:schemeClr val="accent1"/>
-          </a:lnRef>
-          <a:fillRef idx="3">
-            <a:schemeClr val="accent1"/>
-          </a:fillRef>
-          <a:effectRef idx="2">
-            <a:schemeClr val="accent1"/>
-          </a:effectRef>
-          <a:fontRef idx="minor">
-            <a:schemeClr val="lt1"/>
-          </a:fontRef>
-        </p:style>
-        <p:txBody>
-          <a:bodyPr rtlCol="0" anchor="ctr"/>
-          <a:lstStyle/>
-          <a:p>
-            <a:pPr algn="ctr"/>
-          </a:p>
-        </p:txBody>
-      </p:sp>
-      <p:sp>
-        <p:nvSpPr>
-          <p:cNvPr id="19" name="TextBox 18"/>
-          <p:cNvSpPr txBox="1"/>
-          <p:nvPr/>
-        </p:nvSpPr>
-        <p:spPr>
-          <a:xfrm>
-            <a:off x="6784847" y="3904487"/>
-            <a:ext cx="4224528" cy="1783080"/>
-          </a:xfrm>
-          <a:prstGeom prst="rect">
-            <a:avLst/>
-          </a:prstGeom>
-          <a:noFill/>
-        </p:spPr>
-        <p:txBody>
-          <a:bodyPr wrap="square" lIns="45720" rIns="45720" tIns="36576" bIns="36576" anchor="t">
-            <a:spAutoFit/>
-          </a:bodyPr>
-          <a:lstStyle/>
-          <a:p>
-            <a:pPr algn="l">
-              <a:defRPr sz="1900" b="0">
-                <a:solidFill>
-                  <a:srgbClr val="1C2330"/>
-                </a:solidFill>
-                <a:latin typeface="Aptos"/>
-              </a:defRPr>
-            </a:pPr>
-            <a:r>
-              <a:t>Los ejemplos de Laura solo se consultan después del intento propio.</a:t>
+              <a:t>no copies la misma reflexión en otro documento; el Site personal seleccionará evidencias al cerrar H1.</a:t>
             </a:r>
           </a:p>
         </p:txBody>
@@ -7296,7 +7882,7 @@
               </a:defRPr>
             </a:pPr>
             <a:r>
-              <a:t>EXPLICAR Y DEFENDER</a:t>
+              <a:t>LÍMITES QUE PROTEGEN EL APRENDIZAJE</a:t>
             </a:r>
           </a:p>
         </p:txBody>
@@ -7332,7 +7918,7 @@
               </a:defRPr>
             </a:pPr>
             <a:r>
-              <a:t>Cierre y defensa</a:t>
+              <a:t>Seguridad y uso responsable</a:t>
             </a:r>
           </a:p>
         </p:txBody>
@@ -7411,7 +7997,510 @@
               </a:defRPr>
             </a:pPr>
             <a:r>
-              <a:t>MiniJarvis · 1.º DAW · Sesión 211 · H1</a:t>
+              <a:t>MiniJarvis · 1.º DAW · Sesión 211 · H1 — Primer MiniJarvis</a:t>
+            </a:r>
+          </a:p>
+        </p:txBody>
+      </p:sp>
+      <p:sp>
+        <p:nvSpPr>
+          <p:cNvPr id="8" name="Rounded Rectangle 7"/>
+          <p:cNvSpPr/>
+          <p:nvPr/>
+        </p:nvSpPr>
+        <p:spPr>
+          <a:xfrm>
+            <a:off x="621792" y="1298448"/>
+            <a:ext cx="5230368" cy="4553712"/>
+          </a:xfrm>
+          <a:prstGeom prst="roundRect">
+            <a:avLst/>
+          </a:prstGeom>
+          <a:solidFill>
+            <a:srgbClr val="FFFFFF"/>
+          </a:solidFill>
+          <a:ln>
+            <a:solidFill>
+              <a:srgbClr val="E5E9EF"/>
+            </a:solidFill>
+          </a:ln>
+        </p:spPr>
+        <p:style>
+          <a:lnRef idx="1">
+            <a:schemeClr val="accent1"/>
+          </a:lnRef>
+          <a:fillRef idx="3">
+            <a:schemeClr val="accent1"/>
+          </a:fillRef>
+          <a:effectRef idx="2">
+            <a:schemeClr val="accent1"/>
+          </a:effectRef>
+          <a:fontRef idx="minor">
+            <a:schemeClr val="lt1"/>
+          </a:fontRef>
+        </p:style>
+        <p:txBody>
+          <a:bodyPr rtlCol="0" anchor="ctr"/>
+          <a:lstStyle/>
+          <a:p>
+            <a:pPr algn="ctr"/>
+          </a:p>
+        </p:txBody>
+      </p:sp>
+      <p:sp>
+        <p:nvSpPr>
+          <p:cNvPr id="9" name="Rounded Rectangle 8"/>
+          <p:cNvSpPr/>
+          <p:nvPr/>
+        </p:nvSpPr>
+        <p:spPr>
+          <a:xfrm>
+            <a:off x="841248" y="1527048"/>
+            <a:ext cx="237744" cy="4096512"/>
+          </a:xfrm>
+          <a:prstGeom prst="roundRect">
+            <a:avLst/>
+          </a:prstGeom>
+          <a:solidFill>
+            <a:srgbClr val="247E5C"/>
+          </a:solidFill>
+          <a:ln>
+            <a:noFill/>
+          </a:ln>
+        </p:spPr>
+        <p:style>
+          <a:lnRef idx="1">
+            <a:schemeClr val="accent1"/>
+          </a:lnRef>
+          <a:fillRef idx="3">
+            <a:schemeClr val="accent1"/>
+          </a:fillRef>
+          <a:effectRef idx="2">
+            <a:schemeClr val="accent1"/>
+          </a:effectRef>
+          <a:fontRef idx="minor">
+            <a:schemeClr val="lt1"/>
+          </a:fontRef>
+        </p:style>
+        <p:txBody>
+          <a:bodyPr rtlCol="0" anchor="ctr"/>
+          <a:lstStyle/>
+          <a:p>
+            <a:pPr algn="ctr"/>
+          </a:p>
+        </p:txBody>
+      </p:sp>
+      <p:sp>
+        <p:nvSpPr>
+          <p:cNvPr id="10" name="TextBox 9"/>
+          <p:cNvSpPr txBox="1"/>
+          <p:nvPr/>
+        </p:nvSpPr>
+        <p:spPr>
+          <a:xfrm>
+            <a:off x="1280160" y="1527048"/>
+            <a:ext cx="4224528" cy="4160520"/>
+          </a:xfrm>
+          <a:prstGeom prst="rect">
+            <a:avLst/>
+          </a:prstGeom>
+          <a:noFill/>
+        </p:spPr>
+        <p:txBody>
+          <a:bodyPr wrap="square" lIns="45720" rIns="45720" tIns="36576" bIns="36576" anchor="t">
+            <a:spAutoFit/>
+          </a:bodyPr>
+          <a:lstStyle/>
+          <a:p>
+            <a:pPr algn="l">
+              <a:defRPr sz="1900" b="0">
+                <a:solidFill>
+                  <a:srgbClr val="1C2330"/>
+                </a:solidFill>
+                <a:latin typeface="Aptos"/>
+              </a:defRPr>
+            </a:pPr>
+            <a:r>
+              <a:t>Usa datos ficticios y no publiques credenciales ni información personal.</a:t>
+            </a:r>
+          </a:p>
+        </p:txBody>
+      </p:sp>
+      <p:sp>
+        <p:nvSpPr>
+          <p:cNvPr id="11" name="Rounded Rectangle 10"/>
+          <p:cNvSpPr/>
+          <p:nvPr/>
+        </p:nvSpPr>
+        <p:spPr>
+          <a:xfrm>
+            <a:off x="6126479" y="1298448"/>
+            <a:ext cx="5230368" cy="4553712"/>
+          </a:xfrm>
+          <a:prstGeom prst="roundRect">
+            <a:avLst/>
+          </a:prstGeom>
+          <a:solidFill>
+            <a:srgbClr val="FFFFFF"/>
+          </a:solidFill>
+          <a:ln>
+            <a:solidFill>
+              <a:srgbClr val="E5E9EF"/>
+            </a:solidFill>
+          </a:ln>
+        </p:spPr>
+        <p:style>
+          <a:lnRef idx="1">
+            <a:schemeClr val="accent1"/>
+          </a:lnRef>
+          <a:fillRef idx="3">
+            <a:schemeClr val="accent1"/>
+          </a:fillRef>
+          <a:effectRef idx="2">
+            <a:schemeClr val="accent1"/>
+          </a:effectRef>
+          <a:fontRef idx="minor">
+            <a:schemeClr val="lt1"/>
+          </a:fontRef>
+        </p:style>
+        <p:txBody>
+          <a:bodyPr rtlCol="0" anchor="ctr"/>
+          <a:lstStyle/>
+          <a:p>
+            <a:pPr algn="ctr"/>
+          </a:p>
+        </p:txBody>
+      </p:sp>
+      <p:sp>
+        <p:nvSpPr>
+          <p:cNvPr id="12" name="Rounded Rectangle 11"/>
+          <p:cNvSpPr/>
+          <p:nvPr/>
+        </p:nvSpPr>
+        <p:spPr>
+          <a:xfrm>
+            <a:off x="6345936" y="1527048"/>
+            <a:ext cx="237744" cy="4096512"/>
+          </a:xfrm>
+          <a:prstGeom prst="roundRect">
+            <a:avLst/>
+          </a:prstGeom>
+          <a:solidFill>
+            <a:srgbClr val="C07020"/>
+          </a:solidFill>
+          <a:ln>
+            <a:noFill/>
+          </a:ln>
+        </p:spPr>
+        <p:style>
+          <a:lnRef idx="1">
+            <a:schemeClr val="accent1"/>
+          </a:lnRef>
+          <a:fillRef idx="3">
+            <a:schemeClr val="accent1"/>
+          </a:fillRef>
+          <a:effectRef idx="2">
+            <a:schemeClr val="accent1"/>
+          </a:effectRef>
+          <a:fontRef idx="minor">
+            <a:schemeClr val="lt1"/>
+          </a:fontRef>
+        </p:style>
+        <p:txBody>
+          <a:bodyPr rtlCol="0" anchor="ctr"/>
+          <a:lstStyle/>
+          <a:p>
+            <a:pPr algn="ctr"/>
+          </a:p>
+        </p:txBody>
+      </p:sp>
+      <p:sp>
+        <p:nvSpPr>
+          <p:cNvPr id="13" name="TextBox 12"/>
+          <p:cNvSpPr txBox="1"/>
+          <p:nvPr/>
+        </p:nvSpPr>
+        <p:spPr>
+          <a:xfrm>
+            <a:off x="6784847" y="1527048"/>
+            <a:ext cx="4224528" cy="4160520"/>
+          </a:xfrm>
+          <a:prstGeom prst="rect">
+            <a:avLst/>
+          </a:prstGeom>
+          <a:noFill/>
+        </p:spPr>
+        <p:txBody>
+          <a:bodyPr wrap="square" lIns="45720" rIns="45720" tIns="36576" bIns="36576" anchor="t">
+            <a:spAutoFit/>
+          </a:bodyPr>
+          <a:lstStyle/>
+          <a:p>
+            <a:pPr algn="l">
+              <a:defRPr sz="1900" b="0">
+                <a:solidFill>
+                  <a:srgbClr val="1C2330"/>
+                </a:solidFill>
+                <a:latin typeface="Aptos"/>
+              </a:defRPr>
+            </a:pPr>
+            <a:r>
+              <a:t>Si utilizas IA de forma sustantiva, registra propósito, propuesta, cambios propios y validación en el registro de IA del hito.</a:t>
+            </a:r>
+          </a:p>
+        </p:txBody>
+      </p:sp>
+    </p:spTree>
+  </p:cSld>
+  <p:clrMapOvr>
+    <a:masterClrMapping/>
+  </p:clrMapOvr>
+</p:sld>
+</file>
+
+<file path=ppt/slides/slide9.xml><?xml version="1.0" encoding="utf-8"?>
+<p:sld xmlns:a="http://schemas.openxmlformats.org/drawingml/2006/main" xmlns:p="http://schemas.openxmlformats.org/presentationml/2006/main" xmlns:r="http://schemas.openxmlformats.org/officeDocument/2006/relationships">
+  <p:cSld>
+    <p:spTree>
+      <p:nvGrpSpPr>
+        <p:cNvPr id="1" name=""/>
+        <p:cNvGrpSpPr/>
+        <p:nvPr/>
+      </p:nvGrpSpPr>
+      <p:grpSpPr/>
+      <p:sp>
+        <p:nvSpPr>
+          <p:cNvPr id="2" name="Rectangle 1"/>
+          <p:cNvSpPr/>
+          <p:nvPr/>
+        </p:nvSpPr>
+        <p:spPr>
+          <a:xfrm>
+            <a:off x="0" y="0"/>
+            <a:ext cx="12191695" cy="6858000"/>
+          </a:xfrm>
+          <a:prstGeom prst="rect">
+            <a:avLst/>
+          </a:prstGeom>
+          <a:solidFill>
+            <a:srgbClr val="F9F7F2"/>
+          </a:solidFill>
+          <a:ln>
+            <a:noFill/>
+          </a:ln>
+        </p:spPr>
+        <p:style>
+          <a:lnRef idx="1">
+            <a:schemeClr val="accent1"/>
+          </a:lnRef>
+          <a:fillRef idx="3">
+            <a:schemeClr val="accent1"/>
+          </a:fillRef>
+          <a:effectRef idx="2">
+            <a:schemeClr val="accent1"/>
+          </a:effectRef>
+          <a:fontRef idx="minor">
+            <a:schemeClr val="lt1"/>
+          </a:fontRef>
+        </p:style>
+        <p:txBody>
+          <a:bodyPr rtlCol="0" anchor="ctr"/>
+          <a:lstStyle/>
+          <a:p>
+            <a:pPr algn="ctr"/>
+          </a:p>
+        </p:txBody>
+      </p:sp>
+      <p:sp>
+        <p:nvSpPr>
+          <p:cNvPr id="3" name="Rectangle 2"/>
+          <p:cNvSpPr/>
+          <p:nvPr/>
+        </p:nvSpPr>
+        <p:spPr>
+          <a:xfrm>
+            <a:off x="0" y="0"/>
+            <a:ext cx="164592" cy="6858000"/>
+          </a:xfrm>
+          <a:prstGeom prst="rect">
+            <a:avLst/>
+          </a:prstGeom>
+          <a:solidFill>
+            <a:srgbClr val="2F5BA8"/>
+          </a:solidFill>
+          <a:ln>
+            <a:noFill/>
+          </a:ln>
+        </p:spPr>
+        <p:style>
+          <a:lnRef idx="1">
+            <a:schemeClr val="accent1"/>
+          </a:lnRef>
+          <a:fillRef idx="3">
+            <a:schemeClr val="accent1"/>
+          </a:fillRef>
+          <a:effectRef idx="2">
+            <a:schemeClr val="accent1"/>
+          </a:effectRef>
+          <a:fontRef idx="minor">
+            <a:schemeClr val="lt1"/>
+          </a:fontRef>
+        </p:style>
+        <p:txBody>
+          <a:bodyPr rtlCol="0" anchor="ctr"/>
+          <a:lstStyle/>
+          <a:p>
+            <a:pPr algn="ctr"/>
+          </a:p>
+        </p:txBody>
+      </p:sp>
+      <p:sp>
+        <p:nvSpPr>
+          <p:cNvPr id="4" name="TextBox 3"/>
+          <p:cNvSpPr txBox="1"/>
+          <p:nvPr/>
+        </p:nvSpPr>
+        <p:spPr>
+          <a:xfrm>
+            <a:off x="502920" y="274320"/>
+            <a:ext cx="5486400" cy="256032"/>
+          </a:xfrm>
+          <a:prstGeom prst="rect">
+            <a:avLst/>
+          </a:prstGeom>
+          <a:noFill/>
+        </p:spPr>
+        <p:txBody>
+          <a:bodyPr wrap="square" lIns="45720" rIns="45720" tIns="36576" bIns="36576" anchor="t">
+            <a:spAutoFit/>
+          </a:bodyPr>
+          <a:lstStyle/>
+          <a:p>
+            <a:pPr algn="l">
+              <a:defRPr sz="1000" b="1">
+                <a:solidFill>
+                  <a:srgbClr val="2F5BA8"/>
+                </a:solidFill>
+                <a:latin typeface="Aptos"/>
+              </a:defRPr>
+            </a:pPr>
+            <a:r>
+              <a:t>EXPLICAR Y DEFENDER</a:t>
+            </a:r>
+          </a:p>
+        </p:txBody>
+      </p:sp>
+      <p:sp>
+        <p:nvSpPr>
+          <p:cNvPr id="5" name="TextBox 4"/>
+          <p:cNvSpPr txBox="1"/>
+          <p:nvPr/>
+        </p:nvSpPr>
+        <p:spPr>
+          <a:xfrm>
+            <a:off x="502920" y="603504"/>
+            <a:ext cx="11064240" cy="530352"/>
+          </a:xfrm>
+          <a:prstGeom prst="rect">
+            <a:avLst/>
+          </a:prstGeom>
+          <a:noFill/>
+        </p:spPr>
+        <p:txBody>
+          <a:bodyPr wrap="square" lIns="45720" rIns="45720" tIns="36576" bIns="36576" anchor="t">
+            <a:spAutoFit/>
+          </a:bodyPr>
+          <a:lstStyle/>
+          <a:p>
+            <a:pPr algn="l">
+              <a:defRPr sz="2800" b="1">
+                <a:solidFill>
+                  <a:srgbClr val="1C2330"/>
+                </a:solidFill>
+                <a:latin typeface="Aptos"/>
+              </a:defRPr>
+            </a:pPr>
+            <a:r>
+              <a:t>Cierre y defensa</a:t>
+            </a:r>
+          </a:p>
+        </p:txBody>
+      </p:sp>
+      <p:sp>
+        <p:nvSpPr>
+          <p:cNvPr id="6" name="Rectangle 5"/>
+          <p:cNvSpPr/>
+          <p:nvPr/>
+        </p:nvSpPr>
+        <p:spPr>
+          <a:xfrm>
+            <a:off x="0" y="6601968"/>
+            <a:ext cx="12191695" cy="256032"/>
+          </a:xfrm>
+          <a:prstGeom prst="rect">
+            <a:avLst/>
+          </a:prstGeom>
+          <a:solidFill>
+            <a:srgbClr val="2F5BA8"/>
+          </a:solidFill>
+          <a:ln>
+            <a:noFill/>
+          </a:ln>
+        </p:spPr>
+        <p:style>
+          <a:lnRef idx="1">
+            <a:schemeClr val="accent1"/>
+          </a:lnRef>
+          <a:fillRef idx="3">
+            <a:schemeClr val="accent1"/>
+          </a:fillRef>
+          <a:effectRef idx="2">
+            <a:schemeClr val="accent1"/>
+          </a:effectRef>
+          <a:fontRef idx="minor">
+            <a:schemeClr val="lt1"/>
+          </a:fontRef>
+        </p:style>
+        <p:txBody>
+          <a:bodyPr rtlCol="0" anchor="ctr"/>
+          <a:lstStyle/>
+          <a:p>
+            <a:pPr algn="ctr"/>
+          </a:p>
+        </p:txBody>
+      </p:sp>
+      <p:sp>
+        <p:nvSpPr>
+          <p:cNvPr id="7" name="TextBox 6"/>
+          <p:cNvSpPr txBox="1"/>
+          <p:nvPr/>
+        </p:nvSpPr>
+        <p:spPr>
+          <a:xfrm>
+            <a:off x="411480" y="6629400"/>
+            <a:ext cx="11247120" cy="164592"/>
+          </a:xfrm>
+          <a:prstGeom prst="rect">
+            <a:avLst/>
+          </a:prstGeom>
+          <a:noFill/>
+        </p:spPr>
+        <p:txBody>
+          <a:bodyPr wrap="square" lIns="45720" rIns="45720" tIns="36576" bIns="36576" anchor="t">
+            <a:spAutoFit/>
+          </a:bodyPr>
+          <a:lstStyle/>
+          <a:p>
+            <a:pPr algn="l">
+              <a:defRPr sz="900" b="0">
+                <a:solidFill>
+                  <a:srgbClr val="FFFFFF"/>
+                </a:solidFill>
+                <a:latin typeface="Aptos"/>
+              </a:defRPr>
+            </a:pPr>
+            <a:r>
+              <a:t>MiniJarvis · 1.º DAW · Sesión 211 · H1 — Primer MiniJarvis</a:t>
             </a:r>
           </a:p>
         </p:txBody>
@@ -7528,7 +8617,7 @@
               </a:defRPr>
             </a:pPr>
             <a:r>
-              <a:t>¿qué dato de nuestro programa debería ser constante?</a:t>
+              <a:t>¿Qué puedes señalar, explicar y probar al terminar este checkpoint?</a:t>
             </a:r>
           </a:p>
         </p:txBody>
@@ -7895,4 +8984,324 @@
   </a:objectDefaults>
   <a:extraClrSchemeLst/>
 </a:theme>
+</file>
+
+<file path=ppt/theme/theme2.xml><?xml version="1.0" encoding="utf-8"?>
+<a:theme xmlns:a="http://schemas.openxmlformats.org/drawingml/2006/main" name="Office Theme">
+  <a:themeElements>
+    <a:clrScheme name="Office">
+      <a:dk1>
+        <a:sysClr val="windowText" lastClr="000000"/>
+      </a:dk1>
+      <a:lt1>
+        <a:sysClr val="window" lastClr="FFFFFF"/>
+      </a:lt1>
+      <a:dk2>
+        <a:srgbClr val="1F497D"/>
+      </a:dk2>
+      <a:lt2>
+        <a:srgbClr val="EEECE1"/>
+      </a:lt2>
+      <a:accent1>
+        <a:srgbClr val="4F81BD"/>
+      </a:accent1>
+      <a:accent2>
+        <a:srgbClr val="C0504D"/>
+      </a:accent2>
+      <a:accent3>
+        <a:srgbClr val="9BBB59"/>
+      </a:accent3>
+      <a:accent4>
+        <a:srgbClr val="8064A2"/>
+      </a:accent4>
+      <a:accent5>
+        <a:srgbClr val="4BACC6"/>
+      </a:accent5>
+      <a:accent6>
+        <a:srgbClr val="F79646"/>
+      </a:accent6>
+      <a:hlink>
+        <a:srgbClr val="0000FF"/>
+      </a:hlink>
+      <a:folHlink>
+        <a:srgbClr val="800080"/>
+      </a:folHlink>
+    </a:clrScheme>
+    <a:fontScheme name="Office">
+      <a:majorFont>
+        <a:latin typeface="Calibri"/>
+        <a:ea typeface=""/>
+        <a:cs typeface=""/>
+        <a:font script="Jpan" typeface="ＭＳ Ｐゴシック"/>
+        <a:font script="Hang" typeface="맑은 고딕"/>
+        <a:font script="Hans" typeface="宋体"/>
+        <a:font script="Hant" typeface="新細明體"/>
+        <a:font script="Arab" typeface="Times New Roman"/>
+        <a:font script="Hebr" typeface="Times New Roman"/>
+        <a:font script="Thai" typeface="Angsana New"/>
+        <a:font script="Ethi" typeface="Nyala"/>
+        <a:font script="Beng" typeface="Vrinda"/>
+        <a:font script="Gujr" typeface="Shruti"/>
+        <a:font script="Khmr" typeface="MoolBoran"/>
+        <a:font script="Knda" typeface="Tunga"/>
+        <a:font script="Guru" typeface="Raavi"/>
+        <a:font script="Cans" typeface="Euphemia"/>
+        <a:font script="Cher" typeface="Plantagenet Cherokee"/>
+        <a:font script="Yiii" typeface="Microsoft Yi Baiti"/>
+        <a:font script="Tibt" typeface="Microsoft Himalaya"/>
+        <a:font script="Thaa" typeface="MV Boli"/>
+        <a:font script="Deva" typeface="Mangal"/>
+        <a:font script="Telu" typeface="Gautami"/>
+        <a:font script="Taml" typeface="Latha"/>
+        <a:font script="Syrc" typeface="Estrangelo Edessa"/>
+        <a:font script="Orya" typeface="Kalinga"/>
+        <a:font script="Mlym" typeface="Kartika"/>
+        <a:font script="Laoo" typeface="DokChampa"/>
+        <a:font script="Sinh" typeface="Iskoola Pota"/>
+        <a:font script="Mong" typeface="Mongolian Baiti"/>
+        <a:font script="Viet" typeface="Times New Roman"/>
+        <a:font script="Uigh" typeface="Microsoft Uighur"/>
+        <a:font script="Geor" typeface="Sylfaen"/>
+      </a:majorFont>
+      <a:minorFont>
+        <a:latin typeface="Calibri"/>
+        <a:ea typeface=""/>
+        <a:cs typeface=""/>
+        <a:font script="Jpan" typeface="ＭＳ Ｐゴシック"/>
+        <a:font script="Hang" typeface="맑은 고딕"/>
+        <a:font script="Hans" typeface="宋体"/>
+        <a:font script="Hant" typeface="新細明體"/>
+        <a:font script="Arab" typeface="Arial"/>
+        <a:font script="Hebr" typeface="Arial"/>
+        <a:font script="Thai" typeface="Cordia New"/>
+        <a:font script="Ethi" typeface="Nyala"/>
+        <a:font script="Beng" typeface="Vrinda"/>
+        <a:font script="Gujr" typeface="Shruti"/>
+        <a:font script="Khmr" typeface="DaunPenh"/>
+        <a:font script="Knda" typeface="Tunga"/>
+        <a:font script="Guru" typeface="Raavi"/>
+        <a:font script="Cans" typeface="Euphemia"/>
+        <a:font script="Cher" typeface="Plantagenet Cherokee"/>
+        <a:font script="Yiii" typeface="Microsoft Yi Baiti"/>
+        <a:font script="Tibt" typeface="Microsoft Himalaya"/>
+        <a:font script="Thaa" typeface="MV Boli"/>
+        <a:font script="Deva" typeface="Mangal"/>
+        <a:font script="Telu" typeface="Gautami"/>
+        <a:font script="Taml" typeface="Latha"/>
+        <a:font script="Syrc" typeface="Estrangelo Edessa"/>
+        <a:font script="Orya" typeface="Kalinga"/>
+        <a:font script="Mlym" typeface="Kartika"/>
+        <a:font script="Laoo" typeface="DokChampa"/>
+        <a:font script="Sinh" typeface="Iskoola Pota"/>
+        <a:font script="Mong" typeface="Mongolian Baiti"/>
+        <a:font script="Viet" typeface="Arial"/>
+        <a:font script="Uigh" typeface="Microsoft Uighur"/>
+        <a:font script="Geor" typeface="Sylfaen"/>
+      </a:minorFont>
+    </a:fontScheme>
+    <a:fmtScheme name="Office">
+      <a:fillStyleLst>
+        <a:solidFill>
+          <a:schemeClr val="phClr"/>
+        </a:solidFill>
+        <a:gradFill rotWithShape="1">
+          <a:gsLst>
+            <a:gs pos="0">
+              <a:schemeClr val="phClr">
+                <a:tint val="50000"/>
+                <a:satMod val="300000"/>
+              </a:schemeClr>
+            </a:gs>
+            <a:gs pos="35000">
+              <a:schemeClr val="phClr">
+                <a:tint val="37000"/>
+                <a:satMod val="300000"/>
+              </a:schemeClr>
+            </a:gs>
+            <a:gs pos="100000">
+              <a:schemeClr val="phClr">
+                <a:tint val="15000"/>
+                <a:satMod val="350000"/>
+              </a:schemeClr>
+            </a:gs>
+          </a:gsLst>
+          <a:lin ang="16200000" scaled="1"/>
+        </a:gradFill>
+        <a:gradFill rotWithShape="1">
+          <a:gsLst>
+            <a:gs pos="0">
+              <a:schemeClr val="phClr">
+                <a:tint val="100000"/>
+                <a:shade val="100000"/>
+                <a:satMod val="130000"/>
+              </a:schemeClr>
+            </a:gs>
+            <a:gs pos="100000">
+              <a:schemeClr val="phClr">
+                <a:tint val="50000"/>
+                <a:shade val="100000"/>
+                <a:satMod val="350000"/>
+              </a:schemeClr>
+            </a:gs>
+          </a:gsLst>
+          <a:lin ang="16200000" scaled="0"/>
+        </a:gradFill>
+      </a:fillStyleLst>
+      <a:lnStyleLst>
+        <a:ln w="9525" cap="flat" cmpd="sng" algn="ctr">
+          <a:solidFill>
+            <a:schemeClr val="phClr">
+              <a:shade val="95000"/>
+              <a:satMod val="105000"/>
+            </a:schemeClr>
+          </a:solidFill>
+          <a:prstDash val="solid"/>
+        </a:ln>
+        <a:ln w="25400" cap="flat" cmpd="sng" algn="ctr">
+          <a:solidFill>
+            <a:schemeClr val="phClr"/>
+          </a:solidFill>
+          <a:prstDash val="solid"/>
+        </a:ln>
+        <a:ln w="38100" cap="flat" cmpd="sng" algn="ctr">
+          <a:solidFill>
+            <a:schemeClr val="phClr"/>
+          </a:solidFill>
+          <a:prstDash val="solid"/>
+        </a:ln>
+      </a:lnStyleLst>
+      <a:effectStyleLst>
+        <a:effectStyle>
+          <a:effectLst>
+            <a:outerShdw blurRad="40000" dist="20000" dir="5400000" rotWithShape="0">
+              <a:srgbClr val="000000">
+                <a:alpha val="38000"/>
+              </a:srgbClr>
+            </a:outerShdw>
+          </a:effectLst>
+        </a:effectStyle>
+        <a:effectStyle>
+          <a:effectLst>
+            <a:outerShdw blurRad="40000" dist="23000" dir="5400000" rotWithShape="0">
+              <a:srgbClr val="000000">
+                <a:alpha val="35000"/>
+              </a:srgbClr>
+            </a:outerShdw>
+          </a:effectLst>
+        </a:effectStyle>
+        <a:effectStyle>
+          <a:effectLst>
+            <a:outerShdw blurRad="40000" dist="23000" dir="5400000" rotWithShape="0">
+              <a:srgbClr val="000000">
+                <a:alpha val="35000"/>
+              </a:srgbClr>
+            </a:outerShdw>
+          </a:effectLst>
+          <a:scene3d>
+            <a:camera prst="orthographicFront">
+              <a:rot lat="0" lon="0" rev="0"/>
+            </a:camera>
+            <a:lightRig rig="threePt" dir="t">
+              <a:rot lat="0" lon="0" rev="1200000"/>
+            </a:lightRig>
+          </a:scene3d>
+          <a:sp3d>
+            <a:bevelT w="63500" h="25400"/>
+          </a:sp3d>
+        </a:effectStyle>
+      </a:effectStyleLst>
+      <a:bgFillStyleLst>
+        <a:solidFill>
+          <a:schemeClr val="phClr"/>
+        </a:solidFill>
+        <a:gradFill rotWithShape="1">
+          <a:gsLst>
+            <a:gs pos="0">
+              <a:schemeClr val="phClr">
+                <a:tint val="40000"/>
+                <a:satMod val="350000"/>
+              </a:schemeClr>
+            </a:gs>
+            <a:gs pos="40000">
+              <a:schemeClr val="phClr">
+                <a:tint val="45000"/>
+                <a:shade val="99000"/>
+                <a:satMod val="350000"/>
+              </a:schemeClr>
+            </a:gs>
+            <a:gs pos="100000">
+              <a:schemeClr val="phClr">
+                <a:shade val="20000"/>
+                <a:satMod val="255000"/>
+              </a:schemeClr>
+            </a:gs>
+          </a:gsLst>
+          <a:path path="circle">
+            <a:fillToRect l="50000" t="-80000" r="50000" b="180000"/>
+          </a:path>
+        </a:gradFill>
+        <a:gradFill rotWithShape="1">
+          <a:gsLst>
+            <a:gs pos="0">
+              <a:schemeClr val="phClr">
+                <a:tint val="80000"/>
+                <a:satMod val="300000"/>
+              </a:schemeClr>
+            </a:gs>
+            <a:gs pos="100000">
+              <a:schemeClr val="phClr">
+                <a:shade val="30000"/>
+                <a:satMod val="200000"/>
+              </a:schemeClr>
+            </a:gs>
+          </a:gsLst>
+          <a:path path="circle">
+            <a:fillToRect l="50000" t="50000" r="50000" b="50000"/>
+          </a:path>
+        </a:gradFill>
+      </a:bgFillStyleLst>
+    </a:fmtScheme>
+  </a:themeElements>
+  <a:objectDefaults>
+    <a:spDef>
+      <a:spPr/>
+      <a:bodyPr/>
+      <a:lstStyle/>
+      <a:style>
+        <a:lnRef idx="1">
+          <a:schemeClr val="accent1"/>
+        </a:lnRef>
+        <a:fillRef idx="3">
+          <a:schemeClr val="accent1"/>
+        </a:fillRef>
+        <a:effectRef idx="2">
+          <a:schemeClr val="accent1"/>
+        </a:effectRef>
+        <a:fontRef idx="minor">
+          <a:schemeClr val="lt1"/>
+        </a:fontRef>
+      </a:style>
+    </a:spDef>
+    <a:lnDef>
+      <a:spPr/>
+      <a:bodyPr/>
+      <a:lstStyle/>
+      <a:style>
+        <a:lnRef idx="2">
+          <a:schemeClr val="accent1"/>
+        </a:lnRef>
+        <a:fillRef idx="0">
+          <a:schemeClr val="accent1"/>
+        </a:fillRef>
+        <a:effectRef idx="1">
+          <a:schemeClr val="accent1"/>
+        </a:effectRef>
+        <a:fontRef idx="minor">
+          <a:schemeClr val="tx1"/>
+        </a:fontRef>
+      </a:style>
+    </a:lnDef>
+  </a:objectDefaults>
+  <a:extraClrSchemeLst/>
+</a:theme>
 </file>
--- a/02-PROFESORADO/03-PRESENTACIONES/POR-SESION/h1/S211-constantes-presentacion.pptx
+++ b/02-PROFESORADO/03-PRESENTACIONES/POR-SESION/h1/S211-constantes-presentacion.pptx
@@ -675,7 +675,7 @@
           </a:p>
           <a:p>
             <a:r>
-              <a:t>Diapositiva 2 de 9: Qué debe conseguirse</a:t>
+              <a:t>Diapositiva 2 de 9: Qué aprenderás y cómo lo demostrarás</a:t>
             </a:r>
           </a:p>
           <a:p>
@@ -690,7 +690,7 @@
           </a:p>
           <a:p>
             <a:r>
-              <a:t>- Al terminar: señala la evidencia, explica qué demuestra y reproduce la prueba.</a:t>
+              <a:t>- Comprobación: Quede diagnóstico.</a:t>
             </a:r>
           </a:p>
           <a:p>
@@ -770,7 +770,7 @@
           </a:p>
           <a:p>
             <a:r>
-              <a:t>Diapositiva 3 de 9: Ejemplo o demostración · 1</a:t>
+              <a:t>Diapositiva 3 de 9: Constante, variable y literal</a:t>
             </a:r>
           </a:p>
           <a:p>
@@ -780,32 +780,37 @@
           </a:p>
           <a:p>
             <a:r>
-              <a:t>Modela el ejemplo sin resolver la actividad completa; pide una predicción antes de ejecutar.</a:t>
-            </a:r>
-          </a:p>
-          <a:p>
-            <a:r>
-              <a:t>- D1 · ¿Qué datos deberían cambiar? — Nombre del asistente · curso · horas de estudio · contador de tareas</a:t>
-            </a:r>
-          </a:p>
-          <a:p>
-            <a:r>
-              <a:t>- D2 · Constantes con final — final String ASSISTANT_NAME = "MiniJarvis";</a:t>
-            </a:r>
-          </a:p>
-          <a:p>
-            <a:r>
-              <a:t>- final int START_YEAR = 2026;</a:t>
-            </a:r>
-          </a:p>
-          <a:p>
-            <a:r>
-              <a:t>- D3 · Literal = valor escrito directamente — NÚMEROS: 5 / 3.5 \| TEXTO/CARÁCTER: "Hola" / 'A' \| LÓGICO: true / false</a:t>
-            </a:r>
-          </a:p>
-          <a:p>
-            <a:r>
-              <a:t>- D4 · Operadores aritméticos — + suma</a:t>
+              <a:t>Explica con predicción y ejemplo mínimo; comprueba comprensión antes de continuar.</a:t>
+            </a:r>
+          </a:p>
+          <a:p>
+            <a:r>
+              <a:t>- final String ASSISTANT_NAME = "MiniJarvis";</a:t>
+            </a:r>
+          </a:p>
+          <a:p>
+            <a:r>
+              <a:t>int studyHours = 5;</a:t>
+            </a:r>
+          </a:p>
+          <a:p>
+            <a:r>
+              <a:t>int minutes = studyHours * 60;</a:t>
+            </a:r>
+          </a:p>
+          <a:p>
+            <a:r>
+              <a:t>System.out.println(ASSISTANT_NAME + ": " + minutes);</a:t>
+            </a:r>
+          </a:p>
+          <a:p>
+            <a:r>
+              <a:t>- final impide reasignar la variable; el nombre de constante usa UPPER_SNAKE_CASE.</a:t>
+            </a:r>
+          </a:p>
+          <a:p>
+            <a:r>
+              <a:t>- Los literales del ejemplo son "MiniJarvis", 5 y 60.</a:t>
             </a:r>
           </a:p>
           <a:p>
@@ -885,7 +890,7 @@
           </a:p>
           <a:p>
             <a:r>
-              <a:t>Diapositiva 4 de 9: Ejemplo o demostración · 2</a:t>
+              <a:t>Diapositiva 4 de 9: La división depende de los operandos</a:t>
             </a:r>
           </a:p>
           <a:p>
@@ -895,22 +900,32 @@
           </a:p>
           <a:p>
             <a:r>
-              <a:t>Modela el ejemplo sin resolver la actividad completa; pide una predicción antes de ejecutar.</a:t>
-            </a:r>
-          </a:p>
-          <a:p>
-            <a:r>
-              <a:t>- resta</a:t>
-            </a:r>
-          </a:p>
-          <a:p>
-            <a:r>
-              <a:t>- \* multiplicación</a:t>
-            </a:r>
-          </a:p>
-          <a:p>
-            <a:r>
-              <a:t>- / división o cociente</a:t>
+              <a:t>Explica con predicción y ejemplo mínimo; comprueba comprensión antes de continuar.</a:t>
+            </a:r>
+          </a:p>
+          <a:p>
+            <a:r>
+              <a:t>- ENTERA · int result = 5 / 2;</a:t>
+            </a:r>
+          </a:p>
+          <a:p>
+            <a:r>
+              <a:t>Resultado: 2</a:t>
+            </a:r>
+          </a:p>
+          <a:p>
+            <a:r>
+              <a:t>- REAL · double result = 5 / 2.0;</a:t>
+            </a:r>
+          </a:p>
+          <a:p>
+            <a:r>
+              <a:t>Resultado: 2.5</a:t>
+            </a:r>
+          </a:p>
+          <a:p>
+            <a:r>
+              <a:t>- Si ambos operandos son enteros, la parte decimal no aparece.</a:t>
             </a:r>
           </a:p>
           <a:p>
@@ -990,7 +1005,7 @@
           </a:p>
           <a:p>
             <a:r>
-              <a:t>Diapositiva 5 de 9: Actividad central · 1</a:t>
+              <a:t>Diapositiva 5 de 9: Resto, precedencia y actualización</a:t>
             </a:r>
           </a:p>
           <a:p>
@@ -1000,27 +1015,42 @@
           </a:p>
           <a:p>
             <a:r>
-              <a:t>Entrega la consigna, observa decisiones y pide una prueba reproducible.</a:t>
-            </a:r>
-          </a:p>
-          <a:p>
-            <a:r>
-              <a:t>- Predice antes de ejecutar cuando haya código.</a:t>
-            </a:r>
-          </a:p>
-          <a:p>
-            <a:r>
-              <a:t>- Realiza la micropráctica o modificación prevista.</a:t>
-            </a:r>
-          </a:p>
-          <a:p>
-            <a:r>
-              <a:t>- Prueba el caso normal y, cuando exista una decisión o conversión, también el caso alternativo o erróneo.</a:t>
-            </a:r>
-          </a:p>
-          <a:p>
-            <a:r>
-              <a:t>- Conserva el código o resultado en el repositorio o espacio indicado.</a:t>
+              <a:t>Explica con predicción y ejemplo mínimo; comprueba comprensión antes de continuar.</a:t>
+            </a:r>
+          </a:p>
+          <a:p>
+            <a:r>
+              <a:t>- int remainder = 10 % 4;       // 2</a:t>
+            </a:r>
+          </a:p>
+          <a:p>
+            <a:r>
+              <a:t>int a = 8 * 4 + 2;            // 34</a:t>
+            </a:r>
+          </a:p>
+          <a:p>
+            <a:r>
+              <a:t>int b = 8 * (4 + 2);          // 48</a:t>
+            </a:r>
+          </a:p>
+          <a:p>
+            <a:r>
+              <a:t>int tasks = 3;</a:t>
+            </a:r>
+          </a:p>
+          <a:p>
+            <a:r>
+              <a:t>tasks += 2;                    // 5</a:t>
+            </a:r>
+          </a:p>
+          <a:p>
+            <a:r>
+              <a:t>- % devuelve el resto; no calcula un porcentaje.</a:t>
+            </a:r>
+          </a:p>
+          <a:p>
+            <a:r>
+              <a:t>- Los paréntesis hacen explícito qué se calcula primero.</a:t>
             </a:r>
           </a:p>
           <a:p>
@@ -1100,7 +1130,7 @@
           </a:p>
           <a:p>
             <a:r>
-              <a:t>Diapositiva 6 de 9: Actividad central · 2</a:t>
+              <a:t>Diapositiva 6 de 9: Predice antes de ejecutar</a:t>
             </a:r>
           </a:p>
           <a:p>
@@ -1115,12 +1145,22 @@
           </a:p>
           <a:p>
             <a:r>
-              <a:t>- Registra una sola entrada en el diario individual; no crees un informe paralelo.</a:t>
-            </a:r>
-          </a:p>
-          <a:p>
-            <a:r>
-              <a:t>- ¿Qué puedes señalar, explicar y probar al terminar este checkpoint?</a:t>
+              <a:t>- Predice 7 / 2, 7 / 2.0 y 7 % 2.</a:t>
+            </a:r>
+          </a:p>
+          <a:p>
+            <a:r>
+              <a:t>- Construye un microprograma con una constante, una variable y una operación.</a:t>
+            </a:r>
+          </a:p>
+          <a:p>
+            <a:r>
+              <a:t>- Actualiza la variable y muestra el resultado.</a:t>
+            </a:r>
+          </a:p>
+          <a:p>
+            <a:r>
+              <a:t>- Intenta reasignar la constante, lee el error y deshazlo.</a:t>
             </a:r>
           </a:p>
           <a:p>
@@ -1200,7 +1240,7 @@
           </a:p>
           <a:p>
             <a:r>
-              <a:t>Diapositiva 7 de 9: Evidencia y comprobación</a:t>
+              <a:t>Diapositiva 7 de 9: Resultados que debes poder explicar</a:t>
             </a:r>
           </a:p>
           <a:p>
@@ -1215,17 +1255,22 @@
           </a:p>
           <a:p>
             <a:r>
-              <a:t>- conserva el código o la prueba en el lugar indicado por la sesión;</a:t>
-            </a:r>
-          </a:p>
-          <a:p>
-            <a:r>
-              <a:t>- añade una sola entrada al diario individual con prueba, bloqueo y siguiente paso;</a:t>
-            </a:r>
-          </a:p>
-          <a:p>
-            <a:r>
-              <a:t>- no copies la misma reflexión en otro documento; el Site personal seleccionará evidencias al cerrar H1.</a:t>
+              <a:t>- Distingo variable, constante y literal.</a:t>
+            </a:r>
+          </a:p>
+          <a:p>
+            <a:r>
+              <a:t>- Explico división entera y real.</a:t>
+            </a:r>
+          </a:p>
+          <a:p>
+            <a:r>
+              <a:t>- Explico qué devuelve %.</a:t>
+            </a:r>
+          </a:p>
+          <a:p>
+            <a:r>
+              <a:t>- Justifico un resultado con precedencia y paréntesis.</a:t>
             </a:r>
           </a:p>
           <a:p>
@@ -1305,7 +1350,7 @@
           </a:p>
           <a:p>
             <a:r>
-              <a:t>Diapositiva 8 de 9: Seguridad y uso responsable</a:t>
+              <a:t>Diapositiva 8 de 9: Salida diagnóstica</a:t>
             </a:r>
           </a:p>
           <a:p>
@@ -1315,17 +1360,12 @@
           </a:p>
           <a:p>
             <a:r>
-              <a:t>Recuerda estos límites antes de que el alumnado comparta o publique:</a:t>
-            </a:r>
-          </a:p>
-          <a:p>
-            <a:r>
-              <a:t>- Usa datos ficticios y no publiques credenciales ni información personal.</a:t>
-            </a:r>
-          </a:p>
-          <a:p>
-            <a:r>
-              <a:t>- Si utilizas IA de forma sustantiva, registra propósito, propuesta, cambios propios y validación en el registro de IA del hito.</a:t>
+              <a:t>Cierra con explicación individual, prueba observable y siguiente paso concreto.</a:t>
+            </a:r>
+          </a:p>
+          <a:p>
+            <a:r>
+              <a:t>- Sin ejecutar: ¿qué producen 5 / 2, 5 / 2.0 y 10 % 4, y por qué?</a:t>
             </a:r>
           </a:p>
           <a:p>
@@ -1405,7 +1445,7 @@
           </a:p>
           <a:p>
             <a:r>
-              <a:t>Diapositiva 9 de 9: Cierre y defensa</a:t>
+              <a:t>Diapositiva 9 de 9: Fuentes utilizadas</a:t>
             </a:r>
           </a:p>
           <a:p>
@@ -1415,12 +1455,22 @@
           </a:p>
           <a:p>
             <a:r>
-              <a:t>Cierra con explicación individual, prueba observable y siguiente paso concreto.</a:t>
-            </a:r>
-          </a:p>
-          <a:p>
-            <a:r>
-              <a:t>- ¿Qué puedes señalar, explicar y probar al terminar este checkpoint?</a:t>
+              <a:t>Indica al alumnado dónde ampliar el contenido y qué fragmentos se han adaptado.</a:t>
+            </a:r>
+          </a:p>
+          <a:p>
+            <a:r>
+              <a:t>- Libro: capítulo 02 · Tema 1: constantes, literales y operadores</a:t>
+            </a:r>
+          </a:p>
+          <a:p>
+            <a:r>
+              <a:t>- Fichas S206-S215 y píldoras H1</a:t>
+            </a:r>
+          </a:p>
+          <a:p>
+            <a:r>
+              <a:t>- Ejemplos revisados y adaptados a MiniJarvis; no se copian errores ni capturas antiguas del PDF.</a:t>
             </a:r>
           </a:p>
           <a:p>
@@ -4665,7 +4715,7 @@
               </a:defRPr>
             </a:pPr>
             <a:r>
-              <a:t>H1 — Primer MiniJarvis · Fase HEXA: Ejecutar — crear</a:t>
+              <a:t>H1 — Primer MiniJarvis</a:t>
             </a:r>
           </a:p>
         </p:txBody>
@@ -4949,7 +4999,7 @@
               </a:defRPr>
             </a:pPr>
             <a:r>
-              <a:t>Qué debe conseguirse</a:t>
+              <a:t>Qué aprenderás y cómo lo demostrarás</a:t>
             </a:r>
           </a:p>
         </p:txBody>
@@ -5190,7 +5240,7 @@
               </a:defRPr>
             </a:pPr>
             <a:r>
-              <a:t>Al terminar: señala la evidencia, explica qué demuestra y reproduce la prueba.</a:t>
+              <a:t>Comprobación: Quede diagnóstico.</a:t>
             </a:r>
           </a:p>
         </p:txBody>
@@ -5330,7 +5380,7 @@
               </a:defRPr>
             </a:pPr>
             <a:r>
-              <a:t>OBSERVAR ANTES DE ACTUAR</a:t>
+              <a:t>CÓDIGO EXPLICADO</a:t>
             </a:r>
           </a:p>
         </p:txBody>
@@ -5366,7 +5416,7 @@
               </a:defRPr>
             </a:pPr>
             <a:r>
-              <a:t>Ejemplo o demostración · 1</a:t>
+              <a:t>Constante, variable y literal</a:t>
             </a:r>
           </a:p>
         </p:txBody>
@@ -5458,8 +5508,8 @@
         </p:nvSpPr>
         <p:spPr>
           <a:xfrm>
-            <a:off x="621792" y="1353312"/>
-            <a:ext cx="10927080" cy="4526280"/>
+            <a:off x="621792" y="1325880"/>
+            <a:ext cx="7315200" cy="4709160"/>
           </a:xfrm>
           <a:prstGeom prst="roundRect">
             <a:avLst/>
@@ -5468,7 +5518,9 @@
             <a:srgbClr val="121824"/>
           </a:solidFill>
           <a:ln>
-            <a:noFill/>
+            <a:solidFill>
+              <a:srgbClr val="121824"/>
+            </a:solidFill>
           </a:ln>
         </p:spPr>
         <p:style>
@@ -5501,8 +5553,104 @@
         </p:nvSpPr>
         <p:spPr>
           <a:xfrm>
-            <a:off x="932688" y="1627632"/>
-            <a:ext cx="2057400" cy="411480"/>
+            <a:off x="822960" y="1572768"/>
+            <a:ext cx="6903720" cy="4251960"/>
+          </a:xfrm>
+          <a:prstGeom prst="rect">
+            <a:avLst/>
+          </a:prstGeom>
+          <a:noFill/>
+        </p:spPr>
+        <p:txBody>
+          <a:bodyPr wrap="none" lIns="164592" rIns="164592" tIns="109728" bIns="109728">
+            <a:spAutoFit/>
+          </a:bodyPr>
+          <a:lstStyle/>
+          <a:p>
+            <a:pPr>
+              <a:spcAft>
+                <a:spcPts val="0"/>
+              </a:spcAft>
+              <a:defRPr sz="1600">
+                <a:solidFill>
+                  <a:srgbClr val="FFFFFF"/>
+                </a:solidFill>
+                <a:latin typeface="Liberation Mono"/>
+              </a:defRPr>
+            </a:pPr>
+            <a:r>
+              <a:t>final String ASSISTANT_NAME = "MiniJarvis";</a:t>
+            </a:r>
+            <a:br/>
+            <a:r>
+              <a:t>int studyHours = 5;</a:t>
+            </a:r>
+            <a:br/>
+            <a:r>
+              <a:t>int minutes = studyHours * 60;</a:t>
+            </a:r>
+            <a:br/>
+            <a:r>
+              <a:t>System.out.println(ASSISTANT_NAME + ": " + minutes);</a:t>
+            </a:r>
+          </a:p>
+        </p:txBody>
+      </p:sp>
+      <p:sp>
+        <p:nvSpPr>
+          <p:cNvPr id="10" name="Rounded Rectangle 9"/>
+          <p:cNvSpPr/>
+          <p:nvPr/>
+        </p:nvSpPr>
+        <p:spPr>
+          <a:xfrm>
+            <a:off x="8156448" y="1325880"/>
+            <a:ext cx="3401568" cy="4709160"/>
+          </a:xfrm>
+          <a:prstGeom prst="roundRect">
+            <a:avLst/>
+          </a:prstGeom>
+          <a:solidFill>
+            <a:srgbClr val="FFFFFF"/>
+          </a:solidFill>
+          <a:ln>
+            <a:solidFill>
+              <a:srgbClr val="E5E9EF"/>
+            </a:solidFill>
+          </a:ln>
+        </p:spPr>
+        <p:style>
+          <a:lnRef idx="1">
+            <a:schemeClr val="accent1"/>
+          </a:lnRef>
+          <a:fillRef idx="3">
+            <a:schemeClr val="accent1"/>
+          </a:fillRef>
+          <a:effectRef idx="2">
+            <a:schemeClr val="accent1"/>
+          </a:effectRef>
+          <a:fontRef idx="minor">
+            <a:schemeClr val="lt1"/>
+          </a:fontRef>
+        </p:style>
+        <p:txBody>
+          <a:bodyPr rtlCol="0" anchor="ctr"/>
+          <a:lstStyle/>
+          <a:p>
+            <a:pPr algn="ctr"/>
+          </a:p>
+        </p:txBody>
+      </p:sp>
+      <p:sp>
+        <p:nvSpPr>
+          <p:cNvPr id="11" name="TextBox 10"/>
+          <p:cNvSpPr txBox="1"/>
+          <p:nvPr/>
+        </p:nvSpPr>
+        <p:spPr>
+          <a:xfrm>
+            <a:off x="8412480" y="1627632"/>
+            <a:ext cx="2880360" cy="320040"/>
           </a:xfrm>
           <a:prstGeom prst="rect">
             <a:avLst/>
@@ -5516,7 +5664,7 @@
           <a:lstStyle/>
           <a:p>
             <a:pPr algn="l">
-              <a:defRPr sz="1300" b="1">
+              <a:defRPr sz="1200" b="1">
                 <a:solidFill>
                   <a:srgbClr val="2F5BA8"/>
                 </a:solidFill>
@@ -5524,21 +5672,21 @@
               </a:defRPr>
             </a:pPr>
             <a:r>
-              <a:t>DEMOSTRACIÓN</a:t>
-            </a:r>
-          </a:p>
-        </p:txBody>
-      </p:sp>
-      <p:sp>
-        <p:nvSpPr>
-          <p:cNvPr id="10" name="TextBox 9"/>
+              <a:t>LEE Y PREDICE</a:t>
+            </a:r>
+          </a:p>
+        </p:txBody>
+      </p:sp>
+      <p:sp>
+        <p:nvSpPr>
+          <p:cNvPr id="12" name="TextBox 11"/>
           <p:cNvSpPr txBox="1"/>
           <p:nvPr/>
         </p:nvSpPr>
         <p:spPr>
           <a:xfrm>
-            <a:off x="932688" y="2212848"/>
-            <a:ext cx="9966960" cy="3246120"/>
+            <a:off x="8394192" y="2103120"/>
+            <a:ext cx="2788920" cy="3474720"/>
           </a:xfrm>
           <a:prstGeom prst="rect">
             <a:avLst/>
@@ -5555,15 +5703,15 @@
               <a:spcAft>
                 <a:spcPts val="900"/>
               </a:spcAft>
-              <a:defRPr sz="1900">
+              <a:defRPr sz="1700">
                 <a:solidFill>
-                  <a:srgbClr val="FFFFFF"/>
+                  <a:srgbClr val="1C2330"/>
                 </a:solidFill>
                 <a:latin typeface="Aptos"/>
               </a:defRPr>
             </a:pPr>
             <a:r>
-              <a:t>•  D1 · ¿Qué datos deberían cambiar? — Nombre del asistente · curso · horas de estudio · contador de tareas</a:t>
+              <a:t>•  final impide reasignar la variable; el nombre de constante usa UPPER_SNAKE_CASE.</a:t>
             </a:r>
           </a:p>
           <a:p>
@@ -5571,63 +5719,15 @@
               <a:spcAft>
                 <a:spcPts val="900"/>
               </a:spcAft>
-              <a:defRPr sz="1900">
+              <a:defRPr sz="1700">
                 <a:solidFill>
-                  <a:srgbClr val="FFFFFF"/>
+                  <a:srgbClr val="1C2330"/>
                 </a:solidFill>
                 <a:latin typeface="Aptos"/>
               </a:defRPr>
             </a:pPr>
             <a:r>
-              <a:t>•  D2 · Constantes con final — final String ASSISTANT_NAME = "MiniJarvis";</a:t>
-            </a:r>
-          </a:p>
-          <a:p>
-            <a:pPr>
-              <a:spcAft>
-                <a:spcPts val="900"/>
-              </a:spcAft>
-              <a:defRPr sz="1900">
-                <a:solidFill>
-                  <a:srgbClr val="FFFFFF"/>
-                </a:solidFill>
-                <a:latin typeface="Aptos"/>
-              </a:defRPr>
-            </a:pPr>
-            <a:r>
-              <a:t>•  final int START_YEAR = 2026;</a:t>
-            </a:r>
-          </a:p>
-          <a:p>
-            <a:pPr>
-              <a:spcAft>
-                <a:spcPts val="900"/>
-              </a:spcAft>
-              <a:defRPr sz="1900">
-                <a:solidFill>
-                  <a:srgbClr val="FFFFFF"/>
-                </a:solidFill>
-                <a:latin typeface="Aptos"/>
-              </a:defRPr>
-            </a:pPr>
-            <a:r>
-              <a:t>•  D3 · Literal = valor escrito directamente — NÚMEROS: 5 / 3.5 \| TEXTO/CARÁCTER: "Hola" / 'A' \| LÓGICO: true / false</a:t>
-            </a:r>
-          </a:p>
-          <a:p>
-            <a:pPr>
-              <a:spcAft>
-                <a:spcPts val="900"/>
-              </a:spcAft>
-              <a:defRPr sz="1900">
-                <a:solidFill>
-                  <a:srgbClr val="FFFFFF"/>
-                </a:solidFill>
-                <a:latin typeface="Aptos"/>
-              </a:defRPr>
-            </a:pPr>
-            <a:r>
-              <a:t>•  D4 · Operadores aritméticos — + suma</a:t>
+              <a:t>•  Los literales del ejemplo son "MiniJarvis", 5 y 60.</a:t>
             </a:r>
           </a:p>
         </p:txBody>
@@ -5767,7 +5867,7 @@
               </a:defRPr>
             </a:pPr>
             <a:r>
-              <a:t>OBSERVAR ANTES DE ACTUAR</a:t>
+              <a:t>CONTRASTAR PARA DECIDIR</a:t>
             </a:r>
           </a:p>
         </p:txBody>
@@ -5803,7 +5903,7 @@
               </a:defRPr>
             </a:pPr>
             <a:r>
-              <a:t>Ejemplo o demostración · 2</a:t>
+              <a:t>La división depende de los operandos</a:t>
             </a:r>
           </a:p>
         </p:txBody>
@@ -5895,17 +5995,19 @@
         </p:nvSpPr>
         <p:spPr>
           <a:xfrm>
-            <a:off x="621792" y="1353312"/>
-            <a:ext cx="10927080" cy="4526280"/>
+            <a:off x="621792" y="1325880"/>
+            <a:ext cx="5230368" cy="3401568"/>
           </a:xfrm>
           <a:prstGeom prst="roundRect">
             <a:avLst/>
           </a:prstGeom>
           <a:solidFill>
-            <a:srgbClr val="121824"/>
+            <a:srgbClr val="FFFFFF"/>
           </a:solidFill>
           <a:ln>
-            <a:noFill/>
+            <a:solidFill>
+              <a:srgbClr val="445B80"/>
+            </a:solidFill>
           </a:ln>
         </p:spPr>
         <p:style>
@@ -5932,14 +6034,59 @@
       </p:sp>
       <p:sp>
         <p:nvSpPr>
-          <p:cNvPr id="9" name="TextBox 8"/>
+          <p:cNvPr id="9" name="Rounded Rectangle 8"/>
+          <p:cNvSpPr/>
+          <p:nvPr/>
+        </p:nvSpPr>
+        <p:spPr>
+          <a:xfrm>
+            <a:off x="850392" y="1572768"/>
+            <a:ext cx="566928" cy="475488"/>
+          </a:xfrm>
+          <a:prstGeom prst="roundRect">
+            <a:avLst/>
+          </a:prstGeom>
+          <a:solidFill>
+            <a:srgbClr val="445B80"/>
+          </a:solidFill>
+          <a:ln>
+            <a:solidFill>
+              <a:srgbClr val="445B80"/>
+            </a:solidFill>
+          </a:ln>
+        </p:spPr>
+        <p:style>
+          <a:lnRef idx="1">
+            <a:schemeClr val="accent1"/>
+          </a:lnRef>
+          <a:fillRef idx="3">
+            <a:schemeClr val="accent1"/>
+          </a:fillRef>
+          <a:effectRef idx="2">
+            <a:schemeClr val="accent1"/>
+          </a:effectRef>
+          <a:fontRef idx="minor">
+            <a:schemeClr val="lt1"/>
+          </a:fontRef>
+        </p:style>
+        <p:txBody>
+          <a:bodyPr rtlCol="0" anchor="ctr"/>
+          <a:lstStyle/>
+          <a:p>
+            <a:pPr algn="ctr"/>
+          </a:p>
+        </p:txBody>
+      </p:sp>
+      <p:sp>
+        <p:nvSpPr>
+          <p:cNvPr id="10" name="TextBox 9"/>
           <p:cNvSpPr txBox="1"/>
           <p:nvPr/>
         </p:nvSpPr>
         <p:spPr>
           <a:xfrm>
-            <a:off x="932688" y="1627632"/>
-            <a:ext cx="2057400" cy="411480"/>
+            <a:off x="850392" y="1682496"/>
+            <a:ext cx="566928" cy="182880"/>
           </a:xfrm>
           <a:prstGeom prst="rect">
             <a:avLst/>
@@ -5952,47 +6099,8 @@
           </a:bodyPr>
           <a:lstStyle/>
           <a:p>
-            <a:pPr algn="l">
+            <a:pPr algn="ctr">
               <a:defRPr sz="1300" b="1">
-                <a:solidFill>
-                  <a:srgbClr val="2F5BA8"/>
-                </a:solidFill>
-                <a:latin typeface="Aptos"/>
-              </a:defRPr>
-            </a:pPr>
-            <a:r>
-              <a:t>DEMOSTRACIÓN</a:t>
-            </a:r>
-          </a:p>
-        </p:txBody>
-      </p:sp>
-      <p:sp>
-        <p:nvSpPr>
-          <p:cNvPr id="10" name="TextBox 9"/>
-          <p:cNvSpPr txBox="1"/>
-          <p:nvPr/>
-        </p:nvSpPr>
-        <p:spPr>
-          <a:xfrm>
-            <a:off x="932688" y="2212848"/>
-            <a:ext cx="9966960" cy="3246120"/>
-          </a:xfrm>
-          <a:prstGeom prst="rect">
-            <a:avLst/>
-          </a:prstGeom>
-          <a:noFill/>
-        </p:spPr>
-        <p:txBody>
-          <a:bodyPr wrap="square" lIns="73152" rIns="45720" tIns="36576">
-            <a:spAutoFit/>
-          </a:bodyPr>
-          <a:lstStyle/>
-          <a:p>
-            <a:pPr>
-              <a:spcAft>
-                <a:spcPts val="900"/>
-              </a:spcAft>
-              <a:defRPr sz="2200">
                 <a:solidFill>
                   <a:srgbClr val="FFFFFF"/>
                 </a:solidFill>
@@ -6000,15 +6108,168 @@
               </a:defRPr>
             </a:pPr>
             <a:r>
-              <a:t>•  resta</a:t>
-            </a:r>
-          </a:p>
+              <a:t>A</a:t>
+            </a:r>
+          </a:p>
+        </p:txBody>
+      </p:sp>
+      <p:sp>
+        <p:nvSpPr>
+          <p:cNvPr id="11" name="TextBox 10"/>
+          <p:cNvSpPr txBox="1"/>
+          <p:nvPr/>
+        </p:nvSpPr>
+        <p:spPr>
+          <a:xfrm>
+            <a:off x="896112" y="2304288"/>
+            <a:ext cx="4663440" cy="2011680"/>
+          </a:xfrm>
+          <a:prstGeom prst="rect">
+            <a:avLst/>
+          </a:prstGeom>
+          <a:noFill/>
+        </p:spPr>
+        <p:txBody>
+          <a:bodyPr wrap="none" lIns="164592" rIns="164592" tIns="109728" bIns="109728">
+            <a:spAutoFit/>
+          </a:bodyPr>
+          <a:lstStyle/>
           <a:p>
             <a:pPr>
               <a:spcAft>
-                <a:spcPts val="900"/>
+                <a:spcPts val="0"/>
               </a:spcAft>
-              <a:defRPr sz="2200">
+              <a:defRPr sz="1600">
+                <a:solidFill>
+                  <a:srgbClr val="1C2330"/>
+                </a:solidFill>
+                <a:latin typeface="Liberation Mono"/>
+              </a:defRPr>
+            </a:pPr>
+            <a:r>
+              <a:t>ENTERA · int result = 5 / 2;</a:t>
+            </a:r>
+            <a:br/>
+            <a:r>
+              <a:t>Resultado: 2</a:t>
+            </a:r>
+          </a:p>
+        </p:txBody>
+      </p:sp>
+      <p:sp>
+        <p:nvSpPr>
+          <p:cNvPr id="12" name="Rounded Rectangle 11"/>
+          <p:cNvSpPr/>
+          <p:nvPr/>
+        </p:nvSpPr>
+        <p:spPr>
+          <a:xfrm>
+            <a:off x="6153912" y="1325880"/>
+            <a:ext cx="5230368" cy="3401568"/>
+          </a:xfrm>
+          <a:prstGeom prst="roundRect">
+            <a:avLst/>
+          </a:prstGeom>
+          <a:solidFill>
+            <a:srgbClr val="FFFFFF"/>
+          </a:solidFill>
+          <a:ln>
+            <a:solidFill>
+              <a:srgbClr val="2F5BA8"/>
+            </a:solidFill>
+          </a:ln>
+        </p:spPr>
+        <p:style>
+          <a:lnRef idx="1">
+            <a:schemeClr val="accent1"/>
+          </a:lnRef>
+          <a:fillRef idx="3">
+            <a:schemeClr val="accent1"/>
+          </a:fillRef>
+          <a:effectRef idx="2">
+            <a:schemeClr val="accent1"/>
+          </a:effectRef>
+          <a:fontRef idx="minor">
+            <a:schemeClr val="lt1"/>
+          </a:fontRef>
+        </p:style>
+        <p:txBody>
+          <a:bodyPr rtlCol="0" anchor="ctr"/>
+          <a:lstStyle/>
+          <a:p>
+            <a:pPr algn="ctr"/>
+          </a:p>
+        </p:txBody>
+      </p:sp>
+      <p:sp>
+        <p:nvSpPr>
+          <p:cNvPr id="13" name="Rounded Rectangle 12"/>
+          <p:cNvSpPr/>
+          <p:nvPr/>
+        </p:nvSpPr>
+        <p:spPr>
+          <a:xfrm>
+            <a:off x="6382512" y="1572768"/>
+            <a:ext cx="566928" cy="475488"/>
+          </a:xfrm>
+          <a:prstGeom prst="roundRect">
+            <a:avLst/>
+          </a:prstGeom>
+          <a:solidFill>
+            <a:srgbClr val="2F5BA8"/>
+          </a:solidFill>
+          <a:ln>
+            <a:solidFill>
+              <a:srgbClr val="2F5BA8"/>
+            </a:solidFill>
+          </a:ln>
+        </p:spPr>
+        <p:style>
+          <a:lnRef idx="1">
+            <a:schemeClr val="accent1"/>
+          </a:lnRef>
+          <a:fillRef idx="3">
+            <a:schemeClr val="accent1"/>
+          </a:fillRef>
+          <a:effectRef idx="2">
+            <a:schemeClr val="accent1"/>
+          </a:effectRef>
+          <a:fontRef idx="minor">
+            <a:schemeClr val="lt1"/>
+          </a:fontRef>
+        </p:style>
+        <p:txBody>
+          <a:bodyPr rtlCol="0" anchor="ctr"/>
+          <a:lstStyle/>
+          <a:p>
+            <a:pPr algn="ctr"/>
+          </a:p>
+        </p:txBody>
+      </p:sp>
+      <p:sp>
+        <p:nvSpPr>
+          <p:cNvPr id="14" name="TextBox 13"/>
+          <p:cNvSpPr txBox="1"/>
+          <p:nvPr/>
+        </p:nvSpPr>
+        <p:spPr>
+          <a:xfrm>
+            <a:off x="6382512" y="1682496"/>
+            <a:ext cx="566928" cy="182880"/>
+          </a:xfrm>
+          <a:prstGeom prst="rect">
+            <a:avLst/>
+          </a:prstGeom>
+          <a:noFill/>
+        </p:spPr>
+        <p:txBody>
+          <a:bodyPr wrap="square" lIns="45720" rIns="45720" tIns="36576" bIns="36576" anchor="t">
+            <a:spAutoFit/>
+          </a:bodyPr>
+          <a:lstStyle/>
+          <a:p>
+            <a:pPr algn="ctr">
+              <a:defRPr sz="1300" b="1">
                 <a:solidFill>
                   <a:srgbClr val="FFFFFF"/>
                 </a:solidFill>
@@ -6016,15 +6277,123 @@
               </a:defRPr>
             </a:pPr>
             <a:r>
-              <a:t>•  \* multiplicación</a:t>
-            </a:r>
-          </a:p>
+              <a:t>B</a:t>
+            </a:r>
+          </a:p>
+        </p:txBody>
+      </p:sp>
+      <p:sp>
+        <p:nvSpPr>
+          <p:cNvPr id="15" name="TextBox 14"/>
+          <p:cNvSpPr txBox="1"/>
+          <p:nvPr/>
+        </p:nvSpPr>
+        <p:spPr>
+          <a:xfrm>
+            <a:off x="6428232" y="2304288"/>
+            <a:ext cx="4663440" cy="2011680"/>
+          </a:xfrm>
+          <a:prstGeom prst="rect">
+            <a:avLst/>
+          </a:prstGeom>
+          <a:noFill/>
+        </p:spPr>
+        <p:txBody>
+          <a:bodyPr wrap="none" lIns="164592" rIns="164592" tIns="109728" bIns="109728">
+            <a:spAutoFit/>
+          </a:bodyPr>
+          <a:lstStyle/>
           <a:p>
             <a:pPr>
               <a:spcAft>
-                <a:spcPts val="900"/>
+                <a:spcPts val="0"/>
               </a:spcAft>
-              <a:defRPr sz="2200">
+              <a:defRPr sz="1600">
+                <a:solidFill>
+                  <a:srgbClr val="1C2330"/>
+                </a:solidFill>
+                <a:latin typeface="Liberation Mono"/>
+              </a:defRPr>
+            </a:pPr>
+            <a:r>
+              <a:t>REAL · double result = 5 / 2.0;</a:t>
+            </a:r>
+            <a:br/>
+            <a:r>
+              <a:t>Resultado: 2.5</a:t>
+            </a:r>
+          </a:p>
+        </p:txBody>
+      </p:sp>
+      <p:sp>
+        <p:nvSpPr>
+          <p:cNvPr id="16" name="Rounded Rectangle 15"/>
+          <p:cNvSpPr/>
+          <p:nvPr/>
+        </p:nvSpPr>
+        <p:spPr>
+          <a:xfrm>
+            <a:off x="621792" y="5010912"/>
+            <a:ext cx="10762488" cy="932688"/>
+          </a:xfrm>
+          <a:prstGeom prst="roundRect">
+            <a:avLst/>
+          </a:prstGeom>
+          <a:solidFill>
+            <a:srgbClr val="121824"/>
+          </a:solidFill>
+          <a:ln>
+            <a:solidFill>
+              <a:srgbClr val="121824"/>
+            </a:solidFill>
+          </a:ln>
+        </p:spPr>
+        <p:style>
+          <a:lnRef idx="1">
+            <a:schemeClr val="accent1"/>
+          </a:lnRef>
+          <a:fillRef idx="3">
+            <a:schemeClr val="accent1"/>
+          </a:fillRef>
+          <a:effectRef idx="2">
+            <a:schemeClr val="accent1"/>
+          </a:effectRef>
+          <a:fontRef idx="minor">
+            <a:schemeClr val="lt1"/>
+          </a:fontRef>
+        </p:style>
+        <p:txBody>
+          <a:bodyPr rtlCol="0" anchor="ctr"/>
+          <a:lstStyle/>
+          <a:p>
+            <a:pPr algn="ctr"/>
+          </a:p>
+        </p:txBody>
+      </p:sp>
+      <p:sp>
+        <p:nvSpPr>
+          <p:cNvPr id="17" name="TextBox 16"/>
+          <p:cNvSpPr txBox="1"/>
+          <p:nvPr/>
+        </p:nvSpPr>
+        <p:spPr>
+          <a:xfrm>
+            <a:off x="896112" y="5230368"/>
+            <a:ext cx="10204704" cy="475488"/>
+          </a:xfrm>
+          <a:prstGeom prst="rect">
+            <a:avLst/>
+          </a:prstGeom>
+          <a:noFill/>
+        </p:spPr>
+        <p:txBody>
+          <a:bodyPr wrap="square" lIns="45720" rIns="45720" tIns="36576" bIns="36576" anchor="t">
+            <a:spAutoFit/>
+          </a:bodyPr>
+          <a:lstStyle/>
+          <a:p>
+            <a:pPr algn="ctr">
+              <a:defRPr sz="1700" b="1">
                 <a:solidFill>
                   <a:srgbClr val="FFFFFF"/>
                 </a:solidFill>
@@ -6032,7 +6401,7 @@
               </a:defRPr>
             </a:pPr>
             <a:r>
-              <a:t>•  / división o cociente</a:t>
+              <a:t>Si ambos operandos son enteros, la parte decimal no aparece.</a:t>
             </a:r>
           </a:p>
         </p:txBody>
@@ -6172,7 +6541,7 @@
               </a:defRPr>
             </a:pPr>
             <a:r>
-              <a:t>APLICAR Y DECIDIR</a:t>
+              <a:t>CÓDIGO EXPLICADO</a:t>
             </a:r>
           </a:p>
         </p:txBody>
@@ -6208,7 +6577,7 @@
               </a:defRPr>
             </a:pPr>
             <a:r>
-              <a:t>Actividad central · 1</a:t>
+              <a:t>Resto, precedencia y actualización</a:t>
             </a:r>
           </a:p>
         </p:txBody>
@@ -6300,8 +6669,108 @@
         </p:nvSpPr>
         <p:spPr>
           <a:xfrm>
-            <a:off x="658368" y="1307592"/>
-            <a:ext cx="10835640" cy="1049274"/>
+            <a:off x="621792" y="1325880"/>
+            <a:ext cx="7315200" cy="4709160"/>
+          </a:xfrm>
+          <a:prstGeom prst="roundRect">
+            <a:avLst/>
+          </a:prstGeom>
+          <a:solidFill>
+            <a:srgbClr val="121824"/>
+          </a:solidFill>
+          <a:ln>
+            <a:solidFill>
+              <a:srgbClr val="121824"/>
+            </a:solidFill>
+          </a:ln>
+        </p:spPr>
+        <p:style>
+          <a:lnRef idx="1">
+            <a:schemeClr val="accent1"/>
+          </a:lnRef>
+          <a:fillRef idx="3">
+            <a:schemeClr val="accent1"/>
+          </a:fillRef>
+          <a:effectRef idx="2">
+            <a:schemeClr val="accent1"/>
+          </a:effectRef>
+          <a:fontRef idx="minor">
+            <a:schemeClr val="lt1"/>
+          </a:fontRef>
+        </p:style>
+        <p:txBody>
+          <a:bodyPr rtlCol="0" anchor="ctr"/>
+          <a:lstStyle/>
+          <a:p>
+            <a:pPr algn="ctr"/>
+          </a:p>
+        </p:txBody>
+      </p:sp>
+      <p:sp>
+        <p:nvSpPr>
+          <p:cNvPr id="9" name="TextBox 8"/>
+          <p:cNvSpPr txBox="1"/>
+          <p:nvPr/>
+        </p:nvSpPr>
+        <p:spPr>
+          <a:xfrm>
+            <a:off x="822960" y="1572768"/>
+            <a:ext cx="6903720" cy="4251960"/>
+          </a:xfrm>
+          <a:prstGeom prst="rect">
+            <a:avLst/>
+          </a:prstGeom>
+          <a:noFill/>
+        </p:spPr>
+        <p:txBody>
+          <a:bodyPr wrap="none" lIns="164592" rIns="164592" tIns="109728" bIns="109728">
+            <a:spAutoFit/>
+          </a:bodyPr>
+          <a:lstStyle/>
+          <a:p>
+            <a:pPr>
+              <a:spcAft>
+                <a:spcPts val="0"/>
+              </a:spcAft>
+              <a:defRPr sz="1800">
+                <a:solidFill>
+                  <a:srgbClr val="FFFFFF"/>
+                </a:solidFill>
+                <a:latin typeface="Liberation Mono"/>
+              </a:defRPr>
+            </a:pPr>
+            <a:r>
+              <a:t>int remainder = 10 % 4;       // 2</a:t>
+            </a:r>
+            <a:br/>
+            <a:r>
+              <a:t>int a = 8 * 4 + 2;            // 34</a:t>
+            </a:r>
+            <a:br/>
+            <a:r>
+              <a:t>int b = 8 * (4 + 2);          // 48</a:t>
+            </a:r>
+            <a:br/>
+            <a:r>
+              <a:t>int tasks = 3;</a:t>
+            </a:r>
+            <a:br/>
+            <a:r>
+              <a:t>tasks += 2;                    // 5</a:t>
+            </a:r>
+          </a:p>
+        </p:txBody>
+      </p:sp>
+      <p:sp>
+        <p:nvSpPr>
+          <p:cNvPr id="10" name="Rounded Rectangle 9"/>
+          <p:cNvSpPr/>
+          <p:nvPr/>
+        </p:nvSpPr>
+        <p:spPr>
+          <a:xfrm>
+            <a:off x="8156448" y="1325880"/>
+            <a:ext cx="3401568" cy="4709160"/>
           </a:xfrm>
           <a:prstGeom prst="roundRect">
             <a:avLst/>
@@ -6339,14 +6808,14 @@
       </p:sp>
       <p:sp>
         <p:nvSpPr>
-          <p:cNvPr id="9" name="TextBox 8"/>
+          <p:cNvPr id="11" name="TextBox 10"/>
           <p:cNvSpPr txBox="1"/>
           <p:nvPr/>
         </p:nvSpPr>
         <p:spPr>
           <a:xfrm>
-            <a:off x="850392" y="1453895"/>
-            <a:ext cx="685800" cy="384048"/>
+            <a:off x="8412480" y="1627632"/>
+            <a:ext cx="2880360" cy="320040"/>
           </a:xfrm>
           <a:prstGeom prst="rect">
             <a:avLst/>
@@ -6368,21 +6837,21 @@
               </a:defRPr>
             </a:pPr>
             <a:r>
-              <a:t>PASO 1</a:t>
-            </a:r>
-          </a:p>
-        </p:txBody>
-      </p:sp>
-      <p:sp>
-        <p:nvSpPr>
-          <p:cNvPr id="10" name="TextBox 9"/>
+              <a:t>LEE Y PREDICE</a:t>
+            </a:r>
+          </a:p>
+        </p:txBody>
+      </p:sp>
+      <p:sp>
+        <p:nvSpPr>
+          <p:cNvPr id="12" name="TextBox 11"/>
           <p:cNvSpPr txBox="1"/>
           <p:nvPr/>
         </p:nvSpPr>
         <p:spPr>
           <a:xfrm>
-            <a:off x="1664208" y="1417319"/>
-            <a:ext cx="9464040" cy="829818"/>
+            <a:off x="8394192" y="2103120"/>
+            <a:ext cx="2788920" cy="3474720"/>
           </a:xfrm>
           <a:prstGeom prst="rect">
             <a:avLst/>
@@ -6390,13 +6859,16 @@
           <a:noFill/>
         </p:spPr>
         <p:txBody>
-          <a:bodyPr wrap="square" lIns="45720" rIns="45720" tIns="36576" bIns="36576" anchor="t">
+          <a:bodyPr wrap="square" lIns="73152" rIns="45720" tIns="36576">
             <a:spAutoFit/>
           </a:bodyPr>
           <a:lstStyle/>
           <a:p>
-            <a:pPr algn="l">
-              <a:defRPr sz="2000" b="0">
+            <a:pPr>
+              <a:spcAft>
+                <a:spcPts val="900"/>
+              </a:spcAft>
+              <a:defRPr sz="1700">
                 <a:solidFill>
                   <a:srgbClr val="1C2330"/>
                 </a:solidFill>
@@ -6404,116 +6876,15 @@
               </a:defRPr>
             </a:pPr>
             <a:r>
-              <a:t>Predice antes de ejecutar cuando haya código.</a:t>
-            </a:r>
-          </a:p>
-        </p:txBody>
-      </p:sp>
-      <p:sp>
-        <p:nvSpPr>
-          <p:cNvPr id="11" name="Rounded Rectangle 10"/>
-          <p:cNvSpPr/>
-          <p:nvPr/>
-        </p:nvSpPr>
-        <p:spPr>
-          <a:xfrm>
-            <a:off x="658368" y="2542032"/>
-            <a:ext cx="10835640" cy="1049274"/>
-          </a:xfrm>
-          <a:prstGeom prst="roundRect">
-            <a:avLst/>
-          </a:prstGeom>
-          <a:solidFill>
-            <a:srgbClr val="FFFFFF"/>
-          </a:solidFill>
-          <a:ln>
-            <a:solidFill>
-              <a:srgbClr val="E5E9EF"/>
-            </a:solidFill>
-          </a:ln>
-        </p:spPr>
-        <p:style>
-          <a:lnRef idx="1">
-            <a:schemeClr val="accent1"/>
-          </a:lnRef>
-          <a:fillRef idx="3">
-            <a:schemeClr val="accent1"/>
-          </a:fillRef>
-          <a:effectRef idx="2">
-            <a:schemeClr val="accent1"/>
-          </a:effectRef>
-          <a:fontRef idx="minor">
-            <a:schemeClr val="lt1"/>
-          </a:fontRef>
-        </p:style>
-        <p:txBody>
-          <a:bodyPr rtlCol="0" anchor="ctr"/>
-          <a:lstStyle/>
-          <a:p>
-            <a:pPr algn="ctr"/>
-          </a:p>
-        </p:txBody>
-      </p:sp>
-      <p:sp>
-        <p:nvSpPr>
-          <p:cNvPr id="12" name="TextBox 11"/>
-          <p:cNvSpPr txBox="1"/>
-          <p:nvPr/>
-        </p:nvSpPr>
-        <p:spPr>
-          <a:xfrm>
-            <a:off x="850392" y="2688336"/>
-            <a:ext cx="685800" cy="384048"/>
-          </a:xfrm>
-          <a:prstGeom prst="rect">
-            <a:avLst/>
-          </a:prstGeom>
-          <a:noFill/>
-        </p:spPr>
-        <p:txBody>
-          <a:bodyPr wrap="square" lIns="45720" rIns="45720" tIns="36576" bIns="36576" anchor="t">
-            <a:spAutoFit/>
-          </a:bodyPr>
-          <a:lstStyle/>
-          <a:p>
-            <a:pPr algn="l">
-              <a:defRPr sz="1200" b="1">
-                <a:solidFill>
-                  <a:srgbClr val="2F5BA8"/>
-                </a:solidFill>
-                <a:latin typeface="Aptos"/>
-              </a:defRPr>
-            </a:pPr>
-            <a:r>
-              <a:t>PASO 2</a:t>
-            </a:r>
-          </a:p>
-        </p:txBody>
-      </p:sp>
-      <p:sp>
-        <p:nvSpPr>
-          <p:cNvPr id="13" name="TextBox 12"/>
-          <p:cNvSpPr txBox="1"/>
-          <p:nvPr/>
-        </p:nvSpPr>
-        <p:spPr>
-          <a:xfrm>
-            <a:off x="1664208" y="2651760"/>
-            <a:ext cx="9464040" cy="829818"/>
-          </a:xfrm>
-          <a:prstGeom prst="rect">
-            <a:avLst/>
-          </a:prstGeom>
-          <a:noFill/>
-        </p:spPr>
-        <p:txBody>
-          <a:bodyPr wrap="square" lIns="45720" rIns="45720" tIns="36576" bIns="36576" anchor="t">
-            <a:spAutoFit/>
-          </a:bodyPr>
-          <a:lstStyle/>
-          <a:p>
-            <a:pPr algn="l">
-              <a:defRPr sz="2000" b="0">
+              <a:t>•  % devuelve el resto; no calcula un porcentaje.</a:t>
+            </a:r>
+          </a:p>
+          <a:p>
+            <a:pPr>
+              <a:spcAft>
+                <a:spcPts val="900"/>
+              </a:spcAft>
+              <a:defRPr sz="1700">
                 <a:solidFill>
                   <a:srgbClr val="1C2330"/>
                 </a:solidFill>
@@ -6521,241 +6892,7 @@
               </a:defRPr>
             </a:pPr>
             <a:r>
-              <a:t>Realiza la micropráctica o modificación prevista.</a:t>
-            </a:r>
-          </a:p>
-        </p:txBody>
-      </p:sp>
-      <p:sp>
-        <p:nvSpPr>
-          <p:cNvPr id="14" name="Rounded Rectangle 13"/>
-          <p:cNvSpPr/>
-          <p:nvPr/>
-        </p:nvSpPr>
-        <p:spPr>
-          <a:xfrm>
-            <a:off x="658368" y="3776472"/>
-            <a:ext cx="10835640" cy="1049274"/>
-          </a:xfrm>
-          <a:prstGeom prst="roundRect">
-            <a:avLst/>
-          </a:prstGeom>
-          <a:solidFill>
-            <a:srgbClr val="FFFFFF"/>
-          </a:solidFill>
-          <a:ln>
-            <a:solidFill>
-              <a:srgbClr val="E5E9EF"/>
-            </a:solidFill>
-          </a:ln>
-        </p:spPr>
-        <p:style>
-          <a:lnRef idx="1">
-            <a:schemeClr val="accent1"/>
-          </a:lnRef>
-          <a:fillRef idx="3">
-            <a:schemeClr val="accent1"/>
-          </a:fillRef>
-          <a:effectRef idx="2">
-            <a:schemeClr val="accent1"/>
-          </a:effectRef>
-          <a:fontRef idx="minor">
-            <a:schemeClr val="lt1"/>
-          </a:fontRef>
-        </p:style>
-        <p:txBody>
-          <a:bodyPr rtlCol="0" anchor="ctr"/>
-          <a:lstStyle/>
-          <a:p>
-            <a:pPr algn="ctr"/>
-          </a:p>
-        </p:txBody>
-      </p:sp>
-      <p:sp>
-        <p:nvSpPr>
-          <p:cNvPr id="15" name="TextBox 14"/>
-          <p:cNvSpPr txBox="1"/>
-          <p:nvPr/>
-        </p:nvSpPr>
-        <p:spPr>
-          <a:xfrm>
-            <a:off x="850392" y="3922776"/>
-            <a:ext cx="685800" cy="384048"/>
-          </a:xfrm>
-          <a:prstGeom prst="rect">
-            <a:avLst/>
-          </a:prstGeom>
-          <a:noFill/>
-        </p:spPr>
-        <p:txBody>
-          <a:bodyPr wrap="square" lIns="45720" rIns="45720" tIns="36576" bIns="36576" anchor="t">
-            <a:spAutoFit/>
-          </a:bodyPr>
-          <a:lstStyle/>
-          <a:p>
-            <a:pPr algn="l">
-              <a:defRPr sz="1200" b="1">
-                <a:solidFill>
-                  <a:srgbClr val="2F5BA8"/>
-                </a:solidFill>
-                <a:latin typeface="Aptos"/>
-              </a:defRPr>
-            </a:pPr>
-            <a:r>
-              <a:t>PASO 3</a:t>
-            </a:r>
-          </a:p>
-        </p:txBody>
-      </p:sp>
-      <p:sp>
-        <p:nvSpPr>
-          <p:cNvPr id="16" name="TextBox 15"/>
-          <p:cNvSpPr txBox="1"/>
-          <p:nvPr/>
-        </p:nvSpPr>
-        <p:spPr>
-          <a:xfrm>
-            <a:off x="1664208" y="3886200"/>
-            <a:ext cx="9464040" cy="829818"/>
-          </a:xfrm>
-          <a:prstGeom prst="rect">
-            <a:avLst/>
-          </a:prstGeom>
-          <a:noFill/>
-        </p:spPr>
-        <p:txBody>
-          <a:bodyPr wrap="square" lIns="45720" rIns="45720" tIns="36576" bIns="36576" anchor="t">
-            <a:spAutoFit/>
-          </a:bodyPr>
-          <a:lstStyle/>
-          <a:p>
-            <a:pPr algn="l">
-              <a:defRPr sz="2000" b="0">
-                <a:solidFill>
-                  <a:srgbClr val="1C2330"/>
-                </a:solidFill>
-                <a:latin typeface="Aptos"/>
-              </a:defRPr>
-            </a:pPr>
-            <a:r>
-              <a:t>Prueba el caso normal y, cuando exista una decisión o conversión, también el caso alternativo o erróneo.</a:t>
-            </a:r>
-          </a:p>
-        </p:txBody>
-      </p:sp>
-      <p:sp>
-        <p:nvSpPr>
-          <p:cNvPr id="17" name="Rounded Rectangle 16"/>
-          <p:cNvSpPr/>
-          <p:nvPr/>
-        </p:nvSpPr>
-        <p:spPr>
-          <a:xfrm>
-            <a:off x="658368" y="5010912"/>
-            <a:ext cx="10835640" cy="1049274"/>
-          </a:xfrm>
-          <a:prstGeom prst="roundRect">
-            <a:avLst/>
-          </a:prstGeom>
-          <a:solidFill>
-            <a:srgbClr val="FFFFFF"/>
-          </a:solidFill>
-          <a:ln>
-            <a:solidFill>
-              <a:srgbClr val="E5E9EF"/>
-            </a:solidFill>
-          </a:ln>
-        </p:spPr>
-        <p:style>
-          <a:lnRef idx="1">
-            <a:schemeClr val="accent1"/>
-          </a:lnRef>
-          <a:fillRef idx="3">
-            <a:schemeClr val="accent1"/>
-          </a:fillRef>
-          <a:effectRef idx="2">
-            <a:schemeClr val="accent1"/>
-          </a:effectRef>
-          <a:fontRef idx="minor">
-            <a:schemeClr val="lt1"/>
-          </a:fontRef>
-        </p:style>
-        <p:txBody>
-          <a:bodyPr rtlCol="0" anchor="ctr"/>
-          <a:lstStyle/>
-          <a:p>
-            <a:pPr algn="ctr"/>
-          </a:p>
-        </p:txBody>
-      </p:sp>
-      <p:sp>
-        <p:nvSpPr>
-          <p:cNvPr id="18" name="TextBox 17"/>
-          <p:cNvSpPr txBox="1"/>
-          <p:nvPr/>
-        </p:nvSpPr>
-        <p:spPr>
-          <a:xfrm>
-            <a:off x="850392" y="5157216"/>
-            <a:ext cx="685800" cy="384048"/>
-          </a:xfrm>
-          <a:prstGeom prst="rect">
-            <a:avLst/>
-          </a:prstGeom>
-          <a:noFill/>
-        </p:spPr>
-        <p:txBody>
-          <a:bodyPr wrap="square" lIns="45720" rIns="45720" tIns="36576" bIns="36576" anchor="t">
-            <a:spAutoFit/>
-          </a:bodyPr>
-          <a:lstStyle/>
-          <a:p>
-            <a:pPr algn="l">
-              <a:defRPr sz="1200" b="1">
-                <a:solidFill>
-                  <a:srgbClr val="2F5BA8"/>
-                </a:solidFill>
-                <a:latin typeface="Aptos"/>
-              </a:defRPr>
-            </a:pPr>
-            <a:r>
-              <a:t>PASO 4</a:t>
-            </a:r>
-          </a:p>
-        </p:txBody>
-      </p:sp>
-      <p:sp>
-        <p:nvSpPr>
-          <p:cNvPr id="19" name="TextBox 18"/>
-          <p:cNvSpPr txBox="1"/>
-          <p:nvPr/>
-        </p:nvSpPr>
-        <p:spPr>
-          <a:xfrm>
-            <a:off x="1664208" y="5120640"/>
-            <a:ext cx="9464040" cy="829818"/>
-          </a:xfrm>
-          <a:prstGeom prst="rect">
-            <a:avLst/>
-          </a:prstGeom>
-          <a:noFill/>
-        </p:spPr>
-        <p:txBody>
-          <a:bodyPr wrap="square" lIns="45720" rIns="45720" tIns="36576" bIns="36576" anchor="t">
-            <a:spAutoFit/>
-          </a:bodyPr>
-          <a:lstStyle/>
-          <a:p>
-            <a:pPr algn="l">
-              <a:defRPr sz="2000" b="0">
-                <a:solidFill>
-                  <a:srgbClr val="1C2330"/>
-                </a:solidFill>
-                <a:latin typeface="Aptos"/>
-              </a:defRPr>
-            </a:pPr>
-            <a:r>
-              <a:t>Conserva el código o resultado en el repositorio o espacio indicado.</a:t>
+              <a:t>•  Los paréntesis hacen explícito qué se calcula primero.</a:t>
             </a:r>
           </a:p>
         </p:txBody>
@@ -6931,7 +7068,7 @@
               </a:defRPr>
             </a:pPr>
             <a:r>
-              <a:t>Actividad central · 2</a:t>
+              <a:t>Predice antes de ejecutar</a:t>
             </a:r>
           </a:p>
         </p:txBody>
@@ -7024,7 +7161,7 @@
         <p:spPr>
           <a:xfrm>
             <a:off x="658368" y="1307592"/>
-            <a:ext cx="10835640" cy="2226564"/>
+            <a:ext cx="10835640" cy="1049274"/>
           </a:xfrm>
           <a:prstGeom prst="roundRect">
             <a:avLst/>
@@ -7091,7 +7228,7 @@
               </a:defRPr>
             </a:pPr>
             <a:r>
-              <a:t>PASO 6</a:t>
+              <a:t>PASO 1</a:t>
             </a:r>
           </a:p>
         </p:txBody>
@@ -7105,7 +7242,7 @@
         <p:spPr>
           <a:xfrm>
             <a:off x="1664208" y="1417319"/>
-            <a:ext cx="9464040" cy="2007108"/>
+            <a:ext cx="9464040" cy="829818"/>
           </a:xfrm>
           <a:prstGeom prst="rect">
             <a:avLst/>
@@ -7127,7 +7264,7 @@
               </a:defRPr>
             </a:pPr>
             <a:r>
-              <a:t>Registra una sola entrada en el diario individual; no crees un informe paralelo.</a:t>
+              <a:t>Predice 7 / 2, 7 / 2.0 y 7 % 2.</a:t>
             </a:r>
           </a:p>
         </p:txBody>
@@ -7140,8 +7277,8 @@
         </p:nvSpPr>
         <p:spPr>
           <a:xfrm>
-            <a:off x="658368" y="3776472"/>
-            <a:ext cx="10835640" cy="2226564"/>
+            <a:off x="658368" y="2542032"/>
+            <a:ext cx="10835640" cy="1049274"/>
           </a:xfrm>
           <a:prstGeom prst="roundRect">
             <a:avLst/>
@@ -7185,7 +7322,7 @@
         </p:nvSpPr>
         <p:spPr>
           <a:xfrm>
-            <a:off x="850392" y="3922776"/>
+            <a:off x="850392" y="2688336"/>
             <a:ext cx="685800" cy="384048"/>
           </a:xfrm>
           <a:prstGeom prst="rect">
@@ -7208,7 +7345,7 @@
               </a:defRPr>
             </a:pPr>
             <a:r>
-              <a:t>PASO 7</a:t>
+              <a:t>PASO 2</a:t>
             </a:r>
           </a:p>
         </p:txBody>
@@ -7221,8 +7358,8 @@
         </p:nvSpPr>
         <p:spPr>
           <a:xfrm>
-            <a:off x="1664208" y="3886200"/>
-            <a:ext cx="9464040" cy="2007108"/>
+            <a:off x="1664208" y="2651760"/>
+            <a:ext cx="9464040" cy="829818"/>
           </a:xfrm>
           <a:prstGeom prst="rect">
             <a:avLst/>
@@ -7244,7 +7381,241 @@
               </a:defRPr>
             </a:pPr>
             <a:r>
-              <a:t>¿Qué puedes señalar, explicar y probar al terminar este checkpoint?</a:t>
+              <a:t>Construye un microprograma con una constante, una variable y una operación.</a:t>
+            </a:r>
+          </a:p>
+        </p:txBody>
+      </p:sp>
+      <p:sp>
+        <p:nvSpPr>
+          <p:cNvPr id="14" name="Rounded Rectangle 13"/>
+          <p:cNvSpPr/>
+          <p:nvPr/>
+        </p:nvSpPr>
+        <p:spPr>
+          <a:xfrm>
+            <a:off x="658368" y="3776472"/>
+            <a:ext cx="10835640" cy="1049274"/>
+          </a:xfrm>
+          <a:prstGeom prst="roundRect">
+            <a:avLst/>
+          </a:prstGeom>
+          <a:solidFill>
+            <a:srgbClr val="FFFFFF"/>
+          </a:solidFill>
+          <a:ln>
+            <a:solidFill>
+              <a:srgbClr val="E5E9EF"/>
+            </a:solidFill>
+          </a:ln>
+        </p:spPr>
+        <p:style>
+          <a:lnRef idx="1">
+            <a:schemeClr val="accent1"/>
+          </a:lnRef>
+          <a:fillRef idx="3">
+            <a:schemeClr val="accent1"/>
+          </a:fillRef>
+          <a:effectRef idx="2">
+            <a:schemeClr val="accent1"/>
+          </a:effectRef>
+          <a:fontRef idx="minor">
+            <a:schemeClr val="lt1"/>
+          </a:fontRef>
+        </p:style>
+        <p:txBody>
+          <a:bodyPr rtlCol="0" anchor="ctr"/>
+          <a:lstStyle/>
+          <a:p>
+            <a:pPr algn="ctr"/>
+          </a:p>
+        </p:txBody>
+      </p:sp>
+      <p:sp>
+        <p:nvSpPr>
+          <p:cNvPr id="15" name="TextBox 14"/>
+          <p:cNvSpPr txBox="1"/>
+          <p:nvPr/>
+        </p:nvSpPr>
+        <p:spPr>
+          <a:xfrm>
+            <a:off x="850392" y="3922776"/>
+            <a:ext cx="685800" cy="384048"/>
+          </a:xfrm>
+          <a:prstGeom prst="rect">
+            <a:avLst/>
+          </a:prstGeom>
+          <a:noFill/>
+        </p:spPr>
+        <p:txBody>
+          <a:bodyPr wrap="square" lIns="45720" rIns="45720" tIns="36576" bIns="36576" anchor="t">
+            <a:spAutoFit/>
+          </a:bodyPr>
+          <a:lstStyle/>
+          <a:p>
+            <a:pPr algn="l">
+              <a:defRPr sz="1200" b="1">
+                <a:solidFill>
+                  <a:srgbClr val="2F5BA8"/>
+                </a:solidFill>
+                <a:latin typeface="Aptos"/>
+              </a:defRPr>
+            </a:pPr>
+            <a:r>
+              <a:t>PASO 3</a:t>
+            </a:r>
+          </a:p>
+        </p:txBody>
+      </p:sp>
+      <p:sp>
+        <p:nvSpPr>
+          <p:cNvPr id="16" name="TextBox 15"/>
+          <p:cNvSpPr txBox="1"/>
+          <p:nvPr/>
+        </p:nvSpPr>
+        <p:spPr>
+          <a:xfrm>
+            <a:off x="1664208" y="3886200"/>
+            <a:ext cx="9464040" cy="829818"/>
+          </a:xfrm>
+          <a:prstGeom prst="rect">
+            <a:avLst/>
+          </a:prstGeom>
+          <a:noFill/>
+        </p:spPr>
+        <p:txBody>
+          <a:bodyPr wrap="square" lIns="45720" rIns="45720" tIns="36576" bIns="36576" anchor="t">
+            <a:spAutoFit/>
+          </a:bodyPr>
+          <a:lstStyle/>
+          <a:p>
+            <a:pPr algn="l">
+              <a:defRPr sz="2000" b="0">
+                <a:solidFill>
+                  <a:srgbClr val="1C2330"/>
+                </a:solidFill>
+                <a:latin typeface="Aptos"/>
+              </a:defRPr>
+            </a:pPr>
+            <a:r>
+              <a:t>Actualiza la variable y muestra el resultado.</a:t>
+            </a:r>
+          </a:p>
+        </p:txBody>
+      </p:sp>
+      <p:sp>
+        <p:nvSpPr>
+          <p:cNvPr id="17" name="Rounded Rectangle 16"/>
+          <p:cNvSpPr/>
+          <p:nvPr/>
+        </p:nvSpPr>
+        <p:spPr>
+          <a:xfrm>
+            <a:off x="658368" y="5010912"/>
+            <a:ext cx="10835640" cy="1049274"/>
+          </a:xfrm>
+          <a:prstGeom prst="roundRect">
+            <a:avLst/>
+          </a:prstGeom>
+          <a:solidFill>
+            <a:srgbClr val="FFFFFF"/>
+          </a:solidFill>
+          <a:ln>
+            <a:solidFill>
+              <a:srgbClr val="E5E9EF"/>
+            </a:solidFill>
+          </a:ln>
+        </p:spPr>
+        <p:style>
+          <a:lnRef idx="1">
+            <a:schemeClr val="accent1"/>
+          </a:lnRef>
+          <a:fillRef idx="3">
+            <a:schemeClr val="accent1"/>
+          </a:fillRef>
+          <a:effectRef idx="2">
+            <a:schemeClr val="accent1"/>
+          </a:effectRef>
+          <a:fontRef idx="minor">
+            <a:schemeClr val="lt1"/>
+          </a:fontRef>
+        </p:style>
+        <p:txBody>
+          <a:bodyPr rtlCol="0" anchor="ctr"/>
+          <a:lstStyle/>
+          <a:p>
+            <a:pPr algn="ctr"/>
+          </a:p>
+        </p:txBody>
+      </p:sp>
+      <p:sp>
+        <p:nvSpPr>
+          <p:cNvPr id="18" name="TextBox 17"/>
+          <p:cNvSpPr txBox="1"/>
+          <p:nvPr/>
+        </p:nvSpPr>
+        <p:spPr>
+          <a:xfrm>
+            <a:off x="850392" y="5157216"/>
+            <a:ext cx="685800" cy="384048"/>
+          </a:xfrm>
+          <a:prstGeom prst="rect">
+            <a:avLst/>
+          </a:prstGeom>
+          <a:noFill/>
+        </p:spPr>
+        <p:txBody>
+          <a:bodyPr wrap="square" lIns="45720" rIns="45720" tIns="36576" bIns="36576" anchor="t">
+            <a:spAutoFit/>
+          </a:bodyPr>
+          <a:lstStyle/>
+          <a:p>
+            <a:pPr algn="l">
+              <a:defRPr sz="1200" b="1">
+                <a:solidFill>
+                  <a:srgbClr val="2F5BA8"/>
+                </a:solidFill>
+                <a:latin typeface="Aptos"/>
+              </a:defRPr>
+            </a:pPr>
+            <a:r>
+              <a:t>PASO 4</a:t>
+            </a:r>
+          </a:p>
+        </p:txBody>
+      </p:sp>
+      <p:sp>
+        <p:nvSpPr>
+          <p:cNvPr id="19" name="TextBox 18"/>
+          <p:cNvSpPr txBox="1"/>
+          <p:nvPr/>
+        </p:nvSpPr>
+        <p:spPr>
+          <a:xfrm>
+            <a:off x="1664208" y="5120640"/>
+            <a:ext cx="9464040" cy="829818"/>
+          </a:xfrm>
+          <a:prstGeom prst="rect">
+            <a:avLst/>
+          </a:prstGeom>
+          <a:noFill/>
+        </p:spPr>
+        <p:txBody>
+          <a:bodyPr wrap="square" lIns="45720" rIns="45720" tIns="36576" bIns="36576" anchor="t">
+            <a:spAutoFit/>
+          </a:bodyPr>
+          <a:lstStyle/>
+          <a:p>
+            <a:pPr algn="l">
+              <a:defRPr sz="2000" b="0">
+                <a:solidFill>
+                  <a:srgbClr val="1C2330"/>
+                </a:solidFill>
+                <a:latin typeface="Aptos"/>
+              </a:defRPr>
+            </a:pPr>
+            <a:r>
+              <a:t>Intenta reasignar la constante, lee el error y deshazlo.</a:t>
             </a:r>
           </a:p>
         </p:txBody>
@@ -7420,7 +7791,7 @@
               </a:defRPr>
             </a:pPr>
             <a:r>
-              <a:t>Evidencia y comprobación</a:t>
+              <a:t>Resultados que debes poder explicar</a:t>
             </a:r>
           </a:p>
         </p:txBody>
@@ -7558,7 +7929,7 @@
         <p:spPr>
           <a:xfrm>
             <a:off x="1389888" y="1280160"/>
-            <a:ext cx="9829800" cy="1624584"/>
+            <a:ext cx="9829800" cy="1209294"/>
           </a:xfrm>
           <a:prstGeom prst="rect">
             <a:avLst/>
@@ -7580,7 +7951,7 @@
               </a:defRPr>
             </a:pPr>
             <a:r>
-              <a:t>conserva el código o la prueba en el lugar indicado por la sesión;</a:t>
+              <a:t>Distingo variable, constante y literal.</a:t>
             </a:r>
           </a:p>
         </p:txBody>
@@ -7593,7 +7964,7 @@
         </p:nvSpPr>
         <p:spPr>
           <a:xfrm>
-            <a:off x="713232" y="2959607"/>
+            <a:off x="713232" y="2544318"/>
             <a:ext cx="420624" cy="420624"/>
           </a:xfrm>
           <a:prstGeom prst="roundRect">
@@ -7638,8 +8009,8 @@
         </p:nvSpPr>
         <p:spPr>
           <a:xfrm>
-            <a:off x="1389888" y="2941319"/>
-            <a:ext cx="9829800" cy="1624584"/>
+            <a:off x="1389888" y="2526029"/>
+            <a:ext cx="9829800" cy="1209294"/>
           </a:xfrm>
           <a:prstGeom prst="rect">
             <a:avLst/>
@@ -7661,7 +8032,7 @@
               </a:defRPr>
             </a:pPr>
             <a:r>
-              <a:t>añade una sola entrada al diario individual con prueba, bloqueo y siguiente paso;</a:t>
+              <a:t>Explico división entera y real.</a:t>
             </a:r>
           </a:p>
         </p:txBody>
@@ -7674,7 +8045,7 @@
         </p:nvSpPr>
         <p:spPr>
           <a:xfrm>
-            <a:off x="713232" y="4620767"/>
+            <a:off x="713232" y="3790187"/>
             <a:ext cx="420624" cy="420624"/>
           </a:xfrm>
           <a:prstGeom prst="roundRect">
@@ -7719,8 +8090,8 @@
         </p:nvSpPr>
         <p:spPr>
           <a:xfrm>
-            <a:off x="1389888" y="4602480"/>
-            <a:ext cx="9829800" cy="1624584"/>
+            <a:off x="1389888" y="3771900"/>
+            <a:ext cx="9829800" cy="1209294"/>
           </a:xfrm>
           <a:prstGeom prst="rect">
             <a:avLst/>
@@ -7742,7 +8113,88 @@
               </a:defRPr>
             </a:pPr>
             <a:r>
-              <a:t>no copies la misma reflexión en otro documento; el Site personal seleccionará evidencias al cerrar H1.</a:t>
+              <a:t>Explico qué devuelve %.</a:t>
+            </a:r>
+          </a:p>
+        </p:txBody>
+      </p:sp>
+      <p:sp>
+        <p:nvSpPr>
+          <p:cNvPr id="14" name="Rounded Rectangle 13"/>
+          <p:cNvSpPr/>
+          <p:nvPr/>
+        </p:nvSpPr>
+        <p:spPr>
+          <a:xfrm>
+            <a:off x="713232" y="5036057"/>
+            <a:ext cx="420624" cy="420624"/>
+          </a:xfrm>
+          <a:prstGeom prst="roundRect">
+            <a:avLst/>
+          </a:prstGeom>
+          <a:solidFill>
+            <a:srgbClr val="FFFFFF"/>
+          </a:solidFill>
+          <a:ln>
+            <a:solidFill>
+              <a:srgbClr val="2F5BA8"/>
+            </a:solidFill>
+          </a:ln>
+        </p:spPr>
+        <p:style>
+          <a:lnRef idx="1">
+            <a:schemeClr val="accent1"/>
+          </a:lnRef>
+          <a:fillRef idx="3">
+            <a:schemeClr val="accent1"/>
+          </a:fillRef>
+          <a:effectRef idx="2">
+            <a:schemeClr val="accent1"/>
+          </a:effectRef>
+          <a:fontRef idx="minor">
+            <a:schemeClr val="lt1"/>
+          </a:fontRef>
+        </p:style>
+        <p:txBody>
+          <a:bodyPr rtlCol="0" anchor="ctr"/>
+          <a:lstStyle/>
+          <a:p>
+            <a:pPr algn="ctr"/>
+          </a:p>
+        </p:txBody>
+      </p:sp>
+      <p:sp>
+        <p:nvSpPr>
+          <p:cNvPr id="15" name="TextBox 14"/>
+          <p:cNvSpPr txBox="1"/>
+          <p:nvPr/>
+        </p:nvSpPr>
+        <p:spPr>
+          <a:xfrm>
+            <a:off x="1389888" y="5017770"/>
+            <a:ext cx="9829800" cy="1209294"/>
+          </a:xfrm>
+          <a:prstGeom prst="rect">
+            <a:avLst/>
+          </a:prstGeom>
+          <a:noFill/>
+        </p:spPr>
+        <p:txBody>
+          <a:bodyPr wrap="square" lIns="45720" rIns="45720" tIns="36576" bIns="36576" anchor="t">
+            <a:spAutoFit/>
+          </a:bodyPr>
+          <a:lstStyle/>
+          <a:p>
+            <a:pPr algn="l">
+              <a:defRPr sz="1900" b="0">
+                <a:solidFill>
+                  <a:srgbClr val="1C2330"/>
+                </a:solidFill>
+                <a:latin typeface="Aptos"/>
+              </a:defRPr>
+            </a:pPr>
+            <a:r>
+              <a:t>Justifico un resultado con precedencia y paréntesis.</a:t>
             </a:r>
           </a:p>
         </p:txBody>
@@ -7882,7 +8334,7 @@
               </a:defRPr>
             </a:pPr>
             <a:r>
-              <a:t>LÍMITES QUE PROTEGEN EL APRENDIZAJE</a:t>
+              <a:t>EXPLICAR Y DEFENDER</a:t>
             </a:r>
           </a:p>
         </p:txBody>
@@ -7918,7 +8370,7 @@
               </a:defRPr>
             </a:pPr>
             <a:r>
-              <a:t>Seguridad y uso responsable</a:t>
+              <a:t>Salida diagnóstica</a:t>
             </a:r>
           </a:p>
         </p:txBody>
@@ -8011,17 +8463,17 @@
         <p:spPr>
           <a:xfrm>
             <a:off x="621792" y="1298448"/>
-            <a:ext cx="5230368" cy="4553712"/>
+            <a:ext cx="10927080" cy="1828800"/>
           </a:xfrm>
           <a:prstGeom prst="roundRect">
             <a:avLst/>
           </a:prstGeom>
           <a:solidFill>
-            <a:srgbClr val="FFFFFF"/>
+            <a:srgbClr val="2F5BA8"/>
           </a:solidFill>
           <a:ln>
             <a:solidFill>
-              <a:srgbClr val="E5E9EF"/>
+              <a:srgbClr val="2F5BA8"/>
             </a:solidFill>
           </a:ln>
         </p:spPr>
@@ -8049,57 +8501,14 @@
       </p:sp>
       <p:sp>
         <p:nvSpPr>
-          <p:cNvPr id="9" name="Rounded Rectangle 8"/>
-          <p:cNvSpPr/>
-          <p:nvPr/>
-        </p:nvSpPr>
-        <p:spPr>
-          <a:xfrm>
-            <a:off x="841248" y="1527048"/>
-            <a:ext cx="237744" cy="4096512"/>
-          </a:xfrm>
-          <a:prstGeom prst="roundRect">
-            <a:avLst/>
-          </a:prstGeom>
-          <a:solidFill>
-            <a:srgbClr val="247E5C"/>
-          </a:solidFill>
-          <a:ln>
-            <a:noFill/>
-          </a:ln>
-        </p:spPr>
-        <p:style>
-          <a:lnRef idx="1">
-            <a:schemeClr val="accent1"/>
-          </a:lnRef>
-          <a:fillRef idx="3">
-            <a:schemeClr val="accent1"/>
-          </a:fillRef>
-          <a:effectRef idx="2">
-            <a:schemeClr val="accent1"/>
-          </a:effectRef>
-          <a:fontRef idx="minor">
-            <a:schemeClr val="lt1"/>
-          </a:fontRef>
-        </p:style>
-        <p:txBody>
-          <a:bodyPr rtlCol="0" anchor="ctr"/>
-          <a:lstStyle/>
-          <a:p>
-            <a:pPr algn="ctr"/>
-          </a:p>
-        </p:txBody>
-      </p:sp>
-      <p:sp>
-        <p:nvSpPr>
-          <p:cNvPr id="10" name="TextBox 9"/>
+          <p:cNvPr id="9" name="TextBox 8"/>
           <p:cNvSpPr txBox="1"/>
           <p:nvPr/>
         </p:nvSpPr>
         <p:spPr>
           <a:xfrm>
-            <a:off x="1280160" y="1527048"/>
-            <a:ext cx="4224528" cy="4160520"/>
+            <a:off x="932688" y="1591056"/>
+            <a:ext cx="10241280" cy="256032"/>
           </a:xfrm>
           <a:prstGeom prst="rect">
             <a:avLst/>
@@ -8113,117 +8522,29 @@
           <a:lstStyle/>
           <a:p>
             <a:pPr algn="l">
-              <a:defRPr sz="1900" b="0">
+              <a:defRPr sz="1300" b="1">
                 <a:solidFill>
-                  <a:srgbClr val="1C2330"/>
+                  <a:srgbClr val="FFFFFF"/>
                 </a:solidFill>
                 <a:latin typeface="Aptos"/>
               </a:defRPr>
             </a:pPr>
             <a:r>
-              <a:t>Usa datos ficticios y no publiques credenciales ni información personal.</a:t>
-            </a:r>
-          </a:p>
-        </p:txBody>
-      </p:sp>
-      <p:sp>
-        <p:nvSpPr>
-          <p:cNvPr id="11" name="Rounded Rectangle 10"/>
-          <p:cNvSpPr/>
-          <p:nvPr/>
-        </p:nvSpPr>
-        <p:spPr>
-          <a:xfrm>
-            <a:off x="6126479" y="1298448"/>
-            <a:ext cx="5230368" cy="4553712"/>
-          </a:xfrm>
-          <a:prstGeom prst="roundRect">
-            <a:avLst/>
-          </a:prstGeom>
-          <a:solidFill>
-            <a:srgbClr val="FFFFFF"/>
-          </a:solidFill>
-          <a:ln>
-            <a:solidFill>
-              <a:srgbClr val="E5E9EF"/>
-            </a:solidFill>
-          </a:ln>
-        </p:spPr>
-        <p:style>
-          <a:lnRef idx="1">
-            <a:schemeClr val="accent1"/>
-          </a:lnRef>
-          <a:fillRef idx="3">
-            <a:schemeClr val="accent1"/>
-          </a:fillRef>
-          <a:effectRef idx="2">
-            <a:schemeClr val="accent1"/>
-          </a:effectRef>
-          <a:fontRef idx="minor">
-            <a:schemeClr val="lt1"/>
-          </a:fontRef>
-        </p:style>
-        <p:txBody>
-          <a:bodyPr rtlCol="0" anchor="ctr"/>
-          <a:lstStyle/>
-          <a:p>
-            <a:pPr algn="ctr"/>
-          </a:p>
-        </p:txBody>
-      </p:sp>
-      <p:sp>
-        <p:nvSpPr>
-          <p:cNvPr id="12" name="Rounded Rectangle 11"/>
-          <p:cNvSpPr/>
-          <p:nvPr/>
-        </p:nvSpPr>
-        <p:spPr>
-          <a:xfrm>
-            <a:off x="6345936" y="1527048"/>
-            <a:ext cx="237744" cy="4096512"/>
-          </a:xfrm>
-          <a:prstGeom prst="roundRect">
-            <a:avLst/>
-          </a:prstGeom>
-          <a:solidFill>
-            <a:srgbClr val="C07020"/>
-          </a:solidFill>
-          <a:ln>
-            <a:noFill/>
-          </a:ln>
-        </p:spPr>
-        <p:style>
-          <a:lnRef idx="1">
-            <a:schemeClr val="accent1"/>
-          </a:lnRef>
-          <a:fillRef idx="3">
-            <a:schemeClr val="accent1"/>
-          </a:fillRef>
-          <a:effectRef idx="2">
-            <a:schemeClr val="accent1"/>
-          </a:effectRef>
-          <a:fontRef idx="minor">
-            <a:schemeClr val="lt1"/>
-          </a:fontRef>
-        </p:style>
-        <p:txBody>
-          <a:bodyPr rtlCol="0" anchor="ctr"/>
-          <a:lstStyle/>
-          <a:p>
-            <a:pPr algn="ctr"/>
-          </a:p>
-        </p:txBody>
-      </p:sp>
-      <p:sp>
-        <p:nvSpPr>
-          <p:cNvPr id="13" name="TextBox 12"/>
+              <a:t>PREGUNTA O DECISIÓN DE SALIDA</a:t>
+            </a:r>
+          </a:p>
+        </p:txBody>
+      </p:sp>
+      <p:sp>
+        <p:nvSpPr>
+          <p:cNvPr id="10" name="TextBox 9"/>
           <p:cNvSpPr txBox="1"/>
           <p:nvPr/>
         </p:nvSpPr>
         <p:spPr>
           <a:xfrm>
-            <a:off x="6784847" y="1527048"/>
-            <a:ext cx="4224528" cy="4160520"/>
+            <a:off x="932688" y="1975104"/>
+            <a:ext cx="10058400" cy="822960"/>
           </a:xfrm>
           <a:prstGeom prst="rect">
             <a:avLst/>
@@ -8237,15 +8558,51 @@
           <a:lstStyle/>
           <a:p>
             <a:pPr algn="l">
-              <a:defRPr sz="1900" b="0">
+              <a:defRPr sz="2500" b="1">
                 <a:solidFill>
-                  <a:srgbClr val="1C2330"/>
+                  <a:srgbClr val="FFFFFF"/>
                 </a:solidFill>
                 <a:latin typeface="Aptos"/>
               </a:defRPr>
             </a:pPr>
             <a:r>
-              <a:t>Si utilizas IA de forma sustantiva, registra propósito, propuesta, cambios propios y validación en el registro de IA del hito.</a:t>
+              <a:t>Sin ejecutar: ¿qué producen 5 / 2, 5 / 2.0 y 10 % 4, y por qué?</a:t>
+            </a:r>
+          </a:p>
+        </p:txBody>
+      </p:sp>
+      <p:sp>
+        <p:nvSpPr>
+          <p:cNvPr id="11" name="TextBox 10"/>
+          <p:cNvSpPr txBox="1"/>
+          <p:nvPr/>
+        </p:nvSpPr>
+        <p:spPr>
+          <a:xfrm>
+            <a:off x="749808" y="3886200"/>
+            <a:ext cx="10607040" cy="1280160"/>
+          </a:xfrm>
+          <a:prstGeom prst="rect">
+            <a:avLst/>
+          </a:prstGeom>
+          <a:noFill/>
+        </p:spPr>
+        <p:txBody>
+          <a:bodyPr wrap="square" lIns="45720" rIns="45720" tIns="36576" bIns="36576" anchor="ctr">
+            <a:spAutoFit/>
+          </a:bodyPr>
+          <a:lstStyle/>
+          <a:p>
+            <a:pPr algn="ctr">
+              <a:defRPr sz="2300" b="1">
+                <a:solidFill>
+                  <a:srgbClr val="247E5C"/>
+                </a:solidFill>
+                <a:latin typeface="Aptos"/>
+              </a:defRPr>
+            </a:pPr>
+            <a:r>
+              <a:t>La sesión termina cuando la evidencia existe, está comprobada y puede defenderse.</a:t>
             </a:r>
           </a:p>
         </p:txBody>
@@ -8385,7 +8742,7 @@
               </a:defRPr>
             </a:pPr>
             <a:r>
-              <a:t>EXPLICAR Y DEFENDER</a:t>
+              <a:t>TRAZABILIDAD DEL CONTENIDO</a:t>
             </a:r>
           </a:p>
         </p:txBody>
@@ -8421,7 +8778,7 @@
               </a:defRPr>
             </a:pPr>
             <a:r>
-              <a:t>Cierre y defensa</a:t>
+              <a:t>Fuentes utilizadas</a:t>
             </a:r>
           </a:p>
         </p:txBody>
@@ -8507,59 +8864,14 @@
       </p:sp>
       <p:sp>
         <p:nvSpPr>
-          <p:cNvPr id="8" name="Rounded Rectangle 7"/>
-          <p:cNvSpPr/>
-          <p:nvPr/>
-        </p:nvSpPr>
-        <p:spPr>
-          <a:xfrm>
-            <a:off x="621792" y="1298448"/>
-            <a:ext cx="10927080" cy="1828800"/>
-          </a:xfrm>
-          <a:prstGeom prst="roundRect">
-            <a:avLst/>
-          </a:prstGeom>
-          <a:solidFill>
-            <a:srgbClr val="2F5BA8"/>
-          </a:solidFill>
-          <a:ln>
-            <a:solidFill>
-              <a:srgbClr val="2F5BA8"/>
-            </a:solidFill>
-          </a:ln>
-        </p:spPr>
-        <p:style>
-          <a:lnRef idx="1">
-            <a:schemeClr val="accent1"/>
-          </a:lnRef>
-          <a:fillRef idx="3">
-            <a:schemeClr val="accent1"/>
-          </a:fillRef>
-          <a:effectRef idx="2">
-            <a:schemeClr val="accent1"/>
-          </a:effectRef>
-          <a:fontRef idx="minor">
-            <a:schemeClr val="lt1"/>
-          </a:fontRef>
-        </p:style>
-        <p:txBody>
-          <a:bodyPr rtlCol="0" anchor="ctr"/>
-          <a:lstStyle/>
-          <a:p>
-            <a:pPr algn="ctr"/>
-          </a:p>
-        </p:txBody>
-      </p:sp>
-      <p:sp>
-        <p:nvSpPr>
-          <p:cNvPr id="9" name="TextBox 8"/>
+          <p:cNvPr id="8" name="TextBox 7"/>
           <p:cNvSpPr txBox="1"/>
           <p:nvPr/>
         </p:nvSpPr>
         <p:spPr>
           <a:xfrm>
-            <a:off x="932688" y="1591056"/>
-            <a:ext cx="10241280" cy="256032"/>
+            <a:off x="777240" y="1417320"/>
+            <a:ext cx="10515600" cy="658368"/>
           </a:xfrm>
           <a:prstGeom prst="rect">
             <a:avLst/>
@@ -8572,30 +8884,30 @@
           </a:bodyPr>
           <a:lstStyle/>
           <a:p>
-            <a:pPr algn="l">
-              <a:defRPr sz="1300" b="1">
+            <a:pPr algn="ctr">
+              <a:defRPr sz="2300" b="1">
                 <a:solidFill>
-                  <a:srgbClr val="FFFFFF"/>
+                  <a:srgbClr val="1C2330"/>
                 </a:solidFill>
                 <a:latin typeface="Aptos"/>
               </a:defRPr>
             </a:pPr>
             <a:r>
-              <a:t>PREGUNTA O DECISIÓN DE SALIDA</a:t>
-            </a:r>
-          </a:p>
-        </p:txBody>
-      </p:sp>
-      <p:sp>
-        <p:nvSpPr>
-          <p:cNvPr id="10" name="TextBox 9"/>
+              <a:t>Esta presentación selecciona y adapta contenido; no sustituye al libro ni copia el PDF completo.</a:t>
+            </a:r>
+          </a:p>
+        </p:txBody>
+      </p:sp>
+      <p:sp>
+        <p:nvSpPr>
+          <p:cNvPr id="9" name="TextBox 8"/>
           <p:cNvSpPr txBox="1"/>
           <p:nvPr/>
         </p:nvSpPr>
         <p:spPr>
           <a:xfrm>
-            <a:off x="932688" y="1975104"/>
-            <a:ext cx="10058400" cy="822960"/>
+            <a:off x="1005840" y="2468880"/>
+            <a:ext cx="10058400" cy="2331720"/>
           </a:xfrm>
           <a:prstGeom prst="rect">
             <a:avLst/>
@@ -8603,57 +8915,92 @@
           <a:noFill/>
         </p:spPr>
         <p:txBody>
-          <a:bodyPr wrap="square" lIns="45720" rIns="45720" tIns="36576" bIns="36576" anchor="t">
+          <a:bodyPr wrap="square" lIns="73152" rIns="45720" tIns="36576">
             <a:spAutoFit/>
           </a:bodyPr>
           <a:lstStyle/>
           <a:p>
-            <a:pPr algn="l">
-              <a:defRPr sz="2500" b="1">
+            <a:pPr>
+              <a:spcAft>
+                <a:spcPts val="900"/>
+              </a:spcAft>
+              <a:defRPr sz="2000">
                 <a:solidFill>
-                  <a:srgbClr val="FFFFFF"/>
+                  <a:srgbClr val="1C2330"/>
                 </a:solidFill>
                 <a:latin typeface="Aptos"/>
               </a:defRPr>
             </a:pPr>
             <a:r>
-              <a:t>¿Qué puedes señalar, explicar y probar al terminar este checkpoint?</a:t>
-            </a:r>
-          </a:p>
-        </p:txBody>
-      </p:sp>
-      <p:sp>
-        <p:nvSpPr>
-          <p:cNvPr id="11" name="TextBox 10"/>
-          <p:cNvSpPr txBox="1"/>
-          <p:nvPr/>
-        </p:nvSpPr>
-        <p:spPr>
-          <a:xfrm>
-            <a:off x="749808" y="3886200"/>
-            <a:ext cx="10607040" cy="1280160"/>
-          </a:xfrm>
-          <a:prstGeom prst="rect">
-            <a:avLst/>
-          </a:prstGeom>
-          <a:noFill/>
-        </p:spPr>
-        <p:txBody>
-          <a:bodyPr wrap="square" lIns="45720" rIns="45720" tIns="36576" bIns="36576" anchor="ctr">
-            <a:spAutoFit/>
-          </a:bodyPr>
-          <a:lstStyle/>
-          <a:p>
-            <a:pPr algn="ctr">
-              <a:defRPr sz="2300" b="1">
+              <a:t>•  Libro: capítulo 02 · Tema 1: constantes, literales y operadores</a:t>
+            </a:r>
+          </a:p>
+          <a:p>
+            <a:pPr>
+              <a:spcAft>
+                <a:spcPts val="900"/>
+              </a:spcAft>
+              <a:defRPr sz="2000">
                 <a:solidFill>
-                  <a:srgbClr val="247E5C"/>
+                  <a:srgbClr val="1C2330"/>
                 </a:solidFill>
                 <a:latin typeface="Aptos"/>
               </a:defRPr>
             </a:pPr>
             <a:r>
-              <a:t>La sesión termina cuando la evidencia existe, está comprobada y puede defenderse.</a:t>
+              <a:t>•  Fichas S206-S215 y píldoras H1</a:t>
+            </a:r>
+          </a:p>
+          <a:p>
+            <a:pPr>
+              <a:spcAft>
+                <a:spcPts val="900"/>
+              </a:spcAft>
+              <a:defRPr sz="2000">
+                <a:solidFill>
+                  <a:srgbClr val="1C2330"/>
+                </a:solidFill>
+                <a:latin typeface="Aptos"/>
+              </a:defRPr>
+            </a:pPr>
+            <a:r>
+              <a:t>•  Ejemplos revisados y adaptados a MiniJarvis; no se copian errores ni capturas antiguas del PDF.</a:t>
+            </a:r>
+          </a:p>
+        </p:txBody>
+      </p:sp>
+      <p:sp>
+        <p:nvSpPr>
+          <p:cNvPr id="10" name="TextBox 9"/>
+          <p:cNvSpPr txBox="1"/>
+          <p:nvPr/>
+        </p:nvSpPr>
+        <p:spPr>
+          <a:xfrm>
+            <a:off x="960120" y="5257800"/>
+            <a:ext cx="10241280" cy="411480"/>
+          </a:xfrm>
+          <a:prstGeom prst="rect">
+            <a:avLst/>
+          </a:prstGeom>
+          <a:noFill/>
+        </p:spPr>
+        <p:txBody>
+          <a:bodyPr wrap="square" lIns="45720" rIns="45720" tIns="36576" bIns="36576" anchor="t">
+            <a:spAutoFit/>
+          </a:bodyPr>
+          <a:lstStyle/>
+          <a:p>
+            <a:pPr algn="ctr">
+              <a:defRPr sz="1800" b="1">
+                <a:solidFill>
+                  <a:srgbClr val="2F5BA8"/>
+                </a:solidFill>
+                <a:latin typeface="Aptos"/>
+              </a:defRPr>
+            </a:pPr>
+            <a:r>
+              <a:t>Consulta el libro para ampliar, practicar y repasar errores frecuentes.</a:t>
             </a:r>
           </a:p>
         </p:txBody>

--- a/02-PROFESORADO/03-PRESENTACIONES/POR-SESION/h1/S211-constantes-presentacion.pptx
+++ b/02-PROFESORADO/03-PRESENTACIONES/POR-SESION/h1/S211-constantes-presentacion.pptx
@@ -510,12 +510,12 @@
           <a:lstStyle/>
           <a:p>
             <a:r>
-              <a:t>Objetivo docente: Aplicar constantes, literales y operaciones aritméticas con predicción y prueba.</a:t>
-            </a:r>
-          </a:p>
-          <a:p>
-            <a:r>
-              <a:t>Diapositiva 1 de 9: Constantes, literales y operaciones</a:t>
+              <a:t>Objetivo docente: Al terminar, debes usar constantes, literales y operaciones aritméticas con predicción y prueba.</a:t>
+            </a:r>
+          </a:p>
+          <a:p>
+            <a:r>
+              <a:t>Diapositiva 1 de 9: Qué vas a aprender</a:t>
             </a:r>
           </a:p>
           <a:p>
@@ -525,7 +525,7 @@
           </a:p>
           <a:p>
             <a:r>
-              <a:t>Presenta el producto y anticipa la evidencia: Quede diagnóstico.</a:t>
+              <a:t>Presenta el producto y anticipa la evidencia: Conservad el ejercicio o el código integrado y registrad una predicción que haya sido confirmada o corregida.</a:t>
             </a:r>
           </a:p>
           <a:p>
@@ -535,52 +535,7 @@
           </a:p>
           <a:p>
             <a:r>
-              <a:t>- 00:00–00:04 / D1: EJECUTAR: Pide clasificar datos estables y cambiantes.</a:t>
-            </a:r>
-          </a:p>
-          <a:p>
-            <a:r>
-              <a:t>- 00:04–00:09 / D2: PÍLDORA DOCENTE 1/5: Explica que no deben cambiar durante la ejecución y por qué dan intención al código.</a:t>
-            </a:r>
-          </a:p>
-          <a:p>
-            <a:r>
-              <a:t>- 00:09–00:14 / D3: PÍLDORA DOCENTE 2/5: Introduce literales de forma práctica.</a:t>
-            </a:r>
-          </a:p>
-          <a:p>
-            <a:r>
-              <a:t>- 00:14–00:21 / D4: PÍLDORA DOCENTE 3/5: Explica que una operación produce un resultado que debemos usar/guardar si queremos trabajar con él.</a:t>
-            </a:r>
-          </a:p>
-          <a:p>
-            <a:r>
-              <a:t>- 00:21–00:26 / D5: EXPERIMENTO: Haz predicción antes de ejecutar. Explica cociente entero vs división real.</a:t>
-            </a:r>
-          </a:p>
-          <a:p>
-            <a:r>
-              <a:t>- 00:26–00:30 / D6: PÍLDORA DOCENTE 4/5: Aclara que % no significa porcentaje.</a:t>
-            </a:r>
-          </a:p>
-          <a:p>
-            <a:r>
-              <a:t>- 00:30–00:34 / D7: EXPERIMENTO: Haz resolver a mano. Conecta con precedencia matemática y paréntesis.</a:t>
-            </a:r>
-          </a:p>
-          <a:p>
-            <a:r>
-              <a:t>- 00:34–00:37 / D8: PÍLDORA DOCENTE 5/5: Relaciona con asignación de S210.</a:t>
-            </a:r>
-          </a:p>
-          <a:p>
-            <a:r>
-              <a:t>- 00:37–00:42 / D9: ACTIVIDAD: Circula y pregunta qué entrada/datos usaron y qué esperaban.</a:t>
-            </a:r>
-          </a:p>
-          <a:p>
-            <a:r>
-              <a:t>- 00:42–00:45 / D10: CIERRE: Recoge respuestas y registra errores comunes.</a:t>
+              <a:t>- 45 minutos: En vuestro MiniJarvis o en un ejercicio, usad una constante, una variable, una operación, una actualización y una salida que permita comprobar el resultado.</a:t>
             </a:r>
           </a:p>
           <a:p>
@@ -590,12 +545,122 @@
           </a:p>
           <a:p>
             <a:r>
-              <a:t>- PÍLDORA DOCENTE 1/5: Explica que no deben cambiar durante la ejecución y por qué dan intención al código, PÍLDORA DOCENTE 2/5: Introduce literales de forma práctica, PÍLDORA DOCENTE 3/5: Explica que una operación produce un resultado que debemos usar/guardar si queremos trabajar con él.</a:t>
-            </a:r>
-          </a:p>
-          <a:p>
-            <a:r>
-              <a:t>- PÍLDORA DOCENTE 4/5: Aclara que % no significa porcentaje, PÍLDORA DOCENTE 5/5: Relaciona con asignación de S210.</a:t>
+              <a:t>- Úsala antes de introducir final, división entera, % y actualización.</a:t>
+            </a:r>
+          </a:p>
+          <a:p>
+            <a:r>
+              <a:t>- Una constante representa un dato que no debe cambiar durante la ejecución. Un literal es un valor escrito directamente. Una operación produce un resultado, pero ese resultado se pierde si no lo guardamos, mostramos o usamos.</a:t>
+            </a:r>
+          </a:p>
+          <a:p>
+            <a:r>
+              <a:t>- Empieza con constantes y variables:</a:t>
+            </a:r>
+          </a:p>
+          <a:p>
+            <a:r>
+              <a:t>- final String NOMBRE_ASISTENTE = "MiniJarvis";</a:t>
+            </a:r>
+          </a:p>
+          <a:p>
+            <a:r>
+              <a:t>- final int ANIO_INICIO = 2026;</a:t>
+            </a:r>
+          </a:p>
+          <a:p>
+            <a:r>
+              <a:t>- Pregunta al alumnado:</a:t>
+            </a:r>
+          </a:p>
+          <a:p>
+            <a:r>
+              <a:t>- Esperamos que estos datos cambien durante la ejecución.</a:t>
+            </a:r>
+          </a:p>
+          <a:p>
+            <a:r>
+              <a:t>- Contrasta constante y variable:</a:t>
+            </a:r>
+          </a:p>
+          <a:p>
+            <a:r>
+              <a:t>- int horasEstudio = 3;</a:t>
+            </a:r>
+          </a:p>
+          <a:p>
+            <a:r>
+              <a:t>- horasEstudio = 4;</a:t>
+            </a:r>
+          </a:p>
+          <a:p>
+            <a:r>
+              <a:t>- Aclara:</a:t>
+            </a:r>
+          </a:p>
+          <a:p>
+            <a:r>
+              <a:t>- Un dato puede empezar siempre igual y no ser constante si está pensado para cambiar.</a:t>
+            </a:r>
+          </a:p>
+          <a:p>
+            <a:r>
+              <a:t>- int tareas = 0;</a:t>
+            </a:r>
+          </a:p>
+          <a:p>
+            <a:r>
+              <a:t>- Presenta literales:</a:t>
+            </a:r>
+          </a:p>
+          <a:p>
+            <a:r>
+              <a:t>- 5</a:t>
+            </a:r>
+          </a:p>
+          <a:p>
+            <a:r>
+              <a:t>- 3.5</a:t>
+            </a:r>
+          </a:p>
+          <a:p>
+            <a:r>
+              <a:t>- "Hola"</a:t>
+            </a:r>
+          </a:p>
+          <a:p>
+            <a:r>
+              <a:t>- 'A'</a:t>
+            </a:r>
+          </a:p>
+          <a:p>
+            <a:r>
+              <a:t>- true</a:t>
+            </a:r>
+          </a:p>
+          <a:p>
+            <a:r>
+              <a:t>- false</a:t>
+            </a:r>
+          </a:p>
+          <a:p>
+            <a:r>
+              <a:t>- Clasifica con ejemplos:</a:t>
+            </a:r>
+          </a:p>
+          <a:p>
+            <a:r>
+              <a:t>- int horas = 5;</a:t>
+            </a:r>
+          </a:p>
+          <a:p>
+            <a:r>
+              <a:t>- double nota = 7.5;</a:t>
+            </a:r>
+          </a:p>
+          <a:p>
+            <a:r>
+              <a:t>- String mensaje = "Hola";</a:t>
             </a:r>
           </a:p>
           <a:p>
@@ -670,7 +735,7 @@
           <a:lstStyle/>
           <a:p>
             <a:r>
-              <a:t>Objetivo docente: Aplicar constantes, literales y operaciones aritméticas con predicción y prueba.</a:t>
+              <a:t>Objetivo docente: Al terminar, debes usar constantes, literales y operaciones aritméticas con predicción y prueba.</a:t>
             </a:r>
           </a:p>
           <a:p>
@@ -685,12 +750,12 @@
           </a:p>
           <a:p>
             <a:r>
-              <a:t>- Objetivo: Aplicar constantes, literales y operaciones aritméticas con predicción y prueba.</a:t>
-            </a:r>
-          </a:p>
-          <a:p>
-            <a:r>
-              <a:t>- Comprobación: Quede diagnóstico.</a:t>
+              <a:t>- Objetivo: Al terminar, debes usar constantes, literales y operaciones aritméticas con predicción y prueba.</a:t>
+            </a:r>
+          </a:p>
+          <a:p>
+            <a:r>
+              <a:t>- Comprobación: Conservad el ejercicio o el código integrado y registrad una predicción que haya sido confirmada o corregida.</a:t>
             </a:r>
           </a:p>
           <a:p>
@@ -765,7 +830,7 @@
           <a:lstStyle/>
           <a:p>
             <a:r>
-              <a:t>Objetivo docente: Aplicar constantes, literales y operaciones aritméticas con predicción y prueba.</a:t>
+              <a:t>Objetivo docente: Al terminar, debes usar constantes, literales y operaciones aritméticas con predicción y prueba.</a:t>
             </a:r>
           </a:p>
           <a:p>
@@ -885,7 +950,7 @@
           <a:lstStyle/>
           <a:p>
             <a:r>
-              <a:t>Objetivo docente: Aplicar constantes, literales y operaciones aritméticas con predicción y prueba.</a:t>
+              <a:t>Objetivo docente: Al terminar, debes usar constantes, literales y operaciones aritméticas con predicción y prueba.</a:t>
             </a:r>
           </a:p>
           <a:p>
@@ -1000,7 +1065,7 @@
           <a:lstStyle/>
           <a:p>
             <a:r>
-              <a:t>Objetivo docente: Aplicar constantes, literales y operaciones aritméticas con predicción y prueba.</a:t>
+              <a:t>Objetivo docente: Al terminar, debes usar constantes, literales y operaciones aritméticas con predicción y prueba.</a:t>
             </a:r>
           </a:p>
           <a:p>
@@ -1045,12 +1110,22 @@
           </a:p>
           <a:p>
             <a:r>
+              <a:t>tasks++;                       // 6</a:t>
+            </a:r>
+          </a:p>
+          <a:p>
+            <a:r>
+              <a:t>tasks--;                       // 5</a:t>
+            </a:r>
+          </a:p>
+          <a:p>
+            <a:r>
               <a:t>- % devuelve el resto; no calcula un porcentaje.</a:t>
             </a:r>
           </a:p>
           <a:p>
             <a:r>
-              <a:t>- Los paréntesis hacen explícito qué se calcula primero.</a:t>
+              <a:t>- tasks++ y tasks-- cambian exactamente una unidad.</a:t>
             </a:r>
           </a:p>
           <a:p>
@@ -1125,7 +1200,7 @@
           <a:lstStyle/>
           <a:p>
             <a:r>
-              <a:t>Objetivo docente: Aplicar constantes, literales y operaciones aritméticas con predicción y prueba.</a:t>
+              <a:t>Objetivo docente: Al terminar, debes usar constantes, literales y operaciones aritméticas con predicción y prueba.</a:t>
             </a:r>
           </a:p>
           <a:p>
@@ -1235,7 +1310,7 @@
           <a:lstStyle/>
           <a:p>
             <a:r>
-              <a:t>Objetivo docente: Aplicar constantes, literales y operaciones aritméticas con predicción y prueba.</a:t>
+              <a:t>Objetivo docente: Al terminar, debes usar constantes, literales y operaciones aritméticas con predicción y prueba.</a:t>
             </a:r>
           </a:p>
           <a:p>
@@ -1250,7 +1325,7 @@
           </a:p>
           <a:p>
             <a:r>
-              <a:t>Comprueba la evidencia en su fuente canónica: Quede diagnóstico.</a:t>
+              <a:t>Comprueba la evidencia en su fuente canónica: Conservad el ejercicio o el código integrado y registrad una predicción que haya sido confirmada o corregida.</a:t>
             </a:r>
           </a:p>
           <a:p>
@@ -1345,7 +1420,7 @@
           <a:lstStyle/>
           <a:p>
             <a:r>
-              <a:t>Objetivo docente: Aplicar constantes, literales y operaciones aritméticas con predicción y prueba.</a:t>
+              <a:t>Objetivo docente: Al terminar, debes usar constantes, literales y operaciones aritméticas con predicción y prueba.</a:t>
             </a:r>
           </a:p>
           <a:p>
@@ -1440,12 +1515,12 @@
           <a:lstStyle/>
           <a:p>
             <a:r>
-              <a:t>Objetivo docente: Aplicar constantes, literales y operaciones aritméticas con predicción y prueba.</a:t>
-            </a:r>
-          </a:p>
-          <a:p>
-            <a:r>
-              <a:t>Diapositiva 9 de 9: Fuentes utilizadas</a:t>
+              <a:t>Objetivo docente: Al terminar, debes usar constantes, literales y operaciones aritméticas con predicción y prueba.</a:t>
+            </a:r>
+          </a:p>
+          <a:p>
+            <a:r>
+              <a:t>Diapositiva 9 de 9: Fuentes diferenciadas</a:t>
             </a:r>
           </a:p>
           <a:p>
@@ -1460,17 +1535,17 @@
           </a:p>
           <a:p>
             <a:r>
-              <a:t>- Libro: capítulo 02 · Tema 1: constantes, literales y operadores</a:t>
-            </a:r>
-          </a:p>
-          <a:p>
-            <a:r>
-              <a:t>- Fichas S206-S215 y píldoras H1</a:t>
-            </a:r>
-          </a:p>
-          <a:p>
-            <a:r>
-              <a:t>- Ejemplos revisados y adaptados a MiniJarvis; no se copian errores ni capturas antiguas del PDF.</a:t>
+              <a:t>- Libro por hitos · Capítulo 02: constantes y operadores</a:t>
+            </a:r>
+          </a:p>
+          <a:p>
+            <a:r>
+              <a:t>- PDF Tema 1 · §§4-5: literales, constantes y operaciones</a:t>
+            </a:r>
+          </a:p>
+          <a:p>
+            <a:r>
+              <a:t>- Proyecto MiniJarvis · fichas S206-S215, píldoras H1 y criterios de evidencia</a:t>
             </a:r>
           </a:p>
           <a:p>
@@ -4679,7 +4754,7 @@
               </a:defRPr>
             </a:pPr>
             <a:r>
-              <a:t>Constantes, literales y operaciones</a:t>
+              <a:t>Qué vas a aprender</a:t>
             </a:r>
           </a:p>
         </p:txBody>
@@ -4715,7 +4790,7 @@
               </a:defRPr>
             </a:pPr>
             <a:r>
-              <a:t>H1 — Primer MiniJarvis</a:t>
+              <a:t>H1 — Primer asistente ejecutable</a:t>
             </a:r>
           </a:p>
         </p:txBody>
@@ -4759,42 +4834,6 @@
       <p:sp>
         <p:nvSpPr>
           <p:cNvPr id="9" name="TextBox 8"/>
-          <p:cNvSpPr txBox="1"/>
-          <p:nvPr/>
-        </p:nvSpPr>
-        <p:spPr>
-          <a:xfrm>
-            <a:off x="713232" y="4965192"/>
-            <a:ext cx="10241280" cy="594360"/>
-          </a:xfrm>
-          <a:prstGeom prst="rect">
-            <a:avLst/>
-          </a:prstGeom>
-          <a:noFill/>
-        </p:spPr>
-        <p:txBody>
-          <a:bodyPr wrap="square" lIns="45720" rIns="45720" tIns="36576" bIns="36576" anchor="t">
-            <a:spAutoFit/>
-          </a:bodyPr>
-          <a:lstStyle/>
-          <a:p>
-            <a:pPr algn="l">
-              <a:defRPr sz="1700" b="0">
-                <a:solidFill>
-                  <a:srgbClr val="D2D9E4"/>
-                </a:solidFill>
-                <a:latin typeface="Aptos"/>
-              </a:defRPr>
-            </a:pPr>
-            <a:r>
-              <a:t>Individual con contraste por parejas o equipo cuando la práctica lo requiera</a:t>
-            </a:r>
-          </a:p>
-        </p:txBody>
-      </p:sp>
-      <p:sp>
-        <p:nvSpPr>
-          <p:cNvPr id="10" name="TextBox 9"/>
           <p:cNvSpPr txBox="1"/>
           <p:nvPr/>
         </p:nvSpPr>
@@ -5078,7 +5117,7 @@
               </a:defRPr>
             </a:pPr>
             <a:r>
-              <a:t>MiniJarvis · 1.º DAW · Sesión 211 · H1 — Primer MiniJarvis</a:t>
+              <a:t>MiniJarvis · 1.º DAW · Sesión 211 · H1 — Primer asistente ejecutable</a:t>
             </a:r>
           </a:p>
         </p:txBody>
@@ -5159,7 +5198,7 @@
               </a:defRPr>
             </a:pPr>
             <a:r>
-              <a:t>Objetivo: Aplicar constantes, literales y operaciones aritméticas con predicción y prueba.</a:t>
+              <a:t>Objetivo: Al terminar, debes usar constantes, literales y operaciones aritméticas con predicción y prueba.</a:t>
             </a:r>
           </a:p>
         </p:txBody>
@@ -5240,7 +5279,7 @@
               </a:defRPr>
             </a:pPr>
             <a:r>
-              <a:t>Comprobación: Quede diagnóstico.</a:t>
+              <a:t>Comprobación: Conservad el ejercicio o el código integrado y registrad una predicción que haya sido confirmada o corregida.</a:t>
             </a:r>
           </a:p>
         </p:txBody>
@@ -5495,7 +5534,7 @@
               </a:defRPr>
             </a:pPr>
             <a:r>
-              <a:t>MiniJarvis · 1.º DAW · Sesión 211 · H1 — Primer MiniJarvis</a:t>
+              <a:t>MiniJarvis · 1.º DAW · Sesión 211 · H1 — Primer asistente ejecutable</a:t>
             </a:r>
           </a:p>
         </p:txBody>
@@ -5982,7 +6021,7 @@
               </a:defRPr>
             </a:pPr>
             <a:r>
-              <a:t>MiniJarvis · 1.º DAW · Sesión 211 · H1 — Primer MiniJarvis</a:t>
+              <a:t>MiniJarvis · 1.º DAW · Sesión 211 · H1 — Primer asistente ejecutable</a:t>
             </a:r>
           </a:p>
         </p:txBody>
@@ -6656,7 +6695,7 @@
               </a:defRPr>
             </a:pPr>
             <a:r>
-              <a:t>MiniJarvis · 1.º DAW · Sesión 211 · H1 — Primer MiniJarvis</a:t>
+              <a:t>MiniJarvis · 1.º DAW · Sesión 211 · H1 — Primer asistente ejecutable</a:t>
             </a:r>
           </a:p>
         </p:txBody>
@@ -6758,6 +6797,14 @@
             <a:r>
               <a:t>tasks += 2;                    // 5</a:t>
             </a:r>
+            <a:br/>
+            <a:r>
+              <a:t>tasks++;                       // 6</a:t>
+            </a:r>
+            <a:br/>
+            <a:r>
+              <a:t>tasks--;                       // 5</a:t>
+            </a:r>
           </a:p>
         </p:txBody>
       </p:sp>
@@ -6892,7 +6939,7 @@
               </a:defRPr>
             </a:pPr>
             <a:r>
-              <a:t>•  Los paréntesis hacen explícito qué se calcula primero.</a:t>
+              <a:t>•  tasks++ y tasks-- cambian exactamente una unidad.</a:t>
             </a:r>
           </a:p>
         </p:txBody>
@@ -7147,7 +7194,7 @@
               </a:defRPr>
             </a:pPr>
             <a:r>
-              <a:t>MiniJarvis · 1.º DAW · Sesión 211 · H1 — Primer MiniJarvis</a:t>
+              <a:t>MiniJarvis · 1.º DAW · Sesión 211 · H1 — Primer asistente ejecutable</a:t>
             </a:r>
           </a:p>
         </p:txBody>
@@ -7870,7 +7917,7 @@
               </a:defRPr>
             </a:pPr>
             <a:r>
-              <a:t>MiniJarvis · 1.º DAW · Sesión 211 · H1 — Primer MiniJarvis</a:t>
+              <a:t>MiniJarvis · 1.º DAW · Sesión 211 · H1 — Primer asistente ejecutable</a:t>
             </a:r>
           </a:p>
         </p:txBody>
@@ -8449,7 +8496,7 @@
               </a:defRPr>
             </a:pPr>
             <a:r>
-              <a:t>MiniJarvis · 1.º DAW · Sesión 211 · H1 — Primer MiniJarvis</a:t>
+              <a:t>MiniJarvis · 1.º DAW · Sesión 211 · H1 — Primer asistente ejecutable</a:t>
             </a:r>
           </a:p>
         </p:txBody>
@@ -8778,7 +8825,7 @@
               </a:defRPr>
             </a:pPr>
             <a:r>
-              <a:t>Fuentes utilizadas</a:t>
+              <a:t>Fuentes diferenciadas</a:t>
             </a:r>
           </a:p>
         </p:txBody>
@@ -8857,7 +8904,7 @@
               </a:defRPr>
             </a:pPr>
             <a:r>
-              <a:t>MiniJarvis · 1.º DAW · Sesión 211 · H1 — Primer MiniJarvis</a:t>
+              <a:t>MiniJarvis · 1.º DAW · Sesión 211 · H1 — Primer asistente ejecutable</a:t>
             </a:r>
           </a:p>
         </p:txBody>
@@ -8932,7 +8979,7 @@
               </a:defRPr>
             </a:pPr>
             <a:r>
-              <a:t>•  Libro: capítulo 02 · Tema 1: constantes, literales y operadores</a:t>
+              <a:t>•  Libro por hitos · Capítulo 02: constantes y operadores</a:t>
             </a:r>
           </a:p>
           <a:p>
@@ -8948,7 +8995,7 @@
               </a:defRPr>
             </a:pPr>
             <a:r>
-              <a:t>•  Fichas S206-S215 y píldoras H1</a:t>
+              <a:t>•  PDF Tema 1 · §§4-5: literales, constantes y operaciones</a:t>
             </a:r>
           </a:p>
           <a:p>
@@ -8964,7 +9011,7 @@
               </a:defRPr>
             </a:pPr>
             <a:r>
-              <a:t>•  Ejemplos revisados y adaptados a MiniJarvis; no se copian errores ni capturas antiguas del PDF.</a:t>
+              <a:t>•  Proyecto MiniJarvis · fichas S206-S215, píldoras H1 y criterios de evidencia</a:t>
             </a:r>
           </a:p>
         </p:txBody>

--- a/02-PROFESORADO/03-PRESENTACIONES/POR-SESION/h1/S211-constantes-presentacion.pptx
+++ b/02-PROFESORADO/03-PRESENTACIONES/POR-SESION/h1/S211-constantes-presentacion.pptx
@@ -6081,7 +6081,7 @@
               </a:defRPr>
             </a:pPr>
             <a:r>
-              <a:t>He producido o actualizado: Código con al menos una constante bien usada.</a:t>
+              <a:t>Pueden explicar qué están intentando conseguir.</a:t>
             </a:r>
           </a:p>
         </p:txBody>
@@ -6162,7 +6162,7 @@
               </a:defRPr>
             </a:pPr>
             <a:r>
-              <a:t>Puedo señalar dónde está.</a:t>
+              <a:t>Registran una decisión, prueba o bloqueo; no muestran solo el resultado final.</a:t>
             </a:r>
           </a:p>
         </p:txBody>
@@ -6243,7 +6243,7 @@
               </a:defRPr>
             </a:pPr>
             <a:r>
-              <a:t>Puedo explicar una decisión tomada.</a:t>
+              <a:t>Todas las personas pueden describir su aportación.</a:t>
             </a:r>
           </a:p>
         </p:txBody>
@@ -6324,7 +6324,7 @@
               </a:defRPr>
             </a:pPr>
             <a:r>
-              <a:t>Puedo mostrar una prueba o comprobación.</a:t>
+              <a:t>Comprueban el producto con un criterio observable.</a:t>
             </a:r>
           </a:p>
         </p:txBody>
@@ -6405,7 +6405,7 @@
               </a:defRPr>
             </a:pPr>
             <a:r>
-              <a:t>He registrado mi aportación individual si el trabajo era de equipo.</a:t>
+              <a:t>No usan datos personales, credenciales ni respuestas de ejemplo antes del intento propio.</a:t>
             </a:r>
           </a:p>
         </p:txBody>

--- a/02-PROFESORADO/03-PRESENTACIONES/POR-SESION/h1/S211-constantes-presentacion.pptx
+++ b/02-PROFESORADO/03-PRESENTACIONES/POR-SESION/h1/S211-constantes-presentacion.pptx
@@ -3378,8 +3378,8 @@
         </p:nvSpPr>
         <p:spPr>
           <a:xfrm>
-            <a:off x="713232" y="6272784"/>
-            <a:ext cx="10607040" cy="201168"/>
+            <a:off x="713232" y="4965192"/>
+            <a:ext cx="10241280" cy="594360"/>
           </a:xfrm>
           <a:prstGeom prst="rect">
             <a:avLst/>
@@ -3393,6 +3393,42 @@
           <a:lstStyle/>
           <a:p>
             <a:pPr algn="l">
+              <a:defRPr sz="1700" b="0">
+                <a:solidFill>
+                  <a:srgbClr val="D2D9E4"/>
+                </a:solidFill>
+                <a:latin typeface="Aptos"/>
+              </a:defRPr>
+            </a:pPr>
+            <a:r>
+              <a:t>Equipo</a:t>
+            </a:r>
+          </a:p>
+        </p:txBody>
+      </p:sp>
+      <p:sp>
+        <p:nvSpPr>
+          <p:cNvPr id="10" name="TextBox 9"/>
+          <p:cNvSpPr txBox="1"/>
+          <p:nvPr/>
+        </p:nvSpPr>
+        <p:spPr>
+          <a:xfrm>
+            <a:off x="713232" y="6272784"/>
+            <a:ext cx="10607040" cy="201168"/>
+          </a:xfrm>
+          <a:prstGeom prst="rect">
+            <a:avLst/>
+          </a:prstGeom>
+          <a:noFill/>
+        </p:spPr>
+        <p:txBody>
+          <a:bodyPr wrap="square" lIns="45720" rIns="45720" tIns="36576" bIns="36576" anchor="t">
+            <a:spAutoFit/>
+          </a:bodyPr>
+          <a:lstStyle/>
+          <a:p>
+            <a:pPr algn="l">
               <a:defRPr sz="1000" b="1">
                 <a:solidFill>
                   <a:srgbClr val="A0AAB9"/>
@@ -3401,7 +3437,7 @@
               </a:defRPr>
             </a:pPr>
             <a:r>
-              <a:t>MINIJARVIS · PROGRAMACIÓN + ENTORNOS DE DESARROLLO</a:t>
+              <a:t>MINIJARVIS · PROGRAMACIÓN</a:t>
             </a:r>
           </a:p>
         </p:txBody>

--- a/02-PROFESORADO/03-PRESENTACIONES/POR-SESION/h1/S211-constantes-presentacion.pptx
+++ b/02-PROFESORADO/03-PRESENTACIONES/POR-SESION/h1/S211-constantes-presentacion.pptx
@@ -29,7 +29,6 @@
     <p:sldId id="277" r:id="rId29"/>
     <p:sldId id="278" r:id="rId30"/>
     <p:sldId id="279" r:id="rId31"/>
-    <p:sldId id="280" r:id="rId32"/>
   </p:sldIdLst>
   <p:sldSz cx="12191695" cy="6858000" type="screen4x3"/>
   <p:notesSz cx="6858000" cy="9144000"/>
@@ -737,7 +736,7 @@
           </a:p>
           <a:p>
             <a:r>
-              <a:t>S211 parte de variables y tipos ya trabajados en S210. No introduce `Scanner`, parseo ni casting como contenido central; la entrada y las conversiones corresponden a S212. Las expresiones lógicas aparecen solo para reconocer resultados con tipo y no adelantan el trabajo de decisiones de S213.</a:t>
+              <a:t>S211 parte de variables y tipos ya trabajados en S210. No introduce `Scanner`, parseo ni casting como contenido central; la entrada, las conversiones, el cálculo y la comparación booleana observable corresponden a S212. Las expresiones lógicas aparecen solo para reconocer resultados con tipo y no adelantan las decisiones con control de flujo de H2.</a:t>
             </a:r>
           </a:p>
           <a:p/>
@@ -2203,89 +2202,6 @@
           </a:p>
           <a:p>
             <a:r>
-              <a:t>Reloj fuente 38–43 min: duración compartida 300 segundos. Trabajo: Integrar constante, variable, operación, actualización y salida; ejecutar y explicar discrepancias. Función del soporte: apoyo al trabajo.</a:t>
-            </a:r>
-          </a:p>
-          <a:p/>
-          <a:p/>
-        </p:txBody>
-      </p:sp>
-      <p:sp>
-        <p:nvSpPr>
-          <p:cNvPr id="4" name="Slide Number Placeholder 3"/>
-          <p:cNvSpPr>
-            <a:spLocks noGrp="1"/>
-          </p:cNvSpPr>
-          <p:nvPr>
-            <p:ph type="sldNum" idx="5" sz="quarter"/>
-          </p:nvPr>
-        </p:nvSpPr>
-        <p:spPr/>
-      </p:sp>
-    </p:spTree>
-  </p:cSld>
-  <p:clrMapOvr>
-    <a:masterClrMapping/>
-  </p:clrMapOvr>
-</p:notes>
-</file>
-
-<file path=ppt/notesSlides/notesSlide25.xml><?xml version="1.0" encoding="utf-8"?>
-<p:notes xmlns:a="http://schemas.openxmlformats.org/drawingml/2006/main" xmlns:p="http://schemas.openxmlformats.org/presentationml/2006/main" xmlns:r="http://schemas.openxmlformats.org/officeDocument/2006/relationships">
-  <p:cSld>
-    <p:spTree>
-      <p:nvGrpSpPr>
-        <p:cNvPr id="1" name=""/>
-        <p:cNvGrpSpPr/>
-        <p:nvPr/>
-      </p:nvGrpSpPr>
-      <p:grpSpPr>
-        <a:xfrm>
-          <a:off x="0" y="0"/>
-          <a:ext cx="0" cy="0"/>
-          <a:chOff x="0" y="0"/>
-          <a:chExt cx="0" cy="0"/>
-        </a:xfrm>
-      </p:grpSpPr>
-      <p:sp>
-        <p:nvSpPr>
-          <p:cNvPr id="2" name="Slide Image Placeholder 1"/>
-          <p:cNvSpPr>
-            <a:spLocks noGrp="1"/>
-          </p:cNvSpPr>
-          <p:nvPr>
-            <p:ph type="sldImg" idx="2"/>
-          </p:nvPr>
-        </p:nvSpPr>
-        <p:spPr/>
-      </p:sp>
-      <p:sp>
-        <p:nvSpPr>
-          <p:cNvPr id="3" name="Notes Placeholder 2"/>
-          <p:cNvSpPr>
-            <a:spLocks noGrp="1"/>
-          </p:cNvSpPr>
-          <p:nvPr>
-            <p:ph type="body" idx="3" sz="quarter"/>
-          </p:nvPr>
-        </p:nvSpPr>
-        <p:spPr/>
-        <p:txBody>
-          <a:bodyPr/>
-          <a:lstStyle/>
-          <a:p>
-            <a:r>
-              <a:t>NOTAS DEL PRESENTADOR</a:t>
-            </a:r>
-          </a:p>
-          <a:p/>
-          <a:p>
-            <a:r>
-              <a:t>TIEMPO ORIENTATIVO (no proyectado)</a:t>
-            </a:r>
-          </a:p>
-          <a:p>
-            <a:r>
               <a:t>Reloj fuente 43–45 min: duración compartida 120 segundos. Trabajo: Comprobar la comprensión y cerrar. Función del soporte: comprobación individual.</a:t>
             </a:r>
           </a:p>
@@ -2785,7 +2701,7 @@
           <a:p/>
           <a:p>
             <a:r>
-              <a:t>Antes de ejecutar, pregunta por el valor y el tipo esperado. Las expresiones booleanas se utilizan aquí solo para reconocer que una expresión produce un resultado tipado; comparaciones, lógica y decisiones se desarrollan en S213.</a:t>
+              <a:t>Antes de ejecutar, pregunta por el valor y el tipo esperado. Las expresiones booleanas se utilizan aquí solo para reconocer que una expresión produce un resultado tipado; la comparación obligatoria se integra en S212 y las decisiones con control de flujo comienzan en H2.</a:t>
             </a:r>
           </a:p>
         </p:txBody>
@@ -2883,7 +2799,7 @@
           <a:p/>
           <a:p>
             <a:r>
-              <a:t>Antes de ejecutar, pregunta por el valor y el tipo esperado. Las expresiones booleanas se utilizan aquí solo para reconocer que una expresión produce un resultado tipado; comparaciones, lógica y decisiones se desarrollan en S213.</a:t>
+              <a:t>Antes de ejecutar, pregunta por el valor y el tipo esperado. Las expresiones booleanas se utilizan aquí solo para reconocer que una expresión produce un resultado tipado; la comparación obligatoria se integra en S212 y las decisiones con control de flujo comienzan en H2.</a:t>
             </a:r>
           </a:p>
         </p:txBody>
@@ -6158,7 +6074,7 @@
               </a:defRPr>
             </a:pPr>
             <a:r>
-              <a:t>Modalidad publicada: Equipo</a:t>
+              <a:t>Modalidad publicada: Individual → contraste por parejas</a:t>
             </a:r>
           </a:p>
         </p:txBody>
@@ -6212,7 +6128,7 @@
   </p:clrMapOvr>
   <p:extLst>
     <p:ext uri="urn:minijarvis:semantic-render:v1">
-      <ns0:renderMetadata xmlns:ns0="urn:minijarvis:semantic-render:v1">{"session": "211", "source_files": {"teacher": "/mnt/compartido/Programación-26-27/Minijarvis/02-PROFESORADO/02-SESIONES/h1/S211-constantes-docente.md", "student_fallback": "/mnt/compartido/Programación-26-27/Minijarvis/01-ALUMNADO/03-SESIONES/h1/S211-constantes-alumnado.md"}, "layout": "title", "plan_index": 0, "recognition": false, "unit_ids": ["unit-0", "unit-1", "unit-2", "unit-3", "unit-15", "unit-16", "unit-18", "unit-21", "unit-22", "unit-23", "unit-24", "unit-25", "unit-26", "unit-27"], "roles": {"unit-0": "core", "unit-1": "core", "unit-2": "core", "unit-3": "core", "unit-15": "core", "unit-16": "core", "unit-18": "recognition", "unit-21": "core", "unit-22": "core", "unit-23": "core", "unit-24": "core", "unit-25": "core", "unit-26": "core", "unit-27": "core"}, "source_refs": [{"source": "teacher", "heading": "Qué vas a aprender", "block_index": 0, "fragment": 0}, {"source": "teacher", "heading": "Antes de entrar en clase", "block_index": 1, "fragment": 0}, {"source": "teacher", "heading": "Apertura docente", "block_index": 2, "fragment": 0}, {"source": "teacher", "heading": "Temporalización orientativa", "block_index": 3, "fragment": 0}, {"source": "teacher", "heading": "Observación docente", "block_index": 17, "fragment": 0}, {"source": "teacher", "heading": "Andamiaje ante bloqueos", "block_index": 18, "fragment": 0}, {"source": "teacher", "heading": "Límite de la sesión", "block_index": 20, "fragment": 0}, {"source": "teacher", "heading": "Temporalización orientativa", "block_index": 3, "fragment": 0}, {"source": "teacher", "heading": "Temporalización orientativa", "block_index": 3, "fragment": 0}, {"source": "teacher", "heading": "Temporalización orientativa", "block_index": 3, "fragment": 0}, {"source": "teacher", "heading": "Temporalización orientativa", "block_index": 3, "fragment": 0}, {"source": "teacher", "heading": "Temporalización orientativa", "block_index": 3, "fragment": 0}, {"source": "teacher", "heading": "Temporalización orientativa", "block_index": 3, "fragment": 0}, {"source": "teacher", "heading": "Temporalización orientativa", "block_index": 3, "fragment": 0}], "visible_sources": [], "notes_sources": [{"function": "preparation", "heading": "Antes de entrar en clase", "sha256": "976b9dd451159130e5e327555cce74c5829765b52ef33716ad6ec408a2a66923"}, {"function": "explanations", "heading": "Apertura docente", "sha256": "aba648f76cad8b1cc54e87b4d9c0aad7a74096e41f45c6a5d82acb961899719f"}, {"function": "explanations", "heading": "Apertura docente", "sha256": "ce1f0857d26380a2db4fa3a708eee1789fad11e95e032b739b314d5785066212"}, {"function": "explanations", "heading": "Apertura docente", "sha256": "e5ec778dc0ff64fe2d17b41ac3e208cabc9e51f34e3a91c25c0177b1e98ae9fc"}, {"function": "explanations", "heading": "Apertura docente", "sha256": "961a36ac1093894fee007ef1fca1e4742fada4cd15b2c78a5cc5f7df8caa61e0"}, {"function": "timeline_context", "heading": "Temporalización orientativa", "sha256": "fe7ede0a952730893372452faa99dcdd09289ad68a28cafc3370de385ab020cf"}, {"function": "observation", "heading": "Observación docente", "sha256": "2e9c80d870522826e7567ba0fa7d8a1669df1afe27478998cd1b11535b2abe46"}, {"function": "observation", "heading": "Observación docente", "sha256": "fa109026666097671080037117c7e72c68714fb73a51af0ac09a6985d1f72a45"}, {"function": "scaffolding", "heading": "Andamiaje ante bloqueos", "sha256": "6789281f6c65eb1a281db9f861b5fe884cd2684b0bb07e471d4695b1e147117b"}, {"function": "scaffolding", "heading": "Andamiaje ante bloqueos", "sha256": "8a89977cd43faa597bf663e19509ffd2ec73e08d2c319f000d9305609d0e1af0"}, {"function": "other", "heading": "Límite de la sesión", "sha256": "a049055f530a241951132582c7667fbc5493024446b01dbe0e315ef426b38bc3"}, {"function": "timeline", "heading": "Temporalización orientativa", "sha256": "1438698420b4a98ebec8c1855fabce3d38d909f53a7e1e2949621ebe18cfc959"}, {"function": "timeline", "heading": "Temporalización orientativa", "sha256": "58d50d4294551b88f78c9303d7711d397b47b690440dcc99e389af91bd2ffc07"}, {"function": "timeline", "heading": "Temporalización orientativa", "sha256": "9202f15c35c34e4e90d85c432ae6933d117a77998f2ff75a5f566b6596d5a685"}, {"function": "timeline", "heading": "Temporalización orientativa", "sha256": "851bee345c95146bb1aafb34e50d13d32354b6c6f9a119250a9dd1934d6321b6"}, {"function": "timeline", "heading": "Temporalización orientativa", "sha256": "7e82f258f01736ed53a434714f4ea5a933384e48b0daa55b060500394a4adf4f"}, {"function": "timeline", "heading": "Temporalización orientativa", "sha256": "153023fd4fa29421d4abec6e167e5d52536d026d7952dd7c48977f004753a8b4"}, {"function": "timeline", "heading": "Temporalización orientativa", "sha256": "b121a354998520337bdf6f25824e9cd13b9daf9d17db016db960266b765e3399"}], "relations": {"source_supports_enriched": true}, "timeline_refs": [0], "composition": {"origin_slides": [1]}, "timing": {"seconds": 0, "allocations": [{"source_index": 0, "seconds": 0, "decision": "Intervalo compartido íntegro; propietario contable seleccionado por función de actividad y referencia timeline de unidad (identidad semántica en empates). Soporte, sin duplicación contable. Portada limitada a la apertura inicial: las referencias timeline presenter-only no convierten la portada en soporte de todos los tramos.", "source_time": "0–4 min", "source_seconds": 240, "is_owner": false, "function": "concepts"}], "clock_intervals": [0], "presenter_notes": "Reloj fuente 0–4 min: duración compartida 240 segundos. Trabajo: Presentar la finalidad y activar la distinción entre constante y variable. Función del soporte: explicación.", "shared_intervals": [{"source_index": 0, "source_time": "0–4 min", "seconds": 240, "is_owner": false, "function": "concepts", "action": "Presentar la finalidad y activar la distinción entre constante y variable.", "concurrent": false, "parallel_work": ""}]}, "code_blocks": [], "representation_needs": []}</ns0:renderMetadata>
+      <ns0:renderMetadata xmlns:ns0="urn:minijarvis:semantic-render:v1">{"session": "211", "source_files": {"teacher": "/mnt/compartido/Programación-26-27/Minijarvis/02-PROFESORADO/02-SESIONES/h1/S211-constantes-docente.md", "student_fallback": "/mnt/compartido/Programación-26-27/Minijarvis/01-ALUMNADO/03-SESIONES/h1/S211-constantes-alumnado.md"}, "layout": "title", "plan_index": 0, "recognition": false, "unit_ids": ["unit-0", "unit-1", "unit-2", "unit-3", "unit-15", "unit-16", "unit-18", "unit-20", "unit-21", "unit-22", "unit-23", "unit-24", "unit-25", "unit-26"], "roles": {"unit-0": "core", "unit-1": "core", "unit-2": "core", "unit-3": "core", "unit-15": "core", "unit-16": "core", "unit-18": "recognition", "unit-20": "core", "unit-21": "core", "unit-22": "core", "unit-23": "core", "unit-24": "core", "unit-25": "core", "unit-26": "core"}, "source_refs": [{"source": "teacher", "heading": "Qué vas a aprender", "block_index": 0, "fragment": 0}, {"source": "teacher", "heading": "Antes de entrar en clase", "block_index": 1, "fragment": 0}, {"source": "teacher", "heading": "Apertura docente", "block_index": 2, "fragment": 0}, {"source": "teacher", "heading": "Temporalización orientativa", "block_index": 3, "fragment": 0}, {"source": "teacher", "heading": "Observación docente", "block_index": 17, "fragment": 0}, {"source": "teacher", "heading": "Andamiaje ante bloqueos", "block_index": 18, "fragment": 0}, {"source": "teacher", "heading": "Límite de la sesión", "block_index": 20, "fragment": 0}, {"source": "teacher", "heading": "Temporalización orientativa", "block_index": 3, "fragment": 0}, {"source": "teacher", "heading": "Temporalización orientativa", "block_index": 3, "fragment": 0}, {"source": "teacher", "heading": "Temporalización orientativa", "block_index": 3, "fragment": 0}, {"source": "teacher", "heading": "Temporalización orientativa", "block_index": 3, "fragment": 0}, {"source": "teacher", "heading": "Temporalización orientativa", "block_index": 3, "fragment": 0}, {"source": "teacher", "heading": "Temporalización orientativa", "block_index": 3, "fragment": 0}, {"source": "teacher", "heading": "Temporalización orientativa", "block_index": 3, "fragment": 0}], "visible_sources": [], "notes_sources": [{"function": "preparation", "heading": "Antes de entrar en clase", "sha256": "976b9dd451159130e5e327555cce74c5829765b52ef33716ad6ec408a2a66923"}, {"function": "explanations", "heading": "Apertura docente", "sha256": "aba648f76cad8b1cc54e87b4d9c0aad7a74096e41f45c6a5d82acb961899719f"}, {"function": "explanations", "heading": "Apertura docente", "sha256": "ce1f0857d26380a2db4fa3a708eee1789fad11e95e032b739b314d5785066212"}, {"function": "explanations", "heading": "Apertura docente", "sha256": "e5ec778dc0ff64fe2d17b41ac3e208cabc9e51f34e3a91c25c0177b1e98ae9fc"}, {"function": "explanations", "heading": "Apertura docente", "sha256": "961a36ac1093894fee007ef1fca1e4742fada4cd15b2c78a5cc5f7df8caa61e0"}, {"function": "timeline_context", "heading": "Temporalización orientativa", "sha256": "fe7ede0a952730893372452faa99dcdd09289ad68a28cafc3370de385ab020cf"}, {"function": "observation", "heading": "Observación docente", "sha256": "2e9c80d870522826e7567ba0fa7d8a1669df1afe27478998cd1b11535b2abe46"}, {"function": "observation", "heading": "Observación docente", "sha256": "fa109026666097671080037117c7e72c68714fb73a51af0ac09a6985d1f72a45"}, {"function": "scaffolding", "heading": "Andamiaje ante bloqueos", "sha256": "6789281f6c65eb1a281db9f861b5fe884cd2684b0bb07e471d4695b1e147117b"}, {"function": "scaffolding", "heading": "Andamiaje ante bloqueos", "sha256": "8a89977cd43faa597bf663e19509ffd2ec73e08d2c319f000d9305609d0e1af0"}, {"function": "other", "heading": "Límite de la sesión", "sha256": "0c0ef4d0a8bb3c359f10b5dec3783be078434c8000ac882f3555d973cde300b1"}, {"function": "timeline", "heading": "Temporalización orientativa", "sha256": "1438698420b4a98ebec8c1855fabce3d38d909f53a7e1e2949621ebe18cfc959"}, {"function": "timeline", "heading": "Temporalización orientativa", "sha256": "58d50d4294551b88f78c9303d7711d397b47b690440dcc99e389af91bd2ffc07"}, {"function": "timeline", "heading": "Temporalización orientativa", "sha256": "9202f15c35c34e4e90d85c432ae6933d117a77998f2ff75a5f566b6596d5a685"}, {"function": "timeline", "heading": "Temporalización orientativa", "sha256": "851bee345c95146bb1aafb34e50d13d32354b6c6f9a119250a9dd1934d6321b6"}, {"function": "timeline", "heading": "Temporalización orientativa", "sha256": "7e82f258f01736ed53a434714f4ea5a933384e48b0daa55b060500394a4adf4f"}, {"function": "timeline", "heading": "Temporalización orientativa", "sha256": "153023fd4fa29421d4abec6e167e5d52536d026d7952dd7c48977f004753a8b4"}, {"function": "timeline", "heading": "Temporalización orientativa", "sha256": "b121a354998520337bdf6f25824e9cd13b9daf9d17db016db960266b765e3399"}], "relations": {"source_supports_enriched": true}, "timeline_refs": [0], "composition": {"origin_slides": [1]}, "timing": {"seconds": 0, "allocations": [{"source_index": 0, "seconds": 0, "decision": "Intervalo compartido íntegro; propietario contable seleccionado por función de actividad y referencia timeline de unidad (identidad semántica en empates). Soporte, sin duplicación contable. Portada limitada a la apertura inicial: las referencias timeline presenter-only no convierten la portada en soporte de todos los tramos.", "source_time": "0–4 min", "source_seconds": 240, "is_owner": false, "function": "concepts"}], "clock_intervals": [0], "presenter_notes": "Reloj fuente 0–4 min: duración compartida 240 segundos. Trabajo: Presentar la finalidad y activar la distinción entre constante y variable. Función del soporte: explicación.", "shared_intervals": [{"source_index": 0, "source_time": "0–4 min", "seconds": 240, "is_owner": false, "function": "concepts", "action": "Presentar la finalidad y activar la distinción entre constante y variable.", "concurrent": false, "parallel_work": ""}]}, "code_blocks": [], "representation_needs": []}</ns0:renderMetadata>
     </p:ext>
   </p:extLst>
 </p:sld>
@@ -11499,7 +11415,7 @@
               </a:defRPr>
             </a:pPr>
             <a:r>
-              <a:t>Seguridad y uso de IA</a:t>
+              <a:t>Comprueba lo aprendido</a:t>
             </a:r>
           </a:p>
         </p:txBody>
@@ -11548,14 +11464,63 @@
       </p:sp>
       <p:sp>
         <p:nvSpPr>
-          <p:cNvPr id="5" name="Acción" descr="Acción"/>
-          <p:cNvSpPr txBox="1"/>
-          <p:nvPr/>
-        </p:nvSpPr>
-        <p:spPr>
-          <a:xfrm>
-            <a:off x="640080" y="1406652"/>
-            <a:ext cx="10881360" cy="443992"/>
+          <p:cNvPr id="5" name="Contenido" descr="Contenido"/>
+          <p:cNvSpPr txBox="1"/>
+          <p:nvPr/>
+        </p:nvSpPr>
+        <p:spPr>
+          <a:xfrm>
+            <a:off x="640080" y="1417320"/>
+            <a:ext cx="10881360" cy="1338072"/>
+          </a:xfrm>
+          <a:prstGeom prst="rect">
+            <a:avLst/>
+          </a:prstGeom>
+          <a:solidFill>
+            <a:srgbClr val="2F5BA8"/>
+          </a:solidFill>
+        </p:spPr>
+        <p:txBody>
+          <a:bodyPr wrap="square" lIns="109728" rIns="109728" tIns="73152" bIns="73152">
+            <a:noAutofit/>
+          </a:bodyPr>
+          <a:lstStyle/>
+          <a:p>
+            <a:pPr>
+              <a:lnSpc>
+                <a:spcPts val="3080"/>
+              </a:lnSpc>
+              <a:spcAft>
+                <a:spcPts val="0"/>
+              </a:spcAft>
+              <a:defRPr sz="2800" b="1">
+                <a:solidFill>
+                  <a:srgbClr val="FFFFFF"/>
+                </a:solidFill>
+                <a:latin typeface="Liberation Sans"/>
+              </a:defRPr>
+            </a:pPr>
+            <a:r>
+              <a:rPr>
+                <a:solidFill>
+                  <a:srgbClr val="FFFFFF"/>
+                </a:solidFill>
+              </a:rPr>
+              <a:t>¿Por qué 5 / 2 produce 2, qué cambian los paréntesis, qué significa % y cómo evoluciona una variable con +=, -=, ++ o --?</a:t>
+            </a:r>
+          </a:p>
+        </p:txBody>
+      </p:sp>
+      <p:sp>
+        <p:nvSpPr>
+          <p:cNvPr id="6" name="Contenido" descr="Contenido"/>
+          <p:cNvSpPr txBox="1"/>
+          <p:nvPr/>
+        </p:nvSpPr>
+        <p:spPr>
+          <a:xfrm>
+            <a:off x="640080" y="2846832"/>
+            <a:ext cx="10881360" cy="946912"/>
           </a:xfrm>
           <a:prstGeom prst="rect">
             <a:avLst/>
@@ -11570,216 +11535,69 @@
           <a:p>
             <a:pPr>
               <a:lnSpc>
-                <a:spcPts val="2200"/>
-              </a:lnSpc>
-              <a:spcAft>
-                <a:spcPts val="0"/>
-              </a:spcAft>
-              <a:defRPr sz="2000" b="1">
-                <a:solidFill>
-                  <a:srgbClr val="2F5BA8"/>
-                </a:solidFill>
-                <a:latin typeface="Liberation Sans"/>
-              </a:defRPr>
-            </a:pPr>
-            <a:r>
-              <a:t>QUÉ HACER</a:t>
-            </a:r>
-          </a:p>
-        </p:txBody>
-      </p:sp>
-      <p:sp>
-        <p:nvSpPr>
-          <p:cNvPr id="6" name="Acción o criterio 0" descr="Acción o criterio 0"/>
-          <p:cNvSpPr txBox="1"/>
-          <p:nvPr/>
-        </p:nvSpPr>
-        <p:spPr>
-          <a:xfrm>
-            <a:off x="640080" y="1987804"/>
-            <a:ext cx="5257800" cy="1170432"/>
+                <a:spcPts val="3080"/>
+              </a:lnSpc>
+              <a:spcAft>
+                <a:spcPts val="0"/>
+              </a:spcAft>
+              <a:defRPr sz="2800" b="0">
+                <a:solidFill>
+                  <a:srgbClr val="1C2330"/>
+                </a:solidFill>
+                <a:latin typeface="Liberation Sans"/>
+              </a:defRPr>
+            </a:pPr>
+            <a:r>
+              <a:t>Una operación no está demostrada porque el código compile.</a:t>
+            </a:r>
+          </a:p>
+        </p:txBody>
+      </p:sp>
+      <p:sp>
+        <p:nvSpPr>
+          <p:cNvPr id="7" name="Contenido" descr="Contenido"/>
+          <p:cNvSpPr txBox="1"/>
+          <p:nvPr/>
+        </p:nvSpPr>
+        <p:spPr>
+          <a:xfrm>
+            <a:off x="640080" y="3885184"/>
+            <a:ext cx="10881360" cy="1729232"/>
           </a:xfrm>
           <a:prstGeom prst="rect">
             <a:avLst/>
           </a:prstGeom>
           <a:solidFill>
-            <a:srgbClr val="FFFFFF"/>
+            <a:srgbClr val="2F5BA8"/>
           </a:solidFill>
-          <a:ln>
-            <a:solidFill>
-              <a:srgbClr val="2F5BA8"/>
-            </a:solidFill>
-          </a:ln>
-        </p:spPr>
-        <p:txBody>
-          <a:bodyPr wrap="square" lIns="109728" rIns="109728" tIns="73152" bIns="73152">
-            <a:noAutofit/>
-          </a:bodyPr>
-          <a:lstStyle/>
-          <a:p>
-            <a:pPr>
-              <a:lnSpc>
-                <a:spcPts val="2640"/>
-              </a:lnSpc>
-              <a:spcAft>
-                <a:spcPts val="0"/>
-              </a:spcAft>
-              <a:defRPr sz="2400" b="0">
-                <a:solidFill>
-                  <a:srgbClr val="1C2330"/>
-                </a:solidFill>
-                <a:latin typeface="Liberation Sans"/>
-              </a:defRPr>
-            </a:pPr>
-            <a:r>
-              <a:t>Trabaja únicamente con datos ficticios.</a:t>
-            </a:r>
-          </a:p>
-        </p:txBody>
-      </p:sp>
-      <p:sp>
-        <p:nvSpPr>
-          <p:cNvPr id="7" name="Acción o criterio 1" descr="Acción o criterio 1"/>
-          <p:cNvSpPr txBox="1"/>
-          <p:nvPr/>
-        </p:nvSpPr>
-        <p:spPr>
-          <a:xfrm>
-            <a:off x="6080760" y="1987804"/>
-            <a:ext cx="5257800" cy="1170432"/>
-          </a:xfrm>
-          <a:prstGeom prst="rect">
-            <a:avLst/>
-          </a:prstGeom>
-          <a:solidFill>
-            <a:srgbClr val="FFFFFF"/>
-          </a:solidFill>
-          <a:ln>
-            <a:solidFill>
-              <a:srgbClr val="2F5BA8"/>
-            </a:solidFill>
-          </a:ln>
-        </p:spPr>
-        <p:txBody>
-          <a:bodyPr wrap="square" lIns="109728" rIns="109728" tIns="73152" bIns="73152">
-            <a:noAutofit/>
-          </a:bodyPr>
-          <a:lstStyle/>
-          <a:p>
-            <a:pPr>
-              <a:lnSpc>
-                <a:spcPts val="2640"/>
-              </a:lnSpc>
-              <a:spcAft>
-                <a:spcPts val="0"/>
-              </a:spcAft>
-              <a:defRPr sz="2400" b="0">
-                <a:solidFill>
-                  <a:srgbClr val="1C2330"/>
-                </a:solidFill>
-                <a:latin typeface="Liberation Sans"/>
-              </a:defRPr>
-            </a:pPr>
-            <a:r>
-              <a:t>No escribas contraseñas, tokens, claves API ni datos personales.</a:t>
-            </a:r>
-          </a:p>
-        </p:txBody>
-      </p:sp>
-      <p:sp>
-        <p:nvSpPr>
-          <p:cNvPr id="8" name="Acción o criterio 2" descr="Acción o criterio 2"/>
-          <p:cNvSpPr txBox="1"/>
-          <p:nvPr/>
-        </p:nvSpPr>
-        <p:spPr>
-          <a:xfrm>
-            <a:off x="640080" y="3249676"/>
-            <a:ext cx="5257800" cy="1840991"/>
-          </a:xfrm>
-          <a:prstGeom prst="rect">
-            <a:avLst/>
-          </a:prstGeom>
-          <a:solidFill>
-            <a:srgbClr val="FFFFFF"/>
-          </a:solidFill>
-          <a:ln>
-            <a:solidFill>
-              <a:srgbClr val="2F5BA8"/>
-            </a:solidFill>
-          </a:ln>
-        </p:spPr>
-        <p:txBody>
-          <a:bodyPr wrap="square" lIns="109728" rIns="109728" tIns="73152" bIns="73152">
-            <a:noAutofit/>
-          </a:bodyPr>
-          <a:lstStyle/>
-          <a:p>
-            <a:pPr>
-              <a:lnSpc>
-                <a:spcPts val="2640"/>
-              </a:lnSpc>
-              <a:spcAft>
-                <a:spcPts val="0"/>
-              </a:spcAft>
-              <a:defRPr sz="2400" b="0">
-                <a:solidFill>
-                  <a:srgbClr val="1C2330"/>
-                </a:solidFill>
-                <a:latin typeface="Liberation Sans"/>
-              </a:defRPr>
-            </a:pPr>
-            <a:r>
-              <a:t>Si utilizas IA en un uso permitido, registra qué pediste, qué recibiste, qué cambiaste y cómo lo comprobaste.</a:t>
-            </a:r>
-          </a:p>
-        </p:txBody>
-      </p:sp>
-      <p:sp>
-        <p:nvSpPr>
-          <p:cNvPr id="9" name="Acción o criterio 3" descr="Acción o criterio 3"/>
-          <p:cNvSpPr txBox="1"/>
-          <p:nvPr/>
-        </p:nvSpPr>
-        <p:spPr>
-          <a:xfrm>
-            <a:off x="6080760" y="3249676"/>
-            <a:ext cx="5257800" cy="1840991"/>
-          </a:xfrm>
-          <a:prstGeom prst="rect">
-            <a:avLst/>
-          </a:prstGeom>
-          <a:solidFill>
-            <a:srgbClr val="FFFFFF"/>
-          </a:solidFill>
-          <a:ln>
-            <a:solidFill>
-              <a:srgbClr val="2F5BA8"/>
-            </a:solidFill>
-          </a:ln>
-        </p:spPr>
-        <p:txBody>
-          <a:bodyPr wrap="square" lIns="109728" rIns="109728" tIns="73152" bIns="73152">
-            <a:noAutofit/>
-          </a:bodyPr>
-          <a:lstStyle/>
-          <a:p>
-            <a:pPr>
-              <a:lnSpc>
-                <a:spcPts val="2640"/>
-              </a:lnSpc>
-              <a:spcAft>
-                <a:spcPts val="0"/>
-              </a:spcAft>
-              <a:defRPr sz="2400" b="0">
-                <a:solidFill>
-                  <a:srgbClr val="1C2330"/>
-                </a:solidFill>
-                <a:latin typeface="Liberation Sans"/>
-              </a:defRPr>
-            </a:pPr>
-            <a:r>
-              <a:t>Los ejemplos de Laura solo se consultan después del intento propio.</a:t>
+        </p:spPr>
+        <p:txBody>
+          <a:bodyPr wrap="square" lIns="109728" rIns="109728" tIns="73152" bIns="73152">
+            <a:noAutofit/>
+          </a:bodyPr>
+          <a:lstStyle/>
+          <a:p>
+            <a:pPr>
+              <a:lnSpc>
+                <a:spcPts val="3080"/>
+              </a:lnSpc>
+              <a:spcAft>
+                <a:spcPts val="0"/>
+              </a:spcAft>
+              <a:defRPr sz="2800" b="1">
+                <a:solidFill>
+                  <a:srgbClr val="FFFFFF"/>
+                </a:solidFill>
+                <a:latin typeface="Liberation Sans"/>
+              </a:defRPr>
+            </a:pPr>
+            <a:r>
+              <a:rPr>
+                <a:solidFill>
+                  <a:srgbClr val="FFFFFF"/>
+                </a:solidFill>
+              </a:rPr>
+              <a:t>¿Qué dato has tratado como constante y por qué, qué expresión has calculado, dónde queda su resultado y cómo sabes que la salida coincide con tu predicción?</a:t>
             </a:r>
           </a:p>
         </p:txBody>
@@ -11791,301 +11609,7 @@
   </p:clrMapOvr>
   <p:extLst>
     <p:ext uri="urn:minijarvis:semantic-render:v1">
-      <ns0:renderMetadata xmlns:ns0="urn:minijarvis:semantic-render:v1">{"session": "211", "source_files": {"teacher": "/mnt/compartido/Programación-26-27/Minijarvis/02-PROFESORADO/02-SESIONES/h1/S211-constantes-docente.md", "student_fallback": "/mnt/compartido/Programación-26-27/Minijarvis/01-ALUMNADO/03-SESIONES/h1/S211-constantes-alumnado.md"}, "layout": "activity", "plan_index": 6, "recognition": false, "unit_ids": ["unit-20"], "roles": {"unit-20": "core"}, "source_refs": [{"source": "student_fallback", "heading": "Seguridad y uso de IA", "block_index": null, "fragment": 0}], "visible_sources": [{"index": 7, "sha256": "61337aa7d62b810fc872b64ccf50a7b9620d423d2be91b3dfff6d304f2bec734"}], "notes_sources": [], "relations": {"unit_relations": {"unit-20": {}}, "schedule": null, "source_supports_enriched": true}, "timeline_refs": [5], "composition": {"origin_slides": [29]}, "timing": {"seconds": 0, "allocations": [{"source_index": 5, "seconds": 0, "decision": "Intervalo compartido íntegro; propietario contable seleccionado por función de actividad y referencia timeline de unidad (identidad semántica en empates). Soporte, sin duplicación contable. ", "source_time": "38–43 min", "source_seconds": 300, "is_owner": false, "function": "security"}], "clock_intervals": [5], "presenter_notes": "Reloj fuente 38–43 min: duración compartida 300 segundos. Trabajo: Integrar constante, variable, operación, actualización y salida; ejecutar y explicar discrepancias. Función del soporte: apoyo al trabajo.", "shared_intervals": [{"source_index": 5, "source_time": "38–43 min", "seconds": 300, "is_owner": false, "function": "security", "action": "Integrar constante, variable, operación, actualización y salida; ejecutar y explicar discrepancias.", "concurrent": false, "parallel_work": ""}]}, "code_blocks": [], "representation_needs": []}</ns0:renderMetadata>
-    </p:ext>
-  </p:extLst>
-</p:sld>
-</file>
-
-<file path=ppt/slides/slide25.xml><?xml version="1.0" encoding="utf-8"?>
-<p:sld xmlns:a="http://schemas.openxmlformats.org/drawingml/2006/main" xmlns:p="http://schemas.openxmlformats.org/presentationml/2006/main" xmlns:r="http://schemas.openxmlformats.org/officeDocument/2006/relationships">
-  <p:cSld>
-    <p:bg>
-      <p:bgPr>
-        <a:solidFill>
-          <a:srgbClr val="F9F7F2"/>
-        </a:solidFill>
-        <a:effectLst/>
-      </p:bgPr>
-    </p:bg>
-    <p:spTree>
-      <p:nvGrpSpPr>
-        <p:cNvPr id="1" name=""/>
-        <p:cNvGrpSpPr/>
-        <p:nvPr/>
-      </p:nvGrpSpPr>
-      <p:grpSpPr/>
-      <p:sp>
-        <p:nvSpPr>
-          <p:cNvPr id="2" name="Contexto" descr="Contexto"/>
-          <p:cNvSpPr txBox="1"/>
-          <p:nvPr/>
-        </p:nvSpPr>
-        <p:spPr>
-          <a:xfrm>
-            <a:off x="640080" y="256032"/>
-            <a:ext cx="10881360" cy="443992"/>
-          </a:xfrm>
-          <a:prstGeom prst="rect">
-            <a:avLst/>
-          </a:prstGeom>
-          <a:noFill/>
-        </p:spPr>
-        <p:txBody>
-          <a:bodyPr wrap="square" lIns="109728" rIns="109728" tIns="73152" bIns="73152">
-            <a:noAutofit/>
-          </a:bodyPr>
-          <a:lstStyle/>
-          <a:p>
-            <a:pPr>
-              <a:lnSpc>
-                <a:spcPts val="2200"/>
-              </a:lnSpc>
-              <a:spcAft>
-                <a:spcPts val="0"/>
-              </a:spcAft>
-              <a:defRPr sz="2000" b="1">
-                <a:solidFill>
-                  <a:srgbClr val="2F5BA8"/>
-                </a:solidFill>
-                <a:latin typeface="Liberation Sans"/>
-              </a:defRPr>
-            </a:pPr>
-          </a:p>
-        </p:txBody>
-      </p:sp>
-      <p:sp>
-        <p:nvSpPr>
-          <p:cNvPr id="3" name="Idea principal" descr="Idea principal"/>
-          <p:cNvSpPr txBox="1"/>
-          <p:nvPr/>
-        </p:nvSpPr>
-        <p:spPr>
-          <a:xfrm>
-            <a:off x="640080" y="694944"/>
-            <a:ext cx="10881360" cy="594360"/>
-          </a:xfrm>
-          <a:prstGeom prst="rect">
-            <a:avLst/>
-          </a:prstGeom>
-          <a:noFill/>
-        </p:spPr>
-        <p:txBody>
-          <a:bodyPr wrap="square" lIns="109728" rIns="109728" tIns="73152" bIns="73152">
-            <a:noAutofit/>
-          </a:bodyPr>
-          <a:lstStyle/>
-          <a:p>
-            <a:pPr>
-              <a:lnSpc>
-                <a:spcPts val="3300"/>
-              </a:lnSpc>
-              <a:spcAft>
-                <a:spcPts val="0"/>
-              </a:spcAft>
-              <a:defRPr sz="3000" b="1">
-                <a:solidFill>
-                  <a:srgbClr val="1C2330"/>
-                </a:solidFill>
-                <a:latin typeface="Liberation Sans"/>
-              </a:defRPr>
-            </a:pPr>
-            <a:r>
-              <a:t>Comprueba lo aprendido</a:t>
-            </a:r>
-          </a:p>
-        </p:txBody>
-      </p:sp>
-      <p:sp>
-        <p:nvSpPr>
-          <p:cNvPr id="4" name="Sesión y procedencia" descr="Sesión y procedencia"/>
-          <p:cNvSpPr txBox="1"/>
-          <p:nvPr/>
-        </p:nvSpPr>
-        <p:spPr>
-          <a:xfrm>
-            <a:off x="640080" y="6428232"/>
-            <a:ext cx="10881360" cy="388112"/>
-          </a:xfrm>
-          <a:prstGeom prst="rect">
-            <a:avLst/>
-          </a:prstGeom>
-          <a:noFill/>
-        </p:spPr>
-        <p:txBody>
-          <a:bodyPr wrap="square" lIns="109728" rIns="109728" tIns="73152" bIns="73152">
-            <a:noAutofit/>
-          </a:bodyPr>
-          <a:lstStyle/>
-          <a:p>
-            <a:pPr>
-              <a:lnSpc>
-                <a:spcPts val="1760"/>
-              </a:lnSpc>
-              <a:spcAft>
-                <a:spcPts val="0"/>
-              </a:spcAft>
-              <a:defRPr sz="1600" b="0">
-                <a:solidFill>
-                  <a:srgbClr val="1C2330"/>
-                </a:solidFill>
-                <a:latin typeface="Liberation Sans"/>
-              </a:defRPr>
-            </a:pPr>
-            <a:r>
-              <a:t>S211 · H1 — Primer asistente ejecutable</a:t>
-            </a:r>
-          </a:p>
-        </p:txBody>
-      </p:sp>
-      <p:sp>
-        <p:nvSpPr>
-          <p:cNvPr id="5" name="Contenido" descr="Contenido"/>
-          <p:cNvSpPr txBox="1"/>
-          <p:nvPr/>
-        </p:nvSpPr>
-        <p:spPr>
-          <a:xfrm>
-            <a:off x="640080" y="1417320"/>
-            <a:ext cx="10881360" cy="1338072"/>
-          </a:xfrm>
-          <a:prstGeom prst="rect">
-            <a:avLst/>
-          </a:prstGeom>
-          <a:solidFill>
-            <a:srgbClr val="2F5BA8"/>
-          </a:solidFill>
-        </p:spPr>
-        <p:txBody>
-          <a:bodyPr wrap="square" lIns="109728" rIns="109728" tIns="73152" bIns="73152">
-            <a:noAutofit/>
-          </a:bodyPr>
-          <a:lstStyle/>
-          <a:p>
-            <a:pPr>
-              <a:lnSpc>
-                <a:spcPts val="3080"/>
-              </a:lnSpc>
-              <a:spcAft>
-                <a:spcPts val="0"/>
-              </a:spcAft>
-              <a:defRPr sz="2800" b="1">
-                <a:solidFill>
-                  <a:srgbClr val="FFFFFF"/>
-                </a:solidFill>
-                <a:latin typeface="Liberation Sans"/>
-              </a:defRPr>
-            </a:pPr>
-            <a:r>
-              <a:rPr>
-                <a:solidFill>
-                  <a:srgbClr val="FFFFFF"/>
-                </a:solidFill>
-              </a:rPr>
-              <a:t>¿Por qué 5 / 2 produce 2, qué cambian los paréntesis, qué significa % y cómo evoluciona una variable con +=, -=, ++ o --?</a:t>
-            </a:r>
-          </a:p>
-        </p:txBody>
-      </p:sp>
-      <p:sp>
-        <p:nvSpPr>
-          <p:cNvPr id="6" name="Contenido" descr="Contenido"/>
-          <p:cNvSpPr txBox="1"/>
-          <p:nvPr/>
-        </p:nvSpPr>
-        <p:spPr>
-          <a:xfrm>
-            <a:off x="640080" y="2846832"/>
-            <a:ext cx="10881360" cy="946912"/>
-          </a:xfrm>
-          <a:prstGeom prst="rect">
-            <a:avLst/>
-          </a:prstGeom>
-          <a:noFill/>
-        </p:spPr>
-        <p:txBody>
-          <a:bodyPr wrap="square" lIns="109728" rIns="109728" tIns="73152" bIns="73152">
-            <a:noAutofit/>
-          </a:bodyPr>
-          <a:lstStyle/>
-          <a:p>
-            <a:pPr>
-              <a:lnSpc>
-                <a:spcPts val="3080"/>
-              </a:lnSpc>
-              <a:spcAft>
-                <a:spcPts val="0"/>
-              </a:spcAft>
-              <a:defRPr sz="2800" b="0">
-                <a:solidFill>
-                  <a:srgbClr val="1C2330"/>
-                </a:solidFill>
-                <a:latin typeface="Liberation Sans"/>
-              </a:defRPr>
-            </a:pPr>
-            <a:r>
-              <a:t>Una operación no está demostrada porque el código compile.</a:t>
-            </a:r>
-          </a:p>
-        </p:txBody>
-      </p:sp>
-      <p:sp>
-        <p:nvSpPr>
-          <p:cNvPr id="7" name="Contenido" descr="Contenido"/>
-          <p:cNvSpPr txBox="1"/>
-          <p:nvPr/>
-        </p:nvSpPr>
-        <p:spPr>
-          <a:xfrm>
-            <a:off x="640080" y="3885184"/>
-            <a:ext cx="10881360" cy="1729232"/>
-          </a:xfrm>
-          <a:prstGeom prst="rect">
-            <a:avLst/>
-          </a:prstGeom>
-          <a:solidFill>
-            <a:srgbClr val="2F5BA8"/>
-          </a:solidFill>
-        </p:spPr>
-        <p:txBody>
-          <a:bodyPr wrap="square" lIns="109728" rIns="109728" tIns="73152" bIns="73152">
-            <a:noAutofit/>
-          </a:bodyPr>
-          <a:lstStyle/>
-          <a:p>
-            <a:pPr>
-              <a:lnSpc>
-                <a:spcPts val="3080"/>
-              </a:lnSpc>
-              <a:spcAft>
-                <a:spcPts val="0"/>
-              </a:spcAft>
-              <a:defRPr sz="2800" b="1">
-                <a:solidFill>
-                  <a:srgbClr val="FFFFFF"/>
-                </a:solidFill>
-                <a:latin typeface="Liberation Sans"/>
-              </a:defRPr>
-            </a:pPr>
-            <a:r>
-              <a:rPr>
-                <a:solidFill>
-                  <a:srgbClr val="FFFFFF"/>
-                </a:solidFill>
-              </a:rPr>
-              <a:t>¿Qué dato has tratado como constante y por qué, qué expresión has calculado, dónde queda su resultado y cómo sabes que la salida coincide con tu predicción?</a:t>
-            </a:r>
-          </a:p>
-        </p:txBody>
-      </p:sp>
-    </p:spTree>
-  </p:cSld>
-  <p:clrMapOvr>
-    <a:masterClrMapping/>
-  </p:clrMapOvr>
-  <p:extLst>
-    <p:ext uri="urn:minijarvis:semantic-render:v1">
-      <ns0:renderMetadata xmlns:ns0="urn:minijarvis:semantic-render:v1">{"session": "211", "source_files": {"teacher": "/mnt/compartido/Programación-26-27/Minijarvis/02-PROFESORADO/02-SESIONES/h1/S211-constantes-docente.md", "student_fallback": "/mnt/compartido/Programación-26-27/Minijarvis/01-ALUMNADO/03-SESIONES/h1/S211-constantes-alumnado.md"}, "layout": "closure", "plan_index": 7, "recognition": false, "unit_ids": ["unit-17", "unit-19"], "roles": {"unit-17": "core", "unit-19": "core"}, "source_refs": [{"source": "teacher", "heading": "Comprueba lo aprendido", "block_index": 19, "fragment": 0}, {"source": "teacher", "heading": "Al terminar", "block_index": 21, "fragment": 0}], "visible_sources": [{"index": 0, "sha256": "d1e883f1f673c17af930de84df20616b0e9672320f9b22c6a8df1e66e398200b"}, {"index": 2, "sha256": "139edc0da4c423e7db0c409a658663d5a0f2456a703f1ea36786e34fff0c98d3"}, {"index": 3, "sha256": "ed77adc5766e0f42b1d6cff68535cbcac28f722a78b754bfa501b904b5075277"}], "notes_sources": [{"function": "individual_check", "heading": "Comprueba lo aprendido", "sha256": "dae03982d930a360cc6f21f6182bdcfffd59c916b3cd04bb2bc0c7f6a450910a"}, {"function": "individual_check", "heading": "Comprueba lo aprendido", "sha256": "c54f205b33bd0dd1f4ec5e9ca0395c54a3e3633b76fe0bb5b87a0f6041c4f4f5"}, {"function": "continuity", "heading": "Al terminar", "sha256": "c5d760b9336aefe6ba9649ec169c61027094be686b87323b8f689f792abbf42a"}, {"function": "facilitation", "heading": "Comprueba lo aprendido", "sha256": "5ac270c14daf9145b5fa6b3260aaee7fce13571ee2fba5f4f556b6f5b86f5a90"}, {"function": "visible_detail", "heading": "Comprueba lo aprendido", "sha256": "139edc0da4c423e7db0c409a658663d5a0f2456a703f1ea36786e34fff0c98d3"}, {"function": "closure", "heading": "Comprueba lo aprendido", "sha256": "ed77adc5766e0f42b1d6cff68535cbcac28f722a78b754bfa501b904b5075277"}, {"function": "closure", "heading": "Comprueba lo aprendido", "sha256": "d1e883f1f673c17af930de84df20616b0e9672320f9b22c6a8df1e66e398200b"}, {"function": "closure", "heading": "Comprueba lo aprendido", "sha256": "ed77adc5766e0f42b1d6cff68535cbcac28f722a78b754bfa501b904b5075277"}, {"function": "closure", "heading": "Comprueba lo aprendido", "sha256": "d1e883f1f673c17af930de84df20616b0e9672320f9b22c6a8df1e66e398200b"}], "relations": {"unit_relations": {"unit-17": {"question_context": ["context", "question"]}}, "schedule": null, "source_supports_enriched": true}, "timeline_refs": [6], "composition": {"origin_slides": [30]}, "timing": {"seconds": 120, "allocations": [{"source_index": 6, "seconds": 120, "decision": "Intervalo compartido íntegro; propietario contable seleccionado por función de actividad y referencia timeline de unidad (identidad semántica en empates). Propietario. ", "source_time": "43–45 min", "source_seconds": 120, "is_owner": true, "function": "individual_check"}], "clock_intervals": [6], "presenter_notes": "Reloj fuente 43–45 min: duración compartida 120 segundos. Trabajo: Comprobar la comprensión y cerrar. Función del soporte: comprobación individual.", "shared_intervals": [{"source_index": 6, "source_time": "43–45 min", "seconds": 120, "is_owner": true, "function": "individual_check", "action": "Comprobar la comprensión y cerrar.", "concurrent": false, "parallel_work": ""}]}, "code_blocks": [], "representation_needs": []}</ns0:renderMetadata>
+      <ns0:renderMetadata xmlns:ns0="urn:minijarvis:semantic-render:v1">{"session": "211", "source_files": {"teacher": "/mnt/compartido/Programación-26-27/Minijarvis/02-PROFESORADO/02-SESIONES/h1/S211-constantes-docente.md", "student_fallback": "/mnt/compartido/Programación-26-27/Minijarvis/01-ALUMNADO/03-SESIONES/h1/S211-constantes-alumnado.md"}, "layout": "closure", "plan_index": 7, "recognition": false, "unit_ids": ["unit-17", "unit-19"], "roles": {"unit-17": "core", "unit-19": "core"}, "source_refs": [{"source": "teacher", "heading": "Comprueba lo aprendido", "block_index": 19, "fragment": 0}, {"source": "teacher", "heading": "Al terminar", "block_index": 21, "fragment": 0}], "visible_sources": [{"index": 0, "sha256": "d1e883f1f673c17af930de84df20616b0e9672320f9b22c6a8df1e66e398200b"}, {"index": 2, "sha256": "139edc0da4c423e7db0c409a658663d5a0f2456a703f1ea36786e34fff0c98d3"}, {"index": 3, "sha256": "ed77adc5766e0f42b1d6cff68535cbcac28f722a78b754bfa501b904b5075277"}], "notes_sources": [{"function": "individual_check", "heading": "Comprueba lo aprendido", "sha256": "dae03982d930a360cc6f21f6182bdcfffd59c916b3cd04bb2bc0c7f6a450910a"}, {"function": "individual_check", "heading": "Comprueba lo aprendido", "sha256": "c54f205b33bd0dd1f4ec5e9ca0395c54a3e3633b76fe0bb5b87a0f6041c4f4f5"}, {"function": "continuity", "heading": "Al terminar", "sha256": "c5d760b9336aefe6ba9649ec169c61027094be686b87323b8f689f792abbf42a"}, {"function": "facilitation", "heading": "Comprueba lo aprendido", "sha256": "5ac270c14daf9145b5fa6b3260aaee7fce13571ee2fba5f4f556b6f5b86f5a90"}, {"function": "visible_detail", "heading": "Comprueba lo aprendido", "sha256": "139edc0da4c423e7db0c409a658663d5a0f2456a703f1ea36786e34fff0c98d3"}, {"function": "closure", "heading": "Comprueba lo aprendido", "sha256": "ed77adc5766e0f42b1d6cff68535cbcac28f722a78b754bfa501b904b5075277"}, {"function": "closure", "heading": "Comprueba lo aprendido", "sha256": "d1e883f1f673c17af930de84df20616b0e9672320f9b22c6a8df1e66e398200b"}, {"function": "closure", "heading": "Comprueba lo aprendido", "sha256": "ed77adc5766e0f42b1d6cff68535cbcac28f722a78b754bfa501b904b5075277"}, {"function": "closure", "heading": "Comprueba lo aprendido", "sha256": "d1e883f1f673c17af930de84df20616b0e9672320f9b22c6a8df1e66e398200b"}], "relations": {"unit_relations": {"unit-17": {"question_context": ["context", "question"]}}, "schedule": null, "source_supports_enriched": true}, "timeline_refs": [6], "composition": {"origin_slides": [29]}, "timing": {"seconds": 120, "allocations": [{"source_index": 6, "seconds": 120, "decision": "Intervalo compartido íntegro; propietario contable seleccionado por función de actividad y referencia timeline de unidad (identidad semántica en empates). Propietario. ", "source_time": "43–45 min", "source_seconds": 120, "is_owner": true, "function": "individual_check"}], "clock_intervals": [6], "presenter_notes": "Reloj fuente 43–45 min: duración compartida 120 segundos. Trabajo: Comprobar la comprensión y cerrar. Función del soporte: comprobación individual.", "shared_intervals": [{"source_index": 6, "source_time": "43–45 min", "seconds": 120, "is_owner": true, "function": "individual_check", "action": "Comprobar la comprensión y cerrar.", "concurrent": false, "parallel_work": ""}]}, "code_blocks": [], "representation_needs": []}</ns0:renderMetadata>
     </p:ext>
   </p:extLst>
 </p:sld>
@@ -13924,7 +13448,7 @@
   </p:clrMapOvr>
   <p:extLst>
     <p:ext uri="urn:minijarvis:semantic-render:v1">
-      <ns0:renderMetadata xmlns:ns0="urn:minijarvis:semantic-render:v1">{"session": "211", "source_files": {"teacher": "/mnt/compartido/Programación-26-27/Minijarvis/02-PROFESORADO/02-SESIONES/h1/S211-constantes-docente.md", "student_fallback": "/mnt/compartido/Programación-26-27/Minijarvis/01-ALUMNADO/03-SESIONES/h1/S211-constantes-alumnado.md"}, "layout": "recognition", "plan_index": 1, "recognition": true, "unit_ids": ["unit-6"], "roles": {"unit-6": "recognition"}, "source_refs": [{"source": "teacher", "heading": "Una expresión produce un resultado", "block_index": 7, "fragment": 0}, {"source": "teacher", "heading": "Ideas y ejemplos", "block_index": 4, "fragment": 0}], "visible_sources": [{"index": 20, "sha256": "562859ea1a4afbd61aaea042d301bfd191eb570e4b86f6b2584eb895ee625bde"}, {"index": 21, "sha256": "379433b7200354cefb196f05aed38d7c5233dae0d804528f62fb886300908929"}, {"index": 23, "sha256": "4456aad91c236cb26dfc892dec8d8e079d6f125ca2e3155c3da9198533319b28"}], "notes_sources": [{"function": "visible_detail", "heading": "Una expresión produce un resultado", "sha256": "562859ea1a4afbd61aaea042d301bfd191eb570e4b86f6b2584eb895ee625bde"}, {"function": "facilitation", "heading": "Una expresión produce un resultado", "sha256": "843c52d28a05bcb423518b94511c89e3c448a851556ca2152b0e6dfe1f779ed0"}, {"function": "visible_detail", "heading": "Una expresión produce un resultado", "sha256": "22cbb3b1e032d3a540bfcc3354138a634224a4f306db9e7ed9ee632f1bed623b"}], "relations": {"unit_relations": {"unit-6": {}}, "schedule": null, "presentation_normalizations": {"3 + 2                       -&gt; int\n5 / 2.0                     -&gt; double\nhoras &gt;= 4                  -&gt; boolean\n\"Hola, \" + nombreUsuario    -&gt; String": "3 + 2                       → int\n5 / 2.0                     → double\nhoras &gt;= 4                  → boolean\n\"Hola, \" + nombreUsuario    → String"}, "source_supports_enriched": true}, "timeline_refs": [1], "composition": {"origin_slides": [8, 9]}, "timing": {"seconds": 0, "allocations": [{"source_index": 1, "seconds": 0, "decision": "Intervalo compartido íntegro; propietario contable seleccionado por función de actividad y referencia timeline de unidad (identidad semántica en empates). Soporte, sin duplicación contable. ", "source_time": "4–12 min", "source_seconds": 480, "is_owner": false, "function": "other"}], "clock_intervals": [1], "presenter_notes": "Reloj fuente 4–12 min: duración compartida 480 segundos. Trabajo: Núcleo práctico guiado: final, mapa de literales y expresiones con resultado y tipo. Función del soporte: apoyo al trabajo.", "shared_intervals": [{"source_index": 1, "source_time": "4–12 min", "seconds": 480, "is_owner": false, "function": "other", "action": "Núcleo práctico guiado: final, mapa de literales y expresiones con resultado y tipo.", "concurrent": false, "parallel_work": ""}]}, "code_blocks": ["3 + 2\nhoras * 60\nhoras &gt;= 4\ntieneNombre &amp;&amp; tieneObjetivo\n\"Hola, \" + nombreUsuario"], "representation_needs": [{"source_need": "Representación especial de unidades completas; no truncar", "status": "resolved", "resolution": "Vistas por unidad y fronteras fuente; código íntegro y tipografía fija"}]}</ns0:renderMetadata>
+      <ns0:renderMetadata xmlns:ns0="urn:minijarvis:semantic-render:v1">{"session": "211", "source_files": {"teacher": "/mnt/compartido/Programación-26-27/Minijarvis/02-PROFESORADO/02-SESIONES/h1/S211-constantes-docente.md", "student_fallback": "/mnt/compartido/Programación-26-27/Minijarvis/01-ALUMNADO/03-SESIONES/h1/S211-constantes-alumnado.md"}, "layout": "recognition", "plan_index": 1, "recognition": true, "unit_ids": ["unit-6"], "roles": {"unit-6": "recognition"}, "source_refs": [{"source": "teacher", "heading": "Una expresión produce un resultado", "block_index": 7, "fragment": 0}, {"source": "teacher", "heading": "Ideas y ejemplos", "block_index": 4, "fragment": 0}], "visible_sources": [{"index": 20, "sha256": "562859ea1a4afbd61aaea042d301bfd191eb570e4b86f6b2584eb895ee625bde"}, {"index": 21, "sha256": "379433b7200354cefb196f05aed38d7c5233dae0d804528f62fb886300908929"}, {"index": 23, "sha256": "4456aad91c236cb26dfc892dec8d8e079d6f125ca2e3155c3da9198533319b28"}], "notes_sources": [{"function": "visible_detail", "heading": "Una expresión produce un resultado", "sha256": "562859ea1a4afbd61aaea042d301bfd191eb570e4b86f6b2584eb895ee625bde"}, {"function": "facilitation", "heading": "Una expresión produce un resultado", "sha256": "843c52d28a05bcb423518b94511c89e3c448a851556ca2152b0e6dfe1f779ed0"}, {"function": "visible_detail", "heading": "Una expresión produce un resultado", "sha256": "7b968c98e67987d31f981a91c23a492010cb5c5a4c203c8e0f7d7a52146f26a5"}], "relations": {"unit_relations": {"unit-6": {}}, "schedule": null, "presentation_normalizations": {"3 + 2                       -&gt; int\n5 / 2.0                     -&gt; double\nhoras &gt;= 4                  -&gt; boolean\n\"Hola, \" + nombreUsuario    -&gt; String": "3 + 2                       → int\n5 / 2.0                     → double\nhoras &gt;= 4                  → boolean\n\"Hola, \" + nombreUsuario    → String"}, "source_supports_enriched": true}, "timeline_refs": [1], "composition": {"origin_slides": [8, 9]}, "timing": {"seconds": 0, "allocations": [{"source_index": 1, "seconds": 0, "decision": "Intervalo compartido íntegro; propietario contable seleccionado por función de actividad y referencia timeline de unidad (identidad semántica en empates). Soporte, sin duplicación contable. ", "source_time": "4–12 min", "source_seconds": 480, "is_owner": false, "function": "other"}], "clock_intervals": [1], "presenter_notes": "Reloj fuente 4–12 min: duración compartida 480 segundos. Trabajo: Núcleo práctico guiado: final, mapa de literales y expresiones con resultado y tipo. Función del soporte: apoyo al trabajo.", "shared_intervals": [{"source_index": 1, "source_time": "4–12 min", "seconds": 480, "is_owner": false, "function": "other", "action": "Núcleo práctico guiado: final, mapa de literales y expresiones con resultado y tipo.", "concurrent": false, "parallel_work": ""}]}, "code_blocks": ["3 + 2\nhoras * 60\nhoras &gt;= 4\ntieneNombre &amp;&amp; tieneObjetivo\n\"Hola, \" + nombreUsuario"], "representation_needs": [{"source_need": "Representación especial de unidades completas; no truncar", "status": "resolved", "resolution": "Vistas por unidad y fronteras fuente; código íntegro y tipografía fija"}]}</ns0:renderMetadata>
     </p:ext>
   </p:extLst>
 </p:sld>
@@ -14123,7 +13647,7 @@
   </p:clrMapOvr>
   <p:extLst>
     <p:ext uri="urn:minijarvis:semantic-render:v1">
-      <ns0:renderMetadata xmlns:ns0="urn:minijarvis:semantic-render:v1">{"session": "211", "source_files": {"teacher": "/mnt/compartido/Programación-26-27/Minijarvis/02-PROFESORADO/02-SESIONES/h1/S211-constantes-docente.md", "student_fallback": "/mnt/compartido/Programación-26-27/Minijarvis/01-ALUMNADO/03-SESIONES/h1/S211-constantes-alumnado.md"}, "layout": "recognition", "plan_index": 1, "recognition": true, "unit_ids": ["unit-6"], "roles": {"unit-6": "recognition"}, "source_refs": [{"source": "teacher", "heading": "Una expresión produce un resultado", "block_index": 7, "fragment": 0}, {"source": "teacher", "heading": "Ideas y ejemplos", "block_index": 4, "fragment": 0}], "visible_sources": [{"index": 24, "sha256": "22cbb3b1e032d3a540bfcc3354138a634224a4f306db9e7ed9ee632f1bed623b"}], "notes_sources": [{"function": "visible_detail", "heading": "Una expresión produce un resultado", "sha256": "562859ea1a4afbd61aaea042d301bfd191eb570e4b86f6b2584eb895ee625bde"}, {"function": "facilitation", "heading": "Una expresión produce un resultado", "sha256": "843c52d28a05bcb423518b94511c89e3c448a851556ca2152b0e6dfe1f779ed0"}, {"function": "visible_detail", "heading": "Una expresión produce un resultado", "sha256": "22cbb3b1e032d3a540bfcc3354138a634224a4f306db9e7ed9ee632f1bed623b"}], "relations": {"unit_relations": {"unit-6": {}}, "schedule": null, "source_supports_enriched": true}, "timeline_refs": [1], "composition": {"origin_slides": [8, 9]}, "timing": {"seconds": 0, "allocations": [{"source_index": 1, "seconds": 0, "decision": "Intervalo compartido íntegro; propietario contable seleccionado por función de actividad y referencia timeline de unidad (identidad semántica en empates). Soporte, sin duplicación contable. ", "source_time": "4–12 min", "source_seconds": 480, "is_owner": false, "function": "other"}], "clock_intervals": [1], "presenter_notes": "Reloj fuente 4–12 min: duración compartida 480 segundos. Trabajo: Núcleo práctico guiado: final, mapa de literales y expresiones con resultado y tipo. Función del soporte: apoyo al trabajo.", "shared_intervals": [{"source_index": 1, "source_time": "4–12 min", "seconds": 480, "is_owner": false, "function": "other", "action": "Núcleo práctico guiado: final, mapa de literales y expresiones con resultado y tipo.", "concurrent": false, "parallel_work": ""}]}, "code_blocks": [], "representation_needs": [{"source_need": "Representación especial de unidades completas; no truncar", "status": "resolved", "resolution": "Vistas por unidad y fronteras fuente; código íntegro y tipografía fija"}]}</ns0:renderMetadata>
+      <ns0:renderMetadata xmlns:ns0="urn:minijarvis:semantic-render:v1">{"session": "211", "source_files": {"teacher": "/mnt/compartido/Programación-26-27/Minijarvis/02-PROFESORADO/02-SESIONES/h1/S211-constantes-docente.md", "student_fallback": "/mnt/compartido/Programación-26-27/Minijarvis/01-ALUMNADO/03-SESIONES/h1/S211-constantes-alumnado.md"}, "layout": "recognition", "plan_index": 1, "recognition": true, "unit_ids": ["unit-6"], "roles": {"unit-6": "recognition"}, "source_refs": [{"source": "teacher", "heading": "Una expresión produce un resultado", "block_index": 7, "fragment": 0}, {"source": "teacher", "heading": "Ideas y ejemplos", "block_index": 4, "fragment": 0}], "visible_sources": [{"index": 24, "sha256": "7b968c98e67987d31f981a91c23a492010cb5c5a4c203c8e0f7d7a52146f26a5"}], "notes_sources": [{"function": "visible_detail", "heading": "Una expresión produce un resultado", "sha256": "562859ea1a4afbd61aaea042d301bfd191eb570e4b86f6b2584eb895ee625bde"}, {"function": "facilitation", "heading": "Una expresión produce un resultado", "sha256": "843c52d28a05bcb423518b94511c89e3c448a851556ca2152b0e6dfe1f779ed0"}, {"function": "visible_detail", "heading": "Una expresión produce un resultado", "sha256": "7b968c98e67987d31f981a91c23a492010cb5c5a4c203c8e0f7d7a52146f26a5"}], "relations": {"unit_relations": {"unit-6": {}}, "schedule": null, "source_supports_enriched": true}, "timeline_refs": [1], "composition": {"origin_slides": [8, 9]}, "timing": {"seconds": 0, "allocations": [{"source_index": 1, "seconds": 0, "decision": "Intervalo compartido íntegro; propietario contable seleccionado por función de actividad y referencia timeline de unidad (identidad semántica en empates). Soporte, sin duplicación contable. ", "source_time": "4–12 min", "source_seconds": 480, "is_owner": false, "function": "other"}], "clock_intervals": [1], "presenter_notes": "Reloj fuente 4–12 min: duración compartida 480 segundos. Trabajo: Núcleo práctico guiado: final, mapa de literales y expresiones con resultado y tipo. Función del soporte: apoyo al trabajo.", "shared_intervals": [{"source_index": 1, "source_time": "4–12 min", "seconds": 480, "is_owner": false, "function": "other", "action": "Núcleo práctico guiado: final, mapa de literales y expresiones con resultado y tipo.", "concurrent": false, "parallel_work": ""}]}, "code_blocks": [], "representation_needs": [{"source_need": "Representación especial de unidades completas; no truncar", "status": "resolved", "resolution": "Vistas por unidad y fronteras fuente; código íntegro y tipografía fija"}]}</ns0:renderMetadata>
     </p:ext>
   </p:extLst>
 </p:sld>

--- a/02-PROFESORADO/03-PRESENTACIONES/POR-SESION/h1/S211-constantes-presentacion.pptx
+++ b/02-PROFESORADO/03-PRESENTACIONES/POR-SESION/h1/S211-constantes-presentacion.pptx
@@ -5948,7 +5948,7 @@
               </a:defRPr>
             </a:pPr>
             <a:r>
-              <a:t>S211 · H1 — Primer asistente ejecutable</a:t>
+              <a:t>H1.6 · H1 — Primer asistente ejecutable</a:t>
             </a:r>
           </a:p>
         </p:txBody>
@@ -6270,7 +6270,7 @@
               </a:defRPr>
             </a:pPr>
             <a:r>
-              <a:t>S211 · H1 — Primer asistente ejecutable</a:t>
+              <a:t>H1.6 · H1 — Primer asistente ejecutable</a:t>
             </a:r>
           </a:p>
         </p:txBody>
@@ -6469,7 +6469,7 @@
               </a:defRPr>
             </a:pPr>
             <a:r>
-              <a:t>S211 · H1 — Primer asistente ejecutable</a:t>
+              <a:t>H1.6 · H1 — Primer asistente ejecutable</a:t>
             </a:r>
           </a:p>
         </p:txBody>
@@ -7018,7 +7018,7 @@
               </a:defRPr>
             </a:pPr>
             <a:r>
-              <a:t>S211 · H1 — Primer asistente ejecutable</a:t>
+              <a:t>H1.6 · H1 — Primer asistente ejecutable</a:t>
             </a:r>
           </a:p>
         </p:txBody>
@@ -7214,7 +7214,7 @@
               </a:defRPr>
             </a:pPr>
             <a:r>
-              <a:t>S211 · H1 — Primer asistente ejecutable</a:t>
+              <a:t>H1.6 · H1 — Primer asistente ejecutable</a:t>
             </a:r>
           </a:p>
         </p:txBody>
@@ -7410,7 +7410,7 @@
               </a:defRPr>
             </a:pPr>
             <a:r>
-              <a:t>ADVERTENCIA · No adelantes casting ni conversión de entrada: se trabajarán en S212.</a:t>
+              <a:t>ADVERTENCIA · No adelantes casting ni conversión de entrada: se trabajarán en H1.7.</a:t>
             </a:r>
           </a:p>
         </p:txBody>
@@ -7672,7 +7672,7 @@
               </a:defRPr>
             </a:pPr>
             <a:r>
-              <a:t>S211 · H1 — Primer asistente ejecutable</a:t>
+              <a:t>H1.6 · H1 — Primer asistente ejecutable</a:t>
             </a:r>
           </a:p>
         </p:txBody>
@@ -8058,7 +8058,7 @@
               </a:defRPr>
             </a:pPr>
             <a:r>
-              <a:t>S211 · H1 — Primer asistente ejecutable</a:t>
+              <a:t>H1.6 · H1 — Primer asistente ejecutable</a:t>
             </a:r>
           </a:p>
         </p:txBody>
@@ -8296,7 +8296,7 @@
               </a:defRPr>
             </a:pPr>
             <a:r>
-              <a:t>S211 · H1 — Primer asistente ejecutable</a:t>
+              <a:t>H1.6 · H1 — Primer asistente ejecutable</a:t>
             </a:r>
           </a:p>
         </p:txBody>
@@ -8629,7 +8629,7 @@
               </a:defRPr>
             </a:pPr>
             <a:r>
-              <a:t>S211 · H1 — Primer asistente ejecutable</a:t>
+              <a:t>H1.6 · H1 — Primer asistente ejecutable</a:t>
             </a:r>
           </a:p>
         </p:txBody>
@@ -8930,7 +8930,7 @@
               </a:defRPr>
             </a:pPr>
             <a:r>
-              <a:t>S211 · H1 — Primer asistente ejecutable</a:t>
+              <a:t>H1.6 · H1 — Primer asistente ejecutable</a:t>
             </a:r>
           </a:p>
         </p:txBody>
@@ -9444,7 +9444,7 @@
               </a:defRPr>
             </a:pPr>
             <a:r>
-              <a:t>S211 · H1 — Primer asistente ejecutable</a:t>
+              <a:t>H1.6 · H1 — Primer asistente ejecutable</a:t>
             </a:r>
           </a:p>
         </p:txBody>
@@ -9682,7 +9682,7 @@
               </a:defRPr>
             </a:pPr>
             <a:r>
-              <a:t>S211 · H1 — Primer asistente ejecutable</a:t>
+              <a:t>H1.6 · H1 — Primer asistente ejecutable</a:t>
             </a:r>
           </a:p>
         </p:txBody>
@@ -9883,7 +9883,7 @@
               </a:defRPr>
             </a:pPr>
             <a:r>
-              <a:t>S211 · H1 — Primer asistente ejecutable</a:t>
+              <a:t>H1.6 · H1 — Primer asistente ejecutable</a:t>
             </a:r>
           </a:p>
         </p:txBody>
@@ -10285,7 +10285,7 @@
               </a:defRPr>
             </a:pPr>
             <a:r>
-              <a:t>S211 · H1 — Primer asistente ejecutable</a:t>
+              <a:t>H1.6 · H1 — Primer asistente ejecutable</a:t>
             </a:r>
           </a:p>
         </p:txBody>
@@ -10726,7 +10726,7 @@
               </a:defRPr>
             </a:pPr>
             <a:r>
-              <a:t>S211 · H1 — Primer asistente ejecutable</a:t>
+              <a:t>H1.6 · H1 — Primer asistente ejecutable</a:t>
             </a:r>
           </a:p>
         </p:txBody>
@@ -10964,7 +10964,7 @@
               </a:defRPr>
             </a:pPr>
             <a:r>
-              <a:t>README / Moodle / Drive / Site: sin actualización o entrega específica en S211.</a:t>
+              <a:t>README / Moodle / Drive / Site: sin actualización o entrega específica en H1.6.</a:t>
             </a:r>
           </a:p>
         </p:txBody>
@@ -11160,7 +11160,7 @@
               </a:defRPr>
             </a:pPr>
             <a:r>
-              <a:t>S211 · H1 — Primer asistente ejecutable</a:t>
+              <a:t>H1.6 · H1 — Primer asistente ejecutable</a:t>
             </a:r>
           </a:p>
         </p:txBody>
@@ -11457,7 +11457,7 @@
               </a:defRPr>
             </a:pPr>
             <a:r>
-              <a:t>S211 · H1 — Primer asistente ejecutable</a:t>
+              <a:t>H1.6 · H1 — Primer asistente ejecutable</a:t>
             </a:r>
           </a:p>
         </p:txBody>
@@ -11751,7 +11751,7 @@
               </a:defRPr>
             </a:pPr>
             <a:r>
-              <a:t>S211 · H1 — Primer asistente ejecutable</a:t>
+              <a:t>H1.6 · H1 — Primer asistente ejecutable</a:t>
             </a:r>
           </a:p>
         </p:txBody>
@@ -12134,7 +12134,7 @@
               </a:defRPr>
             </a:pPr>
             <a:r>
-              <a:t>S211 · H1 — Primer asistente ejecutable</a:t>
+              <a:t>H1.6 · H1 — Primer asistente ejecutable</a:t>
             </a:r>
           </a:p>
         </p:txBody>
@@ -12458,7 +12458,7 @@
               </a:defRPr>
             </a:pPr>
             <a:r>
-              <a:t>S211 · H1 — Primer asistente ejecutable</a:t>
+              <a:t>H1.6 · H1 — Primer asistente ejecutable</a:t>
             </a:r>
           </a:p>
         </p:txBody>
@@ -12934,7 +12934,7 @@
               </a:defRPr>
             </a:pPr>
             <a:r>
-              <a:t>S211 · H1 — Primer asistente ejecutable</a:t>
+              <a:t>H1.6 · H1 — Primer asistente ejecutable</a:t>
             </a:r>
           </a:p>
         </p:txBody>
@@ -13175,7 +13175,7 @@
               </a:defRPr>
             </a:pPr>
             <a:r>
-              <a:t>S211 · H1 — Primer asistente ejecutable</a:t>
+              <a:t>H1.6 · H1 — Primer asistente ejecutable</a:t>
             </a:r>
           </a:p>
         </p:txBody>
@@ -13593,7 +13593,7 @@
               </a:defRPr>
             </a:pPr>
             <a:r>
-              <a:t>S211 · H1 — Primer asistente ejecutable</a:t>
+              <a:t>H1.6 · H1 — Primer asistente ejecutable</a:t>
             </a:r>
           </a:p>
         </p:txBody>
@@ -13789,7 +13789,7 @@
               </a:defRPr>
             </a:pPr>
             <a:r>
-              <a:t>S211 · H1 — Primer asistente ejecutable</a:t>
+              <a:t>H1.6 · H1 — Primer asistente ejecutable</a:t>
             </a:r>
           </a:p>
         </p:txBody>
